--- a/course_outine_10_weeks/Course_Outline_Big_Data_Modeling.pptx
+++ b/course_outine_10_weeks/Course_Outline_Big_Data_Modeling.pptx
@@ -5,38 +5,43 @@
     <p:sldMasterId id="2147483660" r:id="rId1"/>
   </p:sldMasterIdLst>
   <p:notesMasterIdLst>
-    <p:notesMasterId r:id="rId31"/>
+    <p:notesMasterId r:id="rId36"/>
   </p:notesMasterIdLst>
   <p:sldIdLst>
     <p:sldId id="256" r:id="rId2"/>
-    <p:sldId id="257" r:id="rId3"/>
-    <p:sldId id="258" r:id="rId4"/>
-    <p:sldId id="260" r:id="rId5"/>
-    <p:sldId id="277" r:id="rId6"/>
-    <p:sldId id="278" r:id="rId7"/>
-    <p:sldId id="263" r:id="rId8"/>
-    <p:sldId id="262" r:id="rId9"/>
-    <p:sldId id="271" r:id="rId10"/>
-    <p:sldId id="272" r:id="rId11"/>
-    <p:sldId id="275" r:id="rId12"/>
-    <p:sldId id="280" r:id="rId13"/>
-    <p:sldId id="261" r:id="rId14"/>
-    <p:sldId id="281" r:id="rId15"/>
-    <p:sldId id="279" r:id="rId16"/>
-    <p:sldId id="282" r:id="rId17"/>
-    <p:sldId id="273" r:id="rId18"/>
-    <p:sldId id="284" r:id="rId19"/>
-    <p:sldId id="283" r:id="rId20"/>
-    <p:sldId id="268" r:id="rId21"/>
-    <p:sldId id="264" r:id="rId22"/>
-    <p:sldId id="269" r:id="rId23"/>
-    <p:sldId id="270" r:id="rId24"/>
-    <p:sldId id="274" r:id="rId25"/>
-    <p:sldId id="285" r:id="rId26"/>
-    <p:sldId id="286" r:id="rId27"/>
-    <p:sldId id="276" r:id="rId28"/>
-    <p:sldId id="266" r:id="rId29"/>
-    <p:sldId id="267" r:id="rId30"/>
+    <p:sldId id="288" r:id="rId3"/>
+    <p:sldId id="291" r:id="rId4"/>
+    <p:sldId id="257" r:id="rId5"/>
+    <p:sldId id="289" r:id="rId6"/>
+    <p:sldId id="290" r:id="rId7"/>
+    <p:sldId id="287" r:id="rId8"/>
+    <p:sldId id="258" r:id="rId9"/>
+    <p:sldId id="260" r:id="rId10"/>
+    <p:sldId id="277" r:id="rId11"/>
+    <p:sldId id="278" r:id="rId12"/>
+    <p:sldId id="263" r:id="rId13"/>
+    <p:sldId id="262" r:id="rId14"/>
+    <p:sldId id="271" r:id="rId15"/>
+    <p:sldId id="272" r:id="rId16"/>
+    <p:sldId id="275" r:id="rId17"/>
+    <p:sldId id="280" r:id="rId18"/>
+    <p:sldId id="261" r:id="rId19"/>
+    <p:sldId id="281" r:id="rId20"/>
+    <p:sldId id="279" r:id="rId21"/>
+    <p:sldId id="282" r:id="rId22"/>
+    <p:sldId id="273" r:id="rId23"/>
+    <p:sldId id="284" r:id="rId24"/>
+    <p:sldId id="283" r:id="rId25"/>
+    <p:sldId id="268" r:id="rId26"/>
+    <p:sldId id="264" r:id="rId27"/>
+    <p:sldId id="269" r:id="rId28"/>
+    <p:sldId id="270" r:id="rId29"/>
+    <p:sldId id="274" r:id="rId30"/>
+    <p:sldId id="285" r:id="rId31"/>
+    <p:sldId id="286" r:id="rId32"/>
+    <p:sldId id="276" r:id="rId33"/>
+    <p:sldId id="266" r:id="rId34"/>
+    <p:sldId id="267" r:id="rId35"/>
   </p:sldIdLst>
   <p:sldSz cx="12192000" cy="6858000"/>
   <p:notesSz cx="6858000" cy="9144000"/>
@@ -225,7 +230,7 @@
           <a:p>
             <a:fld id="{3D165E93-E323-764B-9CF0-D55E433161EB}" type="datetimeFigureOut">
               <a:rPr lang="en-US" smtClean="0"/>
-              <a:t>8/31/26</a:t>
+              <a:t>9/1/26</a:t>
             </a:fld>
             <a:endParaRPr lang="en-US"/>
           </a:p>
@@ -2444,7 +2449,7 @@
           <a:lstStyle/>
           <a:p>
             <a:pPr algn="ctr"/>
-            <a:endParaRPr lang="en-US" sz="2400" dirty="0"/>
+            <a:endParaRPr lang="en-US" sz="2400"/>
           </a:p>
         </p:txBody>
       </p:sp>
@@ -3030,7 +3035,7 @@
           <a:lstStyle/>
           <a:p>
             <a:pPr algn="ctr"/>
-            <a:endParaRPr lang="en-US" sz="2400" dirty="0"/>
+            <a:endParaRPr lang="en-US" sz="2400"/>
           </a:p>
         </p:txBody>
       </p:sp>
@@ -3110,7 +3115,6 @@
               <a:rPr lang="en-US"/>
               <a:t>Click icon to add picture</a:t>
             </a:r>
-            <a:endParaRPr lang="en-US" dirty="0"/>
           </a:p>
         </p:txBody>
       </p:sp>
@@ -3247,7 +3251,6 @@
               <a:rPr lang="en-US"/>
               <a:t>Click icon to add picture</a:t>
             </a:r>
-            <a:endParaRPr lang="en-US" dirty="0"/>
           </a:p>
         </p:txBody>
       </p:sp>
@@ -3384,7 +3387,6 @@
               <a:rPr lang="en-US"/>
               <a:t>Click icon to add picture</a:t>
             </a:r>
-            <a:endParaRPr lang="en-US" dirty="0"/>
           </a:p>
         </p:txBody>
       </p:sp>
@@ -3580,7 +3582,7 @@
           <a:lstStyle/>
           <a:p>
             <a:pPr algn="ctr"/>
-            <a:endParaRPr lang="en-US" sz="2400" dirty="0"/>
+            <a:endParaRPr lang="en-US" sz="2400"/>
           </a:p>
         </p:txBody>
       </p:sp>
@@ -3660,7 +3662,6 @@
               <a:rPr lang="en-US"/>
               <a:t>Click icon to add picture</a:t>
             </a:r>
-            <a:endParaRPr lang="en-US" dirty="0"/>
           </a:p>
         </p:txBody>
       </p:sp>
@@ -3797,7 +3798,6 @@
               <a:rPr lang="en-US"/>
               <a:t>Click icon to add picture</a:t>
             </a:r>
-            <a:endParaRPr lang="en-US" dirty="0"/>
           </a:p>
         </p:txBody>
       </p:sp>
@@ -3934,7 +3934,6 @@
               <a:rPr lang="en-US"/>
               <a:t>Click icon to add picture</a:t>
             </a:r>
-            <a:endParaRPr lang="en-US" dirty="0"/>
           </a:p>
         </p:txBody>
       </p:sp>
@@ -4071,7 +4070,6 @@
               <a:rPr lang="en-US"/>
               <a:t>Click icon to add picture</a:t>
             </a:r>
-            <a:endParaRPr lang="en-US" dirty="0"/>
           </a:p>
         </p:txBody>
       </p:sp>
@@ -5109,7 +5107,6 @@
               <a:rPr lang="en-US"/>
               <a:t>Click icon to add picture</a:t>
             </a:r>
-            <a:endParaRPr lang="en-US" dirty="0"/>
           </a:p>
         </p:txBody>
       </p:sp>
@@ -6614,7 +6611,7 @@
           </a:bodyPr>
           <a:lstStyle/>
           <a:p>
-            <a:endParaRPr lang="en-US" sz="2400" dirty="0"/>
+            <a:endParaRPr lang="en-US" sz="2400"/>
           </a:p>
         </p:txBody>
       </p:sp>
@@ -6996,7 +6993,7 @@
         <p:spPr>
           <a:xfrm>
             <a:off x="355600" y="793820"/>
-            <a:ext cx="9144000" cy="3165231"/>
+            <a:ext cx="9144000" cy="3407477"/>
           </a:xfrm>
         </p:spPr>
         <p:txBody>
@@ -7005,6 +7002,7 @@
           </a:bodyPr>
           <a:lstStyle/>
           <a:p>
+            <a:pPr algn="ctr"/>
             <a:r>
               <a:rPr lang="en-US" dirty="0"/>
               <a:t>Big Data </a:t>
@@ -7014,14 +7012,7 @@
             </a:br>
             <a:r>
               <a:rPr lang="en-US" dirty="0"/>
-              <a:t>Modeling </a:t>
-            </a:r>
-            <a:br>
-              <a:rPr lang="en-US" dirty="0"/>
-            </a:br>
-            <a:r>
-              <a:rPr lang="en-US" dirty="0"/>
-              <a:t>&amp; Analytics</a:t>
+              <a:t>Modeling &amp; Analytics</a:t>
             </a:r>
             <a:br>
               <a:rPr lang="en-US" dirty="0"/>
@@ -7074,14 +7065,22 @@
           </a:bodyPr>
           <a:lstStyle/>
           <a:p>
-            <a:r>
-              <a:rPr lang="en-US" dirty="0"/>
-              <a:t>Mahmoud  Parsian</a:t>
-            </a:r>
-          </a:p>
-          <a:p>
-            <a:r>
-              <a:rPr lang="en-US" sz="1600" dirty="0"/>
+            <a:pPr algn="ctr"/>
+            <a:r>
+              <a:rPr lang="en-US" dirty="0">
+                <a:latin typeface="Consolas" panose="020B0609020204030204" pitchFamily="49" charset="0"/>
+                <a:cs typeface="Consolas" panose="020B0609020204030204" pitchFamily="49" charset="0"/>
+              </a:rPr>
+              <a:t>Mahmoud Parsian</a:t>
+            </a:r>
+          </a:p>
+          <a:p>
+            <a:pPr algn="ctr"/>
+            <a:r>
+              <a:rPr lang="en-US" sz="1400" dirty="0">
+                <a:latin typeface="Consolas" panose="020B0609020204030204" pitchFamily="49" charset="0"/>
+                <a:cs typeface="Consolas" panose="020B0609020204030204" pitchFamily="49" charset="0"/>
+              </a:rPr>
               <a:t>Ph.D. in Computer Science</a:t>
             </a:r>
           </a:p>
@@ -7135,6 +7134,1641 @@
         </p:nvSpPr>
         <p:spPr>
           <a:xfrm>
+            <a:off x="1524000" y="652805"/>
+            <a:ext cx="9144000" cy="915159"/>
+          </a:xfrm>
+        </p:spPr>
+        <p:txBody>
+          <a:bodyPr/>
+          <a:lstStyle/>
+          <a:p>
+            <a:r>
+              <a:rPr lang="en-US" dirty="0"/>
+              <a:t>1. MapReduce Programs</a:t>
+            </a:r>
+          </a:p>
+        </p:txBody>
+      </p:sp>
+      <p:sp>
+        <p:nvSpPr>
+          <p:cNvPr id="3" name="Subtitle 2">
+            <a:extLst>
+              <a:ext uri="{FF2B5EF4-FFF2-40B4-BE49-F238E27FC236}">
+                <a16:creationId xmlns:a16="http://schemas.microsoft.com/office/drawing/2014/main" id="{67BA4937-A89D-8343-B4A3-942B771C889A}"/>
+              </a:ext>
+            </a:extLst>
+          </p:cNvPr>
+          <p:cNvSpPr>
+            <a:spLocks noGrp="1"/>
+          </p:cNvSpPr>
+          <p:nvPr>
+            <p:ph type="subTitle" idx="1"/>
+          </p:nvPr>
+        </p:nvSpPr>
+        <p:spPr>
+          <a:xfrm>
+            <a:off x="1524000" y="1689652"/>
+            <a:ext cx="9144000" cy="4283765"/>
+          </a:xfrm>
+        </p:spPr>
+        <p:txBody>
+          <a:bodyPr>
+            <a:normAutofit lnSpcReduction="10000"/>
+          </a:bodyPr>
+          <a:lstStyle/>
+          <a:p>
+            <a:pPr marL="457200" indent="-457200" algn="l">
+              <a:buFont typeface="Arial" panose="020B0604020202020204" pitchFamily="34" charset="0"/>
+              <a:buChar char="•"/>
+            </a:pPr>
+            <a:r>
+              <a:rPr lang="en-US" sz="3000" b="1" dirty="0">
+                <a:solidFill>
+                  <a:srgbClr val="002060"/>
+                </a:solidFill>
+              </a:rPr>
+              <a:t>For MapReduce, we will use:</a:t>
+            </a:r>
+          </a:p>
+          <a:p>
+            <a:pPr marL="914389" lvl="1" indent="-457200" algn="l">
+              <a:buFont typeface="Arial" panose="020B0604020202020204" pitchFamily="34" charset="0"/>
+              <a:buChar char="•"/>
+            </a:pPr>
+            <a:r>
+              <a:rPr lang="en-US" sz="2600" b="1" dirty="0">
+                <a:solidFill>
+                  <a:srgbClr val="002060"/>
+                </a:solidFill>
+              </a:rPr>
+              <a:t>Pseudo code (not executable)</a:t>
+            </a:r>
+          </a:p>
+          <a:p>
+            <a:pPr marL="914389" lvl="1" indent="-457200" algn="l">
+              <a:buFont typeface="Arial" panose="020B0604020202020204" pitchFamily="34" charset="0"/>
+              <a:buChar char="•"/>
+            </a:pPr>
+            <a:r>
+              <a:rPr lang="en-US" sz="2600" b="1" dirty="0">
+                <a:solidFill>
+                  <a:srgbClr val="002060"/>
+                </a:solidFill>
+              </a:rPr>
+              <a:t>PySpark code (runs on Spark)</a:t>
+            </a:r>
+          </a:p>
+          <a:p>
+            <a:pPr marL="457200" indent="-457200" algn="l">
+              <a:buFont typeface="Arial" panose="020B0604020202020204" pitchFamily="34" charset="0"/>
+              <a:buChar char="•"/>
+            </a:pPr>
+            <a:r>
+              <a:rPr lang="en-US" sz="3000" dirty="0">
+                <a:solidFill>
+                  <a:srgbClr val="002060"/>
+                </a:solidFill>
+              </a:rPr>
+              <a:t> For MapReduce, we will focus on learning MapReduce </a:t>
+            </a:r>
+            <a:r>
+              <a:rPr lang="en-US" sz="3000" b="1" dirty="0">
+                <a:solidFill>
+                  <a:srgbClr val="002060"/>
+                </a:solidFill>
+              </a:rPr>
+              <a:t>paradigm/model</a:t>
+            </a:r>
+            <a:r>
+              <a:rPr lang="en-US" sz="3000" dirty="0">
+                <a:solidFill>
+                  <a:srgbClr val="002060"/>
+                </a:solidFill>
+              </a:rPr>
+              <a:t> that enables </a:t>
+            </a:r>
+            <a:r>
+              <a:rPr lang="en-US" sz="3000" b="1" dirty="0">
+                <a:solidFill>
+                  <a:srgbClr val="002060"/>
+                </a:solidFill>
+              </a:rPr>
+              <a:t>massive scalability </a:t>
+            </a:r>
+            <a:r>
+              <a:rPr lang="en-US" sz="3000" dirty="0">
+                <a:solidFill>
+                  <a:srgbClr val="002060"/>
+                </a:solidFill>
+              </a:rPr>
+              <a:t>across hundreds or thousands of servers in a cluster.</a:t>
+            </a:r>
+            <a:endParaRPr lang="en-US" sz="3600" dirty="0"/>
+          </a:p>
+          <a:p>
+            <a:pPr marL="457200" indent="-457200">
+              <a:buFont typeface="Arial" panose="020B0604020202020204" pitchFamily="34" charset="0"/>
+              <a:buChar char="•"/>
+            </a:pPr>
+            <a:r>
+              <a:rPr lang="en-US" sz="3600" dirty="0">
+                <a:solidFill>
+                  <a:srgbClr val="002060"/>
+                </a:solidFill>
+              </a:rPr>
+              <a:t>For MapReduce, </a:t>
+            </a:r>
+            <a:r>
+              <a:rPr lang="en-US" sz="3600" b="1" dirty="0">
+                <a:solidFill>
+                  <a:srgbClr val="002060"/>
+                </a:solidFill>
+              </a:rPr>
+              <a:t>pseudo-code </a:t>
+            </a:r>
+            <a:endParaRPr lang="en-US" sz="3600" dirty="0">
+              <a:solidFill>
+                <a:srgbClr val="002060"/>
+              </a:solidFill>
+            </a:endParaRPr>
+          </a:p>
+          <a:p>
+            <a:pPr marL="914389" lvl="1" indent="-457200" algn="l">
+              <a:buFont typeface="Arial" panose="020B0604020202020204" pitchFamily="34" charset="0"/>
+              <a:buChar char="•"/>
+            </a:pPr>
+            <a:r>
+              <a:rPr lang="en-US" sz="2400" dirty="0">
+                <a:solidFill>
+                  <a:srgbClr val="002060"/>
+                </a:solidFill>
+              </a:rPr>
+              <a:t>examples are given in </a:t>
+            </a:r>
+            <a:r>
+              <a:rPr lang="en-US" sz="2400" dirty="0"/>
+              <a:t>Lin, J., &amp; Dyer, C. (2010). </a:t>
+            </a:r>
+            <a:r>
+              <a:rPr lang="en-US" sz="2400" i="1" dirty="0"/>
+              <a:t>Data-intensive text processing with MapReduce</a:t>
+            </a:r>
+            <a:endParaRPr lang="en-US" sz="2400" dirty="0"/>
+          </a:p>
+        </p:txBody>
+      </p:sp>
+    </p:spTree>
+    <p:extLst>
+      <p:ext uri="{BB962C8B-B14F-4D97-AF65-F5344CB8AC3E}">
+        <p14:creationId xmlns:p14="http://schemas.microsoft.com/office/powerpoint/2010/main" val="1982055136"/>
+      </p:ext>
+    </p:extLst>
+  </p:cSld>
+  <p:clrMapOvr>
+    <a:masterClrMapping/>
+  </p:clrMapOvr>
+  <p:timing>
+    <p:tnLst>
+      <p:par>
+        <p:cTn id="1" dur="indefinite" restart="never" nodeType="tmRoot">
+          <p:childTnLst>
+            <p:seq concurrent="1" nextAc="seek">
+              <p:cTn id="2" dur="indefinite" nodeType="mainSeq">
+                <p:childTnLst>
+                  <p:par>
+                    <p:cTn id="3" fill="hold">
+                      <p:stCondLst>
+                        <p:cond delay="indefinite"/>
+                      </p:stCondLst>
+                      <p:childTnLst>
+                        <p:par>
+                          <p:cTn id="4" fill="hold">
+                            <p:stCondLst>
+                              <p:cond delay="0"/>
+                            </p:stCondLst>
+                            <p:childTnLst>
+                              <p:par>
+                                <p:cTn id="5" presetID="1" presetClass="entr" presetSubtype="0" fill="hold" nodeType="clickEffect">
+                                  <p:stCondLst>
+                                    <p:cond delay="0"/>
+                                  </p:stCondLst>
+                                  <p:childTnLst>
+                                    <p:set>
+                                      <p:cBhvr>
+                                        <p:cTn id="6" dur="1" fill="hold">
+                                          <p:stCondLst>
+                                            <p:cond delay="0"/>
+                                          </p:stCondLst>
+                                        </p:cTn>
+                                        <p:tgtEl>
+                                          <p:spTgt spid="3">
+                                            <p:txEl>
+                                              <p:pRg st="0" end="0"/>
+                                            </p:txEl>
+                                          </p:spTgt>
+                                        </p:tgtEl>
+                                        <p:attrNameLst>
+                                          <p:attrName>style.visibility</p:attrName>
+                                        </p:attrNameLst>
+                                      </p:cBhvr>
+                                      <p:to>
+                                        <p:strVal val="visible"/>
+                                      </p:to>
+                                    </p:set>
+                                  </p:childTnLst>
+                                </p:cTn>
+                              </p:par>
+                            </p:childTnLst>
+                          </p:cTn>
+                        </p:par>
+                      </p:childTnLst>
+                    </p:cTn>
+                  </p:par>
+                  <p:par>
+                    <p:cTn id="7" fill="hold">
+                      <p:stCondLst>
+                        <p:cond delay="indefinite"/>
+                      </p:stCondLst>
+                      <p:childTnLst>
+                        <p:par>
+                          <p:cTn id="8" fill="hold">
+                            <p:stCondLst>
+                              <p:cond delay="0"/>
+                            </p:stCondLst>
+                            <p:childTnLst>
+                              <p:par>
+                                <p:cTn id="9" presetID="1" presetClass="entr" presetSubtype="0" fill="hold" nodeType="clickEffect">
+                                  <p:stCondLst>
+                                    <p:cond delay="0"/>
+                                  </p:stCondLst>
+                                  <p:childTnLst>
+                                    <p:set>
+                                      <p:cBhvr>
+                                        <p:cTn id="10" dur="1" fill="hold">
+                                          <p:stCondLst>
+                                            <p:cond delay="0"/>
+                                          </p:stCondLst>
+                                        </p:cTn>
+                                        <p:tgtEl>
+                                          <p:spTgt spid="3">
+                                            <p:txEl>
+                                              <p:pRg st="1" end="1"/>
+                                            </p:txEl>
+                                          </p:spTgt>
+                                        </p:tgtEl>
+                                        <p:attrNameLst>
+                                          <p:attrName>style.visibility</p:attrName>
+                                        </p:attrNameLst>
+                                      </p:cBhvr>
+                                      <p:to>
+                                        <p:strVal val="visible"/>
+                                      </p:to>
+                                    </p:set>
+                                  </p:childTnLst>
+                                </p:cTn>
+                              </p:par>
+                            </p:childTnLst>
+                          </p:cTn>
+                        </p:par>
+                      </p:childTnLst>
+                    </p:cTn>
+                  </p:par>
+                  <p:par>
+                    <p:cTn id="11" fill="hold">
+                      <p:stCondLst>
+                        <p:cond delay="indefinite"/>
+                      </p:stCondLst>
+                      <p:childTnLst>
+                        <p:par>
+                          <p:cTn id="12" fill="hold">
+                            <p:stCondLst>
+                              <p:cond delay="0"/>
+                            </p:stCondLst>
+                            <p:childTnLst>
+                              <p:par>
+                                <p:cTn id="13" presetID="1" presetClass="entr" presetSubtype="0" fill="hold" nodeType="clickEffect">
+                                  <p:stCondLst>
+                                    <p:cond delay="0"/>
+                                  </p:stCondLst>
+                                  <p:childTnLst>
+                                    <p:set>
+                                      <p:cBhvr>
+                                        <p:cTn id="14" dur="1" fill="hold">
+                                          <p:stCondLst>
+                                            <p:cond delay="0"/>
+                                          </p:stCondLst>
+                                        </p:cTn>
+                                        <p:tgtEl>
+                                          <p:spTgt spid="3">
+                                            <p:txEl>
+                                              <p:pRg st="2" end="2"/>
+                                            </p:txEl>
+                                          </p:spTgt>
+                                        </p:tgtEl>
+                                        <p:attrNameLst>
+                                          <p:attrName>style.visibility</p:attrName>
+                                        </p:attrNameLst>
+                                      </p:cBhvr>
+                                      <p:to>
+                                        <p:strVal val="visible"/>
+                                      </p:to>
+                                    </p:set>
+                                  </p:childTnLst>
+                                </p:cTn>
+                              </p:par>
+                            </p:childTnLst>
+                          </p:cTn>
+                        </p:par>
+                      </p:childTnLst>
+                    </p:cTn>
+                  </p:par>
+                  <p:par>
+                    <p:cTn id="15" fill="hold">
+                      <p:stCondLst>
+                        <p:cond delay="indefinite"/>
+                      </p:stCondLst>
+                      <p:childTnLst>
+                        <p:par>
+                          <p:cTn id="16" fill="hold">
+                            <p:stCondLst>
+                              <p:cond delay="0"/>
+                            </p:stCondLst>
+                            <p:childTnLst>
+                              <p:par>
+                                <p:cTn id="17" presetID="1" presetClass="entr" presetSubtype="0" fill="hold" nodeType="clickEffect">
+                                  <p:stCondLst>
+                                    <p:cond delay="0"/>
+                                  </p:stCondLst>
+                                  <p:childTnLst>
+                                    <p:set>
+                                      <p:cBhvr>
+                                        <p:cTn id="18" dur="1" fill="hold">
+                                          <p:stCondLst>
+                                            <p:cond delay="0"/>
+                                          </p:stCondLst>
+                                        </p:cTn>
+                                        <p:tgtEl>
+                                          <p:spTgt spid="3">
+                                            <p:txEl>
+                                              <p:pRg st="3" end="3"/>
+                                            </p:txEl>
+                                          </p:spTgt>
+                                        </p:tgtEl>
+                                        <p:attrNameLst>
+                                          <p:attrName>style.visibility</p:attrName>
+                                        </p:attrNameLst>
+                                      </p:cBhvr>
+                                      <p:to>
+                                        <p:strVal val="visible"/>
+                                      </p:to>
+                                    </p:set>
+                                  </p:childTnLst>
+                                </p:cTn>
+                              </p:par>
+                            </p:childTnLst>
+                          </p:cTn>
+                        </p:par>
+                      </p:childTnLst>
+                    </p:cTn>
+                  </p:par>
+                </p:childTnLst>
+              </p:cTn>
+              <p:prevCondLst>
+                <p:cond evt="onPrev" delay="0">
+                  <p:tgtEl>
+                    <p:sldTgt/>
+                  </p:tgtEl>
+                </p:cond>
+              </p:prevCondLst>
+              <p:nextCondLst>
+                <p:cond evt="onNext" delay="0">
+                  <p:tgtEl>
+                    <p:sldTgt/>
+                  </p:tgtEl>
+                </p:cond>
+              </p:nextCondLst>
+            </p:seq>
+          </p:childTnLst>
+        </p:cTn>
+      </p:par>
+    </p:tnLst>
+  </p:timing>
+</p:sld>
+</file>
+
+<file path=ppt/slides/slide11.xml><?xml version="1.0" encoding="utf-8"?>
+<p:sld xmlns:a="http://schemas.openxmlformats.org/drawingml/2006/main" xmlns:r="http://schemas.openxmlformats.org/officeDocument/2006/relationships" xmlns:p="http://schemas.openxmlformats.org/presentationml/2006/main">
+  <p:cSld>
+    <p:spTree>
+      <p:nvGrpSpPr>
+        <p:cNvPr id="1" name=""/>
+        <p:cNvGrpSpPr/>
+        <p:nvPr/>
+      </p:nvGrpSpPr>
+      <p:grpSpPr>
+        <a:xfrm>
+          <a:off x="0" y="0"/>
+          <a:ext cx="0" cy="0"/>
+          <a:chOff x="0" y="0"/>
+          <a:chExt cx="0" cy="0"/>
+        </a:xfrm>
+      </p:grpSpPr>
+      <p:sp>
+        <p:nvSpPr>
+          <p:cNvPr id="2" name="Title 1">
+            <a:extLst>
+              <a:ext uri="{FF2B5EF4-FFF2-40B4-BE49-F238E27FC236}">
+                <a16:creationId xmlns:a16="http://schemas.microsoft.com/office/drawing/2014/main" id="{8207F09F-B406-FB4C-ABE0-890E4E4F95C8}"/>
+              </a:ext>
+            </a:extLst>
+          </p:cNvPr>
+          <p:cNvSpPr>
+            <a:spLocks noGrp="1"/>
+          </p:cNvSpPr>
+          <p:nvPr>
+            <p:ph type="ctrTitle"/>
+          </p:nvPr>
+        </p:nvSpPr>
+        <p:spPr>
+          <a:xfrm>
+            <a:off x="1524000" y="652805"/>
+            <a:ext cx="9144000" cy="915159"/>
+          </a:xfrm>
+        </p:spPr>
+        <p:txBody>
+          <a:bodyPr/>
+          <a:lstStyle/>
+          <a:p>
+            <a:r>
+              <a:rPr lang="en-US" dirty="0"/>
+              <a:t>1. MapReduce Components</a:t>
+            </a:r>
+          </a:p>
+        </p:txBody>
+      </p:sp>
+      <p:sp>
+        <p:nvSpPr>
+          <p:cNvPr id="3" name="Subtitle 2">
+            <a:extLst>
+              <a:ext uri="{FF2B5EF4-FFF2-40B4-BE49-F238E27FC236}">
+                <a16:creationId xmlns:a16="http://schemas.microsoft.com/office/drawing/2014/main" id="{67BA4937-A89D-8343-B4A3-942B771C889A}"/>
+              </a:ext>
+            </a:extLst>
+          </p:cNvPr>
+          <p:cNvSpPr>
+            <a:spLocks noGrp="1"/>
+          </p:cNvSpPr>
+          <p:nvPr>
+            <p:ph type="subTitle" idx="1"/>
+          </p:nvPr>
+        </p:nvSpPr>
+        <p:spPr>
+          <a:xfrm>
+            <a:off x="1524000" y="1689652"/>
+            <a:ext cx="9144000" cy="4283765"/>
+          </a:xfrm>
+        </p:spPr>
+        <p:txBody>
+          <a:bodyPr>
+            <a:normAutofit/>
+          </a:bodyPr>
+          <a:lstStyle/>
+          <a:p>
+            <a:pPr algn="l"/>
+            <a:r>
+              <a:rPr lang="en-US" sz="3600" dirty="0"/>
+              <a:t>MapReduce has 3 functions:</a:t>
+            </a:r>
+          </a:p>
+          <a:p>
+            <a:pPr marL="457200" lvl="1" algn="l"/>
+            <a:r>
+              <a:rPr lang="en-US" sz="3200" b="1" dirty="0">
+                <a:latin typeface="Consolas" panose="020B0609020204030204" pitchFamily="49" charset="0"/>
+                <a:cs typeface="Consolas" panose="020B0609020204030204" pitchFamily="49" charset="0"/>
+              </a:rPr>
+              <a:t>map()</a:t>
+            </a:r>
+          </a:p>
+          <a:p>
+            <a:pPr marL="1485888" lvl="2" indent="-571500" algn="l">
+              <a:buFont typeface="Arial" panose="020B0604020202020204" pitchFamily="34" charset="0"/>
+              <a:buChar char="•"/>
+            </a:pPr>
+            <a:r>
+              <a:rPr lang="en-US" sz="3000" dirty="0">
+                <a:latin typeface="Consolas" panose="020B0609020204030204" pitchFamily="49" charset="0"/>
+                <a:cs typeface="Consolas" panose="020B0609020204030204" pitchFamily="49" charset="0"/>
+              </a:rPr>
+              <a:t>Mapper function</a:t>
+            </a:r>
+          </a:p>
+          <a:p>
+            <a:pPr marL="457200" lvl="1" algn="l"/>
+            <a:r>
+              <a:rPr lang="en-US" sz="3200" b="1" dirty="0">
+                <a:latin typeface="Consolas" panose="020B0609020204030204" pitchFamily="49" charset="0"/>
+                <a:cs typeface="Consolas" panose="020B0609020204030204" pitchFamily="49" charset="0"/>
+              </a:rPr>
+              <a:t>reduce()</a:t>
+            </a:r>
+          </a:p>
+          <a:p>
+            <a:pPr marL="1485888" lvl="2" indent="-571500" algn="l">
+              <a:buFont typeface="Arial" panose="020B0604020202020204" pitchFamily="34" charset="0"/>
+              <a:buChar char="•"/>
+            </a:pPr>
+            <a:r>
+              <a:rPr lang="en-US" sz="3000" dirty="0">
+                <a:latin typeface="Consolas" panose="020B0609020204030204" pitchFamily="49" charset="0"/>
+                <a:cs typeface="Consolas" panose="020B0609020204030204" pitchFamily="49" charset="0"/>
+              </a:rPr>
+              <a:t>Reducer function</a:t>
+            </a:r>
+          </a:p>
+          <a:p>
+            <a:pPr marL="457200" lvl="1" algn="l"/>
+            <a:r>
+              <a:rPr lang="en-US" sz="3200" b="1" dirty="0">
+                <a:latin typeface="Consolas" panose="020B0609020204030204" pitchFamily="49" charset="0"/>
+                <a:cs typeface="Consolas" panose="020B0609020204030204" pitchFamily="49" charset="0"/>
+              </a:rPr>
+              <a:t>combine()</a:t>
+            </a:r>
+            <a:r>
+              <a:rPr lang="en-US" sz="800" b="1" dirty="0">
+                <a:latin typeface="Consolas" panose="020B0609020204030204" pitchFamily="49" charset="0"/>
+                <a:cs typeface="Consolas" panose="020B0609020204030204" pitchFamily="49" charset="0"/>
+              </a:rPr>
+              <a:t> </a:t>
+            </a:r>
+          </a:p>
+          <a:p>
+            <a:pPr marL="1485888" lvl="2" indent="-571500" algn="l">
+              <a:buFont typeface="Arial" panose="020B0604020202020204" pitchFamily="34" charset="0"/>
+              <a:buChar char="•"/>
+            </a:pPr>
+            <a:r>
+              <a:rPr lang="en-US" sz="2600" dirty="0">
+                <a:latin typeface="Consolas" panose="020B0609020204030204" pitchFamily="49" charset="0"/>
+                <a:cs typeface="Consolas" panose="020B0609020204030204" pitchFamily="49" charset="0"/>
+              </a:rPr>
+              <a:t>Optional combiner function</a:t>
+            </a:r>
+            <a:endParaRPr lang="en-US" sz="600" dirty="0">
+              <a:latin typeface="Consolas" panose="020B0609020204030204" pitchFamily="49" charset="0"/>
+              <a:cs typeface="Consolas" panose="020B0609020204030204" pitchFamily="49" charset="0"/>
+            </a:endParaRPr>
+          </a:p>
+          <a:p>
+            <a:pPr marL="1028700" lvl="1" indent="-571500" algn="l">
+              <a:buFont typeface="Arial" panose="020B0604020202020204" pitchFamily="34" charset="0"/>
+              <a:buChar char="•"/>
+            </a:pPr>
+            <a:endParaRPr lang="en-US" sz="400" dirty="0">
+              <a:latin typeface="Consolas" panose="020B0609020204030204" pitchFamily="49" charset="0"/>
+              <a:cs typeface="Consolas" panose="020B0609020204030204" pitchFamily="49" charset="0"/>
+            </a:endParaRPr>
+          </a:p>
+          <a:p>
+            <a:pPr marL="800100" lvl="1" indent="-342900" algn="l">
+              <a:buFont typeface="+mj-lt"/>
+              <a:buAutoNum type="arabicPeriod"/>
+            </a:pPr>
+            <a:endParaRPr lang="en-US" sz="1200" dirty="0"/>
+          </a:p>
+        </p:txBody>
+      </p:sp>
+    </p:spTree>
+    <p:extLst>
+      <p:ext uri="{BB962C8B-B14F-4D97-AF65-F5344CB8AC3E}">
+        <p14:creationId xmlns:p14="http://schemas.microsoft.com/office/powerpoint/2010/main" val="1696857354"/>
+      </p:ext>
+    </p:extLst>
+  </p:cSld>
+  <p:clrMapOvr>
+    <a:masterClrMapping/>
+  </p:clrMapOvr>
+  <p:timing>
+    <p:tnLst>
+      <p:par>
+        <p:cTn id="1" dur="indefinite" restart="never" nodeType="tmRoot">
+          <p:childTnLst>
+            <p:seq concurrent="1" nextAc="seek">
+              <p:cTn id="2" dur="indefinite" nodeType="mainSeq">
+                <p:childTnLst>
+                  <p:par>
+                    <p:cTn id="3" fill="hold">
+                      <p:stCondLst>
+                        <p:cond delay="indefinite"/>
+                      </p:stCondLst>
+                      <p:childTnLst>
+                        <p:par>
+                          <p:cTn id="4" fill="hold">
+                            <p:stCondLst>
+                              <p:cond delay="0"/>
+                            </p:stCondLst>
+                            <p:childTnLst>
+                              <p:par>
+                                <p:cTn id="5" presetID="1" presetClass="entr" presetSubtype="0" fill="hold" nodeType="clickEffect">
+                                  <p:stCondLst>
+                                    <p:cond delay="0"/>
+                                  </p:stCondLst>
+                                  <p:childTnLst>
+                                    <p:set>
+                                      <p:cBhvr>
+                                        <p:cTn id="6" dur="1" fill="hold">
+                                          <p:stCondLst>
+                                            <p:cond delay="0"/>
+                                          </p:stCondLst>
+                                        </p:cTn>
+                                        <p:tgtEl>
+                                          <p:spTgt spid="3">
+                                            <p:txEl>
+                                              <p:pRg st="0" end="0"/>
+                                            </p:txEl>
+                                          </p:spTgt>
+                                        </p:tgtEl>
+                                        <p:attrNameLst>
+                                          <p:attrName>style.visibility</p:attrName>
+                                        </p:attrNameLst>
+                                      </p:cBhvr>
+                                      <p:to>
+                                        <p:strVal val="visible"/>
+                                      </p:to>
+                                    </p:set>
+                                  </p:childTnLst>
+                                </p:cTn>
+                              </p:par>
+                              <p:par>
+                                <p:cTn id="7" presetID="1" presetClass="entr" presetSubtype="0" fill="hold" nodeType="withEffect">
+                                  <p:stCondLst>
+                                    <p:cond delay="0"/>
+                                  </p:stCondLst>
+                                  <p:childTnLst>
+                                    <p:set>
+                                      <p:cBhvr>
+                                        <p:cTn id="8" dur="1" fill="hold">
+                                          <p:stCondLst>
+                                            <p:cond delay="0"/>
+                                          </p:stCondLst>
+                                        </p:cTn>
+                                        <p:tgtEl>
+                                          <p:spTgt spid="3">
+                                            <p:txEl>
+                                              <p:pRg st="1" end="1"/>
+                                            </p:txEl>
+                                          </p:spTgt>
+                                        </p:tgtEl>
+                                        <p:attrNameLst>
+                                          <p:attrName>style.visibility</p:attrName>
+                                        </p:attrNameLst>
+                                      </p:cBhvr>
+                                      <p:to>
+                                        <p:strVal val="visible"/>
+                                      </p:to>
+                                    </p:set>
+                                  </p:childTnLst>
+                                </p:cTn>
+                              </p:par>
+                              <p:par>
+                                <p:cTn id="9" presetID="1" presetClass="entr" presetSubtype="0" fill="hold" nodeType="withEffect">
+                                  <p:stCondLst>
+                                    <p:cond delay="0"/>
+                                  </p:stCondLst>
+                                  <p:childTnLst>
+                                    <p:set>
+                                      <p:cBhvr>
+                                        <p:cTn id="10" dur="1" fill="hold">
+                                          <p:stCondLst>
+                                            <p:cond delay="0"/>
+                                          </p:stCondLst>
+                                        </p:cTn>
+                                        <p:tgtEl>
+                                          <p:spTgt spid="3">
+                                            <p:txEl>
+                                              <p:pRg st="2" end="2"/>
+                                            </p:txEl>
+                                          </p:spTgt>
+                                        </p:tgtEl>
+                                        <p:attrNameLst>
+                                          <p:attrName>style.visibility</p:attrName>
+                                        </p:attrNameLst>
+                                      </p:cBhvr>
+                                      <p:to>
+                                        <p:strVal val="visible"/>
+                                      </p:to>
+                                    </p:set>
+                                  </p:childTnLst>
+                                </p:cTn>
+                              </p:par>
+                              <p:par>
+                                <p:cTn id="11" presetID="1" presetClass="entr" presetSubtype="0" fill="hold" nodeType="withEffect">
+                                  <p:stCondLst>
+                                    <p:cond delay="0"/>
+                                  </p:stCondLst>
+                                  <p:childTnLst>
+                                    <p:set>
+                                      <p:cBhvr>
+                                        <p:cTn id="12" dur="1" fill="hold">
+                                          <p:stCondLst>
+                                            <p:cond delay="0"/>
+                                          </p:stCondLst>
+                                        </p:cTn>
+                                        <p:tgtEl>
+                                          <p:spTgt spid="3">
+                                            <p:txEl>
+                                              <p:pRg st="3" end="3"/>
+                                            </p:txEl>
+                                          </p:spTgt>
+                                        </p:tgtEl>
+                                        <p:attrNameLst>
+                                          <p:attrName>style.visibility</p:attrName>
+                                        </p:attrNameLst>
+                                      </p:cBhvr>
+                                      <p:to>
+                                        <p:strVal val="visible"/>
+                                      </p:to>
+                                    </p:set>
+                                  </p:childTnLst>
+                                </p:cTn>
+                              </p:par>
+                              <p:par>
+                                <p:cTn id="13" presetID="1" presetClass="entr" presetSubtype="0" fill="hold" nodeType="withEffect">
+                                  <p:stCondLst>
+                                    <p:cond delay="0"/>
+                                  </p:stCondLst>
+                                  <p:childTnLst>
+                                    <p:set>
+                                      <p:cBhvr>
+                                        <p:cTn id="14" dur="1" fill="hold">
+                                          <p:stCondLst>
+                                            <p:cond delay="0"/>
+                                          </p:stCondLst>
+                                        </p:cTn>
+                                        <p:tgtEl>
+                                          <p:spTgt spid="3">
+                                            <p:txEl>
+                                              <p:pRg st="4" end="4"/>
+                                            </p:txEl>
+                                          </p:spTgt>
+                                        </p:tgtEl>
+                                        <p:attrNameLst>
+                                          <p:attrName>style.visibility</p:attrName>
+                                        </p:attrNameLst>
+                                      </p:cBhvr>
+                                      <p:to>
+                                        <p:strVal val="visible"/>
+                                      </p:to>
+                                    </p:set>
+                                  </p:childTnLst>
+                                </p:cTn>
+                              </p:par>
+                              <p:par>
+                                <p:cTn id="15" presetID="1" presetClass="entr" presetSubtype="0" fill="hold" nodeType="withEffect">
+                                  <p:stCondLst>
+                                    <p:cond delay="0"/>
+                                  </p:stCondLst>
+                                  <p:childTnLst>
+                                    <p:set>
+                                      <p:cBhvr>
+                                        <p:cTn id="16" dur="1" fill="hold">
+                                          <p:stCondLst>
+                                            <p:cond delay="0"/>
+                                          </p:stCondLst>
+                                        </p:cTn>
+                                        <p:tgtEl>
+                                          <p:spTgt spid="3">
+                                            <p:txEl>
+                                              <p:pRg st="5" end="5"/>
+                                            </p:txEl>
+                                          </p:spTgt>
+                                        </p:tgtEl>
+                                        <p:attrNameLst>
+                                          <p:attrName>style.visibility</p:attrName>
+                                        </p:attrNameLst>
+                                      </p:cBhvr>
+                                      <p:to>
+                                        <p:strVal val="visible"/>
+                                      </p:to>
+                                    </p:set>
+                                  </p:childTnLst>
+                                </p:cTn>
+                              </p:par>
+                              <p:par>
+                                <p:cTn id="17" presetID="1" presetClass="entr" presetSubtype="0" fill="hold" nodeType="withEffect">
+                                  <p:stCondLst>
+                                    <p:cond delay="0"/>
+                                  </p:stCondLst>
+                                  <p:childTnLst>
+                                    <p:set>
+                                      <p:cBhvr>
+                                        <p:cTn id="18" dur="1" fill="hold">
+                                          <p:stCondLst>
+                                            <p:cond delay="0"/>
+                                          </p:stCondLst>
+                                        </p:cTn>
+                                        <p:tgtEl>
+                                          <p:spTgt spid="3">
+                                            <p:txEl>
+                                              <p:pRg st="6" end="6"/>
+                                            </p:txEl>
+                                          </p:spTgt>
+                                        </p:tgtEl>
+                                        <p:attrNameLst>
+                                          <p:attrName>style.visibility</p:attrName>
+                                        </p:attrNameLst>
+                                      </p:cBhvr>
+                                      <p:to>
+                                        <p:strVal val="visible"/>
+                                      </p:to>
+                                    </p:set>
+                                  </p:childTnLst>
+                                </p:cTn>
+                              </p:par>
+                            </p:childTnLst>
+                          </p:cTn>
+                        </p:par>
+                      </p:childTnLst>
+                    </p:cTn>
+                  </p:par>
+                </p:childTnLst>
+              </p:cTn>
+              <p:prevCondLst>
+                <p:cond evt="onPrev" delay="0">
+                  <p:tgtEl>
+                    <p:sldTgt/>
+                  </p:tgtEl>
+                </p:cond>
+              </p:prevCondLst>
+              <p:nextCondLst>
+                <p:cond evt="onNext" delay="0">
+                  <p:tgtEl>
+                    <p:sldTgt/>
+                  </p:tgtEl>
+                </p:cond>
+              </p:nextCondLst>
+            </p:seq>
+          </p:childTnLst>
+        </p:cTn>
+      </p:par>
+    </p:tnLst>
+  </p:timing>
+</p:sld>
+</file>
+
+<file path=ppt/slides/slide12.xml><?xml version="1.0" encoding="utf-8"?>
+<p:sld xmlns:a="http://schemas.openxmlformats.org/drawingml/2006/main" xmlns:r="http://schemas.openxmlformats.org/officeDocument/2006/relationships" xmlns:p="http://schemas.openxmlformats.org/presentationml/2006/main">
+  <p:cSld>
+    <p:spTree>
+      <p:nvGrpSpPr>
+        <p:cNvPr id="1" name=""/>
+        <p:cNvGrpSpPr/>
+        <p:nvPr/>
+      </p:nvGrpSpPr>
+      <p:grpSpPr>
+        <a:xfrm>
+          <a:off x="0" y="0"/>
+          <a:ext cx="0" cy="0"/>
+          <a:chOff x="0" y="0"/>
+          <a:chExt cx="0" cy="0"/>
+        </a:xfrm>
+      </p:grpSpPr>
+      <p:sp>
+        <p:nvSpPr>
+          <p:cNvPr id="2" name="Title 1">
+            <a:extLst>
+              <a:ext uri="{FF2B5EF4-FFF2-40B4-BE49-F238E27FC236}">
+                <a16:creationId xmlns:a16="http://schemas.microsoft.com/office/drawing/2014/main" id="{8207F09F-B406-FB4C-ABE0-890E4E4F95C8}"/>
+              </a:ext>
+            </a:extLst>
+          </p:cNvPr>
+          <p:cNvSpPr>
+            <a:spLocks noGrp="1"/>
+          </p:cNvSpPr>
+          <p:nvPr>
+            <p:ph type="ctrTitle"/>
+          </p:nvPr>
+        </p:nvSpPr>
+        <p:spPr>
+          <a:xfrm>
+            <a:off x="1524000" y="652806"/>
+            <a:ext cx="9144000" cy="830006"/>
+          </a:xfrm>
+        </p:spPr>
+        <p:txBody>
+          <a:bodyPr/>
+          <a:lstStyle/>
+          <a:p>
+            <a:r>
+              <a:rPr lang="en-US" dirty="0"/>
+              <a:t>MapReduce Paradigm</a:t>
+            </a:r>
+          </a:p>
+        </p:txBody>
+      </p:sp>
+      <p:sp>
+        <p:nvSpPr>
+          <p:cNvPr id="3" name="Subtitle 2">
+            <a:extLst>
+              <a:ext uri="{FF2B5EF4-FFF2-40B4-BE49-F238E27FC236}">
+                <a16:creationId xmlns:a16="http://schemas.microsoft.com/office/drawing/2014/main" id="{67BA4937-A89D-8343-B4A3-942B771C889A}"/>
+              </a:ext>
+            </a:extLst>
+          </p:cNvPr>
+          <p:cNvSpPr>
+            <a:spLocks noGrp="1"/>
+          </p:cNvSpPr>
+          <p:nvPr>
+            <p:ph type="subTitle" idx="1"/>
+          </p:nvPr>
+        </p:nvSpPr>
+        <p:spPr>
+          <a:xfrm>
+            <a:off x="1523999" y="1482812"/>
+            <a:ext cx="9362303" cy="4337220"/>
+          </a:xfrm>
+        </p:spPr>
+        <p:txBody>
+          <a:bodyPr>
+            <a:normAutofit lnSpcReduction="10000"/>
+          </a:bodyPr>
+          <a:lstStyle/>
+          <a:p>
+            <a:pPr marL="457211" indent="-457200">
+              <a:buFont typeface="Arial" panose="020B0604020202020204" pitchFamily="34" charset="0"/>
+              <a:buChar char="•"/>
+            </a:pPr>
+            <a:r>
+              <a:rPr lang="en-US" sz="3200" dirty="0">
+                <a:solidFill>
+                  <a:srgbClr val="0070C0"/>
+                </a:solidFill>
+              </a:rPr>
+              <a:t>MapReduce is a foundation model/paradigm for distributed computing using clusters</a:t>
+            </a:r>
+          </a:p>
+          <a:p>
+            <a:pPr marL="457211" indent="-457200">
+              <a:buFont typeface="Arial" panose="020B0604020202020204" pitchFamily="34" charset="0"/>
+              <a:buChar char="•"/>
+            </a:pPr>
+            <a:r>
+              <a:rPr lang="en-US" sz="3200" dirty="0">
+                <a:solidFill>
+                  <a:srgbClr val="00B050"/>
+                </a:solidFill>
+              </a:rPr>
+              <a:t>MapReduce concrete implementations:</a:t>
+            </a:r>
+          </a:p>
+          <a:p>
+            <a:pPr marL="914400" lvl="1" indent="-457200" algn="l">
+              <a:buFont typeface="Arial" panose="020B0604020202020204" pitchFamily="34" charset="0"/>
+              <a:buChar char="•"/>
+            </a:pPr>
+            <a:r>
+              <a:rPr lang="en-US" sz="3200" dirty="0">
+                <a:solidFill>
+                  <a:schemeClr val="tx1"/>
+                </a:solidFill>
+              </a:rPr>
+              <a:t>Apache Hadoop implements MapReduce</a:t>
+            </a:r>
+          </a:p>
+          <a:p>
+            <a:pPr marL="914400" lvl="1" indent="-457200" algn="l">
+              <a:buFont typeface="Arial" panose="020B0604020202020204" pitchFamily="34" charset="0"/>
+              <a:buChar char="•"/>
+            </a:pPr>
+            <a:r>
+              <a:rPr lang="en-US" sz="3200" dirty="0">
+                <a:solidFill>
+                  <a:schemeClr val="tx1"/>
+                </a:solidFill>
+              </a:rPr>
+              <a:t>Apache Spark implements superset of MapReduce</a:t>
+            </a:r>
+          </a:p>
+          <a:p>
+            <a:pPr marL="914400" lvl="1" indent="-457200" algn="l">
+              <a:buFont typeface="Arial" panose="020B0604020202020204" pitchFamily="34" charset="0"/>
+              <a:buChar char="•"/>
+            </a:pPr>
+            <a:r>
+              <a:rPr lang="en-US" sz="3200" dirty="0">
+                <a:solidFill>
+                  <a:schemeClr val="tx1"/>
+                </a:solidFill>
+              </a:rPr>
+              <a:t>Apache Tez implements MapReduce</a:t>
+            </a:r>
+          </a:p>
+          <a:p>
+            <a:pPr marL="914400" lvl="1" indent="-457200" algn="l">
+              <a:buFont typeface="Arial" panose="020B0604020202020204" pitchFamily="34" charset="0"/>
+              <a:buChar char="•"/>
+            </a:pPr>
+            <a:r>
+              <a:rPr lang="en-US" sz="3200" dirty="0">
+                <a:solidFill>
+                  <a:schemeClr val="tx1"/>
+                </a:solidFill>
+              </a:rPr>
+              <a:t>Amazon Athena implements MapReduce</a:t>
+            </a:r>
+          </a:p>
+          <a:p>
+            <a:pPr marL="914400" lvl="1" indent="-457200" algn="l">
+              <a:buFont typeface="Arial" panose="020B0604020202020204" pitchFamily="34" charset="0"/>
+              <a:buChar char="•"/>
+            </a:pPr>
+            <a:r>
+              <a:rPr lang="en-US" sz="3200" dirty="0">
+                <a:solidFill>
+                  <a:schemeClr val="tx1"/>
+                </a:solidFill>
+              </a:rPr>
+              <a:t>Google Big Query implements MapReduce</a:t>
+            </a:r>
+          </a:p>
+          <a:p>
+            <a:pPr marL="457211" indent="-457200">
+              <a:buFont typeface="Arial" panose="020B0604020202020204" pitchFamily="34" charset="0"/>
+              <a:buChar char="•"/>
+            </a:pPr>
+            <a:endParaRPr lang="en-US" sz="3200" dirty="0">
+              <a:solidFill>
+                <a:srgbClr val="002060"/>
+              </a:solidFill>
+            </a:endParaRPr>
+          </a:p>
+          <a:p>
+            <a:pPr marL="800100" lvl="1" indent="-342900" algn="l">
+              <a:buFont typeface="+mj-lt"/>
+              <a:buAutoNum type="arabicPeriod"/>
+            </a:pPr>
+            <a:endParaRPr lang="en-US" sz="1200" dirty="0"/>
+          </a:p>
+        </p:txBody>
+      </p:sp>
+    </p:spTree>
+    <p:extLst>
+      <p:ext uri="{BB962C8B-B14F-4D97-AF65-F5344CB8AC3E}">
+        <p14:creationId xmlns:p14="http://schemas.microsoft.com/office/powerpoint/2010/main" val="3149967708"/>
+      </p:ext>
+    </p:extLst>
+  </p:cSld>
+  <p:clrMapOvr>
+    <a:masterClrMapping/>
+  </p:clrMapOvr>
+  <p:timing>
+    <p:tnLst>
+      <p:par>
+        <p:cTn id="1" dur="indefinite" restart="never" nodeType="tmRoot">
+          <p:childTnLst>
+            <p:seq concurrent="1" nextAc="seek">
+              <p:cTn id="2" dur="indefinite" nodeType="mainSeq">
+                <p:childTnLst>
+                  <p:par>
+                    <p:cTn id="3" fill="hold">
+                      <p:stCondLst>
+                        <p:cond delay="indefinite"/>
+                      </p:stCondLst>
+                      <p:childTnLst>
+                        <p:par>
+                          <p:cTn id="4" fill="hold">
+                            <p:stCondLst>
+                              <p:cond delay="0"/>
+                            </p:stCondLst>
+                            <p:childTnLst>
+                              <p:par>
+                                <p:cTn id="5" presetID="1" presetClass="entr" presetSubtype="0" fill="hold" nodeType="clickEffect">
+                                  <p:stCondLst>
+                                    <p:cond delay="0"/>
+                                  </p:stCondLst>
+                                  <p:childTnLst>
+                                    <p:set>
+                                      <p:cBhvr>
+                                        <p:cTn id="6" dur="1" fill="hold">
+                                          <p:stCondLst>
+                                            <p:cond delay="0"/>
+                                          </p:stCondLst>
+                                        </p:cTn>
+                                        <p:tgtEl>
+                                          <p:spTgt spid="3">
+                                            <p:txEl>
+                                              <p:pRg st="0" end="0"/>
+                                            </p:txEl>
+                                          </p:spTgt>
+                                        </p:tgtEl>
+                                        <p:attrNameLst>
+                                          <p:attrName>style.visibility</p:attrName>
+                                        </p:attrNameLst>
+                                      </p:cBhvr>
+                                      <p:to>
+                                        <p:strVal val="visible"/>
+                                      </p:to>
+                                    </p:set>
+                                  </p:childTnLst>
+                                </p:cTn>
+                              </p:par>
+                            </p:childTnLst>
+                          </p:cTn>
+                        </p:par>
+                      </p:childTnLst>
+                    </p:cTn>
+                  </p:par>
+                  <p:par>
+                    <p:cTn id="7" fill="hold">
+                      <p:stCondLst>
+                        <p:cond delay="indefinite"/>
+                      </p:stCondLst>
+                      <p:childTnLst>
+                        <p:par>
+                          <p:cTn id="8" fill="hold">
+                            <p:stCondLst>
+                              <p:cond delay="0"/>
+                            </p:stCondLst>
+                            <p:childTnLst>
+                              <p:par>
+                                <p:cTn id="9" presetID="1" presetClass="entr" presetSubtype="0" fill="hold" nodeType="clickEffect">
+                                  <p:stCondLst>
+                                    <p:cond delay="0"/>
+                                  </p:stCondLst>
+                                  <p:childTnLst>
+                                    <p:set>
+                                      <p:cBhvr>
+                                        <p:cTn id="10" dur="1" fill="hold">
+                                          <p:stCondLst>
+                                            <p:cond delay="0"/>
+                                          </p:stCondLst>
+                                        </p:cTn>
+                                        <p:tgtEl>
+                                          <p:spTgt spid="3">
+                                            <p:txEl>
+                                              <p:pRg st="1" end="1"/>
+                                            </p:txEl>
+                                          </p:spTgt>
+                                        </p:tgtEl>
+                                        <p:attrNameLst>
+                                          <p:attrName>style.visibility</p:attrName>
+                                        </p:attrNameLst>
+                                      </p:cBhvr>
+                                      <p:to>
+                                        <p:strVal val="visible"/>
+                                      </p:to>
+                                    </p:set>
+                                  </p:childTnLst>
+                                </p:cTn>
+                              </p:par>
+                              <p:par>
+                                <p:cTn id="11" presetID="1" presetClass="entr" presetSubtype="0" fill="hold" nodeType="withEffect">
+                                  <p:stCondLst>
+                                    <p:cond delay="0"/>
+                                  </p:stCondLst>
+                                  <p:childTnLst>
+                                    <p:set>
+                                      <p:cBhvr>
+                                        <p:cTn id="12" dur="1" fill="hold">
+                                          <p:stCondLst>
+                                            <p:cond delay="0"/>
+                                          </p:stCondLst>
+                                        </p:cTn>
+                                        <p:tgtEl>
+                                          <p:spTgt spid="3">
+                                            <p:txEl>
+                                              <p:pRg st="2" end="2"/>
+                                            </p:txEl>
+                                          </p:spTgt>
+                                        </p:tgtEl>
+                                        <p:attrNameLst>
+                                          <p:attrName>style.visibility</p:attrName>
+                                        </p:attrNameLst>
+                                      </p:cBhvr>
+                                      <p:to>
+                                        <p:strVal val="visible"/>
+                                      </p:to>
+                                    </p:set>
+                                  </p:childTnLst>
+                                </p:cTn>
+                              </p:par>
+                              <p:par>
+                                <p:cTn id="13" presetID="1" presetClass="entr" presetSubtype="0" fill="hold" nodeType="withEffect">
+                                  <p:stCondLst>
+                                    <p:cond delay="0"/>
+                                  </p:stCondLst>
+                                  <p:childTnLst>
+                                    <p:set>
+                                      <p:cBhvr>
+                                        <p:cTn id="14" dur="1" fill="hold">
+                                          <p:stCondLst>
+                                            <p:cond delay="0"/>
+                                          </p:stCondLst>
+                                        </p:cTn>
+                                        <p:tgtEl>
+                                          <p:spTgt spid="3">
+                                            <p:txEl>
+                                              <p:pRg st="3" end="3"/>
+                                            </p:txEl>
+                                          </p:spTgt>
+                                        </p:tgtEl>
+                                        <p:attrNameLst>
+                                          <p:attrName>style.visibility</p:attrName>
+                                        </p:attrNameLst>
+                                      </p:cBhvr>
+                                      <p:to>
+                                        <p:strVal val="visible"/>
+                                      </p:to>
+                                    </p:set>
+                                  </p:childTnLst>
+                                </p:cTn>
+                              </p:par>
+                              <p:par>
+                                <p:cTn id="15" presetID="1" presetClass="entr" presetSubtype="0" fill="hold" nodeType="withEffect">
+                                  <p:stCondLst>
+                                    <p:cond delay="0"/>
+                                  </p:stCondLst>
+                                  <p:childTnLst>
+                                    <p:set>
+                                      <p:cBhvr>
+                                        <p:cTn id="16" dur="1" fill="hold">
+                                          <p:stCondLst>
+                                            <p:cond delay="0"/>
+                                          </p:stCondLst>
+                                        </p:cTn>
+                                        <p:tgtEl>
+                                          <p:spTgt spid="3">
+                                            <p:txEl>
+                                              <p:pRg st="4" end="4"/>
+                                            </p:txEl>
+                                          </p:spTgt>
+                                        </p:tgtEl>
+                                        <p:attrNameLst>
+                                          <p:attrName>style.visibility</p:attrName>
+                                        </p:attrNameLst>
+                                      </p:cBhvr>
+                                      <p:to>
+                                        <p:strVal val="visible"/>
+                                      </p:to>
+                                    </p:set>
+                                  </p:childTnLst>
+                                </p:cTn>
+                              </p:par>
+                              <p:par>
+                                <p:cTn id="17" presetID="1" presetClass="entr" presetSubtype="0" fill="hold" nodeType="withEffect">
+                                  <p:stCondLst>
+                                    <p:cond delay="0"/>
+                                  </p:stCondLst>
+                                  <p:childTnLst>
+                                    <p:set>
+                                      <p:cBhvr>
+                                        <p:cTn id="18" dur="1" fill="hold">
+                                          <p:stCondLst>
+                                            <p:cond delay="0"/>
+                                          </p:stCondLst>
+                                        </p:cTn>
+                                        <p:tgtEl>
+                                          <p:spTgt spid="3">
+                                            <p:txEl>
+                                              <p:pRg st="5" end="5"/>
+                                            </p:txEl>
+                                          </p:spTgt>
+                                        </p:tgtEl>
+                                        <p:attrNameLst>
+                                          <p:attrName>style.visibility</p:attrName>
+                                        </p:attrNameLst>
+                                      </p:cBhvr>
+                                      <p:to>
+                                        <p:strVal val="visible"/>
+                                      </p:to>
+                                    </p:set>
+                                  </p:childTnLst>
+                                </p:cTn>
+                              </p:par>
+                              <p:par>
+                                <p:cTn id="19" presetID="1" presetClass="entr" presetSubtype="0" fill="hold" nodeType="withEffect">
+                                  <p:stCondLst>
+                                    <p:cond delay="0"/>
+                                  </p:stCondLst>
+                                  <p:childTnLst>
+                                    <p:set>
+                                      <p:cBhvr>
+                                        <p:cTn id="20" dur="1" fill="hold">
+                                          <p:stCondLst>
+                                            <p:cond delay="0"/>
+                                          </p:stCondLst>
+                                        </p:cTn>
+                                        <p:tgtEl>
+                                          <p:spTgt spid="3">
+                                            <p:txEl>
+                                              <p:pRg st="6" end="6"/>
+                                            </p:txEl>
+                                          </p:spTgt>
+                                        </p:tgtEl>
+                                        <p:attrNameLst>
+                                          <p:attrName>style.visibility</p:attrName>
+                                        </p:attrNameLst>
+                                      </p:cBhvr>
+                                      <p:to>
+                                        <p:strVal val="visible"/>
+                                      </p:to>
+                                    </p:set>
+                                  </p:childTnLst>
+                                </p:cTn>
+                              </p:par>
+                            </p:childTnLst>
+                          </p:cTn>
+                        </p:par>
+                      </p:childTnLst>
+                    </p:cTn>
+                  </p:par>
+                </p:childTnLst>
+              </p:cTn>
+              <p:prevCondLst>
+                <p:cond evt="onPrev" delay="0">
+                  <p:tgtEl>
+                    <p:sldTgt/>
+                  </p:tgtEl>
+                </p:cond>
+              </p:prevCondLst>
+              <p:nextCondLst>
+                <p:cond evt="onNext" delay="0">
+                  <p:tgtEl>
+                    <p:sldTgt/>
+                  </p:tgtEl>
+                </p:cond>
+              </p:nextCondLst>
+            </p:seq>
+          </p:childTnLst>
+        </p:cTn>
+      </p:par>
+    </p:tnLst>
+  </p:timing>
+</p:sld>
+</file>
+
+<file path=ppt/slides/slide13.xml><?xml version="1.0" encoding="utf-8"?>
+<p:sld xmlns:a="http://schemas.openxmlformats.org/drawingml/2006/main" xmlns:r="http://schemas.openxmlformats.org/officeDocument/2006/relationships" xmlns:p="http://schemas.openxmlformats.org/presentationml/2006/main">
+  <p:cSld>
+    <p:spTree>
+      <p:nvGrpSpPr>
+        <p:cNvPr id="1" name=""/>
+        <p:cNvGrpSpPr/>
+        <p:nvPr/>
+      </p:nvGrpSpPr>
+      <p:grpSpPr>
+        <a:xfrm>
+          <a:off x="0" y="0"/>
+          <a:ext cx="0" cy="0"/>
+          <a:chOff x="0" y="0"/>
+          <a:chExt cx="0" cy="0"/>
+        </a:xfrm>
+      </p:grpSpPr>
+      <p:sp>
+        <p:nvSpPr>
+          <p:cNvPr id="2" name="Title 1">
+            <a:extLst>
+              <a:ext uri="{FF2B5EF4-FFF2-40B4-BE49-F238E27FC236}">
+                <a16:creationId xmlns:a16="http://schemas.microsoft.com/office/drawing/2014/main" id="{8207F09F-B406-FB4C-ABE0-890E4E4F95C8}"/>
+              </a:ext>
+            </a:extLst>
+          </p:cNvPr>
+          <p:cNvSpPr>
+            <a:spLocks noGrp="1"/>
+          </p:cNvSpPr>
+          <p:nvPr>
+            <p:ph type="ctrTitle"/>
+          </p:nvPr>
+        </p:nvSpPr>
+        <p:spPr>
+          <a:xfrm>
+            <a:off x="1524000" y="652805"/>
+            <a:ext cx="9144000" cy="629343"/>
+          </a:xfrm>
+        </p:spPr>
+        <p:txBody>
+          <a:bodyPr>
+            <a:normAutofit fontScale="90000"/>
+          </a:bodyPr>
+          <a:lstStyle/>
+          <a:p>
+            <a:r>
+              <a:rPr lang="en-US" dirty="0"/>
+              <a:t>MapReduce Paradigm: High-Level</a:t>
+            </a:r>
+          </a:p>
+        </p:txBody>
+      </p:sp>
+      <p:sp>
+        <p:nvSpPr>
+          <p:cNvPr id="3" name="Subtitle 2">
+            <a:extLst>
+              <a:ext uri="{FF2B5EF4-FFF2-40B4-BE49-F238E27FC236}">
+                <a16:creationId xmlns:a16="http://schemas.microsoft.com/office/drawing/2014/main" id="{67BA4937-A89D-8343-B4A3-942B771C889A}"/>
+              </a:ext>
+            </a:extLst>
+          </p:cNvPr>
+          <p:cNvSpPr>
+            <a:spLocks noGrp="1"/>
+          </p:cNvSpPr>
+          <p:nvPr>
+            <p:ph type="subTitle" idx="1"/>
+          </p:nvPr>
+        </p:nvSpPr>
+        <p:spPr>
+          <a:xfrm>
+            <a:off x="1524000" y="1371600"/>
+            <a:ext cx="9144000" cy="4333461"/>
+          </a:xfrm>
+        </p:spPr>
+        <p:txBody>
+          <a:bodyPr>
+            <a:normAutofit/>
+          </a:bodyPr>
+          <a:lstStyle/>
+          <a:p>
+            <a:pPr marL="800100" lvl="1" indent="-342900" algn="l">
+              <a:buFont typeface="+mj-lt"/>
+              <a:buAutoNum type="arabicPeriod"/>
+            </a:pPr>
+            <a:endParaRPr lang="en-US" sz="1200" dirty="0"/>
+          </a:p>
+        </p:txBody>
+      </p:sp>
+      <p:pic>
+        <p:nvPicPr>
+          <p:cNvPr id="5" name="Picture 4">
+            <a:extLst>
+              <a:ext uri="{FF2B5EF4-FFF2-40B4-BE49-F238E27FC236}">
+                <a16:creationId xmlns:a16="http://schemas.microsoft.com/office/drawing/2014/main" id="{491BFEAB-8BBF-7B20-3166-F2CEF8513A05}"/>
+              </a:ext>
+            </a:extLst>
+          </p:cNvPr>
+          <p:cNvPicPr>
+            <a:picLocks noChangeAspect="1"/>
+          </p:cNvPicPr>
+          <p:nvPr/>
+        </p:nvPicPr>
+        <p:blipFill>
+          <a:blip r:embed="rId2"/>
+          <a:stretch>
+            <a:fillRect/>
+          </a:stretch>
+        </p:blipFill>
+        <p:spPr>
+          <a:xfrm>
+            <a:off x="1651000" y="1828800"/>
+            <a:ext cx="8890000" cy="3657600"/>
+          </a:xfrm>
+          <a:prstGeom prst="rect">
+            <a:avLst/>
+          </a:prstGeom>
+        </p:spPr>
+      </p:pic>
+    </p:spTree>
+    <p:extLst>
+      <p:ext uri="{BB962C8B-B14F-4D97-AF65-F5344CB8AC3E}">
+        <p14:creationId xmlns:p14="http://schemas.microsoft.com/office/powerpoint/2010/main" val="230988414"/>
+      </p:ext>
+    </p:extLst>
+  </p:cSld>
+  <p:clrMapOvr>
+    <a:masterClrMapping/>
+  </p:clrMapOvr>
+</p:sld>
+</file>
+
+<file path=ppt/slides/slide14.xml><?xml version="1.0" encoding="utf-8"?>
+<p:sld xmlns:a="http://schemas.openxmlformats.org/drawingml/2006/main" xmlns:r="http://schemas.openxmlformats.org/officeDocument/2006/relationships" xmlns:p="http://schemas.openxmlformats.org/presentationml/2006/main">
+  <p:cSld>
+    <p:spTree>
+      <p:nvGrpSpPr>
+        <p:cNvPr id="1" name=""/>
+        <p:cNvGrpSpPr/>
+        <p:nvPr/>
+      </p:nvGrpSpPr>
+      <p:grpSpPr>
+        <a:xfrm>
+          <a:off x="0" y="0"/>
+          <a:ext cx="0" cy="0"/>
+          <a:chOff x="0" y="0"/>
+          <a:chExt cx="0" cy="0"/>
+        </a:xfrm>
+      </p:grpSpPr>
+      <p:sp>
+        <p:nvSpPr>
+          <p:cNvPr id="2" name="Title 1">
+            <a:extLst>
+              <a:ext uri="{FF2B5EF4-FFF2-40B4-BE49-F238E27FC236}">
+                <a16:creationId xmlns:a16="http://schemas.microsoft.com/office/drawing/2014/main" id="{8207F09F-B406-FB4C-ABE0-890E4E4F95C8}"/>
+              </a:ext>
+            </a:extLst>
+          </p:cNvPr>
+          <p:cNvSpPr>
+            <a:spLocks noGrp="1"/>
+          </p:cNvSpPr>
+          <p:nvPr>
+            <p:ph type="ctrTitle"/>
+          </p:nvPr>
+        </p:nvSpPr>
+        <p:spPr>
+          <a:xfrm>
+            <a:off x="1524000" y="652805"/>
+            <a:ext cx="9144000" cy="718795"/>
+          </a:xfrm>
+        </p:spPr>
+        <p:txBody>
+          <a:bodyPr>
+            <a:normAutofit fontScale="90000"/>
+          </a:bodyPr>
+          <a:lstStyle/>
+          <a:p>
+            <a:r>
+              <a:rPr lang="en-US" dirty="0"/>
+              <a:t>MapReduce Paradigm</a:t>
+            </a:r>
+          </a:p>
+        </p:txBody>
+      </p:sp>
+      <p:pic>
+        <p:nvPicPr>
+          <p:cNvPr id="6" name="Picture 5" descr="Diagram, schematic&#10;&#10;Description automatically generated">
+            <a:extLst>
+              <a:ext uri="{FF2B5EF4-FFF2-40B4-BE49-F238E27FC236}">
+                <a16:creationId xmlns:a16="http://schemas.microsoft.com/office/drawing/2014/main" id="{8F8E1082-1B75-2177-A0EF-659F97E96A95}"/>
+              </a:ext>
+            </a:extLst>
+          </p:cNvPr>
+          <p:cNvPicPr>
+            <a:picLocks noChangeAspect="1"/>
+          </p:cNvPicPr>
+          <p:nvPr/>
+        </p:nvPicPr>
+        <p:blipFill>
+          <a:blip r:embed="rId2"/>
+          <a:stretch>
+            <a:fillRect/>
+          </a:stretch>
+        </p:blipFill>
+        <p:spPr>
+          <a:xfrm>
+            <a:off x="1524000" y="1470453"/>
+            <a:ext cx="7780638" cy="3978877"/>
+          </a:xfrm>
+          <a:prstGeom prst="rect">
+            <a:avLst/>
+          </a:prstGeom>
+        </p:spPr>
+      </p:pic>
+    </p:spTree>
+    <p:extLst>
+      <p:ext uri="{BB962C8B-B14F-4D97-AF65-F5344CB8AC3E}">
+        <p14:creationId xmlns:p14="http://schemas.microsoft.com/office/powerpoint/2010/main" val="3660410151"/>
+      </p:ext>
+    </p:extLst>
+  </p:cSld>
+  <p:clrMapOvr>
+    <a:masterClrMapping/>
+  </p:clrMapOvr>
+</p:sld>
+</file>
+
+<file path=ppt/slides/slide15.xml><?xml version="1.0" encoding="utf-8"?>
+<p:sld xmlns:a="http://schemas.openxmlformats.org/drawingml/2006/main" xmlns:r="http://schemas.openxmlformats.org/officeDocument/2006/relationships" xmlns:p="http://schemas.openxmlformats.org/presentationml/2006/main">
+  <p:cSld>
+    <p:spTree>
+      <p:nvGrpSpPr>
+        <p:cNvPr id="1" name=""/>
+        <p:cNvGrpSpPr/>
+        <p:nvPr/>
+      </p:nvGrpSpPr>
+      <p:grpSpPr>
+        <a:xfrm>
+          <a:off x="0" y="0"/>
+          <a:ext cx="0" cy="0"/>
+          <a:chOff x="0" y="0"/>
+          <a:chExt cx="0" cy="0"/>
+        </a:xfrm>
+      </p:grpSpPr>
+      <p:sp>
+        <p:nvSpPr>
+          <p:cNvPr id="2" name="Title 1">
+            <a:extLst>
+              <a:ext uri="{FF2B5EF4-FFF2-40B4-BE49-F238E27FC236}">
+                <a16:creationId xmlns:a16="http://schemas.microsoft.com/office/drawing/2014/main" id="{8207F09F-B406-FB4C-ABE0-890E4E4F95C8}"/>
+              </a:ext>
+            </a:extLst>
+          </p:cNvPr>
+          <p:cNvSpPr>
+            <a:spLocks noGrp="1"/>
+          </p:cNvSpPr>
+          <p:nvPr>
+            <p:ph type="ctrTitle"/>
+          </p:nvPr>
+        </p:nvSpPr>
+        <p:spPr>
+          <a:xfrm>
             <a:off x="1524000" y="432486"/>
             <a:ext cx="9144000" cy="729050"/>
           </a:xfrm>
@@ -7195,7 +8829,7 @@
 </p:sld>
 </file>
 
-<file path=ppt/slides/slide11.xml><?xml version="1.0" encoding="utf-8"?>
+<file path=ppt/slides/slide16.xml><?xml version="1.0" encoding="utf-8"?>
 <p:sld xmlns:a="http://schemas.openxmlformats.org/drawingml/2006/main" xmlns:r="http://schemas.openxmlformats.org/officeDocument/2006/relationships" xmlns:p="http://schemas.openxmlformats.org/presentationml/2006/main">
   <p:cSld>
     <p:spTree>
@@ -7290,7 +8924,7 @@
 </p:sld>
 </file>
 
-<file path=ppt/slides/slide12.xml><?xml version="1.0" encoding="utf-8"?>
+<file path=ppt/slides/slide17.xml><?xml version="1.0" encoding="utf-8"?>
 <p:sld xmlns:a="http://schemas.openxmlformats.org/drawingml/2006/main" xmlns:r="http://schemas.openxmlformats.org/officeDocument/2006/relationships" xmlns:p="http://schemas.openxmlformats.org/presentationml/2006/main">
   <p:cSld>
     <p:spTree>
@@ -7994,7 +9628,7 @@
 </p:sld>
 </file>
 
-<file path=ppt/slides/slide13.xml><?xml version="1.0" encoding="utf-8"?>
+<file path=ppt/slides/slide18.xml><?xml version="1.0" encoding="utf-8"?>
 <p:sld xmlns:a="http://schemas.openxmlformats.org/drawingml/2006/main" xmlns:r="http://schemas.openxmlformats.org/officeDocument/2006/relationships" xmlns:p="http://schemas.openxmlformats.org/presentationml/2006/main">
   <p:cSld>
     <p:spTree>
@@ -8781,7 +10415,7 @@
 </p:sld>
 </file>
 
-<file path=ppt/slides/slide14.xml><?xml version="1.0" encoding="utf-8"?>
+<file path=ppt/slides/slide19.xml><?xml version="1.0" encoding="utf-8"?>
 <p:sld xmlns:a="http://schemas.openxmlformats.org/drawingml/2006/main" xmlns:r="http://schemas.openxmlformats.org/officeDocument/2006/relationships" xmlns:p="http://schemas.openxmlformats.org/presentationml/2006/main">
   <p:cSld>
     <p:spTree>
@@ -8827,7 +10461,7 @@
           <a:lstStyle/>
           <a:p>
             <a:r>
-              <a:rPr lang="en-US" sz="3600" dirty="0">
+              <a:rPr lang="en-US" sz="3600">
                 <a:solidFill>
                   <a:srgbClr val="002060"/>
                 </a:solidFill>
@@ -8870,7 +10504,7 @@
               <a:buChar char="•"/>
             </a:pPr>
             <a:r>
-              <a:rPr lang="en-US" dirty="0">
+              <a:rPr lang="en-US">
                 <a:solidFill>
                   <a:schemeClr val="tx1"/>
                 </a:solidFill>
@@ -8884,7 +10518,7 @@
               <a:buChar char="•"/>
             </a:pPr>
             <a:r>
-              <a:rPr lang="en-US" dirty="0">
+              <a:rPr lang="en-US">
                 <a:solidFill>
                   <a:schemeClr val="tx1"/>
                 </a:solidFill>
@@ -8894,7 +10528,7 @@
           </a:p>
           <a:p>
             <a:r>
-              <a:rPr lang="en-US" dirty="0">
+              <a:rPr lang="en-US">
                 <a:solidFill>
                   <a:schemeClr val="tx1"/>
                 </a:solidFill>
@@ -8903,7 +10537,7 @@
               <a:t>{ key_1, key_2, …, </a:t>
             </a:r>
             <a:r>
-              <a:rPr lang="en-US" dirty="0" err="1">
+              <a:rPr lang="en-US" err="1">
                 <a:solidFill>
                   <a:schemeClr val="tx1"/>
                 </a:solidFill>
@@ -8912,7 +10546,7 @@
               <a:t>key_n</a:t>
             </a:r>
             <a:r>
-              <a:rPr lang="en-US" dirty="0">
+              <a:rPr lang="en-US">
                 <a:solidFill>
                   <a:schemeClr val="tx1"/>
                 </a:solidFill>
@@ -8923,7 +10557,7 @@
           </a:p>
           <a:p>
             <a:r>
-              <a:rPr lang="en-US" dirty="0">
+              <a:rPr lang="en-US">
                 <a:solidFill>
                   <a:schemeClr val="tx1"/>
                 </a:solidFill>
@@ -8933,7 +10567,7 @@
           </a:p>
           <a:p>
             <a:r>
-              <a:rPr lang="en-US" dirty="0">
+              <a:rPr lang="en-US">
                 <a:solidFill>
                   <a:schemeClr val="tx1"/>
                 </a:solidFill>
@@ -8943,7 +10577,7 @@
           </a:p>
           <a:p>
             <a:r>
-              <a:rPr lang="en-US" dirty="0">
+              <a:rPr lang="en-US">
                 <a:solidFill>
                   <a:schemeClr val="tx1"/>
                 </a:solidFill>
@@ -8951,7 +10585,7 @@
               <a:t> </a:t>
             </a:r>
             <a:r>
-              <a:rPr lang="en-US" sz="2000" dirty="0">
+              <a:rPr lang="en-US" sz="2000">
                 <a:solidFill>
                   <a:schemeClr val="tx1"/>
                 </a:solidFill>
@@ -8965,7 +10599,7 @@
           </a:p>
           <a:p>
             <a:r>
-              <a:rPr lang="en-US" sz="2000" dirty="0">
+              <a:rPr lang="en-US" sz="2000">
                 <a:solidFill>
                   <a:schemeClr val="tx1"/>
                 </a:solidFill>
@@ -8979,7 +10613,7 @@
           </a:p>
           <a:p>
             <a:r>
-              <a:rPr lang="en-US" sz="2000" dirty="0">
+              <a:rPr lang="en-US" sz="2000">
                 <a:solidFill>
                   <a:schemeClr val="tx1"/>
                 </a:solidFill>
@@ -8993,7 +10627,7 @@
           </a:p>
           <a:p>
             <a:r>
-              <a:rPr lang="en-US" sz="2000" dirty="0">
+              <a:rPr lang="en-US" sz="2000">
                 <a:solidFill>
                   <a:schemeClr val="tx1"/>
                 </a:solidFill>
@@ -9005,7 +10639,7 @@
               <a:t>reduce(</a:t>
             </a:r>
             <a:r>
-              <a:rPr lang="en-US" sz="2000" dirty="0" err="1">
+              <a:rPr lang="en-US" sz="2000" err="1">
                 <a:solidFill>
                   <a:schemeClr val="tx1"/>
                 </a:solidFill>
@@ -9017,7 +10651,7 @@
               <a:t>key_n</a:t>
             </a:r>
             <a:r>
-              <a:rPr lang="en-US" sz="2000" dirty="0">
+              <a:rPr lang="en-US" sz="2000">
                 <a:solidFill>
                   <a:schemeClr val="tx1"/>
                 </a:solidFill>
@@ -9035,7 +10669,7 @@
               <a:buChar char="•"/>
             </a:pPr>
             <a:r>
-              <a:rPr lang="en-US" sz="2000" b="1" dirty="0">
+              <a:rPr lang="en-US" sz="2000" b="1">
                 <a:solidFill>
                   <a:srgbClr val="00B0F0"/>
                 </a:solidFill>
@@ -9046,7 +10680,7 @@
           </a:p>
           <a:p>
             <a:r>
-              <a:rPr lang="en-US" sz="2000" b="1" dirty="0">
+              <a:rPr lang="en-US" sz="2000" b="1">
                 <a:solidFill>
                   <a:srgbClr val="00B0F0"/>
                 </a:solidFill>
@@ -9056,7 +10690,7 @@
             </a:r>
           </a:p>
           <a:p>
-            <a:endParaRPr lang="en-US" dirty="0">
+            <a:endParaRPr lang="en-US">
               <a:solidFill>
                 <a:schemeClr val="tx1"/>
               </a:solidFill>
@@ -9646,7 +11280,540 @@
 </p:sld>
 </file>
 
-<file path=ppt/slides/slide15.xml><?xml version="1.0" encoding="utf-8"?>
+<file path=ppt/slides/slide2.xml><?xml version="1.0" encoding="utf-8"?>
+<p:sld xmlns:a="http://schemas.openxmlformats.org/drawingml/2006/main" xmlns:r="http://schemas.openxmlformats.org/officeDocument/2006/relationships" xmlns:p="http://schemas.openxmlformats.org/presentationml/2006/main">
+  <p:cSld>
+    <p:spTree>
+      <p:nvGrpSpPr>
+        <p:cNvPr id="1" name="">
+          <a:extLst>
+            <a:ext uri="{FF2B5EF4-FFF2-40B4-BE49-F238E27FC236}">
+              <a16:creationId xmlns:a16="http://schemas.microsoft.com/office/drawing/2014/main" id="{EB808638-B2D6-95E9-A973-3576A94C2A4F}"/>
+            </a:ext>
+          </a:extLst>
+        </p:cNvPr>
+        <p:cNvGrpSpPr/>
+        <p:nvPr/>
+      </p:nvGrpSpPr>
+      <p:grpSpPr>
+        <a:xfrm>
+          <a:off x="0" y="0"/>
+          <a:ext cx="0" cy="0"/>
+          <a:chOff x="0" y="0"/>
+          <a:chExt cx="0" cy="0"/>
+        </a:xfrm>
+      </p:grpSpPr>
+      <p:sp>
+        <p:nvSpPr>
+          <p:cNvPr id="2" name="Title 1">
+            <a:extLst>
+              <a:ext uri="{FF2B5EF4-FFF2-40B4-BE49-F238E27FC236}">
+                <a16:creationId xmlns:a16="http://schemas.microsoft.com/office/drawing/2014/main" id="{5825050C-745B-BB10-EB31-67B29EBCBB21}"/>
+              </a:ext>
+            </a:extLst>
+          </p:cNvPr>
+          <p:cNvSpPr>
+            <a:spLocks noGrp="1"/>
+          </p:cNvSpPr>
+          <p:nvPr>
+            <p:ph type="ctrTitle"/>
+          </p:nvPr>
+        </p:nvSpPr>
+        <p:spPr>
+          <a:xfrm>
+            <a:off x="1413468" y="290725"/>
+            <a:ext cx="9144000" cy="583482"/>
+          </a:xfrm>
+        </p:spPr>
+        <p:txBody>
+          <a:bodyPr>
+            <a:normAutofit fontScale="90000"/>
+          </a:bodyPr>
+          <a:lstStyle/>
+          <a:p>
+            <a:r>
+              <a:rPr lang="en-US" sz="3600" dirty="0">
+                <a:solidFill>
+                  <a:srgbClr val="0070C0"/>
+                </a:solidFill>
+              </a:rPr>
+              <a:t>Big Data Modeling &amp; Analytics?</a:t>
+            </a:r>
+          </a:p>
+        </p:txBody>
+      </p:sp>
+      <p:sp>
+        <p:nvSpPr>
+          <p:cNvPr id="3" name="Subtitle 2">
+            <a:extLst>
+              <a:ext uri="{FF2B5EF4-FFF2-40B4-BE49-F238E27FC236}">
+                <a16:creationId xmlns:a16="http://schemas.microsoft.com/office/drawing/2014/main" id="{432915E2-5634-69F9-B951-73B2F49D6C21}"/>
+              </a:ext>
+            </a:extLst>
+          </p:cNvPr>
+          <p:cNvSpPr>
+            <a:spLocks noGrp="1"/>
+          </p:cNvSpPr>
+          <p:nvPr>
+            <p:ph type="subTitle" idx="1"/>
+          </p:nvPr>
+        </p:nvSpPr>
+        <p:spPr>
+          <a:xfrm>
+            <a:off x="1307184" y="1225900"/>
+            <a:ext cx="9144000" cy="4983188"/>
+          </a:xfrm>
+        </p:spPr>
+        <p:txBody>
+          <a:bodyPr>
+            <a:normAutofit/>
+          </a:bodyPr>
+          <a:lstStyle/>
+          <a:p>
+            <a:r>
+              <a:rPr lang="en-US" sz="3200" dirty="0">
+                <a:solidFill>
+                  <a:schemeClr val="tx1"/>
+                </a:solidFill>
+              </a:rPr>
+              <a:t>1. What is a Big data Modeling?</a:t>
+            </a:r>
+          </a:p>
+          <a:p>
+            <a:r>
+              <a:rPr lang="en-US" sz="3200" dirty="0">
+                <a:solidFill>
+                  <a:schemeClr val="tx1"/>
+                </a:solidFill>
+              </a:rPr>
+              <a:t>2. What is a Big Data Modeling &amp; Analytics?</a:t>
+            </a:r>
+          </a:p>
+          <a:p>
+            <a:r>
+              <a:rPr lang="en-US" sz="3200" dirty="0">
+                <a:solidFill>
+                  <a:schemeClr val="tx1"/>
+                </a:solidFill>
+              </a:rPr>
+              <a:t>3. </a:t>
+            </a:r>
+            <a:r>
+              <a:rPr lang="en-US" sz="3200" dirty="0">
+                <a:solidFill>
+                  <a:srgbClr val="00B0F0"/>
+                </a:solidFill>
+              </a:rPr>
+              <a:t>Solutions</a:t>
+            </a:r>
+            <a:r>
+              <a:rPr lang="en-US" sz="3200" dirty="0">
+                <a:solidFill>
+                  <a:schemeClr val="tx1"/>
+                </a:solidFill>
+              </a:rPr>
+              <a:t> to Big Data Modeling &amp; Analytics</a:t>
+            </a:r>
+          </a:p>
+          <a:p>
+            <a:pPr marL="457200" indent="-457200">
+              <a:buFont typeface="Arial" panose="020B0604020202020204" pitchFamily="34" charset="0"/>
+              <a:buChar char="•"/>
+            </a:pPr>
+            <a:r>
+              <a:rPr lang="en-US" sz="3200" dirty="0">
+                <a:solidFill>
+                  <a:srgbClr val="00B0F0"/>
+                </a:solidFill>
+              </a:rPr>
+              <a:t>MapReduce paradigm</a:t>
+            </a:r>
+          </a:p>
+          <a:p>
+            <a:pPr marL="457200" indent="-457200">
+              <a:buFont typeface="Arial" panose="020B0604020202020204" pitchFamily="34" charset="0"/>
+              <a:buChar char="•"/>
+            </a:pPr>
+            <a:r>
+              <a:rPr lang="en-US" sz="3200" dirty="0">
+                <a:solidFill>
+                  <a:srgbClr val="00B0F0"/>
+                </a:solidFill>
+              </a:rPr>
+              <a:t>Spark/PySpark</a:t>
+            </a:r>
+          </a:p>
+          <a:p>
+            <a:pPr marL="457200" indent="-457200">
+              <a:buFont typeface="Arial" panose="020B0604020202020204" pitchFamily="34" charset="0"/>
+              <a:buChar char="•"/>
+            </a:pPr>
+            <a:r>
+              <a:rPr lang="en-US" sz="3200" dirty="0">
+                <a:solidFill>
+                  <a:srgbClr val="00B0F0"/>
+                </a:solidFill>
+              </a:rPr>
+              <a:t>Amazon Athena &amp; Google’s Big Query</a:t>
+            </a:r>
+          </a:p>
+          <a:p>
+            <a:endParaRPr lang="en-US" sz="3200" dirty="0">
+              <a:solidFill>
+                <a:srgbClr val="00B0F0"/>
+              </a:solidFill>
+            </a:endParaRPr>
+          </a:p>
+          <a:p>
+            <a:endParaRPr lang="en-US" sz="3600" dirty="0"/>
+          </a:p>
+          <a:p>
+            <a:pPr marL="800100" lvl="1" indent="-342900" algn="l">
+              <a:buFont typeface="+mj-lt"/>
+              <a:buAutoNum type="arabicPeriod"/>
+            </a:pPr>
+            <a:endParaRPr lang="en-US" sz="1200" dirty="0"/>
+          </a:p>
+        </p:txBody>
+      </p:sp>
+    </p:spTree>
+    <p:extLst>
+      <p:ext uri="{BB962C8B-B14F-4D97-AF65-F5344CB8AC3E}">
+        <p14:creationId xmlns:p14="http://schemas.microsoft.com/office/powerpoint/2010/main" val="2281650071"/>
+      </p:ext>
+    </p:extLst>
+  </p:cSld>
+  <p:clrMapOvr>
+    <a:masterClrMapping/>
+  </p:clrMapOvr>
+  <p:timing>
+    <p:tnLst>
+      <p:par>
+        <p:cTn id="1" dur="indefinite" restart="never" nodeType="tmRoot">
+          <p:childTnLst>
+            <p:seq concurrent="1" nextAc="seek">
+              <p:cTn id="2" dur="indefinite" nodeType="mainSeq">
+                <p:childTnLst>
+                  <p:par>
+                    <p:cTn id="3" fill="hold">
+                      <p:stCondLst>
+                        <p:cond delay="indefinite"/>
+                      </p:stCondLst>
+                      <p:childTnLst>
+                        <p:par>
+                          <p:cTn id="4" fill="hold">
+                            <p:stCondLst>
+                              <p:cond delay="0"/>
+                            </p:stCondLst>
+                            <p:childTnLst>
+                              <p:par>
+                                <p:cTn id="5" presetID="1" presetClass="entr" presetSubtype="0" fill="hold" nodeType="clickEffect">
+                                  <p:stCondLst>
+                                    <p:cond delay="0"/>
+                                  </p:stCondLst>
+                                  <p:childTnLst>
+                                    <p:set>
+                                      <p:cBhvr>
+                                        <p:cTn id="6" dur="1" fill="hold">
+                                          <p:stCondLst>
+                                            <p:cond delay="0"/>
+                                          </p:stCondLst>
+                                        </p:cTn>
+                                        <p:tgtEl>
+                                          <p:spTgt spid="3">
+                                            <p:txEl>
+                                              <p:pRg st="0" end="0"/>
+                                            </p:txEl>
+                                          </p:spTgt>
+                                        </p:tgtEl>
+                                        <p:attrNameLst>
+                                          <p:attrName>style.visibility</p:attrName>
+                                        </p:attrNameLst>
+                                      </p:cBhvr>
+                                      <p:to>
+                                        <p:strVal val="visible"/>
+                                      </p:to>
+                                    </p:set>
+                                  </p:childTnLst>
+                                </p:cTn>
+                              </p:par>
+                            </p:childTnLst>
+                          </p:cTn>
+                        </p:par>
+                      </p:childTnLst>
+                    </p:cTn>
+                  </p:par>
+                  <p:par>
+                    <p:cTn id="7" fill="hold">
+                      <p:stCondLst>
+                        <p:cond delay="indefinite"/>
+                      </p:stCondLst>
+                      <p:childTnLst>
+                        <p:par>
+                          <p:cTn id="8" fill="hold">
+                            <p:stCondLst>
+                              <p:cond delay="0"/>
+                            </p:stCondLst>
+                            <p:childTnLst>
+                              <p:par>
+                                <p:cTn id="9" presetID="1" presetClass="entr" presetSubtype="0" fill="hold" nodeType="clickEffect">
+                                  <p:stCondLst>
+                                    <p:cond delay="0"/>
+                                  </p:stCondLst>
+                                  <p:childTnLst>
+                                    <p:set>
+                                      <p:cBhvr>
+                                        <p:cTn id="10" dur="1" fill="hold">
+                                          <p:stCondLst>
+                                            <p:cond delay="0"/>
+                                          </p:stCondLst>
+                                        </p:cTn>
+                                        <p:tgtEl>
+                                          <p:spTgt spid="3">
+                                            <p:txEl>
+                                              <p:pRg st="1" end="1"/>
+                                            </p:txEl>
+                                          </p:spTgt>
+                                        </p:tgtEl>
+                                        <p:attrNameLst>
+                                          <p:attrName>style.visibility</p:attrName>
+                                        </p:attrNameLst>
+                                      </p:cBhvr>
+                                      <p:to>
+                                        <p:strVal val="visible"/>
+                                      </p:to>
+                                    </p:set>
+                                  </p:childTnLst>
+                                </p:cTn>
+                              </p:par>
+                            </p:childTnLst>
+                          </p:cTn>
+                        </p:par>
+                      </p:childTnLst>
+                    </p:cTn>
+                  </p:par>
+                  <p:par>
+                    <p:cTn id="11" fill="hold">
+                      <p:stCondLst>
+                        <p:cond delay="indefinite"/>
+                      </p:stCondLst>
+                      <p:childTnLst>
+                        <p:par>
+                          <p:cTn id="12" fill="hold">
+                            <p:stCondLst>
+                              <p:cond delay="0"/>
+                            </p:stCondLst>
+                            <p:childTnLst>
+                              <p:par>
+                                <p:cTn id="13" presetID="1" presetClass="entr" presetSubtype="0" fill="hold" nodeType="clickEffect">
+                                  <p:stCondLst>
+                                    <p:cond delay="0"/>
+                                  </p:stCondLst>
+                                  <p:childTnLst>
+                                    <p:set>
+                                      <p:cBhvr>
+                                        <p:cTn id="14" dur="1" fill="hold">
+                                          <p:stCondLst>
+                                            <p:cond delay="0"/>
+                                          </p:stCondLst>
+                                        </p:cTn>
+                                        <p:tgtEl>
+                                          <p:spTgt spid="3">
+                                            <p:txEl>
+                                              <p:pRg st="2" end="2"/>
+                                            </p:txEl>
+                                          </p:spTgt>
+                                        </p:tgtEl>
+                                        <p:attrNameLst>
+                                          <p:attrName>style.visibility</p:attrName>
+                                        </p:attrNameLst>
+                                      </p:cBhvr>
+                                      <p:to>
+                                        <p:strVal val="visible"/>
+                                      </p:to>
+                                    </p:set>
+                                  </p:childTnLst>
+                                </p:cTn>
+                              </p:par>
+                            </p:childTnLst>
+                          </p:cTn>
+                        </p:par>
+                      </p:childTnLst>
+                    </p:cTn>
+                  </p:par>
+                  <p:par>
+                    <p:cTn id="15" fill="hold">
+                      <p:stCondLst>
+                        <p:cond delay="indefinite"/>
+                      </p:stCondLst>
+                      <p:childTnLst>
+                        <p:par>
+                          <p:cTn id="16" fill="hold">
+                            <p:stCondLst>
+                              <p:cond delay="0"/>
+                            </p:stCondLst>
+                            <p:childTnLst>
+                              <p:par>
+                                <p:cTn id="17" presetID="1" presetClass="entr" presetSubtype="0" fill="hold" nodeType="clickEffect">
+                                  <p:stCondLst>
+                                    <p:cond delay="0"/>
+                                  </p:stCondLst>
+                                  <p:childTnLst>
+                                    <p:set>
+                                      <p:cBhvr>
+                                        <p:cTn id="18" dur="1" fill="hold">
+                                          <p:stCondLst>
+                                            <p:cond delay="0"/>
+                                          </p:stCondLst>
+                                        </p:cTn>
+                                        <p:tgtEl>
+                                          <p:spTgt spid="3">
+                                            <p:txEl>
+                                              <p:pRg st="3" end="3"/>
+                                            </p:txEl>
+                                          </p:spTgt>
+                                        </p:tgtEl>
+                                        <p:attrNameLst>
+                                          <p:attrName>style.visibility</p:attrName>
+                                        </p:attrNameLst>
+                                      </p:cBhvr>
+                                      <p:to>
+                                        <p:strVal val="visible"/>
+                                      </p:to>
+                                    </p:set>
+                                  </p:childTnLst>
+                                </p:cTn>
+                              </p:par>
+                            </p:childTnLst>
+                          </p:cTn>
+                        </p:par>
+                      </p:childTnLst>
+                    </p:cTn>
+                  </p:par>
+                  <p:par>
+                    <p:cTn id="19" fill="hold">
+                      <p:stCondLst>
+                        <p:cond delay="indefinite"/>
+                      </p:stCondLst>
+                      <p:childTnLst>
+                        <p:par>
+                          <p:cTn id="20" fill="hold">
+                            <p:stCondLst>
+                              <p:cond delay="0"/>
+                            </p:stCondLst>
+                            <p:childTnLst>
+                              <p:par>
+                                <p:cTn id="21" presetID="1" presetClass="entr" presetSubtype="0" fill="hold" nodeType="clickEffect">
+                                  <p:stCondLst>
+                                    <p:cond delay="0"/>
+                                  </p:stCondLst>
+                                  <p:childTnLst>
+                                    <p:set>
+                                      <p:cBhvr>
+                                        <p:cTn id="22" dur="1" fill="hold">
+                                          <p:stCondLst>
+                                            <p:cond delay="0"/>
+                                          </p:stCondLst>
+                                        </p:cTn>
+                                        <p:tgtEl>
+                                          <p:spTgt spid="3">
+                                            <p:txEl>
+                                              <p:pRg st="4" end="4"/>
+                                            </p:txEl>
+                                          </p:spTgt>
+                                        </p:tgtEl>
+                                        <p:attrNameLst>
+                                          <p:attrName>style.visibility</p:attrName>
+                                        </p:attrNameLst>
+                                      </p:cBhvr>
+                                      <p:to>
+                                        <p:strVal val="visible"/>
+                                      </p:to>
+                                    </p:set>
+                                  </p:childTnLst>
+                                </p:cTn>
+                              </p:par>
+                            </p:childTnLst>
+                          </p:cTn>
+                        </p:par>
+                      </p:childTnLst>
+                    </p:cTn>
+                  </p:par>
+                  <p:par>
+                    <p:cTn id="23" fill="hold">
+                      <p:stCondLst>
+                        <p:cond delay="indefinite"/>
+                      </p:stCondLst>
+                      <p:childTnLst>
+                        <p:par>
+                          <p:cTn id="24" fill="hold">
+                            <p:stCondLst>
+                              <p:cond delay="0"/>
+                            </p:stCondLst>
+                            <p:childTnLst>
+                              <p:par>
+                                <p:cTn id="25" presetID="1" presetClass="entr" presetSubtype="0" fill="hold" nodeType="clickEffect">
+                                  <p:stCondLst>
+                                    <p:cond delay="0"/>
+                                  </p:stCondLst>
+                                  <p:childTnLst>
+                                    <p:set>
+                                      <p:cBhvr>
+                                        <p:cTn id="26" dur="1" fill="hold">
+                                          <p:stCondLst>
+                                            <p:cond delay="0"/>
+                                          </p:stCondLst>
+                                        </p:cTn>
+                                        <p:tgtEl>
+                                          <p:spTgt spid="3">
+                                            <p:txEl>
+                                              <p:pRg st="5" end="5"/>
+                                            </p:txEl>
+                                          </p:spTgt>
+                                        </p:tgtEl>
+                                        <p:attrNameLst>
+                                          <p:attrName>style.visibility</p:attrName>
+                                        </p:attrNameLst>
+                                      </p:cBhvr>
+                                      <p:to>
+                                        <p:strVal val="visible"/>
+                                      </p:to>
+                                    </p:set>
+                                  </p:childTnLst>
+                                </p:cTn>
+                              </p:par>
+                            </p:childTnLst>
+                          </p:cTn>
+                        </p:par>
+                      </p:childTnLst>
+                    </p:cTn>
+                  </p:par>
+                </p:childTnLst>
+              </p:cTn>
+              <p:prevCondLst>
+                <p:cond evt="onPrev" delay="0">
+                  <p:tgtEl>
+                    <p:sldTgt/>
+                  </p:tgtEl>
+                </p:cond>
+              </p:prevCondLst>
+              <p:nextCondLst>
+                <p:cond evt="onNext" delay="0">
+                  <p:tgtEl>
+                    <p:sldTgt/>
+                  </p:tgtEl>
+                </p:cond>
+              </p:nextCondLst>
+            </p:seq>
+          </p:childTnLst>
+        </p:cTn>
+      </p:par>
+    </p:tnLst>
+  </p:timing>
+</p:sld>
+</file>
+
+<file path=ppt/slides/slide20.xml><?xml version="1.0" encoding="utf-8"?>
 <p:sld xmlns:a="http://schemas.openxmlformats.org/drawingml/2006/main" xmlns:r="http://schemas.openxmlformats.org/officeDocument/2006/relationships" xmlns:p="http://schemas.openxmlformats.org/presentationml/2006/main">
   <p:cSld>
     <p:spTree>
@@ -9692,7 +11859,7 @@
           <a:lstStyle/>
           <a:p>
             <a:r>
-              <a:rPr lang="en-US" dirty="0">
+              <a:rPr lang="en-US">
                 <a:solidFill>
                   <a:srgbClr val="002060"/>
                 </a:solidFill>
@@ -9700,7 +11867,7 @@
               <a:t>2. </a:t>
             </a:r>
             <a:r>
-              <a:rPr lang="en-US" b="1" dirty="0">
+              <a:rPr lang="en-US" b="1">
                 <a:solidFill>
                   <a:srgbClr val="00B0F0"/>
                 </a:solidFill>
@@ -9743,7 +11910,7 @@
               <a:buChar char="•"/>
             </a:pPr>
             <a:r>
-              <a:rPr lang="en-US" sz="3200" dirty="0">
+              <a:rPr lang="en-US" sz="3200">
                 <a:solidFill>
                   <a:srgbClr val="00B0F0"/>
                 </a:solidFill>
@@ -9751,7 +11918,7 @@
               <a:t>Apache </a:t>
             </a:r>
             <a:r>
-              <a:rPr lang="en-US" sz="3200" b="1" dirty="0">
+              <a:rPr lang="en-US" sz="3200" b="1">
                 <a:solidFill>
                   <a:srgbClr val="00B0F0"/>
                 </a:solidFill>
@@ -9759,7 +11926,7 @@
               <a:t>Spark</a:t>
             </a:r>
             <a:r>
-              <a:rPr lang="en-US" sz="3200" dirty="0">
+              <a:rPr lang="en-US" sz="3200">
                 <a:solidFill>
                   <a:schemeClr val="tx1"/>
                 </a:solidFill>
@@ -9773,7 +11940,7 @@
               <a:buChar char="•"/>
             </a:pPr>
             <a:r>
-              <a:rPr lang="en-US" sz="4400" dirty="0">
+              <a:rPr lang="en-US" sz="4400">
                 <a:solidFill>
                   <a:srgbClr val="00B0F0"/>
                 </a:solidFill>
@@ -9781,7 +11948,7 @@
               <a:t>PySpark</a:t>
             </a:r>
             <a:r>
-              <a:rPr lang="en-US" sz="4400" dirty="0">
+              <a:rPr lang="en-US" sz="4400">
                 <a:solidFill>
                   <a:schemeClr val="tx1"/>
                 </a:solidFill>
@@ -9795,7 +11962,7 @@
               <a:buChar char="•"/>
             </a:pPr>
             <a:r>
-              <a:rPr lang="en-US" sz="4400" dirty="0">
+              <a:rPr lang="en-US" sz="4400">
                 <a:solidFill>
                   <a:srgbClr val="00B0F0"/>
                 </a:solidFill>
@@ -9803,7 +11970,7 @@
               <a:t>Spark</a:t>
             </a:r>
             <a:r>
-              <a:rPr lang="en-US" sz="4400" dirty="0">
+              <a:rPr lang="en-US" sz="4400">
                 <a:solidFill>
                   <a:schemeClr val="tx1"/>
                 </a:solidFill>
@@ -9817,7 +11984,7 @@
               <a:buChar char="•"/>
             </a:pPr>
             <a:r>
-              <a:rPr lang="en-US" sz="4000" dirty="0">
+              <a:rPr lang="en-US" sz="4000">
                 <a:solidFill>
                   <a:srgbClr val="00B0F0"/>
                 </a:solidFill>
@@ -9825,7 +11992,7 @@
               <a:t>Spark</a:t>
             </a:r>
             <a:r>
-              <a:rPr lang="en-US" sz="3600" dirty="0">
+              <a:rPr lang="en-US" sz="3600">
                 <a:solidFill>
                   <a:schemeClr val="tx1"/>
                 </a:solidFill>
@@ -9833,14 +12000,14 @@
               <a:t> web site:  https://</a:t>
             </a:r>
             <a:r>
-              <a:rPr lang="en-US" sz="3600" dirty="0" err="1">
+              <a:rPr lang="en-US" sz="3600" err="1">
                 <a:solidFill>
                   <a:schemeClr val="tx1"/>
                 </a:solidFill>
               </a:rPr>
               <a:t>spark.apache.org</a:t>
             </a:r>
-            <a:endParaRPr lang="en-US" sz="3600" dirty="0">
+            <a:endParaRPr lang="en-US" sz="3600">
               <a:solidFill>
                 <a:schemeClr val="tx1"/>
               </a:solidFill>
@@ -10087,7 +12254,7 @@
 </p:sld>
 </file>
 
-<file path=ppt/slides/slide16.xml><?xml version="1.0" encoding="utf-8"?>
+<file path=ppt/slides/slide21.xml><?xml version="1.0" encoding="utf-8"?>
 <p:sld xmlns:a="http://schemas.openxmlformats.org/drawingml/2006/main" xmlns:r="http://schemas.openxmlformats.org/officeDocument/2006/relationships" xmlns:p="http://schemas.openxmlformats.org/presentationml/2006/main">
   <p:cSld>
     <p:spTree>
@@ -10133,7 +12300,7 @@
           <a:lstStyle/>
           <a:p>
             <a:r>
-              <a:rPr lang="en-US" dirty="0">
+              <a:rPr lang="en-US">
                 <a:solidFill>
                   <a:srgbClr val="002060"/>
                 </a:solidFill>
@@ -10141,7 +12308,7 @@
               <a:t>2. </a:t>
             </a:r>
             <a:r>
-              <a:rPr lang="en-US" dirty="0">
+              <a:rPr lang="en-US">
                 <a:solidFill>
                   <a:srgbClr val="00B0F0"/>
                 </a:solidFill>
@@ -10181,7 +12348,7 @@
           <a:p>
             <a:pPr algn="l"/>
             <a:r>
-              <a:rPr lang="en-US" sz="3200" dirty="0">
+              <a:rPr lang="en-US" sz="3200">
                 <a:solidFill>
                   <a:schemeClr val="tx1"/>
                 </a:solidFill>
@@ -10190,7 +12357,7 @@
               <a:t>For Apache </a:t>
             </a:r>
             <a:r>
-              <a:rPr lang="en-US" sz="3200" b="1" dirty="0">
+              <a:rPr lang="en-US" sz="3200" b="1">
                 <a:solidFill>
                   <a:schemeClr val="tx1"/>
                 </a:solidFill>
@@ -10199,7 +12366,7 @@
               <a:t>Spark</a:t>
             </a:r>
             <a:r>
-              <a:rPr lang="en-US" sz="3200" dirty="0">
+              <a:rPr lang="en-US" sz="3200">
                 <a:solidFill>
                   <a:schemeClr val="tx1"/>
                 </a:solidFill>
@@ -10208,7 +12375,7 @@
               <a:t> , we will use </a:t>
             </a:r>
             <a:r>
-              <a:rPr lang="en-US" sz="4400" dirty="0">
+              <a:rPr lang="en-US" sz="4400">
                 <a:solidFill>
                   <a:schemeClr val="tx1"/>
                 </a:solidFill>
@@ -10220,7 +12387,7 @@
           <a:p>
             <a:pPr algn="l"/>
             <a:r>
-              <a:rPr lang="en-US" sz="4400" dirty="0">
+              <a:rPr lang="en-US" sz="4400">
                 <a:solidFill>
                   <a:schemeClr val="tx1"/>
                 </a:solidFill>
@@ -10229,7 +12396,7 @@
               <a:t>write </a:t>
             </a:r>
             <a:r>
-              <a:rPr lang="en-US" sz="4400" b="1" dirty="0">
+              <a:rPr lang="en-US" sz="4400" b="1">
                 <a:solidFill>
                   <a:schemeClr val="tx1"/>
                 </a:solidFill>
@@ -10238,7 +12405,7 @@
               <a:t>actual</a:t>
             </a:r>
             <a:r>
-              <a:rPr lang="en-US" sz="4400" dirty="0">
+              <a:rPr lang="en-US" sz="4400">
                 <a:solidFill>
                   <a:schemeClr val="tx1"/>
                 </a:solidFill>
@@ -10247,7 +12414,7 @@
               <a:t> </a:t>
             </a:r>
             <a:r>
-              <a:rPr lang="en-US" sz="4400" b="1" dirty="0">
+              <a:rPr lang="en-US" sz="4400" b="1">
                 <a:solidFill>
                   <a:schemeClr val="tx1"/>
                 </a:solidFill>
@@ -10256,7 +12423,7 @@
               <a:t>executable</a:t>
             </a:r>
             <a:r>
-              <a:rPr lang="en-US" sz="4400" dirty="0">
+              <a:rPr lang="en-US" sz="4400">
                 <a:solidFill>
                   <a:schemeClr val="tx1"/>
                 </a:solidFill>
@@ -10265,7 +12432,7 @@
               <a:t> </a:t>
             </a:r>
             <a:r>
-              <a:rPr lang="en-US" sz="4400" b="1" dirty="0">
+              <a:rPr lang="en-US" sz="4400" b="1">
                 <a:solidFill>
                   <a:schemeClr val="tx1"/>
                 </a:solidFill>
@@ -10277,7 +12444,7 @@
           <a:p>
             <a:pPr algn="l"/>
             <a:r>
-              <a:rPr lang="en-US" sz="3200" dirty="0">
+              <a:rPr lang="en-US" sz="3200">
                 <a:solidFill>
                   <a:schemeClr val="tx1"/>
                 </a:solidFill>
@@ -10289,7 +12456,7 @@
               <a:t>&gt;&gt;&gt; # spark is an instance of </a:t>
             </a:r>
             <a:r>
-              <a:rPr lang="en-US" sz="3200" dirty="0" err="1">
+              <a:rPr lang="en-US" sz="3200" err="1">
                 <a:solidFill>
                   <a:schemeClr val="tx1"/>
                 </a:solidFill>
@@ -10301,7 +12468,7 @@
               <a:t>SparkSession</a:t>
             </a:r>
             <a:r>
-              <a:rPr lang="en-US" sz="3200" dirty="0">
+              <a:rPr lang="en-US" sz="3200">
                 <a:solidFill>
                   <a:schemeClr val="tx1"/>
                 </a:solidFill>
@@ -10315,7 +12482,7 @@
           </a:p>
           <a:p>
             <a:r>
-              <a:rPr lang="en-US" sz="3200" dirty="0">
+              <a:rPr lang="en-US" sz="3200">
                 <a:solidFill>
                   <a:schemeClr val="tx1"/>
                 </a:solidFill>
@@ -10327,7 +12494,7 @@
               <a:t>&gt;&gt;&gt; </a:t>
             </a:r>
             <a:r>
-              <a:rPr lang="en-US" sz="3200" dirty="0" err="1">
+              <a:rPr lang="en-US" sz="3200" err="1">
                 <a:solidFill>
                   <a:schemeClr val="tx1"/>
                 </a:solidFill>
@@ -10339,7 +12506,7 @@
               <a:t>rdd</a:t>
             </a:r>
             <a:r>
-              <a:rPr lang="en-US" sz="3200" dirty="0">
+              <a:rPr lang="en-US" sz="3200">
                 <a:solidFill>
                   <a:schemeClr val="tx1"/>
                 </a:solidFill>
@@ -10351,7 +12518,7 @@
               <a:t> = </a:t>
             </a:r>
             <a:r>
-              <a:rPr lang="en-US" sz="3200" dirty="0" err="1">
+              <a:rPr lang="en-US" sz="3200" err="1">
                 <a:solidFill>
                   <a:schemeClr val="tx1"/>
                 </a:solidFill>
@@ -10362,7 +12529,7 @@
               </a:rPr>
               <a:t>spark.sparkContext</a:t>
             </a:r>
-            <a:endParaRPr lang="en-US" sz="3200" dirty="0">
+            <a:endParaRPr lang="en-US" sz="3200">
               <a:solidFill>
                 <a:schemeClr val="tx1"/>
               </a:solidFill>
@@ -10374,7 +12541,7 @@
           </a:p>
           <a:p>
             <a:r>
-              <a:rPr lang="en-US" sz="3200" dirty="0">
+              <a:rPr lang="en-US" sz="3200">
                 <a:solidFill>
                   <a:schemeClr val="tx1"/>
                 </a:solidFill>
@@ -10388,7 +12555,7 @@
           </a:p>
           <a:p>
             <a:r>
-              <a:rPr lang="en-US" sz="3200" dirty="0">
+              <a:rPr lang="en-US" sz="3200">
                 <a:solidFill>
                   <a:schemeClr val="tx1"/>
                 </a:solidFill>
@@ -10400,7 +12567,7 @@
               <a:t>&gt;&gt;&gt; </a:t>
             </a:r>
             <a:r>
-              <a:rPr lang="en-US" sz="3200" dirty="0" err="1">
+              <a:rPr lang="en-US" sz="3200" err="1">
                 <a:solidFill>
                   <a:schemeClr val="tx1"/>
                 </a:solidFill>
@@ -10412,7 +12579,7 @@
               <a:t>rdd.count</a:t>
             </a:r>
             <a:r>
-              <a:rPr lang="en-US" sz="3200" dirty="0">
+              <a:rPr lang="en-US" sz="3200">
                 <a:solidFill>
                   <a:schemeClr val="tx1"/>
                 </a:solidFill>
@@ -10426,7 +12593,7 @@
           </a:p>
           <a:p>
             <a:r>
-              <a:rPr lang="en-US" sz="3200" dirty="0">
+              <a:rPr lang="en-US" sz="3200">
                 <a:solidFill>
                   <a:schemeClr val="tx1"/>
                 </a:solidFill>
@@ -10440,7 +12607,7 @@
           </a:p>
           <a:p>
             <a:r>
-              <a:rPr lang="en-US" sz="3200" dirty="0">
+              <a:rPr lang="en-US" sz="3200">
                 <a:solidFill>
                   <a:schemeClr val="tx1"/>
                 </a:solidFill>
@@ -10452,7 +12619,7 @@
               <a:t>&gt;&gt;&gt; </a:t>
             </a:r>
             <a:r>
-              <a:rPr lang="en-US" sz="3200" dirty="0" err="1">
+              <a:rPr lang="en-US" sz="3200" err="1">
                 <a:solidFill>
                   <a:schemeClr val="tx1"/>
                 </a:solidFill>
@@ -10464,7 +12631,7 @@
               <a:t>sum_of_values</a:t>
             </a:r>
             <a:r>
-              <a:rPr lang="en-US" sz="3200" dirty="0">
+              <a:rPr lang="en-US" sz="3200">
                 <a:solidFill>
                   <a:schemeClr val="tx1"/>
                 </a:solidFill>
@@ -10476,7 +12643,7 @@
               <a:t> = </a:t>
             </a:r>
             <a:r>
-              <a:rPr lang="en-US" sz="3200" dirty="0" err="1">
+              <a:rPr lang="en-US" sz="3200" err="1">
                 <a:solidFill>
                   <a:schemeClr val="tx1"/>
                 </a:solidFill>
@@ -10488,7 +12655,7 @@
               <a:t>rdd.reduce</a:t>
             </a:r>
             <a:r>
-              <a:rPr lang="en-US" sz="3200" dirty="0">
+              <a:rPr lang="en-US" sz="3200">
                 <a:solidFill>
                   <a:schemeClr val="tx1"/>
                 </a:solidFill>
@@ -10500,7 +12667,7 @@
               <a:t>(lambda x, y: </a:t>
             </a:r>
             <a:r>
-              <a:rPr lang="en-US" sz="3200" dirty="0" err="1">
+              <a:rPr lang="en-US" sz="3200" err="1">
                 <a:solidFill>
                   <a:schemeClr val="tx1"/>
                 </a:solidFill>
@@ -10512,7 +12679,7 @@
               <a:t>x+y</a:t>
             </a:r>
             <a:r>
-              <a:rPr lang="en-US" sz="3200" dirty="0">
+              <a:rPr lang="en-US" sz="3200">
                 <a:solidFill>
                   <a:schemeClr val="tx1"/>
                 </a:solidFill>
@@ -10526,7 +12693,7 @@
           </a:p>
           <a:p>
             <a:r>
-              <a:rPr lang="en-US" sz="3200" dirty="0">
+              <a:rPr lang="en-US" sz="3200">
                 <a:solidFill>
                   <a:schemeClr val="tx1"/>
                 </a:solidFill>
@@ -10538,7 +12705,7 @@
               <a:t>&gt;&gt;&gt; </a:t>
             </a:r>
             <a:r>
-              <a:rPr lang="en-US" sz="3200" dirty="0" err="1">
+              <a:rPr lang="en-US" sz="3200" err="1">
                 <a:solidFill>
                   <a:schemeClr val="tx1"/>
                 </a:solidFill>
@@ -10549,7 +12716,7 @@
               </a:rPr>
               <a:t>sum_of_values</a:t>
             </a:r>
-            <a:endParaRPr lang="en-US" sz="3200" dirty="0">
+            <a:endParaRPr lang="en-US" sz="3200">
               <a:solidFill>
                 <a:schemeClr val="tx1"/>
               </a:solidFill>
@@ -10561,7 +12728,7 @@
           </a:p>
           <a:p>
             <a:r>
-              <a:rPr lang="en-US" sz="3200" dirty="0">
+              <a:rPr lang="en-US" sz="3200">
                 <a:solidFill>
                   <a:schemeClr val="tx1"/>
                 </a:solidFill>
@@ -11108,7 +13275,7 @@
 </p:sld>
 </file>
 
-<file path=ppt/slides/slide17.xml><?xml version="1.0" encoding="utf-8"?>
+<file path=ppt/slides/slide22.xml><?xml version="1.0" encoding="utf-8"?>
 <p:sld xmlns:a="http://schemas.openxmlformats.org/drawingml/2006/main" xmlns:r="http://schemas.openxmlformats.org/officeDocument/2006/relationships" xmlns:p="http://schemas.openxmlformats.org/presentationml/2006/main">
   <p:cSld>
     <p:bg>
@@ -11162,7 +13329,7 @@
           <a:lstStyle/>
           <a:p>
             <a:r>
-              <a:rPr lang="en-US" sz="5400" dirty="0"/>
+              <a:rPr lang="en-US" sz="5400"/>
               <a:t>Apache Spark: Components</a:t>
             </a:r>
           </a:p>
@@ -11211,7 +13378,7 @@
 </p:sld>
 </file>
 
-<file path=ppt/slides/slide18.xml><?xml version="1.0" encoding="utf-8"?>
+<file path=ppt/slides/slide23.xml><?xml version="1.0" encoding="utf-8"?>
 <p:sld xmlns:a="http://schemas.openxmlformats.org/drawingml/2006/main" xmlns:r="http://schemas.openxmlformats.org/officeDocument/2006/relationships" xmlns:p="http://schemas.openxmlformats.org/presentationml/2006/main">
   <p:cSld>
     <p:spTree>
@@ -11263,7 +13430,7 @@
           <a:lstStyle/>
           <a:p>
             <a:r>
-              <a:rPr lang="en-US" dirty="0">
+              <a:rPr lang="en-US">
                 <a:solidFill>
                   <a:srgbClr val="00B050"/>
                 </a:solidFill>
@@ -11302,7 +13469,7 @@
           <a:lstStyle/>
           <a:p>
             <a:r>
-              <a:rPr lang="en-US" sz="3200" b="1" i="1" dirty="0">
+              <a:rPr lang="en-US" sz="3200" b="1" i="1">
                 <a:solidFill>
                   <a:srgbClr val="00B0F0"/>
                 </a:solidFill>
@@ -11317,7 +13484,7 @@
               <a:buChar char="•"/>
             </a:pPr>
             <a:r>
-              <a:rPr lang="en-US" sz="2800" dirty="0">
+              <a:rPr lang="en-US" sz="2800">
                 <a:solidFill>
                   <a:schemeClr val="tx1"/>
                 </a:solidFill>
@@ -11332,7 +13499,7 @@
               <a:buChar char="•"/>
             </a:pPr>
             <a:r>
-              <a:rPr lang="en-US" sz="2800" dirty="0">
+              <a:rPr lang="en-US" sz="2800">
                 <a:solidFill>
                   <a:schemeClr val="tx1"/>
                 </a:solidFill>
@@ -11347,7 +13514,7 @@
               <a:buChar char="•"/>
             </a:pPr>
             <a:r>
-              <a:rPr lang="en-US" sz="2800" dirty="0">
+              <a:rPr lang="en-US" sz="2800">
                 <a:solidFill>
                   <a:schemeClr val="tx1"/>
                 </a:solidFill>
@@ -11357,7 +13524,7 @@
             </a:r>
           </a:p>
           <a:p>
-            <a:endParaRPr lang="en-US" sz="2800" dirty="0">
+            <a:endParaRPr lang="en-US" sz="2800">
               <a:solidFill>
                 <a:schemeClr val="tx1"/>
               </a:solidFill>
@@ -11366,7 +13533,7 @@
           </a:p>
           <a:p>
             <a:r>
-              <a:rPr lang="en-US" sz="2800" b="1" i="1" dirty="0">
+              <a:rPr lang="en-US" sz="2800" b="1" i="1">
                 <a:solidFill>
                   <a:srgbClr val="00B0F0"/>
                 </a:solidFill>
@@ -11377,7 +13544,7 @@
           </a:p>
           <a:p>
             <a:r>
-              <a:rPr lang="en-US" sz="2800" dirty="0">
+              <a:rPr lang="en-US" sz="2800">
                 <a:solidFill>
                   <a:schemeClr val="tx1"/>
                 </a:solidFill>
@@ -11392,7 +13559,7 @@
               <a:buChar char="•"/>
             </a:pPr>
             <a:r>
-              <a:rPr lang="en-US" sz="2800" b="1" dirty="0">
+              <a:rPr lang="en-US" sz="2800" b="1">
                 <a:solidFill>
                   <a:schemeClr val="tx1"/>
                 </a:solidFill>
@@ -11401,7 +13568,7 @@
               <a:t>Client Mode</a:t>
             </a:r>
             <a:r>
-              <a:rPr lang="en-US" sz="2800" dirty="0">
+              <a:rPr lang="en-US" sz="2800">
                 <a:solidFill>
                   <a:schemeClr val="tx1"/>
                 </a:solidFill>
@@ -11416,7 +13583,7 @@
               <a:buChar char="•"/>
             </a:pPr>
             <a:r>
-              <a:rPr lang="en-US" sz="2800" b="1" dirty="0">
+              <a:rPr lang="en-US" sz="2800" b="1">
                 <a:solidFill>
                   <a:schemeClr val="tx1"/>
                 </a:solidFill>
@@ -11425,7 +13592,7 @@
               <a:t>Cluster Mode</a:t>
             </a:r>
             <a:r>
-              <a:rPr lang="en-US" sz="2800" dirty="0">
+              <a:rPr lang="en-US" sz="2800">
                 <a:solidFill>
                   <a:schemeClr val="tx1"/>
                 </a:solidFill>
@@ -11433,7 +13600,7 @@
               </a:rPr>
               <a:t>: Internal driver: The driver runs inside a worker node within the cluster. Production standard: Best for scheduled production jobs. Independent: You can close your laptop and the job will keep running.</a:t>
             </a:r>
-            <a:endParaRPr lang="en-US" sz="2800" dirty="0">
+            <a:endParaRPr lang="en-US" sz="2800">
               <a:solidFill>
                 <a:schemeClr val="tx1"/>
               </a:solidFill>
@@ -11880,7 +14047,7 @@
 </p:sld>
 </file>
 
-<file path=ppt/slides/slide19.xml><?xml version="1.0" encoding="utf-8"?>
+<file path=ppt/slides/slide24.xml><?xml version="1.0" encoding="utf-8"?>
 <p:sld xmlns:a="http://schemas.openxmlformats.org/drawingml/2006/main" xmlns:r="http://schemas.openxmlformats.org/officeDocument/2006/relationships" xmlns:p="http://schemas.openxmlformats.org/presentationml/2006/main">
   <p:cSld>
     <p:spTree>
@@ -11932,7 +14099,7 @@
           <a:lstStyle/>
           <a:p>
             <a:r>
-              <a:rPr lang="en-US" dirty="0">
+              <a:rPr lang="en-US">
                 <a:solidFill>
                   <a:srgbClr val="00B0F0"/>
                 </a:solidFill>
@@ -11940,7 +14107,7 @@
               <a:t>Apache Spark</a:t>
             </a:r>
             <a:r>
-              <a:rPr lang="en-US" dirty="0"/>
+              <a:rPr lang="en-US"/>
               <a:t>: runs in a cluster</a:t>
             </a:r>
           </a:p>
@@ -11989,335 +14156,7 @@
 </p:sld>
 </file>
 
-<file path=ppt/slides/slide2.xml><?xml version="1.0" encoding="utf-8"?>
-<p:sld xmlns:a="http://schemas.openxmlformats.org/drawingml/2006/main" xmlns:r="http://schemas.openxmlformats.org/officeDocument/2006/relationships" xmlns:p="http://schemas.openxmlformats.org/presentationml/2006/main">
-  <p:cSld>
-    <p:spTree>
-      <p:nvGrpSpPr>
-        <p:cNvPr id="1" name=""/>
-        <p:cNvGrpSpPr/>
-        <p:nvPr/>
-      </p:nvGrpSpPr>
-      <p:grpSpPr>
-        <a:xfrm>
-          <a:off x="0" y="0"/>
-          <a:ext cx="0" cy="0"/>
-          <a:chOff x="0" y="0"/>
-          <a:chExt cx="0" cy="0"/>
-        </a:xfrm>
-      </p:grpSpPr>
-      <p:sp>
-        <p:nvSpPr>
-          <p:cNvPr id="2" name="Title 1">
-            <a:extLst>
-              <a:ext uri="{FF2B5EF4-FFF2-40B4-BE49-F238E27FC236}">
-                <a16:creationId xmlns:a16="http://schemas.microsoft.com/office/drawing/2014/main" id="{8207F09F-B406-FB4C-ABE0-890E4E4F95C8}"/>
-              </a:ext>
-            </a:extLst>
-          </p:cNvPr>
-          <p:cNvSpPr>
-            <a:spLocks noGrp="1"/>
-          </p:cNvSpPr>
-          <p:nvPr>
-            <p:ph type="ctrTitle"/>
-          </p:nvPr>
-        </p:nvSpPr>
-        <p:spPr>
-          <a:xfrm>
-            <a:off x="1524000" y="1122364"/>
-            <a:ext cx="9144000" cy="716376"/>
-          </a:xfrm>
-        </p:spPr>
-        <p:txBody>
-          <a:bodyPr>
-            <a:normAutofit fontScale="90000"/>
-          </a:bodyPr>
-          <a:lstStyle/>
-          <a:p>
-            <a:r>
-              <a:rPr lang="en-US" dirty="0"/>
-              <a:t>Main Course Components:</a:t>
-            </a:r>
-          </a:p>
-        </p:txBody>
-      </p:sp>
-      <p:sp>
-        <p:nvSpPr>
-          <p:cNvPr id="3" name="Subtitle 2">
-            <a:extLst>
-              <a:ext uri="{FF2B5EF4-FFF2-40B4-BE49-F238E27FC236}">
-                <a16:creationId xmlns:a16="http://schemas.microsoft.com/office/drawing/2014/main" id="{67BA4937-A89D-8343-B4A3-942B771C889A}"/>
-              </a:ext>
-            </a:extLst>
-          </p:cNvPr>
-          <p:cNvSpPr>
-            <a:spLocks noGrp="1"/>
-          </p:cNvSpPr>
-          <p:nvPr>
-            <p:ph type="subTitle" idx="1"/>
-          </p:nvPr>
-        </p:nvSpPr>
-        <p:spPr>
-          <a:xfrm>
-            <a:off x="1307184" y="2074410"/>
-            <a:ext cx="9144000" cy="4134677"/>
-          </a:xfrm>
-        </p:spPr>
-        <p:txBody>
-          <a:bodyPr>
-            <a:normAutofit/>
-          </a:bodyPr>
-          <a:lstStyle/>
-          <a:p>
-            <a:pPr algn="l"/>
-            <a:r>
-              <a:rPr lang="en-US" sz="3600" dirty="0"/>
-              <a:t>1. </a:t>
-            </a:r>
-            <a:r>
-              <a:rPr lang="en-US" sz="3600" dirty="0">
-                <a:solidFill>
-                  <a:srgbClr val="00B0F0"/>
-                </a:solidFill>
-              </a:rPr>
-              <a:t>Introduction to MapReduce Paradigm (25%)</a:t>
-            </a:r>
-          </a:p>
-          <a:p>
-            <a:pPr algn="l"/>
-            <a:r>
-              <a:rPr lang="en-US" sz="3600" dirty="0"/>
-              <a:t>2. </a:t>
-            </a:r>
-            <a:r>
-              <a:rPr lang="en-US" sz="3600" dirty="0">
-                <a:solidFill>
-                  <a:srgbClr val="FF0000"/>
-                </a:solidFill>
-              </a:rPr>
-              <a:t>Spark and PySpark (60%)</a:t>
-            </a:r>
-          </a:p>
-          <a:p>
-            <a:pPr algn="l"/>
-            <a:r>
-              <a:rPr lang="en-US" sz="3600" dirty="0"/>
-              <a:t>3. </a:t>
-            </a:r>
-            <a:r>
-              <a:rPr lang="en-US" sz="3600" dirty="0">
-                <a:solidFill>
-                  <a:srgbClr val="00B050"/>
-                </a:solidFill>
-              </a:rPr>
-              <a:t>Serverless SQL Access to Big Data (15%)</a:t>
-            </a:r>
-            <a:endParaRPr lang="en-US" sz="1200" dirty="0">
-              <a:solidFill>
-                <a:srgbClr val="00B050"/>
-              </a:solidFill>
-            </a:endParaRPr>
-          </a:p>
-          <a:p>
-            <a:pPr marL="800100" lvl="1" indent="-342900" algn="l">
-              <a:buFont typeface="+mj-lt"/>
-              <a:buAutoNum type="arabicPeriod"/>
-            </a:pPr>
-            <a:endParaRPr lang="en-US" sz="1200" dirty="0"/>
-          </a:p>
-        </p:txBody>
-      </p:sp>
-    </p:spTree>
-    <p:extLst>
-      <p:ext uri="{BB962C8B-B14F-4D97-AF65-F5344CB8AC3E}">
-        <p14:creationId xmlns:p14="http://schemas.microsoft.com/office/powerpoint/2010/main" val="1264933329"/>
-      </p:ext>
-    </p:extLst>
-  </p:cSld>
-  <p:clrMapOvr>
-    <a:masterClrMapping/>
-  </p:clrMapOvr>
-  <p:timing>
-    <p:tnLst>
-      <p:par>
-        <p:cTn id="1" dur="indefinite" restart="never" nodeType="tmRoot">
-          <p:childTnLst>
-            <p:seq concurrent="1" nextAc="seek">
-              <p:cTn id="2" dur="indefinite" nodeType="mainSeq">
-                <p:childTnLst>
-                  <p:par>
-                    <p:cTn id="3" fill="hold">
-                      <p:stCondLst>
-                        <p:cond delay="indefinite"/>
-                      </p:stCondLst>
-                      <p:childTnLst>
-                        <p:par>
-                          <p:cTn id="4" fill="hold">
-                            <p:stCondLst>
-                              <p:cond delay="0"/>
-                            </p:stCondLst>
-                            <p:childTnLst>
-                              <p:par>
-                                <p:cTn id="5" presetID="1" presetClass="entr" presetSubtype="0" fill="hold" nodeType="clickEffect">
-                                  <p:stCondLst>
-                                    <p:cond delay="0"/>
-                                  </p:stCondLst>
-                                  <p:childTnLst>
-                                    <p:set>
-                                      <p:cBhvr>
-                                        <p:cTn id="6" dur="1" fill="hold">
-                                          <p:stCondLst>
-                                            <p:cond delay="0"/>
-                                          </p:stCondLst>
-                                        </p:cTn>
-                                        <p:tgtEl>
-                                          <p:spTgt spid="3">
-                                            <p:txEl>
-                                              <p:pRg st="0" end="0"/>
-                                            </p:txEl>
-                                          </p:spTgt>
-                                        </p:tgtEl>
-                                        <p:attrNameLst>
-                                          <p:attrName>style.visibility</p:attrName>
-                                        </p:attrNameLst>
-                                      </p:cBhvr>
-                                      <p:to>
-                                        <p:strVal val="visible"/>
-                                      </p:to>
-                                    </p:set>
-                                  </p:childTnLst>
-                                </p:cTn>
-                              </p:par>
-                            </p:childTnLst>
-                          </p:cTn>
-                        </p:par>
-                      </p:childTnLst>
-                    </p:cTn>
-                  </p:par>
-                  <p:par>
-                    <p:cTn id="7" fill="hold">
-                      <p:stCondLst>
-                        <p:cond delay="indefinite"/>
-                      </p:stCondLst>
-                      <p:childTnLst>
-                        <p:par>
-                          <p:cTn id="8" fill="hold">
-                            <p:stCondLst>
-                              <p:cond delay="0"/>
-                            </p:stCondLst>
-                            <p:childTnLst>
-                              <p:par>
-                                <p:cTn id="9" presetID="1" presetClass="entr" presetSubtype="0" fill="hold" nodeType="clickEffect">
-                                  <p:stCondLst>
-                                    <p:cond delay="0"/>
-                                  </p:stCondLst>
-                                  <p:childTnLst>
-                                    <p:set>
-                                      <p:cBhvr>
-                                        <p:cTn id="10" dur="1" fill="hold">
-                                          <p:stCondLst>
-                                            <p:cond delay="0"/>
-                                          </p:stCondLst>
-                                        </p:cTn>
-                                        <p:tgtEl>
-                                          <p:spTgt spid="3">
-                                            <p:txEl>
-                                              <p:pRg st="1" end="1"/>
-                                            </p:txEl>
-                                          </p:spTgt>
-                                        </p:tgtEl>
-                                        <p:attrNameLst>
-                                          <p:attrName>style.visibility</p:attrName>
-                                        </p:attrNameLst>
-                                      </p:cBhvr>
-                                      <p:to>
-                                        <p:strVal val="visible"/>
-                                      </p:to>
-                                    </p:set>
-                                  </p:childTnLst>
-                                </p:cTn>
-                              </p:par>
-                            </p:childTnLst>
-                          </p:cTn>
-                        </p:par>
-                      </p:childTnLst>
-                    </p:cTn>
-                  </p:par>
-                  <p:par>
-                    <p:cTn id="11" fill="hold">
-                      <p:stCondLst>
-                        <p:cond delay="indefinite"/>
-                      </p:stCondLst>
-                      <p:childTnLst>
-                        <p:par>
-                          <p:cTn id="12" fill="hold">
-                            <p:stCondLst>
-                              <p:cond delay="0"/>
-                            </p:stCondLst>
-                            <p:childTnLst>
-                              <p:par>
-                                <p:cTn id="13" presetID="1" presetClass="entr" presetSubtype="0" fill="hold" nodeType="clickEffect">
-                                  <p:stCondLst>
-                                    <p:cond delay="0"/>
-                                  </p:stCondLst>
-                                  <p:childTnLst>
-                                    <p:set>
-                                      <p:cBhvr>
-                                        <p:cTn id="14" dur="1" fill="hold">
-                                          <p:stCondLst>
-                                            <p:cond delay="0"/>
-                                          </p:stCondLst>
-                                        </p:cTn>
-                                        <p:tgtEl>
-                                          <p:spTgt spid="3">
-                                            <p:txEl>
-                                              <p:pRg st="2" end="2"/>
-                                            </p:txEl>
-                                          </p:spTgt>
-                                        </p:tgtEl>
-                                        <p:attrNameLst>
-                                          <p:attrName>style.visibility</p:attrName>
-                                        </p:attrNameLst>
-                                      </p:cBhvr>
-                                      <p:to>
-                                        <p:strVal val="visible"/>
-                                      </p:to>
-                                    </p:set>
-                                  </p:childTnLst>
-                                </p:cTn>
-                              </p:par>
-                            </p:childTnLst>
-                          </p:cTn>
-                        </p:par>
-                      </p:childTnLst>
-                    </p:cTn>
-                  </p:par>
-                </p:childTnLst>
-              </p:cTn>
-              <p:prevCondLst>
-                <p:cond evt="onPrev" delay="0">
-                  <p:tgtEl>
-                    <p:sldTgt/>
-                  </p:tgtEl>
-                </p:cond>
-              </p:prevCondLst>
-              <p:nextCondLst>
-                <p:cond evt="onNext" delay="0">
-                  <p:tgtEl>
-                    <p:sldTgt/>
-                  </p:tgtEl>
-                </p:cond>
-              </p:nextCondLst>
-            </p:seq>
-          </p:childTnLst>
-        </p:cTn>
-      </p:par>
-    </p:tnLst>
-  </p:timing>
-</p:sld>
-</file>
-
-<file path=ppt/slides/slide20.xml><?xml version="1.0" encoding="utf-8"?>
+<file path=ppt/slides/slide25.xml><?xml version="1.0" encoding="utf-8"?>
 <p:sld xmlns:a="http://schemas.openxmlformats.org/drawingml/2006/main" xmlns:r="http://schemas.openxmlformats.org/officeDocument/2006/relationships" xmlns:p="http://schemas.openxmlformats.org/presentationml/2006/main">
   <p:cSld>
     <p:spTree>
@@ -12363,7 +14202,7 @@
           <a:lstStyle/>
           <a:p>
             <a:r>
-              <a:rPr lang="en-US" dirty="0"/>
+              <a:rPr lang="en-US"/>
               <a:t>Apache Spark: Cluster Manager</a:t>
             </a:r>
           </a:p>
@@ -12412,7 +14251,7 @@
 </p:sld>
 </file>
 
-<file path=ppt/slides/slide21.xml><?xml version="1.0" encoding="utf-8"?>
+<file path=ppt/slides/slide26.xml><?xml version="1.0" encoding="utf-8"?>
 <p:sld xmlns:a="http://schemas.openxmlformats.org/drawingml/2006/main" xmlns:r="http://schemas.openxmlformats.org/officeDocument/2006/relationships" xmlns:p="http://schemas.openxmlformats.org/presentationml/2006/main">
   <p:cSld>
     <p:spTree>
@@ -12458,22 +14297,22 @@
           <a:lstStyle/>
           <a:p>
             <a:r>
-              <a:rPr lang="en-US" sz="4000" dirty="0"/>
+              <a:rPr lang="en-US" sz="4000"/>
               <a:t>Spark Data Abstractions:</a:t>
             </a:r>
             <a:br>
-              <a:rPr lang="en-US" sz="4000" dirty="0"/>
+              <a:rPr lang="en-US" sz="4000"/>
             </a:br>
             <a:r>
-              <a:rPr lang="en-US" sz="4000" dirty="0"/>
+              <a:rPr lang="en-US" sz="4000"/>
               <a:t>Read/Write </a:t>
             </a:r>
             <a:r>
-              <a:rPr lang="en-US" sz="2800" dirty="0"/>
+              <a:rPr lang="en-US" sz="2800"/>
               <a:t>from/to </a:t>
             </a:r>
             <a:r>
-              <a:rPr lang="en-US" sz="4000" dirty="0"/>
+              <a:rPr lang="en-US" sz="4000"/>
               <a:t>Many Data Sources</a:t>
             </a:r>
           </a:p>
@@ -12522,7 +14361,7 @@
 </p:sld>
 </file>
 
-<file path=ppt/slides/slide22.xml><?xml version="1.0" encoding="utf-8"?>
+<file path=ppt/slides/slide27.xml><?xml version="1.0" encoding="utf-8"?>
 <p:sld xmlns:a="http://schemas.openxmlformats.org/drawingml/2006/main" xmlns:r="http://schemas.openxmlformats.org/officeDocument/2006/relationships" xmlns:p="http://schemas.openxmlformats.org/presentationml/2006/main">
   <p:cSld>
     <p:spTree>
@@ -12593,12 +14432,12 @@
         <p:spPr>
           <a:xfrm>
             <a:off x="1524000" y="1442301"/>
-            <a:ext cx="9144000" cy="4531116"/>
+            <a:ext cx="9144000" cy="4872002"/>
           </a:xfrm>
         </p:spPr>
         <p:txBody>
           <a:bodyPr>
-            <a:normAutofit lnSpcReduction="10000"/>
+            <a:normAutofit/>
           </a:bodyPr>
           <a:lstStyle/>
           <a:p>
@@ -12616,8 +14455,11 @@
             </a:r>
             <a:r>
               <a:rPr lang="en-US" sz="3200" dirty="0">
+                <a:solidFill>
+                  <a:schemeClr val="tx1"/>
+                </a:solidFill>
                 <a:highlight>
-                  <a:srgbClr val="C0C0C0"/>
+                  <a:srgbClr val="00FF00"/>
                 </a:highlight>
               </a:rPr>
               <a:t>RDD</a:t>
@@ -12628,7 +14470,7 @@
                   <a:schemeClr val="tx1"/>
                 </a:solidFill>
               </a:rPr>
-              <a:t> or </a:t>
+              <a:t> and </a:t>
             </a:r>
             <a:r>
               <a:rPr lang="en-US" sz="3200" dirty="0" err="1">
@@ -12656,7 +14498,14 @@
               <a:buChar char="•"/>
             </a:pPr>
             <a:r>
-              <a:rPr lang="en-US" sz="3200" dirty="0"/>
+              <a:rPr lang="en-US" sz="3200" dirty="0">
+                <a:solidFill>
+                  <a:schemeClr val="tx1"/>
+                </a:solidFill>
+                <a:highlight>
+                  <a:srgbClr val="00FF00"/>
+                </a:highlight>
+              </a:rPr>
               <a:t>1. Resilient Distributed Datasets (RDD)</a:t>
             </a:r>
           </a:p>
@@ -12674,7 +14523,7 @@
             <a:pPr lvl="1" algn="l"/>
             <a:r>
               <a:rPr lang="en-US" sz="2800" dirty="0"/>
-              <a:t>     (integer, string, tuples, arrays, …)</a:t>
+              <a:t>     (integer, string, tuples, arrays, dictionary, …)</a:t>
             </a:r>
           </a:p>
           <a:p>
@@ -13119,7 +14968,7 @@
 </p:sld>
 </file>
 
-<file path=ppt/slides/slide23.xml><?xml version="1.0" encoding="utf-8"?>
+<file path=ppt/slides/slide28.xml><?xml version="1.0" encoding="utf-8"?>
 <p:sld xmlns:a="http://schemas.openxmlformats.org/drawingml/2006/main" xmlns:r="http://schemas.openxmlformats.org/officeDocument/2006/relationships" xmlns:p="http://schemas.openxmlformats.org/presentationml/2006/main">
   <p:cSld>
     <p:spTree>
@@ -13165,34 +15014,34 @@
           <a:lstStyle/>
           <a:p>
             <a:r>
-              <a:rPr lang="en-US" sz="3600" dirty="0"/>
+              <a:rPr lang="en-US" sz="3600"/>
               <a:t>Spark Data Abstractions: RDDs</a:t>
             </a:r>
             <a:br>
-              <a:rPr lang="en-US" sz="3600" dirty="0"/>
+              <a:rPr lang="en-US" sz="3600"/>
             </a:br>
             <a:r>
-              <a:rPr lang="en-US" sz="3600" dirty="0"/>
+              <a:rPr lang="en-US" sz="3600"/>
               <a:t>Billions of data elements</a:t>
             </a:r>
             <a:br>
-              <a:rPr lang="en-US" dirty="0"/>
+              <a:rPr lang="en-US"/>
             </a:br>
             <a:r>
-              <a:rPr lang="en-US" b="1" dirty="0"/>
+              <a:rPr lang="en-US" b="1"/>
               <a:t>Each element</a:t>
             </a:r>
             <a:r>
-              <a:rPr lang="en-US" dirty="0"/>
+              <a:rPr lang="en-US"/>
               <a:t>: </a:t>
             </a:r>
             <a:r>
-              <a:rPr lang="en-US" sz="3600" dirty="0">
+              <a:rPr lang="en-US" sz="3600">
                 <a:latin typeface="Courier" pitchFamily="2" charset="0"/>
               </a:rPr>
               <a:t>(String, (Float, Float))</a:t>
             </a:r>
-            <a:endParaRPr lang="en-US" dirty="0">
+            <a:endParaRPr lang="en-US">
               <a:latin typeface="Courier" pitchFamily="2" charset="0"/>
             </a:endParaRPr>
           </a:p>
@@ -13242,7 +15091,7 @@
           <a:p>
             <a:pPr algn="ctr"/>
             <a:r>
-              <a:rPr lang="en-US" sz="2400" dirty="0">
+              <a:rPr lang="en-US" sz="2400">
                 <a:latin typeface="Courier" pitchFamily="2" charset="0"/>
               </a:rPr>
               <a:t>(gene-1, (3.0, 4.5))</a:t>
@@ -13294,7 +15143,7 @@
           <a:p>
             <a:pPr algn="ctr"/>
             <a:r>
-              <a:rPr lang="en-US" sz="2400" dirty="0">
+              <a:rPr lang="en-US" sz="2400">
                 <a:latin typeface="Courier" pitchFamily="2" charset="0"/>
               </a:rPr>
               <a:t>(gene-2, (1.0, 1.5))</a:t>
@@ -13346,7 +15195,7 @@
           <a:p>
             <a:pPr algn="ctr"/>
             <a:r>
-              <a:rPr lang="en-US" sz="2400" dirty="0">
+              <a:rPr lang="en-US" sz="2400">
                 <a:latin typeface="Courier" pitchFamily="2" charset="0"/>
               </a:rPr>
               <a:t>(gene-1, (2.1, 1.6))</a:t>
@@ -13398,7 +15247,7 @@
           <a:p>
             <a:pPr algn="ctr"/>
             <a:r>
-              <a:rPr lang="en-US" sz="2400" dirty="0"/>
+              <a:rPr lang="en-US" sz="2400"/>
               <a:t>…</a:t>
             </a:r>
           </a:p>
@@ -13448,7 +15297,7 @@
           <a:p>
             <a:pPr algn="ctr"/>
             <a:r>
-              <a:rPr lang="en-US" sz="2400" dirty="0">
+              <a:rPr lang="en-US" sz="2400">
                 <a:latin typeface="Courier" pitchFamily="2" charset="0"/>
               </a:rPr>
               <a:t>(gene-8, (3.1, 5.1))</a:t>
@@ -13485,7 +15334,7 @@
           <a:lstStyle/>
           <a:p>
             <a:r>
-              <a:rPr lang="en-US" dirty="0"/>
+              <a:rPr lang="en-US"/>
               <a:t>Element-1:</a:t>
             </a:r>
           </a:p>
@@ -13520,7 +15369,7 @@
           <a:lstStyle/>
           <a:p>
             <a:r>
-              <a:rPr lang="en-US" dirty="0"/>
+              <a:rPr lang="en-US"/>
               <a:t>Element-2:</a:t>
             </a:r>
           </a:p>
@@ -13555,7 +15404,7 @@
           <a:lstStyle/>
           <a:p>
             <a:r>
-              <a:rPr lang="en-US" dirty="0"/>
+              <a:rPr lang="en-US"/>
               <a:t>Element-3:</a:t>
             </a:r>
           </a:p>
@@ -13574,7 +15423,7 @@
 </p:sld>
 </file>
 
-<file path=ppt/slides/slide24.xml><?xml version="1.0" encoding="utf-8"?>
+<file path=ppt/slides/slide29.xml><?xml version="1.0" encoding="utf-8"?>
 <p:sld xmlns:a="http://schemas.openxmlformats.org/drawingml/2006/main" xmlns:r="http://schemas.openxmlformats.org/officeDocument/2006/relationships" xmlns:p="http://schemas.openxmlformats.org/presentationml/2006/main">
   <p:cSld>
     <p:spTree>
@@ -13618,14 +15467,14 @@
           <a:lstStyle/>
           <a:p>
             <a:r>
-              <a:rPr lang="en-US" dirty="0"/>
+              <a:rPr lang="en-US"/>
               <a:t>Spark Data Abstractions: </a:t>
             </a:r>
             <a:r>
-              <a:rPr lang="en-US" dirty="0" err="1"/>
+              <a:rPr lang="en-US" err="1"/>
               <a:t>DataFrame</a:t>
             </a:r>
-            <a:endParaRPr lang="en-US" dirty="0"/>
+            <a:endParaRPr lang="en-US"/>
           </a:p>
         </p:txBody>
       </p:sp>
@@ -13672,7 +15521,818 @@
 </p:sld>
 </file>
 
-<file path=ppt/slides/slide25.xml><?xml version="1.0" encoding="utf-8"?>
+<file path=ppt/slides/slide3.xml><?xml version="1.0" encoding="utf-8"?>
+<p:sld xmlns:a="http://schemas.openxmlformats.org/drawingml/2006/main" xmlns:r="http://schemas.openxmlformats.org/officeDocument/2006/relationships" xmlns:p="http://schemas.openxmlformats.org/presentationml/2006/main">
+  <p:cSld>
+    <p:spTree>
+      <p:nvGrpSpPr>
+        <p:cNvPr id="1" name="">
+          <a:extLst>
+            <a:ext uri="{FF2B5EF4-FFF2-40B4-BE49-F238E27FC236}">
+              <a16:creationId xmlns:a16="http://schemas.microsoft.com/office/drawing/2014/main" id="{E15F8F14-B0A6-8471-A8BF-4EB9794682F5}"/>
+            </a:ext>
+          </a:extLst>
+        </p:cNvPr>
+        <p:cNvGrpSpPr/>
+        <p:nvPr/>
+      </p:nvGrpSpPr>
+      <p:grpSpPr>
+        <a:xfrm>
+          <a:off x="0" y="0"/>
+          <a:ext cx="0" cy="0"/>
+          <a:chOff x="0" y="0"/>
+          <a:chExt cx="0" cy="0"/>
+        </a:xfrm>
+      </p:grpSpPr>
+      <p:sp>
+        <p:nvSpPr>
+          <p:cNvPr id="2" name="Title 1">
+            <a:extLst>
+              <a:ext uri="{FF2B5EF4-FFF2-40B4-BE49-F238E27FC236}">
+                <a16:creationId xmlns:a16="http://schemas.microsoft.com/office/drawing/2014/main" id="{4FEEC0D2-3D42-409E-6E8A-3022A7934564}"/>
+              </a:ext>
+            </a:extLst>
+          </p:cNvPr>
+          <p:cNvSpPr>
+            <a:spLocks noGrp="1"/>
+          </p:cNvSpPr>
+          <p:nvPr>
+            <p:ph type="ctrTitle"/>
+          </p:nvPr>
+        </p:nvSpPr>
+        <p:spPr>
+          <a:xfrm>
+            <a:off x="1413468" y="290725"/>
+            <a:ext cx="9144000" cy="583482"/>
+          </a:xfrm>
+        </p:spPr>
+        <p:txBody>
+          <a:bodyPr>
+            <a:normAutofit fontScale="90000"/>
+          </a:bodyPr>
+          <a:lstStyle/>
+          <a:p>
+            <a:r>
+              <a:rPr lang="en-US" sz="3600" dirty="0"/>
+              <a:t>What is a Big Data Modeling?</a:t>
+            </a:r>
+          </a:p>
+        </p:txBody>
+      </p:sp>
+      <p:sp>
+        <p:nvSpPr>
+          <p:cNvPr id="3" name="Subtitle 2">
+            <a:extLst>
+              <a:ext uri="{FF2B5EF4-FFF2-40B4-BE49-F238E27FC236}">
+                <a16:creationId xmlns:a16="http://schemas.microsoft.com/office/drawing/2014/main" id="{EC353BF7-8743-7C25-95E3-4E6ADA5D6666}"/>
+              </a:ext>
+            </a:extLst>
+          </p:cNvPr>
+          <p:cNvSpPr>
+            <a:spLocks noGrp="1"/>
+          </p:cNvSpPr>
+          <p:nvPr>
+            <p:ph type="subTitle" idx="1"/>
+          </p:nvPr>
+        </p:nvSpPr>
+        <p:spPr>
+          <a:xfrm>
+            <a:off x="1307184" y="1225900"/>
+            <a:ext cx="9144000" cy="4983188"/>
+          </a:xfrm>
+        </p:spPr>
+        <p:txBody>
+          <a:bodyPr>
+            <a:normAutofit fontScale="70000" lnSpcReduction="20000"/>
+          </a:bodyPr>
+          <a:lstStyle/>
+          <a:p>
+            <a:r>
+              <a:rPr lang="en-US" sz="3600" dirty="0">
+                <a:solidFill>
+                  <a:schemeClr val="tx1"/>
+                </a:solidFill>
+              </a:rPr>
+              <a:t>Big data modeling is the process of </a:t>
+            </a:r>
+            <a:r>
+              <a:rPr lang="en-US" sz="3600" dirty="0">
+                <a:solidFill>
+                  <a:srgbClr val="00B0F0"/>
+                </a:solidFill>
+              </a:rPr>
+              <a:t>organizing large</a:t>
+            </a:r>
+            <a:r>
+              <a:rPr lang="en-US" sz="3600" dirty="0">
+                <a:solidFill>
+                  <a:schemeClr val="tx1"/>
+                </a:solidFill>
+              </a:rPr>
+              <a:t>, </a:t>
+            </a:r>
+          </a:p>
+          <a:p>
+            <a:r>
+              <a:rPr lang="en-US" sz="3600" dirty="0">
+                <a:solidFill>
+                  <a:srgbClr val="00B0F0"/>
+                </a:solidFill>
+              </a:rPr>
+              <a:t>fast-moving</a:t>
+            </a:r>
+            <a:r>
+              <a:rPr lang="en-US" sz="3600" dirty="0">
+                <a:solidFill>
+                  <a:schemeClr val="tx1"/>
+                </a:solidFill>
+              </a:rPr>
+              <a:t>, and </a:t>
+            </a:r>
+            <a:r>
+              <a:rPr lang="en-US" sz="3600" dirty="0">
+                <a:solidFill>
+                  <a:srgbClr val="00B0F0"/>
+                </a:solidFill>
+              </a:rPr>
+              <a:t>diverse datasets </a:t>
+            </a:r>
+            <a:r>
+              <a:rPr lang="en-US" sz="3600" dirty="0">
+                <a:solidFill>
+                  <a:schemeClr val="tx1"/>
+                </a:solidFill>
+              </a:rPr>
+              <a:t>so they can be </a:t>
+            </a:r>
+            <a:r>
+              <a:rPr lang="en-US" sz="3600" dirty="0">
+                <a:solidFill>
+                  <a:srgbClr val="00B050"/>
+                </a:solidFill>
+              </a:rPr>
+              <a:t>stored</a:t>
+            </a:r>
+            <a:r>
+              <a:rPr lang="en-US" sz="3600" dirty="0">
+                <a:solidFill>
+                  <a:schemeClr val="tx1"/>
+                </a:solidFill>
+              </a:rPr>
+              <a:t>, </a:t>
+            </a:r>
+          </a:p>
+          <a:p>
+            <a:r>
+              <a:rPr lang="en-US" sz="3600" dirty="0">
+                <a:solidFill>
+                  <a:srgbClr val="00B050"/>
+                </a:solidFill>
+              </a:rPr>
+              <a:t>processed</a:t>
+            </a:r>
+            <a:r>
+              <a:rPr lang="en-US" sz="3600" dirty="0">
+                <a:solidFill>
+                  <a:schemeClr val="tx1"/>
+                </a:solidFill>
+              </a:rPr>
+              <a:t>, </a:t>
+            </a:r>
+            <a:r>
+              <a:rPr lang="en-US" sz="3600" dirty="0">
+                <a:solidFill>
+                  <a:srgbClr val="00B050"/>
+                </a:solidFill>
+              </a:rPr>
+              <a:t>analyzed</a:t>
+            </a:r>
+            <a:r>
+              <a:rPr lang="en-US" sz="3600" dirty="0">
+                <a:solidFill>
+                  <a:schemeClr val="tx1"/>
+                </a:solidFill>
+              </a:rPr>
+              <a:t>, and </a:t>
+            </a:r>
+            <a:r>
+              <a:rPr lang="en-US" sz="3600" dirty="0">
+                <a:solidFill>
+                  <a:srgbClr val="00B050"/>
+                </a:solidFill>
+              </a:rPr>
+              <a:t>understood</a:t>
+            </a:r>
+            <a:r>
+              <a:rPr lang="en-US" sz="3600" dirty="0">
+                <a:solidFill>
+                  <a:schemeClr val="tx1"/>
+                </a:solidFill>
+              </a:rPr>
+              <a:t> efficiently.</a:t>
+            </a:r>
+          </a:p>
+          <a:p>
+            <a:endParaRPr lang="en-US" sz="3600" dirty="0"/>
+          </a:p>
+          <a:p>
+            <a:r>
+              <a:rPr lang="en-US" sz="3600" b="1" u="sng" dirty="0"/>
+              <a:t>Key Characteristics</a:t>
+            </a:r>
+            <a:endParaRPr lang="en-US" sz="3600" b="1" u="sng" dirty="0">
+              <a:solidFill>
+                <a:schemeClr val="tx1"/>
+              </a:solidFill>
+            </a:endParaRPr>
+          </a:p>
+          <a:p>
+            <a:r>
+              <a:rPr lang="en-US" sz="3600" dirty="0">
+                <a:solidFill>
+                  <a:srgbClr val="00B0F0"/>
+                </a:solidFill>
+              </a:rPr>
+              <a:t>1. Volume</a:t>
+            </a:r>
+            <a:r>
+              <a:rPr lang="en-US" sz="3600" dirty="0">
+                <a:solidFill>
+                  <a:schemeClr val="tx1"/>
+                </a:solidFill>
+              </a:rPr>
+              <a:t>: Handles massive amounts of data</a:t>
+            </a:r>
+          </a:p>
+          <a:p>
+            <a:r>
+              <a:rPr lang="en-US" sz="3600" dirty="0">
+                <a:solidFill>
+                  <a:srgbClr val="00B0F0"/>
+                </a:solidFill>
+              </a:rPr>
+              <a:t>2. Velocity</a:t>
+            </a:r>
+            <a:r>
+              <a:rPr lang="en-US" sz="3600" dirty="0">
+                <a:solidFill>
+                  <a:schemeClr val="tx1"/>
+                </a:solidFill>
+              </a:rPr>
+              <a:t>: Supports rapidly generated and processed data</a:t>
+            </a:r>
+          </a:p>
+          <a:p>
+            <a:r>
+              <a:rPr lang="en-US" sz="3600" dirty="0">
+                <a:solidFill>
+                  <a:srgbClr val="00B0F0"/>
+                </a:solidFill>
+              </a:rPr>
+              <a:t>3. Variety</a:t>
+            </a:r>
+            <a:r>
+              <a:rPr lang="en-US" sz="3600" dirty="0">
+                <a:solidFill>
+                  <a:schemeClr val="tx1"/>
+                </a:solidFill>
+              </a:rPr>
+              <a:t>: Combines structured, semi-structured, and unstructured data</a:t>
+            </a:r>
+          </a:p>
+          <a:p>
+            <a:r>
+              <a:rPr lang="en-US" sz="3600" dirty="0">
+                <a:solidFill>
+                  <a:srgbClr val="00B0F0"/>
+                </a:solidFill>
+              </a:rPr>
+              <a:t>4. Veracity</a:t>
+            </a:r>
+            <a:r>
+              <a:rPr lang="en-US" sz="3600" dirty="0">
+                <a:solidFill>
+                  <a:schemeClr val="tx1"/>
+                </a:solidFill>
+              </a:rPr>
+              <a:t>: The quality, reliability, and trust of the data</a:t>
+            </a:r>
+          </a:p>
+          <a:p>
+            <a:r>
+              <a:rPr lang="en-US" sz="3600" dirty="0">
+                <a:solidFill>
+                  <a:srgbClr val="00B0F0"/>
+                </a:solidFill>
+              </a:rPr>
+              <a:t>5. Scalability</a:t>
+            </a:r>
+            <a:r>
+              <a:rPr lang="en-US" sz="3600" dirty="0">
+                <a:solidFill>
+                  <a:schemeClr val="tx1"/>
+                </a:solidFill>
+              </a:rPr>
+              <a:t>: Adapts as data and user demand grow</a:t>
+            </a:r>
+          </a:p>
+          <a:p>
+            <a:endParaRPr lang="en-US" sz="3600" dirty="0"/>
+          </a:p>
+          <a:p>
+            <a:pPr marL="800100" lvl="1" indent="-342900" algn="l">
+              <a:buFont typeface="+mj-lt"/>
+              <a:buAutoNum type="arabicPeriod"/>
+            </a:pPr>
+            <a:endParaRPr lang="en-US" sz="1200" dirty="0"/>
+          </a:p>
+        </p:txBody>
+      </p:sp>
+    </p:spTree>
+    <p:extLst>
+      <p:ext uri="{BB962C8B-B14F-4D97-AF65-F5344CB8AC3E}">
+        <p14:creationId xmlns:p14="http://schemas.microsoft.com/office/powerpoint/2010/main" val="614690070"/>
+      </p:ext>
+    </p:extLst>
+  </p:cSld>
+  <p:clrMapOvr>
+    <a:masterClrMapping/>
+  </p:clrMapOvr>
+  <p:timing>
+    <p:tnLst>
+      <p:par>
+        <p:cTn id="1" dur="indefinite" restart="never" nodeType="tmRoot">
+          <p:childTnLst>
+            <p:seq concurrent="1" nextAc="seek">
+              <p:cTn id="2" dur="indefinite" nodeType="mainSeq">
+                <p:childTnLst>
+                  <p:par>
+                    <p:cTn id="3" fill="hold">
+                      <p:stCondLst>
+                        <p:cond delay="indefinite"/>
+                      </p:stCondLst>
+                      <p:childTnLst>
+                        <p:par>
+                          <p:cTn id="4" fill="hold">
+                            <p:stCondLst>
+                              <p:cond delay="0"/>
+                            </p:stCondLst>
+                            <p:childTnLst>
+                              <p:par>
+                                <p:cTn id="5" presetID="1" presetClass="entr" presetSubtype="0" fill="hold" nodeType="clickEffect">
+                                  <p:stCondLst>
+                                    <p:cond delay="0"/>
+                                  </p:stCondLst>
+                                  <p:childTnLst>
+                                    <p:set>
+                                      <p:cBhvr>
+                                        <p:cTn id="6" dur="1" fill="hold">
+                                          <p:stCondLst>
+                                            <p:cond delay="0"/>
+                                          </p:stCondLst>
+                                        </p:cTn>
+                                        <p:tgtEl>
+                                          <p:spTgt spid="3">
+                                            <p:txEl>
+                                              <p:pRg st="0" end="0"/>
+                                            </p:txEl>
+                                          </p:spTgt>
+                                        </p:tgtEl>
+                                        <p:attrNameLst>
+                                          <p:attrName>style.visibility</p:attrName>
+                                        </p:attrNameLst>
+                                      </p:cBhvr>
+                                      <p:to>
+                                        <p:strVal val="visible"/>
+                                      </p:to>
+                                    </p:set>
+                                  </p:childTnLst>
+                                </p:cTn>
+                              </p:par>
+                            </p:childTnLst>
+                          </p:cTn>
+                        </p:par>
+                      </p:childTnLst>
+                    </p:cTn>
+                  </p:par>
+                  <p:par>
+                    <p:cTn id="7" fill="hold">
+                      <p:stCondLst>
+                        <p:cond delay="indefinite"/>
+                      </p:stCondLst>
+                      <p:childTnLst>
+                        <p:par>
+                          <p:cTn id="8" fill="hold">
+                            <p:stCondLst>
+                              <p:cond delay="0"/>
+                            </p:stCondLst>
+                            <p:childTnLst>
+                              <p:par>
+                                <p:cTn id="9" presetID="1" presetClass="entr" presetSubtype="0" fill="hold" nodeType="clickEffect">
+                                  <p:stCondLst>
+                                    <p:cond delay="0"/>
+                                  </p:stCondLst>
+                                  <p:childTnLst>
+                                    <p:set>
+                                      <p:cBhvr>
+                                        <p:cTn id="10" dur="1" fill="hold">
+                                          <p:stCondLst>
+                                            <p:cond delay="0"/>
+                                          </p:stCondLst>
+                                        </p:cTn>
+                                        <p:tgtEl>
+                                          <p:spTgt spid="3">
+                                            <p:txEl>
+                                              <p:pRg st="1" end="1"/>
+                                            </p:txEl>
+                                          </p:spTgt>
+                                        </p:tgtEl>
+                                        <p:attrNameLst>
+                                          <p:attrName>style.visibility</p:attrName>
+                                        </p:attrNameLst>
+                                      </p:cBhvr>
+                                      <p:to>
+                                        <p:strVal val="visible"/>
+                                      </p:to>
+                                    </p:set>
+                                  </p:childTnLst>
+                                </p:cTn>
+                              </p:par>
+                            </p:childTnLst>
+                          </p:cTn>
+                        </p:par>
+                      </p:childTnLst>
+                    </p:cTn>
+                  </p:par>
+                  <p:par>
+                    <p:cTn id="11" fill="hold">
+                      <p:stCondLst>
+                        <p:cond delay="indefinite"/>
+                      </p:stCondLst>
+                      <p:childTnLst>
+                        <p:par>
+                          <p:cTn id="12" fill="hold">
+                            <p:stCondLst>
+                              <p:cond delay="0"/>
+                            </p:stCondLst>
+                            <p:childTnLst>
+                              <p:par>
+                                <p:cTn id="13" presetID="1" presetClass="entr" presetSubtype="0" fill="hold" nodeType="clickEffect">
+                                  <p:stCondLst>
+                                    <p:cond delay="0"/>
+                                  </p:stCondLst>
+                                  <p:childTnLst>
+                                    <p:set>
+                                      <p:cBhvr>
+                                        <p:cTn id="14" dur="1" fill="hold">
+                                          <p:stCondLst>
+                                            <p:cond delay="0"/>
+                                          </p:stCondLst>
+                                        </p:cTn>
+                                        <p:tgtEl>
+                                          <p:spTgt spid="3">
+                                            <p:txEl>
+                                              <p:pRg st="2" end="2"/>
+                                            </p:txEl>
+                                          </p:spTgt>
+                                        </p:tgtEl>
+                                        <p:attrNameLst>
+                                          <p:attrName>style.visibility</p:attrName>
+                                        </p:attrNameLst>
+                                      </p:cBhvr>
+                                      <p:to>
+                                        <p:strVal val="visible"/>
+                                      </p:to>
+                                    </p:set>
+                                  </p:childTnLst>
+                                </p:cTn>
+                              </p:par>
+                            </p:childTnLst>
+                          </p:cTn>
+                        </p:par>
+                      </p:childTnLst>
+                    </p:cTn>
+                  </p:par>
+                  <p:par>
+                    <p:cTn id="15" fill="hold">
+                      <p:stCondLst>
+                        <p:cond delay="indefinite"/>
+                      </p:stCondLst>
+                      <p:childTnLst>
+                        <p:par>
+                          <p:cTn id="16" fill="hold">
+                            <p:stCondLst>
+                              <p:cond delay="0"/>
+                            </p:stCondLst>
+                            <p:childTnLst>
+                              <p:par>
+                                <p:cTn id="17" presetID="1" presetClass="entr" presetSubtype="0" fill="hold" nodeType="clickEffect">
+                                  <p:stCondLst>
+                                    <p:cond delay="0"/>
+                                  </p:stCondLst>
+                                  <p:childTnLst>
+                                    <p:set>
+                                      <p:cBhvr>
+                                        <p:cTn id="18" dur="1" fill="hold">
+                                          <p:stCondLst>
+                                            <p:cond delay="0"/>
+                                          </p:stCondLst>
+                                        </p:cTn>
+                                        <p:tgtEl>
+                                          <p:spTgt spid="3">
+                                            <p:txEl>
+                                              <p:pRg st="4" end="4"/>
+                                            </p:txEl>
+                                          </p:spTgt>
+                                        </p:tgtEl>
+                                        <p:attrNameLst>
+                                          <p:attrName>style.visibility</p:attrName>
+                                        </p:attrNameLst>
+                                      </p:cBhvr>
+                                      <p:to>
+                                        <p:strVal val="visible"/>
+                                      </p:to>
+                                    </p:set>
+                                  </p:childTnLst>
+                                </p:cTn>
+                              </p:par>
+                            </p:childTnLst>
+                          </p:cTn>
+                        </p:par>
+                      </p:childTnLst>
+                    </p:cTn>
+                  </p:par>
+                  <p:par>
+                    <p:cTn id="19" fill="hold">
+                      <p:stCondLst>
+                        <p:cond delay="indefinite"/>
+                      </p:stCondLst>
+                      <p:childTnLst>
+                        <p:par>
+                          <p:cTn id="20" fill="hold">
+                            <p:stCondLst>
+                              <p:cond delay="0"/>
+                            </p:stCondLst>
+                            <p:childTnLst>
+                              <p:par>
+                                <p:cTn id="21" presetID="1" presetClass="entr" presetSubtype="0" fill="hold" nodeType="clickEffect">
+                                  <p:stCondLst>
+                                    <p:cond delay="0"/>
+                                  </p:stCondLst>
+                                  <p:childTnLst>
+                                    <p:set>
+                                      <p:cBhvr>
+                                        <p:cTn id="22" dur="1" fill="hold">
+                                          <p:stCondLst>
+                                            <p:cond delay="0"/>
+                                          </p:stCondLst>
+                                        </p:cTn>
+                                        <p:tgtEl>
+                                          <p:spTgt spid="3">
+                                            <p:txEl>
+                                              <p:pRg st="5" end="5"/>
+                                            </p:txEl>
+                                          </p:spTgt>
+                                        </p:tgtEl>
+                                        <p:attrNameLst>
+                                          <p:attrName>style.visibility</p:attrName>
+                                        </p:attrNameLst>
+                                      </p:cBhvr>
+                                      <p:to>
+                                        <p:strVal val="visible"/>
+                                      </p:to>
+                                    </p:set>
+                                  </p:childTnLst>
+                                </p:cTn>
+                              </p:par>
+                            </p:childTnLst>
+                          </p:cTn>
+                        </p:par>
+                      </p:childTnLst>
+                    </p:cTn>
+                  </p:par>
+                  <p:par>
+                    <p:cTn id="23" fill="hold">
+                      <p:stCondLst>
+                        <p:cond delay="indefinite"/>
+                      </p:stCondLst>
+                      <p:childTnLst>
+                        <p:par>
+                          <p:cTn id="24" fill="hold">
+                            <p:stCondLst>
+                              <p:cond delay="0"/>
+                            </p:stCondLst>
+                            <p:childTnLst>
+                              <p:par>
+                                <p:cTn id="25" presetID="1" presetClass="entr" presetSubtype="0" fill="hold" nodeType="clickEffect">
+                                  <p:stCondLst>
+                                    <p:cond delay="0"/>
+                                  </p:stCondLst>
+                                  <p:childTnLst>
+                                    <p:set>
+                                      <p:cBhvr>
+                                        <p:cTn id="26" dur="1" fill="hold">
+                                          <p:stCondLst>
+                                            <p:cond delay="0"/>
+                                          </p:stCondLst>
+                                        </p:cTn>
+                                        <p:tgtEl>
+                                          <p:spTgt spid="3">
+                                            <p:txEl>
+                                              <p:pRg st="6" end="6"/>
+                                            </p:txEl>
+                                          </p:spTgt>
+                                        </p:tgtEl>
+                                        <p:attrNameLst>
+                                          <p:attrName>style.visibility</p:attrName>
+                                        </p:attrNameLst>
+                                      </p:cBhvr>
+                                      <p:to>
+                                        <p:strVal val="visible"/>
+                                      </p:to>
+                                    </p:set>
+                                  </p:childTnLst>
+                                </p:cTn>
+                              </p:par>
+                            </p:childTnLst>
+                          </p:cTn>
+                        </p:par>
+                      </p:childTnLst>
+                    </p:cTn>
+                  </p:par>
+                  <p:par>
+                    <p:cTn id="27" fill="hold">
+                      <p:stCondLst>
+                        <p:cond delay="indefinite"/>
+                      </p:stCondLst>
+                      <p:childTnLst>
+                        <p:par>
+                          <p:cTn id="28" fill="hold">
+                            <p:stCondLst>
+                              <p:cond delay="0"/>
+                            </p:stCondLst>
+                            <p:childTnLst>
+                              <p:par>
+                                <p:cTn id="29" presetID="1" presetClass="entr" presetSubtype="0" fill="hold" nodeType="clickEffect">
+                                  <p:stCondLst>
+                                    <p:cond delay="0"/>
+                                  </p:stCondLst>
+                                  <p:childTnLst>
+                                    <p:set>
+                                      <p:cBhvr>
+                                        <p:cTn id="30" dur="1" fill="hold">
+                                          <p:stCondLst>
+                                            <p:cond delay="0"/>
+                                          </p:stCondLst>
+                                        </p:cTn>
+                                        <p:tgtEl>
+                                          <p:spTgt spid="3">
+                                            <p:txEl>
+                                              <p:pRg st="7" end="7"/>
+                                            </p:txEl>
+                                          </p:spTgt>
+                                        </p:tgtEl>
+                                        <p:attrNameLst>
+                                          <p:attrName>style.visibility</p:attrName>
+                                        </p:attrNameLst>
+                                      </p:cBhvr>
+                                      <p:to>
+                                        <p:strVal val="visible"/>
+                                      </p:to>
+                                    </p:set>
+                                  </p:childTnLst>
+                                </p:cTn>
+                              </p:par>
+                            </p:childTnLst>
+                          </p:cTn>
+                        </p:par>
+                      </p:childTnLst>
+                    </p:cTn>
+                  </p:par>
+                  <p:par>
+                    <p:cTn id="31" fill="hold">
+                      <p:stCondLst>
+                        <p:cond delay="indefinite"/>
+                      </p:stCondLst>
+                      <p:childTnLst>
+                        <p:par>
+                          <p:cTn id="32" fill="hold">
+                            <p:stCondLst>
+                              <p:cond delay="0"/>
+                            </p:stCondLst>
+                            <p:childTnLst>
+                              <p:par>
+                                <p:cTn id="33" presetID="1" presetClass="entr" presetSubtype="0" fill="hold" nodeType="clickEffect">
+                                  <p:stCondLst>
+                                    <p:cond delay="0"/>
+                                  </p:stCondLst>
+                                  <p:childTnLst>
+                                    <p:set>
+                                      <p:cBhvr>
+                                        <p:cTn id="34" dur="1" fill="hold">
+                                          <p:stCondLst>
+                                            <p:cond delay="0"/>
+                                          </p:stCondLst>
+                                        </p:cTn>
+                                        <p:tgtEl>
+                                          <p:spTgt spid="3">
+                                            <p:txEl>
+                                              <p:pRg st="8" end="8"/>
+                                            </p:txEl>
+                                          </p:spTgt>
+                                        </p:tgtEl>
+                                        <p:attrNameLst>
+                                          <p:attrName>style.visibility</p:attrName>
+                                        </p:attrNameLst>
+                                      </p:cBhvr>
+                                      <p:to>
+                                        <p:strVal val="visible"/>
+                                      </p:to>
+                                    </p:set>
+                                  </p:childTnLst>
+                                </p:cTn>
+                              </p:par>
+                            </p:childTnLst>
+                          </p:cTn>
+                        </p:par>
+                      </p:childTnLst>
+                    </p:cTn>
+                  </p:par>
+                  <p:par>
+                    <p:cTn id="35" fill="hold">
+                      <p:stCondLst>
+                        <p:cond delay="indefinite"/>
+                      </p:stCondLst>
+                      <p:childTnLst>
+                        <p:par>
+                          <p:cTn id="36" fill="hold">
+                            <p:stCondLst>
+                              <p:cond delay="0"/>
+                            </p:stCondLst>
+                            <p:childTnLst>
+                              <p:par>
+                                <p:cTn id="37" presetID="1" presetClass="entr" presetSubtype="0" fill="hold" nodeType="clickEffect">
+                                  <p:stCondLst>
+                                    <p:cond delay="0"/>
+                                  </p:stCondLst>
+                                  <p:childTnLst>
+                                    <p:set>
+                                      <p:cBhvr>
+                                        <p:cTn id="38" dur="1" fill="hold">
+                                          <p:stCondLst>
+                                            <p:cond delay="0"/>
+                                          </p:stCondLst>
+                                        </p:cTn>
+                                        <p:tgtEl>
+                                          <p:spTgt spid="3">
+                                            <p:txEl>
+                                              <p:pRg st="9" end="9"/>
+                                            </p:txEl>
+                                          </p:spTgt>
+                                        </p:tgtEl>
+                                        <p:attrNameLst>
+                                          <p:attrName>style.visibility</p:attrName>
+                                        </p:attrNameLst>
+                                      </p:cBhvr>
+                                      <p:to>
+                                        <p:strVal val="visible"/>
+                                      </p:to>
+                                    </p:set>
+                                  </p:childTnLst>
+                                </p:cTn>
+                              </p:par>
+                            </p:childTnLst>
+                          </p:cTn>
+                        </p:par>
+                      </p:childTnLst>
+                    </p:cTn>
+                  </p:par>
+                </p:childTnLst>
+              </p:cTn>
+              <p:prevCondLst>
+                <p:cond evt="onPrev" delay="0">
+                  <p:tgtEl>
+                    <p:sldTgt/>
+                  </p:tgtEl>
+                </p:cond>
+              </p:prevCondLst>
+              <p:nextCondLst>
+                <p:cond evt="onNext" delay="0">
+                  <p:tgtEl>
+                    <p:sldTgt/>
+                  </p:tgtEl>
+                </p:cond>
+              </p:nextCondLst>
+            </p:seq>
+          </p:childTnLst>
+        </p:cTn>
+      </p:par>
+    </p:tnLst>
+  </p:timing>
+</p:sld>
+</file>
+
+<file path=ppt/slides/slide30.xml><?xml version="1.0" encoding="utf-8"?>
 <p:sld xmlns:a="http://schemas.openxmlformats.org/drawingml/2006/main" xmlns:r="http://schemas.openxmlformats.org/officeDocument/2006/relationships" xmlns:p="http://schemas.openxmlformats.org/presentationml/2006/main">
   <p:cSld>
     <p:spTree>
@@ -13724,15 +16384,15 @@
           <a:lstStyle/>
           <a:p>
             <a:r>
-              <a:rPr lang="en-US" dirty="0"/>
+              <a:rPr lang="en-US"/>
               <a:t>PySpark </a:t>
             </a:r>
             <a:r>
-              <a:rPr lang="en-US" dirty="0" err="1"/>
+              <a:rPr lang="en-US" err="1"/>
               <a:t>DataFrame</a:t>
             </a:r>
             <a:r>
-              <a:rPr lang="en-US" dirty="0"/>
+              <a:rPr lang="en-US"/>
               <a:t> Example</a:t>
             </a:r>
           </a:p>
@@ -13767,7 +16427,7 @@
           <a:lstStyle/>
           <a:p>
             <a:r>
-              <a:rPr lang="en-US" sz="1600" dirty="0">
+              <a:rPr lang="en-US" sz="1600">
                 <a:solidFill>
                   <a:schemeClr val="tx1"/>
                 </a:solidFill>
@@ -13777,7 +16437,7 @@
               <a:t>from </a:t>
             </a:r>
             <a:r>
-              <a:rPr lang="en-US" sz="1600" dirty="0" err="1">
+              <a:rPr lang="en-US" sz="1600" err="1">
                 <a:solidFill>
                   <a:schemeClr val="tx1"/>
                 </a:solidFill>
@@ -13787,7 +16447,7 @@
               <a:t>pyspark.sql</a:t>
             </a:r>
             <a:r>
-              <a:rPr lang="en-US" sz="1600" dirty="0">
+              <a:rPr lang="en-US" sz="1600">
                 <a:solidFill>
                   <a:schemeClr val="tx1"/>
                 </a:solidFill>
@@ -13797,7 +16457,7 @@
               <a:t> import </a:t>
             </a:r>
             <a:r>
-              <a:rPr lang="en-US" sz="1600" dirty="0" err="1">
+              <a:rPr lang="en-US" sz="1600" err="1">
                 <a:solidFill>
                   <a:schemeClr val="tx1"/>
                 </a:solidFill>
@@ -13806,7 +16466,7 @@
               </a:rPr>
               <a:t>SparkSession</a:t>
             </a:r>
-            <a:endParaRPr lang="en-US" sz="1600" dirty="0">
+            <a:endParaRPr lang="en-US" sz="1600">
               <a:solidFill>
                 <a:schemeClr val="tx1"/>
               </a:solidFill>
@@ -13816,7 +16476,7 @@
           </a:p>
           <a:p>
             <a:r>
-              <a:rPr lang="en-US" sz="1600" dirty="0">
+              <a:rPr lang="en-US" sz="1600">
                 <a:solidFill>
                   <a:srgbClr val="00B050"/>
                 </a:solidFill>
@@ -13829,7 +16489,7 @@
               <a:t># 1. Initialize a </a:t>
             </a:r>
             <a:r>
-              <a:rPr lang="en-US" sz="1600" dirty="0" err="1">
+              <a:rPr lang="en-US" sz="1600" err="1">
                 <a:solidFill>
                   <a:srgbClr val="00B050"/>
                 </a:solidFill>
@@ -13841,7 +16501,7 @@
               </a:rPr>
               <a:t>SparkSession</a:t>
             </a:r>
-            <a:endParaRPr lang="en-US" sz="1600" dirty="0">
+            <a:endParaRPr lang="en-US" sz="1600">
               <a:solidFill>
                 <a:srgbClr val="00B050"/>
               </a:solidFill>
@@ -13854,7 +16514,7 @@
           </a:p>
           <a:p>
             <a:r>
-              <a:rPr lang="en-US" sz="1600" dirty="0">
+              <a:rPr lang="en-US" sz="1600">
                 <a:solidFill>
                   <a:schemeClr val="tx1"/>
                 </a:solidFill>
@@ -13864,7 +16524,7 @@
               <a:t>spark = </a:t>
             </a:r>
             <a:r>
-              <a:rPr lang="en-US" sz="1600" dirty="0" err="1">
+              <a:rPr lang="en-US" sz="1600" err="1">
                 <a:solidFill>
                   <a:schemeClr val="tx1"/>
                 </a:solidFill>
@@ -13874,7 +16534,7 @@
               <a:t>SparkSession.builder.appName</a:t>
             </a:r>
             <a:r>
-              <a:rPr lang="en-US" sz="1600" dirty="0">
+              <a:rPr lang="en-US" sz="1600">
                 <a:solidFill>
                   <a:schemeClr val="tx1"/>
                 </a:solidFill>
@@ -13884,7 +16544,7 @@
               <a:t>(”demo").</a:t>
             </a:r>
             <a:r>
-              <a:rPr lang="en-US" sz="1600" dirty="0" err="1">
+              <a:rPr lang="en-US" sz="1600" err="1">
                 <a:solidFill>
                   <a:schemeClr val="tx1"/>
                 </a:solidFill>
@@ -13894,7 +16554,7 @@
               <a:t>getOrCreate</a:t>
             </a:r>
             <a:r>
-              <a:rPr lang="en-US" sz="1600" dirty="0">
+              <a:rPr lang="en-US" sz="1600">
                 <a:solidFill>
                   <a:schemeClr val="tx1"/>
                 </a:solidFill>
@@ -13905,7 +16565,7 @@
             </a:r>
           </a:p>
           <a:p>
-            <a:endParaRPr lang="en-US" sz="1600" dirty="0">
+            <a:endParaRPr lang="en-US" sz="1600">
               <a:solidFill>
                 <a:schemeClr val="tx1"/>
               </a:solidFill>
@@ -13915,7 +16575,7 @@
           </a:p>
           <a:p>
             <a:r>
-              <a:rPr lang="en-US" sz="1600" dirty="0">
+              <a:rPr lang="en-US" sz="1600">
                 <a:solidFill>
                   <a:srgbClr val="00B050"/>
                 </a:solidFill>
@@ -13928,7 +16588,7 @@
               <a:t># 2. Create a sample </a:t>
             </a:r>
             <a:r>
-              <a:rPr lang="en-US" sz="1600" dirty="0" err="1">
+              <a:rPr lang="en-US" sz="1600" err="1">
                 <a:solidFill>
                   <a:srgbClr val="00B050"/>
                 </a:solidFill>
@@ -13940,7 +16600,7 @@
               </a:rPr>
               <a:t>DataFrame</a:t>
             </a:r>
-            <a:endParaRPr lang="en-US" sz="1600" dirty="0">
+            <a:endParaRPr lang="en-US" sz="1600">
               <a:solidFill>
                 <a:srgbClr val="00B050"/>
               </a:solidFill>
@@ -13953,7 +16613,7 @@
           </a:p>
           <a:p>
             <a:r>
-              <a:rPr lang="en-US" sz="1600" dirty="0">
+              <a:rPr lang="en-US" sz="1600">
                 <a:solidFill>
                   <a:schemeClr val="tx1"/>
                 </a:solidFill>
@@ -13965,7 +16625,7 @@
           </a:p>
           <a:p>
             <a:r>
-              <a:rPr lang="en-US" sz="1600" dirty="0">
+              <a:rPr lang="en-US" sz="1600">
                 <a:solidFill>
                   <a:schemeClr val="tx1"/>
                 </a:solidFill>
@@ -13977,7 +16637,7 @@
           </a:p>
           <a:p>
             <a:r>
-              <a:rPr lang="en-US" sz="1600" dirty="0">
+              <a:rPr lang="en-US" sz="1600">
                 <a:solidFill>
                   <a:schemeClr val="tx1"/>
                 </a:solidFill>
@@ -13989,7 +16649,7 @@
           </a:p>
           <a:p>
             <a:r>
-              <a:rPr lang="en-US" sz="1600" dirty="0" err="1">
+              <a:rPr lang="en-US" sz="1600" err="1">
                 <a:solidFill>
                   <a:schemeClr val="tx1"/>
                 </a:solidFill>
@@ -13999,7 +16659,7 @@
               <a:t>df</a:t>
             </a:r>
             <a:r>
-              <a:rPr lang="en-US" sz="1600" dirty="0">
+              <a:rPr lang="en-US" sz="1600">
                 <a:solidFill>
                   <a:schemeClr val="tx1"/>
                 </a:solidFill>
@@ -14009,7 +16669,7 @@
               <a:t> = </a:t>
             </a:r>
             <a:r>
-              <a:rPr lang="en-US" sz="1600" dirty="0" err="1">
+              <a:rPr lang="en-US" sz="1600" err="1">
                 <a:solidFill>
                   <a:schemeClr val="tx1"/>
                 </a:solidFill>
@@ -14019,7 +16679,7 @@
               <a:t>spark.createDataFrame</a:t>
             </a:r>
             <a:r>
-              <a:rPr lang="en-US" sz="1600" dirty="0">
+              <a:rPr lang="en-US" sz="1600">
                 <a:solidFill>
                   <a:schemeClr val="tx1"/>
                 </a:solidFill>
@@ -14030,7 +16690,7 @@
             </a:r>
           </a:p>
           <a:p>
-            <a:endParaRPr lang="en-US" sz="1600" dirty="0">
+            <a:endParaRPr lang="en-US" sz="1600">
               <a:solidFill>
                 <a:schemeClr val="tx1"/>
               </a:solidFill>
@@ -14040,7 +16700,7 @@
           </a:p>
           <a:p>
             <a:r>
-              <a:rPr lang="en-US" sz="1600" dirty="0">
+              <a:rPr lang="en-US" sz="1600">
                 <a:solidFill>
                   <a:srgbClr val="00B050"/>
                 </a:solidFill>
@@ -14053,7 +16713,7 @@
               <a:t># 3. Register the </a:t>
             </a:r>
             <a:r>
-              <a:rPr lang="en-US" sz="1600" dirty="0" err="1">
+              <a:rPr lang="en-US" sz="1600" err="1">
                 <a:solidFill>
                   <a:srgbClr val="00B050"/>
                 </a:solidFill>
@@ -14066,7 +16726,7 @@
               <a:t>DataFrame</a:t>
             </a:r>
             <a:r>
-              <a:rPr lang="en-US" sz="1600" dirty="0">
+              <a:rPr lang="en-US" sz="1600">
                 <a:solidFill>
                   <a:srgbClr val="00B050"/>
                 </a:solidFill>
@@ -14081,7 +16741,7 @@
           </a:p>
           <a:p>
             <a:r>
-              <a:rPr lang="en-US" sz="1600" dirty="0" err="1">
+              <a:rPr lang="en-US" sz="1600" err="1">
                 <a:solidFill>
                   <a:schemeClr val="tx1"/>
                 </a:solidFill>
@@ -14091,7 +16751,7 @@
               <a:t>df.createOrReplaceTempView</a:t>
             </a:r>
             <a:r>
-              <a:rPr lang="en-US" sz="1600" dirty="0">
+              <a:rPr lang="en-US" sz="1600">
                 <a:solidFill>
                   <a:schemeClr val="tx1"/>
                 </a:solidFill>
@@ -14636,7 +17296,7 @@
 </p:sld>
 </file>
 
-<file path=ppt/slides/slide26.xml><?xml version="1.0" encoding="utf-8"?>
+<file path=ppt/slides/slide31.xml><?xml version="1.0" encoding="utf-8"?>
 <p:sld xmlns:a="http://schemas.openxmlformats.org/drawingml/2006/main" xmlns:r="http://schemas.openxmlformats.org/officeDocument/2006/relationships" xmlns:p="http://schemas.openxmlformats.org/presentationml/2006/main">
   <p:cSld>
     <p:spTree>
@@ -14688,22 +17348,22 @@
           <a:lstStyle/>
           <a:p>
             <a:r>
-              <a:rPr lang="en-US" dirty="0"/>
+              <a:rPr lang="en-US"/>
               <a:t>PySpark </a:t>
             </a:r>
             <a:r>
-              <a:rPr lang="en-US" dirty="0" err="1"/>
+              <a:rPr lang="en-US" err="1"/>
               <a:t>DataFrame</a:t>
             </a:r>
             <a:r>
-              <a:rPr lang="en-US" dirty="0"/>
+              <a:rPr lang="en-US"/>
               <a:t> Example </a:t>
             </a:r>
             <a:r>
-              <a:rPr lang="en-US" sz="2700" dirty="0"/>
+              <a:rPr lang="en-US" sz="2700"/>
               <a:t>continued…</a:t>
             </a:r>
-            <a:endParaRPr lang="en-US" dirty="0"/>
+            <a:endParaRPr lang="en-US"/>
           </a:p>
         </p:txBody>
       </p:sp>
@@ -14736,7 +17396,7 @@
           <a:lstStyle/>
           <a:p>
             <a:r>
-              <a:rPr lang="en-US" sz="2800" dirty="0">
+              <a:rPr lang="en-US" sz="2800">
                 <a:solidFill>
                   <a:srgbClr val="00B050"/>
                 </a:solidFill>
@@ -14749,7 +17409,7 @@
               <a:t># 4. Run an SQL query using </a:t>
             </a:r>
             <a:r>
-              <a:rPr lang="en-US" sz="2800" dirty="0" err="1">
+              <a:rPr lang="en-US" sz="2800" err="1">
                 <a:solidFill>
                   <a:srgbClr val="00B050"/>
                 </a:solidFill>
@@ -14762,7 +17422,7 @@
               <a:t>spark.sql</a:t>
             </a:r>
             <a:r>
-              <a:rPr lang="en-US" sz="2800" dirty="0">
+              <a:rPr lang="en-US" sz="2800">
                 <a:solidFill>
                   <a:srgbClr val="00B050"/>
                 </a:solidFill>
@@ -14777,7 +17437,7 @@
           </a:p>
           <a:p>
             <a:r>
-              <a:rPr lang="en-US" sz="2800" dirty="0" err="1">
+              <a:rPr lang="en-US" sz="2800" err="1">
                 <a:solidFill>
                   <a:schemeClr val="tx1"/>
                 </a:solidFill>
@@ -14787,7 +17447,7 @@
               <a:t>query_result</a:t>
             </a:r>
             <a:r>
-              <a:rPr lang="en-US" sz="2800" dirty="0">
+              <a:rPr lang="en-US" sz="2800">
                 <a:solidFill>
                   <a:schemeClr val="tx1"/>
                 </a:solidFill>
@@ -14797,7 +17457,7 @@
               <a:t> = </a:t>
             </a:r>
             <a:r>
-              <a:rPr lang="en-US" sz="2800" dirty="0" err="1">
+              <a:rPr lang="en-US" sz="2800" err="1">
                 <a:solidFill>
                   <a:schemeClr val="tx1"/>
                 </a:solidFill>
@@ -14807,7 +17467,7 @@
               <a:t>spark.sql</a:t>
             </a:r>
             <a:r>
-              <a:rPr lang="en-US" sz="2800" dirty="0">
+              <a:rPr lang="en-US" sz="2800">
                 <a:solidFill>
                   <a:schemeClr val="tx1"/>
                 </a:solidFill>
@@ -14819,7 +17479,7 @@
           </a:p>
           <a:p>
             <a:r>
-              <a:rPr lang="en-US" sz="2800" dirty="0">
+              <a:rPr lang="en-US" sz="2800">
                 <a:solidFill>
                   <a:schemeClr val="tx1"/>
                 </a:solidFill>
@@ -14831,7 +17491,7 @@
           </a:p>
           <a:p>
             <a:r>
-              <a:rPr lang="en-US" sz="2800" dirty="0">
+              <a:rPr lang="en-US" sz="2800">
                 <a:solidFill>
                   <a:schemeClr val="tx1"/>
                 </a:solidFill>
@@ -14843,7 +17503,7 @@
           </a:p>
           <a:p>
             <a:r>
-              <a:rPr lang="en-US" sz="2800" dirty="0">
+              <a:rPr lang="en-US" sz="2800">
                 <a:solidFill>
                   <a:schemeClr val="tx1"/>
                 </a:solidFill>
@@ -14853,7 +17513,7 @@
               <a:t>        COUNT(*) as </a:t>
             </a:r>
             <a:r>
-              <a:rPr lang="en-US" sz="2800" dirty="0" err="1">
+              <a:rPr lang="en-US" sz="2800" err="1">
                 <a:solidFill>
                   <a:schemeClr val="tx1"/>
                 </a:solidFill>
@@ -14863,7 +17523,7 @@
               <a:t>total_employees</a:t>
             </a:r>
             <a:r>
-              <a:rPr lang="en-US" sz="2800" dirty="0">
+              <a:rPr lang="en-US" sz="2800">
                 <a:solidFill>
                   <a:schemeClr val="tx1"/>
                 </a:solidFill>
@@ -14875,7 +17535,7 @@
           </a:p>
           <a:p>
             <a:r>
-              <a:rPr lang="en-US" sz="2800" dirty="0">
+              <a:rPr lang="en-US" sz="2800">
                 <a:solidFill>
                   <a:schemeClr val="tx1"/>
                 </a:solidFill>
@@ -14885,7 +17545,7 @@
               <a:t>        AVG(salary) as </a:t>
             </a:r>
             <a:r>
-              <a:rPr lang="en-US" sz="2800" dirty="0" err="1">
+              <a:rPr lang="en-US" sz="2800" err="1">
                 <a:solidFill>
                   <a:schemeClr val="tx1"/>
                 </a:solidFill>
@@ -14902,7 +17562,7 @@
                 <a:latin typeface="Consolas" panose="020B0609020204030204" pitchFamily="49" charset="0"/>
                 <a:cs typeface="Consolas" panose="020B0609020204030204" pitchFamily="49" charset="0"/>
               </a:rPr>
-              <a:t>26</a:t>
+              <a:t>31</a:t>
             </a:fld>
             <a:fld id="{CC2D33A0-B2E6-D349-A097-E72DB892D938}" type="slidenum">
               <a:rPr lang="en-US" sz="2800" smtClean="0">
@@ -14912,7 +17572,7 @@
                 <a:latin typeface="Consolas" panose="020B0609020204030204" pitchFamily="49" charset="0"/>
                 <a:cs typeface="Consolas" panose="020B0609020204030204" pitchFamily="49" charset="0"/>
               </a:rPr>
-              <a:t>26</a:t>
+              <a:t>31</a:t>
             </a:fld>
             <a:fld id="{DF44FC3A-F21A-1F4C-8B5B-6DE26541D48A}" type="slidenum">
               <a:rPr lang="en-US" sz="2800" smtClean="0">
@@ -14922,9 +17582,9 @@
                 <a:latin typeface="Consolas" panose="020B0609020204030204" pitchFamily="49" charset="0"/>
                 <a:cs typeface="Consolas" panose="020B0609020204030204" pitchFamily="49" charset="0"/>
               </a:rPr>
-              <a:t>26</a:t>
+              <a:t>31</a:t>
             </a:fld>
-            <a:endParaRPr lang="en-US" sz="2800" dirty="0">
+            <a:endParaRPr lang="en-US" sz="2800">
               <a:solidFill>
                 <a:schemeClr val="tx1"/>
               </a:solidFill>
@@ -14934,7 +17594,7 @@
           </a:p>
           <a:p>
             <a:r>
-              <a:rPr lang="en-US" sz="2800" dirty="0">
+              <a:rPr lang="en-US" sz="2800">
                 <a:solidFill>
                   <a:schemeClr val="tx1"/>
                 </a:solidFill>
@@ -14946,7 +17606,7 @@
           </a:p>
           <a:p>
             <a:r>
-              <a:rPr lang="en-US" sz="2800" dirty="0">
+              <a:rPr lang="en-US" sz="2800">
                 <a:solidFill>
                   <a:schemeClr val="tx1"/>
                 </a:solidFill>
@@ -14958,7 +17618,7 @@
           </a:p>
           <a:p>
             <a:r>
-              <a:rPr lang="en-US" sz="2800" dirty="0">
+              <a:rPr lang="en-US" sz="2800">
                 <a:solidFill>
                   <a:schemeClr val="tx1"/>
                 </a:solidFill>
@@ -14968,7 +17628,7 @@
               <a:t>    HAVING </a:t>
             </a:r>
             <a:r>
-              <a:rPr lang="en-US" sz="2800" dirty="0" err="1">
+              <a:rPr lang="en-US" sz="2800" err="1">
                 <a:solidFill>
                   <a:schemeClr val="tx1"/>
                 </a:solidFill>
@@ -14978,7 +17638,7 @@
               <a:t>average_salary</a:t>
             </a:r>
             <a:r>
-              <a:rPr lang="en-US" sz="2800" dirty="0">
+              <a:rPr lang="en-US" sz="2800">
                 <a:solidFill>
                   <a:schemeClr val="tx1"/>
                 </a:solidFill>
@@ -14990,7 +17650,7 @@
           </a:p>
           <a:p>
             <a:r>
-              <a:rPr lang="en-US" sz="2800" dirty="0">
+              <a:rPr lang="en-US" sz="2800">
                 <a:solidFill>
                   <a:schemeClr val="tx1"/>
                 </a:solidFill>
@@ -15000,7 +17660,7 @@
               <a:t>    ORDER BY </a:t>
             </a:r>
             <a:r>
-              <a:rPr lang="en-US" sz="2800" dirty="0" err="1">
+              <a:rPr lang="en-US" sz="2800" err="1">
                 <a:solidFill>
                   <a:schemeClr val="tx1"/>
                 </a:solidFill>
@@ -15010,7 +17670,7 @@
               <a:t>average_salary</a:t>
             </a:r>
             <a:r>
-              <a:rPr lang="en-US" sz="2800" dirty="0">
+              <a:rPr lang="en-US" sz="2800">
                 <a:solidFill>
                   <a:schemeClr val="tx1"/>
                 </a:solidFill>
@@ -15022,7 +17682,7 @@
           </a:p>
           <a:p>
             <a:r>
-              <a:rPr lang="en-US" sz="2800" dirty="0">
+              <a:rPr lang="en-US" sz="2800">
                 <a:solidFill>
                   <a:schemeClr val="tx1"/>
                 </a:solidFill>
@@ -15033,7 +17693,7 @@
             </a:r>
           </a:p>
           <a:p>
-            <a:endParaRPr lang="en-US" sz="2800" dirty="0">
+            <a:endParaRPr lang="en-US" sz="2800">
               <a:solidFill>
                 <a:schemeClr val="tx1"/>
               </a:solidFill>
@@ -15043,7 +17703,7 @@
           </a:p>
           <a:p>
             <a:r>
-              <a:rPr lang="en-US" sz="2800" dirty="0">
+              <a:rPr lang="en-US" sz="2800">
                 <a:solidFill>
                   <a:srgbClr val="00B050"/>
                 </a:solidFill>
@@ -15058,7 +17718,7 @@
           </a:p>
           <a:p>
             <a:r>
-              <a:rPr lang="en-US" sz="2800" dirty="0" err="1">
+              <a:rPr lang="en-US" sz="2800" err="1">
                 <a:solidFill>
                   <a:schemeClr val="tx1"/>
                 </a:solidFill>
@@ -15068,7 +17728,7 @@
               <a:t>query_result.show</a:t>
             </a:r>
             <a:r>
-              <a:rPr lang="en-US" sz="2800" dirty="0">
+              <a:rPr lang="en-US" sz="2800">
                 <a:solidFill>
                   <a:schemeClr val="tx1"/>
                 </a:solidFill>
@@ -15760,7 +18420,7 @@
 </p:sld>
 </file>
 
-<file path=ppt/slides/slide27.xml><?xml version="1.0" encoding="utf-8"?>
+<file path=ppt/slides/slide32.xml><?xml version="1.0" encoding="utf-8"?>
 <p:sld xmlns:a="http://schemas.openxmlformats.org/drawingml/2006/main" xmlns:r="http://schemas.openxmlformats.org/officeDocument/2006/relationships" xmlns:p="http://schemas.openxmlformats.org/presentationml/2006/main">
   <p:cSld>
     <p:spTree>
@@ -15806,17 +18466,17 @@
           <a:lstStyle/>
           <a:p>
             <a:r>
-              <a:rPr lang="en-US" dirty="0"/>
+              <a:rPr lang="en-US"/>
               <a:t>3. Main Course Components</a:t>
             </a:r>
             <a:br>
-              <a:rPr lang="en-US" dirty="0"/>
+              <a:rPr lang="en-US"/>
             </a:br>
             <a:r>
-              <a:rPr lang="en-US" sz="4800" dirty="0"/>
+              <a:rPr lang="en-US" sz="4800"/>
               <a:t>Serverless SQL Access to Big Data (15%)</a:t>
             </a:r>
-            <a:endParaRPr lang="en-US" dirty="0"/>
+            <a:endParaRPr lang="en-US"/>
           </a:p>
         </p:txBody>
       </p:sp>
@@ -15853,7 +18513,7 @@
               <a:buChar char="•"/>
             </a:pPr>
             <a:r>
-              <a:rPr lang="en-US" sz="3600" dirty="0"/>
+              <a:rPr lang="en-US" sz="3600"/>
               <a:t>Amazon Athena</a:t>
             </a:r>
           </a:p>
@@ -15863,7 +18523,7 @@
               <a:buChar char="•"/>
             </a:pPr>
             <a:r>
-              <a:rPr lang="en-US" sz="4000" dirty="0"/>
+              <a:rPr lang="en-US" sz="4000"/>
               <a:t>Google BigQuery</a:t>
             </a:r>
           </a:p>
@@ -15873,20 +18533,20 @@
               <a:buChar char="•"/>
             </a:pPr>
             <a:r>
-              <a:rPr lang="en-US" sz="4000" dirty="0"/>
+              <a:rPr lang="en-US" sz="4000"/>
               <a:t>Snowflake</a:t>
             </a:r>
           </a:p>
           <a:p>
             <a:pPr lvl="1" algn="l"/>
-            <a:endParaRPr lang="en-US" sz="1200" dirty="0"/>
+            <a:endParaRPr lang="en-US" sz="1200"/>
           </a:p>
           <a:p>
             <a:pPr marL="800100" lvl="1" indent="-342900" algn="l">
               <a:buFont typeface="+mj-lt"/>
               <a:buAutoNum type="arabicPeriod"/>
             </a:pPr>
-            <a:endParaRPr lang="en-US" sz="1200" dirty="0"/>
+            <a:endParaRPr lang="en-US" sz="1200"/>
           </a:p>
         </p:txBody>
       </p:sp>
@@ -16047,7 +18707,7 @@
 </p:sld>
 </file>
 
-<file path=ppt/slides/slide28.xml><?xml version="1.0" encoding="utf-8"?>
+<file path=ppt/slides/slide33.xml><?xml version="1.0" encoding="utf-8"?>
 <p:sld xmlns:a="http://schemas.openxmlformats.org/drawingml/2006/main" xmlns:r="http://schemas.openxmlformats.org/officeDocument/2006/relationships" xmlns:p="http://schemas.openxmlformats.org/presentationml/2006/main">
   <p:cSld>
     <p:spTree>
@@ -16093,7 +18753,7 @@
           <a:lstStyle/>
           <a:p>
             <a:r>
-              <a:rPr lang="en-US" dirty="0"/>
+              <a:rPr lang="en-US"/>
               <a:t>Amazon Athena</a:t>
             </a:r>
           </a:p>
@@ -16132,7 +18792,7 @@
               <a:buChar char="•"/>
             </a:pPr>
             <a:r>
-              <a:rPr lang="en-US" sz="2800" dirty="0"/>
+              <a:rPr lang="en-US" sz="2800"/>
               <a:t>Interactive query service</a:t>
             </a:r>
           </a:p>
@@ -16142,7 +18802,7 @@
               <a:buChar char="•"/>
             </a:pPr>
             <a:r>
-              <a:rPr lang="en-US" sz="2800" dirty="0"/>
+              <a:rPr lang="en-US" sz="2800"/>
               <a:t>Serverless. Zero infrastructure. Zero administration.</a:t>
             </a:r>
           </a:p>
@@ -16152,7 +18812,7 @@
               <a:buChar char="•"/>
             </a:pPr>
             <a:r>
-              <a:rPr lang="en-US" sz="2800" dirty="0"/>
+              <a:rPr lang="en-US" sz="2800"/>
               <a:t>Put your data in S3</a:t>
             </a:r>
           </a:p>
@@ -16162,7 +18822,7 @@
               <a:buChar char="•"/>
             </a:pPr>
             <a:r>
-              <a:rPr lang="en-US" sz="2800" dirty="0"/>
+              <a:rPr lang="en-US" sz="2800"/>
               <a:t>Access your data by SQL</a:t>
             </a:r>
           </a:p>
@@ -16172,7 +18832,7 @@
               <a:buChar char="•"/>
             </a:pPr>
             <a:r>
-              <a:rPr lang="en-US" sz="2800" dirty="0"/>
+              <a:rPr lang="en-US" sz="2800"/>
               <a:t>Pay by query</a:t>
             </a:r>
           </a:p>
@@ -16182,7 +18842,7 @@
               <a:buChar char="•"/>
             </a:pPr>
             <a:r>
-              <a:rPr lang="en-US" sz="2800" dirty="0"/>
+              <a:rPr lang="en-US" sz="2800"/>
               <a:t>Fast performance</a:t>
             </a:r>
           </a:p>
@@ -16525,7 +19185,7 @@
 </p:sld>
 </file>
 
-<file path=ppt/slides/slide29.xml><?xml version="1.0" encoding="utf-8"?>
+<file path=ppt/slides/slide34.xml><?xml version="1.0" encoding="utf-8"?>
 <p:sld xmlns:a="http://schemas.openxmlformats.org/drawingml/2006/main" xmlns:r="http://schemas.openxmlformats.org/officeDocument/2006/relationships" xmlns:p="http://schemas.openxmlformats.org/presentationml/2006/main">
   <p:cSld>
     <p:spTree>
@@ -16569,7 +19229,7 @@
           <a:lstStyle/>
           <a:p>
             <a:r>
-              <a:rPr lang="en-US" dirty="0"/>
+              <a:rPr lang="en-US"/>
               <a:t>Amazon Athena</a:t>
             </a:r>
           </a:p>
@@ -16618,7 +19278,2179 @@
 </p:sld>
 </file>
 
-<file path=ppt/slides/slide3.xml><?xml version="1.0" encoding="utf-8"?>
+<file path=ppt/slides/slide4.xml><?xml version="1.0" encoding="utf-8"?>
+<p:sld xmlns:a="http://schemas.openxmlformats.org/drawingml/2006/main" xmlns:r="http://schemas.openxmlformats.org/officeDocument/2006/relationships" xmlns:p="http://schemas.openxmlformats.org/presentationml/2006/main">
+  <p:cSld>
+    <p:spTree>
+      <p:nvGrpSpPr>
+        <p:cNvPr id="1" name=""/>
+        <p:cNvGrpSpPr/>
+        <p:nvPr/>
+      </p:nvGrpSpPr>
+      <p:grpSpPr>
+        <a:xfrm>
+          <a:off x="0" y="0"/>
+          <a:ext cx="0" cy="0"/>
+          <a:chOff x="0" y="0"/>
+          <a:chExt cx="0" cy="0"/>
+        </a:xfrm>
+      </p:grpSpPr>
+      <p:sp>
+        <p:nvSpPr>
+          <p:cNvPr id="2" name="Title 1">
+            <a:extLst>
+              <a:ext uri="{FF2B5EF4-FFF2-40B4-BE49-F238E27FC236}">
+                <a16:creationId xmlns:a16="http://schemas.microsoft.com/office/drawing/2014/main" id="{8207F09F-B406-FB4C-ABE0-890E4E4F95C8}"/>
+              </a:ext>
+            </a:extLst>
+          </p:cNvPr>
+          <p:cNvSpPr>
+            <a:spLocks noGrp="1"/>
+          </p:cNvSpPr>
+          <p:nvPr>
+            <p:ph type="ctrTitle"/>
+          </p:nvPr>
+        </p:nvSpPr>
+        <p:spPr>
+          <a:xfrm>
+            <a:off x="1413468" y="290725"/>
+            <a:ext cx="9144000" cy="583482"/>
+          </a:xfrm>
+        </p:spPr>
+        <p:txBody>
+          <a:bodyPr>
+            <a:normAutofit fontScale="90000"/>
+          </a:bodyPr>
+          <a:lstStyle/>
+          <a:p>
+            <a:r>
+              <a:rPr lang="en-US" sz="3600" dirty="0"/>
+              <a:t>What is a Big Data Modeling?</a:t>
+            </a:r>
+          </a:p>
+        </p:txBody>
+      </p:sp>
+      <p:sp>
+        <p:nvSpPr>
+          <p:cNvPr id="3" name="Subtitle 2">
+            <a:extLst>
+              <a:ext uri="{FF2B5EF4-FFF2-40B4-BE49-F238E27FC236}">
+                <a16:creationId xmlns:a16="http://schemas.microsoft.com/office/drawing/2014/main" id="{67BA4937-A89D-8343-B4A3-942B771C889A}"/>
+              </a:ext>
+            </a:extLst>
+          </p:cNvPr>
+          <p:cNvSpPr>
+            <a:spLocks noGrp="1"/>
+          </p:cNvSpPr>
+          <p:nvPr>
+            <p:ph type="subTitle" idx="1"/>
+          </p:nvPr>
+        </p:nvSpPr>
+        <p:spPr>
+          <a:xfrm>
+            <a:off x="1307184" y="1225900"/>
+            <a:ext cx="9144000" cy="4983188"/>
+          </a:xfrm>
+        </p:spPr>
+        <p:txBody>
+          <a:bodyPr>
+            <a:normAutofit fontScale="92500"/>
+          </a:bodyPr>
+          <a:lstStyle/>
+          <a:p>
+            <a:r>
+              <a:rPr lang="en-US" sz="3600" dirty="0"/>
+              <a:t># Common Models</a:t>
+            </a:r>
+          </a:p>
+          <a:p>
+            <a:r>
+              <a:rPr lang="en-US" sz="3600" dirty="0">
+                <a:solidFill>
+                  <a:schemeClr val="tx1"/>
+                </a:solidFill>
+              </a:rPr>
+              <a:t>- Data lakes and Lake-Houses</a:t>
+            </a:r>
+          </a:p>
+          <a:p>
+            <a:r>
+              <a:rPr lang="en-US" sz="3600" dirty="0">
+                <a:solidFill>
+                  <a:schemeClr val="tx1"/>
+                </a:solidFill>
+              </a:rPr>
+              <a:t>- NoSQL models: document, key-value, column, and graph</a:t>
+            </a:r>
+          </a:p>
+          <a:p>
+            <a:r>
+              <a:rPr lang="en-US" sz="3600" dirty="0">
+                <a:solidFill>
+                  <a:schemeClr val="tx1"/>
+                </a:solidFill>
+              </a:rPr>
+              <a:t>- Distributed data warehouses (Snowflake)</a:t>
+            </a:r>
+          </a:p>
+          <a:p>
+            <a:r>
+              <a:rPr lang="en-US" sz="3600" dirty="0">
+                <a:solidFill>
+                  <a:schemeClr val="tx1"/>
+                </a:solidFill>
+              </a:rPr>
+              <a:t>- Batch and streaming architectures (Spark)</a:t>
+            </a:r>
+          </a:p>
+          <a:p>
+            <a:endParaRPr lang="en-US" sz="3600" dirty="0"/>
+          </a:p>
+          <a:p>
+            <a:r>
+              <a:rPr lang="en-US" sz="3600" dirty="0"/>
+              <a:t>&gt; Goal: </a:t>
+            </a:r>
+            <a:r>
+              <a:rPr lang="en-US" sz="3600" dirty="0">
+                <a:solidFill>
+                  <a:srgbClr val="00B0F0"/>
+                </a:solidFill>
+              </a:rPr>
+              <a:t>Turn complex raw data into a reliable structure for analysis and decision-making.</a:t>
+            </a:r>
+          </a:p>
+          <a:p>
+            <a:pPr marL="800100" lvl="1" indent="-342900" algn="l">
+              <a:buFont typeface="+mj-lt"/>
+              <a:buAutoNum type="arabicPeriod"/>
+            </a:pPr>
+            <a:endParaRPr lang="en-US" sz="1200" dirty="0"/>
+          </a:p>
+        </p:txBody>
+      </p:sp>
+    </p:spTree>
+    <p:extLst>
+      <p:ext uri="{BB962C8B-B14F-4D97-AF65-F5344CB8AC3E}">
+        <p14:creationId xmlns:p14="http://schemas.microsoft.com/office/powerpoint/2010/main" val="1264933329"/>
+      </p:ext>
+    </p:extLst>
+  </p:cSld>
+  <p:clrMapOvr>
+    <a:masterClrMapping/>
+  </p:clrMapOvr>
+  <p:timing>
+    <p:tnLst>
+      <p:par>
+        <p:cTn id="1" dur="indefinite" restart="never" nodeType="tmRoot">
+          <p:childTnLst>
+            <p:seq concurrent="1" nextAc="seek">
+              <p:cTn id="2" dur="indefinite" nodeType="mainSeq">
+                <p:childTnLst>
+                  <p:par>
+                    <p:cTn id="3" fill="hold">
+                      <p:stCondLst>
+                        <p:cond delay="indefinite"/>
+                      </p:stCondLst>
+                      <p:childTnLst>
+                        <p:par>
+                          <p:cTn id="4" fill="hold">
+                            <p:stCondLst>
+                              <p:cond delay="0"/>
+                            </p:stCondLst>
+                            <p:childTnLst>
+                              <p:par>
+                                <p:cTn id="5" presetID="1" presetClass="entr" presetSubtype="0" fill="hold" nodeType="clickEffect">
+                                  <p:stCondLst>
+                                    <p:cond delay="0"/>
+                                  </p:stCondLst>
+                                  <p:childTnLst>
+                                    <p:set>
+                                      <p:cBhvr>
+                                        <p:cTn id="6" dur="1" fill="hold">
+                                          <p:stCondLst>
+                                            <p:cond delay="0"/>
+                                          </p:stCondLst>
+                                        </p:cTn>
+                                        <p:tgtEl>
+                                          <p:spTgt spid="3">
+                                            <p:txEl>
+                                              <p:pRg st="0" end="0"/>
+                                            </p:txEl>
+                                          </p:spTgt>
+                                        </p:tgtEl>
+                                        <p:attrNameLst>
+                                          <p:attrName>style.visibility</p:attrName>
+                                        </p:attrNameLst>
+                                      </p:cBhvr>
+                                      <p:to>
+                                        <p:strVal val="visible"/>
+                                      </p:to>
+                                    </p:set>
+                                  </p:childTnLst>
+                                </p:cTn>
+                              </p:par>
+                            </p:childTnLst>
+                          </p:cTn>
+                        </p:par>
+                      </p:childTnLst>
+                    </p:cTn>
+                  </p:par>
+                  <p:par>
+                    <p:cTn id="7" fill="hold">
+                      <p:stCondLst>
+                        <p:cond delay="indefinite"/>
+                      </p:stCondLst>
+                      <p:childTnLst>
+                        <p:par>
+                          <p:cTn id="8" fill="hold">
+                            <p:stCondLst>
+                              <p:cond delay="0"/>
+                            </p:stCondLst>
+                            <p:childTnLst>
+                              <p:par>
+                                <p:cTn id="9" presetID="1" presetClass="entr" presetSubtype="0" fill="hold" nodeType="clickEffect">
+                                  <p:stCondLst>
+                                    <p:cond delay="0"/>
+                                  </p:stCondLst>
+                                  <p:childTnLst>
+                                    <p:set>
+                                      <p:cBhvr>
+                                        <p:cTn id="10" dur="1" fill="hold">
+                                          <p:stCondLst>
+                                            <p:cond delay="0"/>
+                                          </p:stCondLst>
+                                        </p:cTn>
+                                        <p:tgtEl>
+                                          <p:spTgt spid="3">
+                                            <p:txEl>
+                                              <p:pRg st="1" end="1"/>
+                                            </p:txEl>
+                                          </p:spTgt>
+                                        </p:tgtEl>
+                                        <p:attrNameLst>
+                                          <p:attrName>style.visibility</p:attrName>
+                                        </p:attrNameLst>
+                                      </p:cBhvr>
+                                      <p:to>
+                                        <p:strVal val="visible"/>
+                                      </p:to>
+                                    </p:set>
+                                  </p:childTnLst>
+                                </p:cTn>
+                              </p:par>
+                            </p:childTnLst>
+                          </p:cTn>
+                        </p:par>
+                      </p:childTnLst>
+                    </p:cTn>
+                  </p:par>
+                  <p:par>
+                    <p:cTn id="11" fill="hold">
+                      <p:stCondLst>
+                        <p:cond delay="indefinite"/>
+                      </p:stCondLst>
+                      <p:childTnLst>
+                        <p:par>
+                          <p:cTn id="12" fill="hold">
+                            <p:stCondLst>
+                              <p:cond delay="0"/>
+                            </p:stCondLst>
+                            <p:childTnLst>
+                              <p:par>
+                                <p:cTn id="13" presetID="1" presetClass="entr" presetSubtype="0" fill="hold" nodeType="clickEffect">
+                                  <p:stCondLst>
+                                    <p:cond delay="0"/>
+                                  </p:stCondLst>
+                                  <p:childTnLst>
+                                    <p:set>
+                                      <p:cBhvr>
+                                        <p:cTn id="14" dur="1" fill="hold">
+                                          <p:stCondLst>
+                                            <p:cond delay="0"/>
+                                          </p:stCondLst>
+                                        </p:cTn>
+                                        <p:tgtEl>
+                                          <p:spTgt spid="3">
+                                            <p:txEl>
+                                              <p:pRg st="2" end="2"/>
+                                            </p:txEl>
+                                          </p:spTgt>
+                                        </p:tgtEl>
+                                        <p:attrNameLst>
+                                          <p:attrName>style.visibility</p:attrName>
+                                        </p:attrNameLst>
+                                      </p:cBhvr>
+                                      <p:to>
+                                        <p:strVal val="visible"/>
+                                      </p:to>
+                                    </p:set>
+                                  </p:childTnLst>
+                                </p:cTn>
+                              </p:par>
+                            </p:childTnLst>
+                          </p:cTn>
+                        </p:par>
+                      </p:childTnLst>
+                    </p:cTn>
+                  </p:par>
+                  <p:par>
+                    <p:cTn id="15" fill="hold">
+                      <p:stCondLst>
+                        <p:cond delay="indefinite"/>
+                      </p:stCondLst>
+                      <p:childTnLst>
+                        <p:par>
+                          <p:cTn id="16" fill="hold">
+                            <p:stCondLst>
+                              <p:cond delay="0"/>
+                            </p:stCondLst>
+                            <p:childTnLst>
+                              <p:par>
+                                <p:cTn id="17" presetID="1" presetClass="entr" presetSubtype="0" fill="hold" nodeType="clickEffect">
+                                  <p:stCondLst>
+                                    <p:cond delay="0"/>
+                                  </p:stCondLst>
+                                  <p:childTnLst>
+                                    <p:set>
+                                      <p:cBhvr>
+                                        <p:cTn id="18" dur="1" fill="hold">
+                                          <p:stCondLst>
+                                            <p:cond delay="0"/>
+                                          </p:stCondLst>
+                                        </p:cTn>
+                                        <p:tgtEl>
+                                          <p:spTgt spid="3">
+                                            <p:txEl>
+                                              <p:pRg st="3" end="3"/>
+                                            </p:txEl>
+                                          </p:spTgt>
+                                        </p:tgtEl>
+                                        <p:attrNameLst>
+                                          <p:attrName>style.visibility</p:attrName>
+                                        </p:attrNameLst>
+                                      </p:cBhvr>
+                                      <p:to>
+                                        <p:strVal val="visible"/>
+                                      </p:to>
+                                    </p:set>
+                                  </p:childTnLst>
+                                </p:cTn>
+                              </p:par>
+                            </p:childTnLst>
+                          </p:cTn>
+                        </p:par>
+                      </p:childTnLst>
+                    </p:cTn>
+                  </p:par>
+                  <p:par>
+                    <p:cTn id="19" fill="hold">
+                      <p:stCondLst>
+                        <p:cond delay="indefinite"/>
+                      </p:stCondLst>
+                      <p:childTnLst>
+                        <p:par>
+                          <p:cTn id="20" fill="hold">
+                            <p:stCondLst>
+                              <p:cond delay="0"/>
+                            </p:stCondLst>
+                            <p:childTnLst>
+                              <p:par>
+                                <p:cTn id="21" presetID="1" presetClass="entr" presetSubtype="0" fill="hold" nodeType="clickEffect">
+                                  <p:stCondLst>
+                                    <p:cond delay="0"/>
+                                  </p:stCondLst>
+                                  <p:childTnLst>
+                                    <p:set>
+                                      <p:cBhvr>
+                                        <p:cTn id="22" dur="1" fill="hold">
+                                          <p:stCondLst>
+                                            <p:cond delay="0"/>
+                                          </p:stCondLst>
+                                        </p:cTn>
+                                        <p:tgtEl>
+                                          <p:spTgt spid="3">
+                                            <p:txEl>
+                                              <p:pRg st="4" end="4"/>
+                                            </p:txEl>
+                                          </p:spTgt>
+                                        </p:tgtEl>
+                                        <p:attrNameLst>
+                                          <p:attrName>style.visibility</p:attrName>
+                                        </p:attrNameLst>
+                                      </p:cBhvr>
+                                      <p:to>
+                                        <p:strVal val="visible"/>
+                                      </p:to>
+                                    </p:set>
+                                  </p:childTnLst>
+                                </p:cTn>
+                              </p:par>
+                            </p:childTnLst>
+                          </p:cTn>
+                        </p:par>
+                      </p:childTnLst>
+                    </p:cTn>
+                  </p:par>
+                  <p:par>
+                    <p:cTn id="23" fill="hold">
+                      <p:stCondLst>
+                        <p:cond delay="indefinite"/>
+                      </p:stCondLst>
+                      <p:childTnLst>
+                        <p:par>
+                          <p:cTn id="24" fill="hold">
+                            <p:stCondLst>
+                              <p:cond delay="0"/>
+                            </p:stCondLst>
+                            <p:childTnLst>
+                              <p:par>
+                                <p:cTn id="25" presetID="1" presetClass="entr" presetSubtype="0" fill="hold" nodeType="clickEffect">
+                                  <p:stCondLst>
+                                    <p:cond delay="0"/>
+                                  </p:stCondLst>
+                                  <p:childTnLst>
+                                    <p:set>
+                                      <p:cBhvr>
+                                        <p:cTn id="26" dur="1" fill="hold">
+                                          <p:stCondLst>
+                                            <p:cond delay="0"/>
+                                          </p:stCondLst>
+                                        </p:cTn>
+                                        <p:tgtEl>
+                                          <p:spTgt spid="3">
+                                            <p:txEl>
+                                              <p:pRg st="6" end="6"/>
+                                            </p:txEl>
+                                          </p:spTgt>
+                                        </p:tgtEl>
+                                        <p:attrNameLst>
+                                          <p:attrName>style.visibility</p:attrName>
+                                        </p:attrNameLst>
+                                      </p:cBhvr>
+                                      <p:to>
+                                        <p:strVal val="visible"/>
+                                      </p:to>
+                                    </p:set>
+                                  </p:childTnLst>
+                                </p:cTn>
+                              </p:par>
+                            </p:childTnLst>
+                          </p:cTn>
+                        </p:par>
+                      </p:childTnLst>
+                    </p:cTn>
+                  </p:par>
+                </p:childTnLst>
+              </p:cTn>
+              <p:prevCondLst>
+                <p:cond evt="onPrev" delay="0">
+                  <p:tgtEl>
+                    <p:sldTgt/>
+                  </p:tgtEl>
+                </p:cond>
+              </p:prevCondLst>
+              <p:nextCondLst>
+                <p:cond evt="onNext" delay="0">
+                  <p:tgtEl>
+                    <p:sldTgt/>
+                  </p:tgtEl>
+                </p:cond>
+              </p:nextCondLst>
+            </p:seq>
+          </p:childTnLst>
+        </p:cTn>
+      </p:par>
+    </p:tnLst>
+  </p:timing>
+</p:sld>
+</file>
+
+<file path=ppt/slides/slide5.xml><?xml version="1.0" encoding="utf-8"?>
+<p:sld xmlns:a="http://schemas.openxmlformats.org/drawingml/2006/main" xmlns:r="http://schemas.openxmlformats.org/officeDocument/2006/relationships" xmlns:p="http://schemas.openxmlformats.org/presentationml/2006/main">
+  <p:cSld>
+    <p:spTree>
+      <p:nvGrpSpPr>
+        <p:cNvPr id="1" name="">
+          <a:extLst>
+            <a:ext uri="{FF2B5EF4-FFF2-40B4-BE49-F238E27FC236}">
+              <a16:creationId xmlns:a16="http://schemas.microsoft.com/office/drawing/2014/main" id="{85F69774-946E-B260-E4C8-F247732A6D47}"/>
+            </a:ext>
+          </a:extLst>
+        </p:cNvPr>
+        <p:cNvGrpSpPr/>
+        <p:nvPr/>
+      </p:nvGrpSpPr>
+      <p:grpSpPr>
+        <a:xfrm>
+          <a:off x="0" y="0"/>
+          <a:ext cx="0" cy="0"/>
+          <a:chOff x="0" y="0"/>
+          <a:chExt cx="0" cy="0"/>
+        </a:xfrm>
+      </p:grpSpPr>
+      <p:sp>
+        <p:nvSpPr>
+          <p:cNvPr id="2" name="Title 1">
+            <a:extLst>
+              <a:ext uri="{FF2B5EF4-FFF2-40B4-BE49-F238E27FC236}">
+                <a16:creationId xmlns:a16="http://schemas.microsoft.com/office/drawing/2014/main" id="{16245835-EA10-131F-D9B6-525812083D25}"/>
+              </a:ext>
+            </a:extLst>
+          </p:cNvPr>
+          <p:cNvSpPr>
+            <a:spLocks noGrp="1"/>
+          </p:cNvSpPr>
+          <p:nvPr>
+            <p:ph type="ctrTitle"/>
+          </p:nvPr>
+        </p:nvSpPr>
+        <p:spPr>
+          <a:xfrm>
+            <a:off x="1413468" y="290725"/>
+            <a:ext cx="9144000" cy="583482"/>
+          </a:xfrm>
+        </p:spPr>
+        <p:txBody>
+          <a:bodyPr>
+            <a:normAutofit fontScale="90000"/>
+          </a:bodyPr>
+          <a:lstStyle/>
+          <a:p>
+            <a:r>
+              <a:rPr lang="en-US" sz="3600" dirty="0"/>
+              <a:t>What is a Big Data Modeling &amp; Analytics?</a:t>
+            </a:r>
+          </a:p>
+        </p:txBody>
+      </p:sp>
+      <p:sp>
+        <p:nvSpPr>
+          <p:cNvPr id="3" name="Subtitle 2">
+            <a:extLst>
+              <a:ext uri="{FF2B5EF4-FFF2-40B4-BE49-F238E27FC236}">
+                <a16:creationId xmlns:a16="http://schemas.microsoft.com/office/drawing/2014/main" id="{B55C9645-A45B-E966-6AAB-2EA599B16DCD}"/>
+              </a:ext>
+            </a:extLst>
+          </p:cNvPr>
+          <p:cNvSpPr>
+            <a:spLocks noGrp="1"/>
+          </p:cNvSpPr>
+          <p:nvPr>
+            <p:ph type="subTitle" idx="1"/>
+          </p:nvPr>
+        </p:nvSpPr>
+        <p:spPr>
+          <a:xfrm>
+            <a:off x="1307184" y="994787"/>
+            <a:ext cx="9144000" cy="5214301"/>
+          </a:xfrm>
+        </p:spPr>
+        <p:txBody>
+          <a:bodyPr>
+            <a:normAutofit fontScale="70000" lnSpcReduction="20000"/>
+          </a:bodyPr>
+          <a:lstStyle/>
+          <a:p>
+            <a:r>
+              <a:rPr lang="en-US" sz="3600" dirty="0">
+                <a:solidFill>
+                  <a:schemeClr val="tx1"/>
+                </a:solidFill>
+              </a:rPr>
+              <a:t>Big data analytics uses modeled data to discover patterns, </a:t>
+            </a:r>
+          </a:p>
+          <a:p>
+            <a:r>
+              <a:rPr lang="en-US" sz="3600" dirty="0">
+                <a:solidFill>
+                  <a:schemeClr val="tx1"/>
+                </a:solidFill>
+              </a:rPr>
+              <a:t>explain outcomes, predict future events, and recommend actions.</a:t>
+            </a:r>
+          </a:p>
+          <a:p>
+            <a:endParaRPr lang="en-US" sz="3600" dirty="0">
+              <a:solidFill>
+                <a:schemeClr val="tx1"/>
+              </a:solidFill>
+            </a:endParaRPr>
+          </a:p>
+          <a:p>
+            <a:r>
+              <a:rPr lang="en-US" sz="3600" dirty="0">
+                <a:solidFill>
+                  <a:srgbClr val="00B0F0"/>
+                </a:solidFill>
+              </a:rPr>
+              <a:t>## Analytics Types</a:t>
+            </a:r>
+          </a:p>
+          <a:p>
+            <a:r>
+              <a:rPr lang="en-US" sz="3600" dirty="0">
+                <a:solidFill>
+                  <a:schemeClr val="tx1"/>
+                </a:solidFill>
+              </a:rPr>
+              <a:t>- Descriptive: What happened?</a:t>
+            </a:r>
+          </a:p>
+          <a:p>
+            <a:r>
+              <a:rPr lang="en-US" sz="3600" dirty="0">
+                <a:solidFill>
+                  <a:schemeClr val="tx1"/>
+                </a:solidFill>
+              </a:rPr>
+              <a:t>- Diagnostic: Why did it happen?</a:t>
+            </a:r>
+          </a:p>
+          <a:p>
+            <a:r>
+              <a:rPr lang="en-US" sz="3600" dirty="0">
+                <a:solidFill>
+                  <a:schemeClr val="tx1"/>
+                </a:solidFill>
+              </a:rPr>
+              <a:t>- Predictive: What is likely to happen?</a:t>
+            </a:r>
+          </a:p>
+          <a:p>
+            <a:r>
+              <a:rPr lang="en-US" sz="3600" dirty="0">
+                <a:solidFill>
+                  <a:schemeClr val="tx1"/>
+                </a:solidFill>
+              </a:rPr>
+              <a:t>- Prescriptive: What action should be taken?</a:t>
+            </a:r>
+          </a:p>
+          <a:p>
+            <a:endParaRPr lang="en-US" sz="3600" dirty="0">
+              <a:solidFill>
+                <a:schemeClr val="tx1"/>
+              </a:solidFill>
+            </a:endParaRPr>
+          </a:p>
+          <a:p>
+            <a:r>
+              <a:rPr lang="en-US" sz="3600" dirty="0">
+                <a:solidFill>
+                  <a:srgbClr val="00B0F0"/>
+                </a:solidFill>
+              </a:rPr>
+              <a:t>## Typical Workflow</a:t>
+            </a:r>
+            <a:endParaRPr lang="en-US" sz="3600" dirty="0">
+              <a:solidFill>
+                <a:schemeClr val="tx1"/>
+              </a:solidFill>
+            </a:endParaRPr>
+          </a:p>
+          <a:p>
+            <a:r>
+              <a:rPr lang="en-US" sz="3600" dirty="0">
+                <a:solidFill>
+                  <a:schemeClr val="tx1"/>
+                </a:solidFill>
+              </a:rPr>
+              <a:t>Collect → Clean → Model → Process → Analyze → Visualize → Act</a:t>
+            </a:r>
+            <a:endParaRPr lang="en-US" sz="1200" dirty="0">
+              <a:solidFill>
+                <a:schemeClr val="tx1"/>
+              </a:solidFill>
+            </a:endParaRPr>
+          </a:p>
+        </p:txBody>
+      </p:sp>
+    </p:spTree>
+    <p:extLst>
+      <p:ext uri="{BB962C8B-B14F-4D97-AF65-F5344CB8AC3E}">
+        <p14:creationId xmlns:p14="http://schemas.microsoft.com/office/powerpoint/2010/main" val="440030108"/>
+      </p:ext>
+    </p:extLst>
+  </p:cSld>
+  <p:clrMapOvr>
+    <a:masterClrMapping/>
+  </p:clrMapOvr>
+  <p:timing>
+    <p:tnLst>
+      <p:par>
+        <p:cTn id="1" dur="indefinite" restart="never" nodeType="tmRoot">
+          <p:childTnLst>
+            <p:seq concurrent="1" nextAc="seek">
+              <p:cTn id="2" dur="indefinite" nodeType="mainSeq">
+                <p:childTnLst>
+                  <p:par>
+                    <p:cTn id="3" fill="hold">
+                      <p:stCondLst>
+                        <p:cond delay="indefinite"/>
+                      </p:stCondLst>
+                      <p:childTnLst>
+                        <p:par>
+                          <p:cTn id="4" fill="hold">
+                            <p:stCondLst>
+                              <p:cond delay="0"/>
+                            </p:stCondLst>
+                            <p:childTnLst>
+                              <p:par>
+                                <p:cTn id="5" presetID="1" presetClass="entr" presetSubtype="0" fill="hold" nodeType="clickEffect">
+                                  <p:stCondLst>
+                                    <p:cond delay="0"/>
+                                  </p:stCondLst>
+                                  <p:childTnLst>
+                                    <p:set>
+                                      <p:cBhvr>
+                                        <p:cTn id="6" dur="1" fill="hold">
+                                          <p:stCondLst>
+                                            <p:cond delay="0"/>
+                                          </p:stCondLst>
+                                        </p:cTn>
+                                        <p:tgtEl>
+                                          <p:spTgt spid="3">
+                                            <p:txEl>
+                                              <p:pRg st="0" end="0"/>
+                                            </p:txEl>
+                                          </p:spTgt>
+                                        </p:tgtEl>
+                                        <p:attrNameLst>
+                                          <p:attrName>style.visibility</p:attrName>
+                                        </p:attrNameLst>
+                                      </p:cBhvr>
+                                      <p:to>
+                                        <p:strVal val="visible"/>
+                                      </p:to>
+                                    </p:set>
+                                  </p:childTnLst>
+                                </p:cTn>
+                              </p:par>
+                            </p:childTnLst>
+                          </p:cTn>
+                        </p:par>
+                      </p:childTnLst>
+                    </p:cTn>
+                  </p:par>
+                  <p:par>
+                    <p:cTn id="7" fill="hold">
+                      <p:stCondLst>
+                        <p:cond delay="indefinite"/>
+                      </p:stCondLst>
+                      <p:childTnLst>
+                        <p:par>
+                          <p:cTn id="8" fill="hold">
+                            <p:stCondLst>
+                              <p:cond delay="0"/>
+                            </p:stCondLst>
+                            <p:childTnLst>
+                              <p:par>
+                                <p:cTn id="9" presetID="1" presetClass="entr" presetSubtype="0" fill="hold" nodeType="clickEffect">
+                                  <p:stCondLst>
+                                    <p:cond delay="0"/>
+                                  </p:stCondLst>
+                                  <p:childTnLst>
+                                    <p:set>
+                                      <p:cBhvr>
+                                        <p:cTn id="10" dur="1" fill="hold">
+                                          <p:stCondLst>
+                                            <p:cond delay="0"/>
+                                          </p:stCondLst>
+                                        </p:cTn>
+                                        <p:tgtEl>
+                                          <p:spTgt spid="3">
+                                            <p:txEl>
+                                              <p:pRg st="1" end="1"/>
+                                            </p:txEl>
+                                          </p:spTgt>
+                                        </p:tgtEl>
+                                        <p:attrNameLst>
+                                          <p:attrName>style.visibility</p:attrName>
+                                        </p:attrNameLst>
+                                      </p:cBhvr>
+                                      <p:to>
+                                        <p:strVal val="visible"/>
+                                      </p:to>
+                                    </p:set>
+                                  </p:childTnLst>
+                                </p:cTn>
+                              </p:par>
+                            </p:childTnLst>
+                          </p:cTn>
+                        </p:par>
+                      </p:childTnLst>
+                    </p:cTn>
+                  </p:par>
+                  <p:par>
+                    <p:cTn id="11" fill="hold">
+                      <p:stCondLst>
+                        <p:cond delay="indefinite"/>
+                      </p:stCondLst>
+                      <p:childTnLst>
+                        <p:par>
+                          <p:cTn id="12" fill="hold">
+                            <p:stCondLst>
+                              <p:cond delay="0"/>
+                            </p:stCondLst>
+                            <p:childTnLst>
+                              <p:par>
+                                <p:cTn id="13" presetID="1" presetClass="entr" presetSubtype="0" fill="hold" nodeType="clickEffect">
+                                  <p:stCondLst>
+                                    <p:cond delay="0"/>
+                                  </p:stCondLst>
+                                  <p:childTnLst>
+                                    <p:set>
+                                      <p:cBhvr>
+                                        <p:cTn id="14" dur="1" fill="hold">
+                                          <p:stCondLst>
+                                            <p:cond delay="0"/>
+                                          </p:stCondLst>
+                                        </p:cTn>
+                                        <p:tgtEl>
+                                          <p:spTgt spid="3">
+                                            <p:txEl>
+                                              <p:pRg st="3" end="3"/>
+                                            </p:txEl>
+                                          </p:spTgt>
+                                        </p:tgtEl>
+                                        <p:attrNameLst>
+                                          <p:attrName>style.visibility</p:attrName>
+                                        </p:attrNameLst>
+                                      </p:cBhvr>
+                                      <p:to>
+                                        <p:strVal val="visible"/>
+                                      </p:to>
+                                    </p:set>
+                                  </p:childTnLst>
+                                </p:cTn>
+                              </p:par>
+                            </p:childTnLst>
+                          </p:cTn>
+                        </p:par>
+                      </p:childTnLst>
+                    </p:cTn>
+                  </p:par>
+                  <p:par>
+                    <p:cTn id="15" fill="hold">
+                      <p:stCondLst>
+                        <p:cond delay="indefinite"/>
+                      </p:stCondLst>
+                      <p:childTnLst>
+                        <p:par>
+                          <p:cTn id="16" fill="hold">
+                            <p:stCondLst>
+                              <p:cond delay="0"/>
+                            </p:stCondLst>
+                            <p:childTnLst>
+                              <p:par>
+                                <p:cTn id="17" presetID="1" presetClass="entr" presetSubtype="0" fill="hold" nodeType="clickEffect">
+                                  <p:stCondLst>
+                                    <p:cond delay="0"/>
+                                  </p:stCondLst>
+                                  <p:childTnLst>
+                                    <p:set>
+                                      <p:cBhvr>
+                                        <p:cTn id="18" dur="1" fill="hold">
+                                          <p:stCondLst>
+                                            <p:cond delay="0"/>
+                                          </p:stCondLst>
+                                        </p:cTn>
+                                        <p:tgtEl>
+                                          <p:spTgt spid="3">
+                                            <p:txEl>
+                                              <p:pRg st="4" end="4"/>
+                                            </p:txEl>
+                                          </p:spTgt>
+                                        </p:tgtEl>
+                                        <p:attrNameLst>
+                                          <p:attrName>style.visibility</p:attrName>
+                                        </p:attrNameLst>
+                                      </p:cBhvr>
+                                      <p:to>
+                                        <p:strVal val="visible"/>
+                                      </p:to>
+                                    </p:set>
+                                  </p:childTnLst>
+                                </p:cTn>
+                              </p:par>
+                            </p:childTnLst>
+                          </p:cTn>
+                        </p:par>
+                      </p:childTnLst>
+                    </p:cTn>
+                  </p:par>
+                  <p:par>
+                    <p:cTn id="19" fill="hold">
+                      <p:stCondLst>
+                        <p:cond delay="indefinite"/>
+                      </p:stCondLst>
+                      <p:childTnLst>
+                        <p:par>
+                          <p:cTn id="20" fill="hold">
+                            <p:stCondLst>
+                              <p:cond delay="0"/>
+                            </p:stCondLst>
+                            <p:childTnLst>
+                              <p:par>
+                                <p:cTn id="21" presetID="1" presetClass="entr" presetSubtype="0" fill="hold" nodeType="clickEffect">
+                                  <p:stCondLst>
+                                    <p:cond delay="0"/>
+                                  </p:stCondLst>
+                                  <p:childTnLst>
+                                    <p:set>
+                                      <p:cBhvr>
+                                        <p:cTn id="22" dur="1" fill="hold">
+                                          <p:stCondLst>
+                                            <p:cond delay="0"/>
+                                          </p:stCondLst>
+                                        </p:cTn>
+                                        <p:tgtEl>
+                                          <p:spTgt spid="3">
+                                            <p:txEl>
+                                              <p:pRg st="5" end="5"/>
+                                            </p:txEl>
+                                          </p:spTgt>
+                                        </p:tgtEl>
+                                        <p:attrNameLst>
+                                          <p:attrName>style.visibility</p:attrName>
+                                        </p:attrNameLst>
+                                      </p:cBhvr>
+                                      <p:to>
+                                        <p:strVal val="visible"/>
+                                      </p:to>
+                                    </p:set>
+                                  </p:childTnLst>
+                                </p:cTn>
+                              </p:par>
+                            </p:childTnLst>
+                          </p:cTn>
+                        </p:par>
+                      </p:childTnLst>
+                    </p:cTn>
+                  </p:par>
+                  <p:par>
+                    <p:cTn id="23" fill="hold">
+                      <p:stCondLst>
+                        <p:cond delay="indefinite"/>
+                      </p:stCondLst>
+                      <p:childTnLst>
+                        <p:par>
+                          <p:cTn id="24" fill="hold">
+                            <p:stCondLst>
+                              <p:cond delay="0"/>
+                            </p:stCondLst>
+                            <p:childTnLst>
+                              <p:par>
+                                <p:cTn id="25" presetID="1" presetClass="entr" presetSubtype="0" fill="hold" nodeType="clickEffect">
+                                  <p:stCondLst>
+                                    <p:cond delay="0"/>
+                                  </p:stCondLst>
+                                  <p:childTnLst>
+                                    <p:set>
+                                      <p:cBhvr>
+                                        <p:cTn id="26" dur="1" fill="hold">
+                                          <p:stCondLst>
+                                            <p:cond delay="0"/>
+                                          </p:stCondLst>
+                                        </p:cTn>
+                                        <p:tgtEl>
+                                          <p:spTgt spid="3">
+                                            <p:txEl>
+                                              <p:pRg st="6" end="6"/>
+                                            </p:txEl>
+                                          </p:spTgt>
+                                        </p:tgtEl>
+                                        <p:attrNameLst>
+                                          <p:attrName>style.visibility</p:attrName>
+                                        </p:attrNameLst>
+                                      </p:cBhvr>
+                                      <p:to>
+                                        <p:strVal val="visible"/>
+                                      </p:to>
+                                    </p:set>
+                                  </p:childTnLst>
+                                </p:cTn>
+                              </p:par>
+                            </p:childTnLst>
+                          </p:cTn>
+                        </p:par>
+                      </p:childTnLst>
+                    </p:cTn>
+                  </p:par>
+                  <p:par>
+                    <p:cTn id="27" fill="hold">
+                      <p:stCondLst>
+                        <p:cond delay="indefinite"/>
+                      </p:stCondLst>
+                      <p:childTnLst>
+                        <p:par>
+                          <p:cTn id="28" fill="hold">
+                            <p:stCondLst>
+                              <p:cond delay="0"/>
+                            </p:stCondLst>
+                            <p:childTnLst>
+                              <p:par>
+                                <p:cTn id="29" presetID="1" presetClass="entr" presetSubtype="0" fill="hold" nodeType="clickEffect">
+                                  <p:stCondLst>
+                                    <p:cond delay="0"/>
+                                  </p:stCondLst>
+                                  <p:childTnLst>
+                                    <p:set>
+                                      <p:cBhvr>
+                                        <p:cTn id="30" dur="1" fill="hold">
+                                          <p:stCondLst>
+                                            <p:cond delay="0"/>
+                                          </p:stCondLst>
+                                        </p:cTn>
+                                        <p:tgtEl>
+                                          <p:spTgt spid="3">
+                                            <p:txEl>
+                                              <p:pRg st="7" end="7"/>
+                                            </p:txEl>
+                                          </p:spTgt>
+                                        </p:tgtEl>
+                                        <p:attrNameLst>
+                                          <p:attrName>style.visibility</p:attrName>
+                                        </p:attrNameLst>
+                                      </p:cBhvr>
+                                      <p:to>
+                                        <p:strVal val="visible"/>
+                                      </p:to>
+                                    </p:set>
+                                  </p:childTnLst>
+                                </p:cTn>
+                              </p:par>
+                            </p:childTnLst>
+                          </p:cTn>
+                        </p:par>
+                      </p:childTnLst>
+                    </p:cTn>
+                  </p:par>
+                  <p:par>
+                    <p:cTn id="31" fill="hold">
+                      <p:stCondLst>
+                        <p:cond delay="indefinite"/>
+                      </p:stCondLst>
+                      <p:childTnLst>
+                        <p:par>
+                          <p:cTn id="32" fill="hold">
+                            <p:stCondLst>
+                              <p:cond delay="0"/>
+                            </p:stCondLst>
+                            <p:childTnLst>
+                              <p:par>
+                                <p:cTn id="33" presetID="1" presetClass="entr" presetSubtype="0" fill="hold" nodeType="clickEffect">
+                                  <p:stCondLst>
+                                    <p:cond delay="0"/>
+                                  </p:stCondLst>
+                                  <p:childTnLst>
+                                    <p:set>
+                                      <p:cBhvr>
+                                        <p:cTn id="34" dur="1" fill="hold">
+                                          <p:stCondLst>
+                                            <p:cond delay="0"/>
+                                          </p:stCondLst>
+                                        </p:cTn>
+                                        <p:tgtEl>
+                                          <p:spTgt spid="3">
+                                            <p:txEl>
+                                              <p:pRg st="9" end="9"/>
+                                            </p:txEl>
+                                          </p:spTgt>
+                                        </p:tgtEl>
+                                        <p:attrNameLst>
+                                          <p:attrName>style.visibility</p:attrName>
+                                        </p:attrNameLst>
+                                      </p:cBhvr>
+                                      <p:to>
+                                        <p:strVal val="visible"/>
+                                      </p:to>
+                                    </p:set>
+                                  </p:childTnLst>
+                                </p:cTn>
+                              </p:par>
+                            </p:childTnLst>
+                          </p:cTn>
+                        </p:par>
+                      </p:childTnLst>
+                    </p:cTn>
+                  </p:par>
+                  <p:par>
+                    <p:cTn id="35" fill="hold">
+                      <p:stCondLst>
+                        <p:cond delay="indefinite"/>
+                      </p:stCondLst>
+                      <p:childTnLst>
+                        <p:par>
+                          <p:cTn id="36" fill="hold">
+                            <p:stCondLst>
+                              <p:cond delay="0"/>
+                            </p:stCondLst>
+                            <p:childTnLst>
+                              <p:par>
+                                <p:cTn id="37" presetID="1" presetClass="entr" presetSubtype="0" fill="hold" nodeType="clickEffect">
+                                  <p:stCondLst>
+                                    <p:cond delay="0"/>
+                                  </p:stCondLst>
+                                  <p:childTnLst>
+                                    <p:set>
+                                      <p:cBhvr>
+                                        <p:cTn id="38" dur="1" fill="hold">
+                                          <p:stCondLst>
+                                            <p:cond delay="0"/>
+                                          </p:stCondLst>
+                                        </p:cTn>
+                                        <p:tgtEl>
+                                          <p:spTgt spid="3">
+                                            <p:txEl>
+                                              <p:pRg st="10" end="10"/>
+                                            </p:txEl>
+                                          </p:spTgt>
+                                        </p:tgtEl>
+                                        <p:attrNameLst>
+                                          <p:attrName>style.visibility</p:attrName>
+                                        </p:attrNameLst>
+                                      </p:cBhvr>
+                                      <p:to>
+                                        <p:strVal val="visible"/>
+                                      </p:to>
+                                    </p:set>
+                                  </p:childTnLst>
+                                </p:cTn>
+                              </p:par>
+                            </p:childTnLst>
+                          </p:cTn>
+                        </p:par>
+                      </p:childTnLst>
+                    </p:cTn>
+                  </p:par>
+                </p:childTnLst>
+              </p:cTn>
+              <p:prevCondLst>
+                <p:cond evt="onPrev" delay="0">
+                  <p:tgtEl>
+                    <p:sldTgt/>
+                  </p:tgtEl>
+                </p:cond>
+              </p:prevCondLst>
+              <p:nextCondLst>
+                <p:cond evt="onNext" delay="0">
+                  <p:tgtEl>
+                    <p:sldTgt/>
+                  </p:tgtEl>
+                </p:cond>
+              </p:nextCondLst>
+            </p:seq>
+          </p:childTnLst>
+        </p:cTn>
+      </p:par>
+    </p:tnLst>
+  </p:timing>
+</p:sld>
+</file>
+
+<file path=ppt/slides/slide6.xml><?xml version="1.0" encoding="utf-8"?>
+<p:sld xmlns:a="http://schemas.openxmlformats.org/drawingml/2006/main" xmlns:r="http://schemas.openxmlformats.org/officeDocument/2006/relationships" xmlns:p="http://schemas.openxmlformats.org/presentationml/2006/main">
+  <p:cSld>
+    <p:spTree>
+      <p:nvGrpSpPr>
+        <p:cNvPr id="1" name="">
+          <a:extLst>
+            <a:ext uri="{FF2B5EF4-FFF2-40B4-BE49-F238E27FC236}">
+              <a16:creationId xmlns:a16="http://schemas.microsoft.com/office/drawing/2014/main" id="{FCD8968A-F75F-7263-50D7-75791B9A7C13}"/>
+            </a:ext>
+          </a:extLst>
+        </p:cNvPr>
+        <p:cNvGrpSpPr/>
+        <p:nvPr/>
+      </p:nvGrpSpPr>
+      <p:grpSpPr>
+        <a:xfrm>
+          <a:off x="0" y="0"/>
+          <a:ext cx="0" cy="0"/>
+          <a:chOff x="0" y="0"/>
+          <a:chExt cx="0" cy="0"/>
+        </a:xfrm>
+      </p:grpSpPr>
+      <p:sp>
+        <p:nvSpPr>
+          <p:cNvPr id="2" name="Title 1">
+            <a:extLst>
+              <a:ext uri="{FF2B5EF4-FFF2-40B4-BE49-F238E27FC236}">
+                <a16:creationId xmlns:a16="http://schemas.microsoft.com/office/drawing/2014/main" id="{F7AF246D-7A97-8661-9CA0-D068C540413D}"/>
+              </a:ext>
+            </a:extLst>
+          </p:cNvPr>
+          <p:cNvSpPr>
+            <a:spLocks noGrp="1"/>
+          </p:cNvSpPr>
+          <p:nvPr>
+            <p:ph type="ctrTitle"/>
+          </p:nvPr>
+        </p:nvSpPr>
+        <p:spPr>
+          <a:xfrm>
+            <a:off x="1413468" y="290725"/>
+            <a:ext cx="9144000" cy="583482"/>
+          </a:xfrm>
+        </p:spPr>
+        <p:txBody>
+          <a:bodyPr>
+            <a:normAutofit fontScale="90000"/>
+          </a:bodyPr>
+          <a:lstStyle/>
+          <a:p>
+            <a:r>
+              <a:rPr lang="en-US" sz="3600" dirty="0">
+                <a:solidFill>
+                  <a:srgbClr val="00B0F0"/>
+                </a:solidFill>
+              </a:rPr>
+              <a:t>Business Value</a:t>
+            </a:r>
+            <a:r>
+              <a:rPr lang="en-US" sz="3600" dirty="0"/>
+              <a:t> of Big Data Modeling &amp; Analytics?</a:t>
+            </a:r>
+          </a:p>
+        </p:txBody>
+      </p:sp>
+      <p:sp>
+        <p:nvSpPr>
+          <p:cNvPr id="3" name="Subtitle 2">
+            <a:extLst>
+              <a:ext uri="{FF2B5EF4-FFF2-40B4-BE49-F238E27FC236}">
+                <a16:creationId xmlns:a16="http://schemas.microsoft.com/office/drawing/2014/main" id="{315B49BE-0C8C-8FDB-F16E-E88633B66ADF}"/>
+              </a:ext>
+            </a:extLst>
+          </p:cNvPr>
+          <p:cNvSpPr>
+            <a:spLocks noGrp="1"/>
+          </p:cNvSpPr>
+          <p:nvPr>
+            <p:ph type="subTitle" idx="1"/>
+          </p:nvPr>
+        </p:nvSpPr>
+        <p:spPr>
+          <a:xfrm>
+            <a:off x="1307184" y="994787"/>
+            <a:ext cx="9144000" cy="5214301"/>
+          </a:xfrm>
+        </p:spPr>
+        <p:txBody>
+          <a:bodyPr>
+            <a:normAutofit fontScale="92500" lnSpcReduction="10000"/>
+          </a:bodyPr>
+          <a:lstStyle/>
+          <a:p>
+            <a:pPr marL="742950" indent="-742950">
+              <a:buFont typeface="+mj-lt"/>
+              <a:buAutoNum type="arabicPeriod"/>
+            </a:pPr>
+            <a:r>
+              <a:rPr lang="en-US" sz="3600" dirty="0">
+                <a:solidFill>
+                  <a:schemeClr val="tx1"/>
+                </a:solidFill>
+              </a:rPr>
+              <a:t>Faster, evidence-based decisions</a:t>
+            </a:r>
+          </a:p>
+          <a:p>
+            <a:pPr marL="742950" indent="-742950">
+              <a:buFont typeface="+mj-lt"/>
+              <a:buAutoNum type="arabicPeriod"/>
+            </a:pPr>
+            <a:r>
+              <a:rPr lang="en-US" sz="3600" dirty="0">
+                <a:solidFill>
+                  <a:schemeClr val="tx1"/>
+                </a:solidFill>
+              </a:rPr>
+              <a:t>Improved customer experiences</a:t>
+            </a:r>
+          </a:p>
+          <a:p>
+            <a:pPr marL="742950" indent="-742950">
+              <a:buFont typeface="+mj-lt"/>
+              <a:buAutoNum type="arabicPeriod"/>
+            </a:pPr>
+            <a:r>
+              <a:rPr lang="en-US" sz="3600" dirty="0">
+                <a:solidFill>
+                  <a:schemeClr val="tx1"/>
+                </a:solidFill>
+              </a:rPr>
+              <a:t>Fraud and risk detection</a:t>
+            </a:r>
+          </a:p>
+          <a:p>
+            <a:pPr marL="742950" indent="-742950">
+              <a:buFont typeface="+mj-lt"/>
+              <a:buAutoNum type="arabicPeriod"/>
+            </a:pPr>
+            <a:r>
+              <a:rPr lang="en-US" sz="3600" dirty="0">
+                <a:solidFill>
+                  <a:schemeClr val="tx1"/>
+                </a:solidFill>
+              </a:rPr>
+              <a:t>Operational efficiency</a:t>
+            </a:r>
+          </a:p>
+          <a:p>
+            <a:pPr marL="742950" indent="-742950">
+              <a:buFont typeface="+mj-lt"/>
+              <a:buAutoNum type="arabicPeriod"/>
+            </a:pPr>
+            <a:r>
+              <a:rPr lang="en-US" sz="3600" dirty="0">
+                <a:solidFill>
+                  <a:schemeClr val="tx1"/>
+                </a:solidFill>
+              </a:rPr>
+              <a:t>Forecasting and innovation</a:t>
+            </a:r>
+          </a:p>
+          <a:p>
+            <a:pPr marL="742950" indent="-742950">
+              <a:buFont typeface="+mj-lt"/>
+              <a:buAutoNum type="arabicPeriod"/>
+            </a:pPr>
+            <a:r>
+              <a:rPr lang="en-US" sz="3600" dirty="0">
+                <a:solidFill>
+                  <a:schemeClr val="tx1"/>
+                </a:solidFill>
+              </a:rPr>
+              <a:t>Building AI-LLM models</a:t>
+            </a:r>
+          </a:p>
+          <a:p>
+            <a:endParaRPr lang="en-US" sz="3600" dirty="0">
+              <a:solidFill>
+                <a:schemeClr val="tx1"/>
+              </a:solidFill>
+            </a:endParaRPr>
+          </a:p>
+          <a:p>
+            <a:pPr marL="571500" indent="-571500">
+              <a:buFont typeface="Wingdings" pitchFamily="2" charset="2"/>
+              <a:buChar char="Ø"/>
+            </a:pPr>
+            <a:r>
+              <a:rPr lang="en-US" sz="3600" dirty="0">
+                <a:solidFill>
+                  <a:srgbClr val="00B0F0"/>
+                </a:solidFill>
+              </a:rPr>
+              <a:t>Strong analytics </a:t>
+            </a:r>
+            <a:r>
+              <a:rPr lang="en-US" sz="3600" dirty="0">
+                <a:solidFill>
+                  <a:schemeClr val="tx1"/>
+                </a:solidFill>
+              </a:rPr>
+              <a:t>depends</a:t>
+            </a:r>
+            <a:r>
+              <a:rPr lang="en-US" sz="3600" dirty="0">
+                <a:solidFill>
+                  <a:srgbClr val="00B0F0"/>
+                </a:solidFill>
+              </a:rPr>
+              <a:t> on a scalable, accurate, </a:t>
+            </a:r>
+          </a:p>
+          <a:p>
+            <a:pPr marL="571500" indent="-571500">
+              <a:buFont typeface="Wingdings" pitchFamily="2" charset="2"/>
+              <a:buChar char="Ø"/>
+            </a:pPr>
+            <a:r>
+              <a:rPr lang="en-US" sz="3600" dirty="0">
+                <a:solidFill>
+                  <a:srgbClr val="00B0F0"/>
+                </a:solidFill>
+              </a:rPr>
+              <a:t>and well-governed data model.</a:t>
+            </a:r>
+          </a:p>
+        </p:txBody>
+      </p:sp>
+    </p:spTree>
+    <p:extLst>
+      <p:ext uri="{BB962C8B-B14F-4D97-AF65-F5344CB8AC3E}">
+        <p14:creationId xmlns:p14="http://schemas.microsoft.com/office/powerpoint/2010/main" val="1219775688"/>
+      </p:ext>
+    </p:extLst>
+  </p:cSld>
+  <p:clrMapOvr>
+    <a:masterClrMapping/>
+  </p:clrMapOvr>
+  <p:timing>
+    <p:tnLst>
+      <p:par>
+        <p:cTn id="1" dur="indefinite" restart="never" nodeType="tmRoot">
+          <p:childTnLst>
+            <p:seq concurrent="1" nextAc="seek">
+              <p:cTn id="2" dur="indefinite" nodeType="mainSeq">
+                <p:childTnLst>
+                  <p:par>
+                    <p:cTn id="3" fill="hold">
+                      <p:stCondLst>
+                        <p:cond delay="indefinite"/>
+                      </p:stCondLst>
+                      <p:childTnLst>
+                        <p:par>
+                          <p:cTn id="4" fill="hold">
+                            <p:stCondLst>
+                              <p:cond delay="0"/>
+                            </p:stCondLst>
+                            <p:childTnLst>
+                              <p:par>
+                                <p:cTn id="5" presetID="1" presetClass="entr" presetSubtype="0" fill="hold" nodeType="clickEffect">
+                                  <p:stCondLst>
+                                    <p:cond delay="0"/>
+                                  </p:stCondLst>
+                                  <p:childTnLst>
+                                    <p:set>
+                                      <p:cBhvr>
+                                        <p:cTn id="6" dur="1" fill="hold">
+                                          <p:stCondLst>
+                                            <p:cond delay="0"/>
+                                          </p:stCondLst>
+                                        </p:cTn>
+                                        <p:tgtEl>
+                                          <p:spTgt spid="3">
+                                            <p:txEl>
+                                              <p:pRg st="0" end="0"/>
+                                            </p:txEl>
+                                          </p:spTgt>
+                                        </p:tgtEl>
+                                        <p:attrNameLst>
+                                          <p:attrName>style.visibility</p:attrName>
+                                        </p:attrNameLst>
+                                      </p:cBhvr>
+                                      <p:to>
+                                        <p:strVal val="visible"/>
+                                      </p:to>
+                                    </p:set>
+                                  </p:childTnLst>
+                                </p:cTn>
+                              </p:par>
+                            </p:childTnLst>
+                          </p:cTn>
+                        </p:par>
+                      </p:childTnLst>
+                    </p:cTn>
+                  </p:par>
+                  <p:par>
+                    <p:cTn id="7" fill="hold">
+                      <p:stCondLst>
+                        <p:cond delay="indefinite"/>
+                      </p:stCondLst>
+                      <p:childTnLst>
+                        <p:par>
+                          <p:cTn id="8" fill="hold">
+                            <p:stCondLst>
+                              <p:cond delay="0"/>
+                            </p:stCondLst>
+                            <p:childTnLst>
+                              <p:par>
+                                <p:cTn id="9" presetID="1" presetClass="entr" presetSubtype="0" fill="hold" nodeType="clickEffect">
+                                  <p:stCondLst>
+                                    <p:cond delay="0"/>
+                                  </p:stCondLst>
+                                  <p:childTnLst>
+                                    <p:set>
+                                      <p:cBhvr>
+                                        <p:cTn id="10" dur="1" fill="hold">
+                                          <p:stCondLst>
+                                            <p:cond delay="0"/>
+                                          </p:stCondLst>
+                                        </p:cTn>
+                                        <p:tgtEl>
+                                          <p:spTgt spid="3">
+                                            <p:txEl>
+                                              <p:pRg st="1" end="1"/>
+                                            </p:txEl>
+                                          </p:spTgt>
+                                        </p:tgtEl>
+                                        <p:attrNameLst>
+                                          <p:attrName>style.visibility</p:attrName>
+                                        </p:attrNameLst>
+                                      </p:cBhvr>
+                                      <p:to>
+                                        <p:strVal val="visible"/>
+                                      </p:to>
+                                    </p:set>
+                                  </p:childTnLst>
+                                </p:cTn>
+                              </p:par>
+                            </p:childTnLst>
+                          </p:cTn>
+                        </p:par>
+                      </p:childTnLst>
+                    </p:cTn>
+                  </p:par>
+                  <p:par>
+                    <p:cTn id="11" fill="hold">
+                      <p:stCondLst>
+                        <p:cond delay="indefinite"/>
+                      </p:stCondLst>
+                      <p:childTnLst>
+                        <p:par>
+                          <p:cTn id="12" fill="hold">
+                            <p:stCondLst>
+                              <p:cond delay="0"/>
+                            </p:stCondLst>
+                            <p:childTnLst>
+                              <p:par>
+                                <p:cTn id="13" presetID="1" presetClass="entr" presetSubtype="0" fill="hold" nodeType="clickEffect">
+                                  <p:stCondLst>
+                                    <p:cond delay="0"/>
+                                  </p:stCondLst>
+                                  <p:childTnLst>
+                                    <p:set>
+                                      <p:cBhvr>
+                                        <p:cTn id="14" dur="1" fill="hold">
+                                          <p:stCondLst>
+                                            <p:cond delay="0"/>
+                                          </p:stCondLst>
+                                        </p:cTn>
+                                        <p:tgtEl>
+                                          <p:spTgt spid="3">
+                                            <p:txEl>
+                                              <p:pRg st="2" end="2"/>
+                                            </p:txEl>
+                                          </p:spTgt>
+                                        </p:tgtEl>
+                                        <p:attrNameLst>
+                                          <p:attrName>style.visibility</p:attrName>
+                                        </p:attrNameLst>
+                                      </p:cBhvr>
+                                      <p:to>
+                                        <p:strVal val="visible"/>
+                                      </p:to>
+                                    </p:set>
+                                  </p:childTnLst>
+                                </p:cTn>
+                              </p:par>
+                            </p:childTnLst>
+                          </p:cTn>
+                        </p:par>
+                      </p:childTnLst>
+                    </p:cTn>
+                  </p:par>
+                  <p:par>
+                    <p:cTn id="15" fill="hold">
+                      <p:stCondLst>
+                        <p:cond delay="indefinite"/>
+                      </p:stCondLst>
+                      <p:childTnLst>
+                        <p:par>
+                          <p:cTn id="16" fill="hold">
+                            <p:stCondLst>
+                              <p:cond delay="0"/>
+                            </p:stCondLst>
+                            <p:childTnLst>
+                              <p:par>
+                                <p:cTn id="17" presetID="1" presetClass="entr" presetSubtype="0" fill="hold" nodeType="clickEffect">
+                                  <p:stCondLst>
+                                    <p:cond delay="0"/>
+                                  </p:stCondLst>
+                                  <p:childTnLst>
+                                    <p:set>
+                                      <p:cBhvr>
+                                        <p:cTn id="18" dur="1" fill="hold">
+                                          <p:stCondLst>
+                                            <p:cond delay="0"/>
+                                          </p:stCondLst>
+                                        </p:cTn>
+                                        <p:tgtEl>
+                                          <p:spTgt spid="3">
+                                            <p:txEl>
+                                              <p:pRg st="3" end="3"/>
+                                            </p:txEl>
+                                          </p:spTgt>
+                                        </p:tgtEl>
+                                        <p:attrNameLst>
+                                          <p:attrName>style.visibility</p:attrName>
+                                        </p:attrNameLst>
+                                      </p:cBhvr>
+                                      <p:to>
+                                        <p:strVal val="visible"/>
+                                      </p:to>
+                                    </p:set>
+                                  </p:childTnLst>
+                                </p:cTn>
+                              </p:par>
+                            </p:childTnLst>
+                          </p:cTn>
+                        </p:par>
+                      </p:childTnLst>
+                    </p:cTn>
+                  </p:par>
+                  <p:par>
+                    <p:cTn id="19" fill="hold">
+                      <p:stCondLst>
+                        <p:cond delay="indefinite"/>
+                      </p:stCondLst>
+                      <p:childTnLst>
+                        <p:par>
+                          <p:cTn id="20" fill="hold">
+                            <p:stCondLst>
+                              <p:cond delay="0"/>
+                            </p:stCondLst>
+                            <p:childTnLst>
+                              <p:par>
+                                <p:cTn id="21" presetID="1" presetClass="entr" presetSubtype="0" fill="hold" nodeType="clickEffect">
+                                  <p:stCondLst>
+                                    <p:cond delay="0"/>
+                                  </p:stCondLst>
+                                  <p:childTnLst>
+                                    <p:set>
+                                      <p:cBhvr>
+                                        <p:cTn id="22" dur="1" fill="hold">
+                                          <p:stCondLst>
+                                            <p:cond delay="0"/>
+                                          </p:stCondLst>
+                                        </p:cTn>
+                                        <p:tgtEl>
+                                          <p:spTgt spid="3">
+                                            <p:txEl>
+                                              <p:pRg st="4" end="4"/>
+                                            </p:txEl>
+                                          </p:spTgt>
+                                        </p:tgtEl>
+                                        <p:attrNameLst>
+                                          <p:attrName>style.visibility</p:attrName>
+                                        </p:attrNameLst>
+                                      </p:cBhvr>
+                                      <p:to>
+                                        <p:strVal val="visible"/>
+                                      </p:to>
+                                    </p:set>
+                                  </p:childTnLst>
+                                </p:cTn>
+                              </p:par>
+                            </p:childTnLst>
+                          </p:cTn>
+                        </p:par>
+                      </p:childTnLst>
+                    </p:cTn>
+                  </p:par>
+                  <p:par>
+                    <p:cTn id="23" fill="hold">
+                      <p:stCondLst>
+                        <p:cond delay="indefinite"/>
+                      </p:stCondLst>
+                      <p:childTnLst>
+                        <p:par>
+                          <p:cTn id="24" fill="hold">
+                            <p:stCondLst>
+                              <p:cond delay="0"/>
+                            </p:stCondLst>
+                            <p:childTnLst>
+                              <p:par>
+                                <p:cTn id="25" presetID="1" presetClass="entr" presetSubtype="0" fill="hold" nodeType="clickEffect">
+                                  <p:stCondLst>
+                                    <p:cond delay="0"/>
+                                  </p:stCondLst>
+                                  <p:childTnLst>
+                                    <p:set>
+                                      <p:cBhvr>
+                                        <p:cTn id="26" dur="1" fill="hold">
+                                          <p:stCondLst>
+                                            <p:cond delay="0"/>
+                                          </p:stCondLst>
+                                        </p:cTn>
+                                        <p:tgtEl>
+                                          <p:spTgt spid="3">
+                                            <p:txEl>
+                                              <p:pRg st="5" end="5"/>
+                                            </p:txEl>
+                                          </p:spTgt>
+                                        </p:tgtEl>
+                                        <p:attrNameLst>
+                                          <p:attrName>style.visibility</p:attrName>
+                                        </p:attrNameLst>
+                                      </p:cBhvr>
+                                      <p:to>
+                                        <p:strVal val="visible"/>
+                                      </p:to>
+                                    </p:set>
+                                  </p:childTnLst>
+                                </p:cTn>
+                              </p:par>
+                            </p:childTnLst>
+                          </p:cTn>
+                        </p:par>
+                      </p:childTnLst>
+                    </p:cTn>
+                  </p:par>
+                  <p:par>
+                    <p:cTn id="27" fill="hold">
+                      <p:stCondLst>
+                        <p:cond delay="indefinite"/>
+                      </p:stCondLst>
+                      <p:childTnLst>
+                        <p:par>
+                          <p:cTn id="28" fill="hold">
+                            <p:stCondLst>
+                              <p:cond delay="0"/>
+                            </p:stCondLst>
+                            <p:childTnLst>
+                              <p:par>
+                                <p:cTn id="29" presetID="1" presetClass="entr" presetSubtype="0" fill="hold" nodeType="clickEffect">
+                                  <p:stCondLst>
+                                    <p:cond delay="0"/>
+                                  </p:stCondLst>
+                                  <p:childTnLst>
+                                    <p:set>
+                                      <p:cBhvr>
+                                        <p:cTn id="30" dur="1" fill="hold">
+                                          <p:stCondLst>
+                                            <p:cond delay="0"/>
+                                          </p:stCondLst>
+                                        </p:cTn>
+                                        <p:tgtEl>
+                                          <p:spTgt spid="3">
+                                            <p:txEl>
+                                              <p:pRg st="7" end="7"/>
+                                            </p:txEl>
+                                          </p:spTgt>
+                                        </p:tgtEl>
+                                        <p:attrNameLst>
+                                          <p:attrName>style.visibility</p:attrName>
+                                        </p:attrNameLst>
+                                      </p:cBhvr>
+                                      <p:to>
+                                        <p:strVal val="visible"/>
+                                      </p:to>
+                                    </p:set>
+                                  </p:childTnLst>
+                                </p:cTn>
+                              </p:par>
+                            </p:childTnLst>
+                          </p:cTn>
+                        </p:par>
+                      </p:childTnLst>
+                    </p:cTn>
+                  </p:par>
+                  <p:par>
+                    <p:cTn id="31" fill="hold">
+                      <p:stCondLst>
+                        <p:cond delay="indefinite"/>
+                      </p:stCondLst>
+                      <p:childTnLst>
+                        <p:par>
+                          <p:cTn id="32" fill="hold">
+                            <p:stCondLst>
+                              <p:cond delay="0"/>
+                            </p:stCondLst>
+                            <p:childTnLst>
+                              <p:par>
+                                <p:cTn id="33" presetID="1" presetClass="entr" presetSubtype="0" fill="hold" nodeType="clickEffect">
+                                  <p:stCondLst>
+                                    <p:cond delay="0"/>
+                                  </p:stCondLst>
+                                  <p:childTnLst>
+                                    <p:set>
+                                      <p:cBhvr>
+                                        <p:cTn id="34" dur="1" fill="hold">
+                                          <p:stCondLst>
+                                            <p:cond delay="0"/>
+                                          </p:stCondLst>
+                                        </p:cTn>
+                                        <p:tgtEl>
+                                          <p:spTgt spid="3">
+                                            <p:txEl>
+                                              <p:pRg st="8" end="8"/>
+                                            </p:txEl>
+                                          </p:spTgt>
+                                        </p:tgtEl>
+                                        <p:attrNameLst>
+                                          <p:attrName>style.visibility</p:attrName>
+                                        </p:attrNameLst>
+                                      </p:cBhvr>
+                                      <p:to>
+                                        <p:strVal val="visible"/>
+                                      </p:to>
+                                    </p:set>
+                                  </p:childTnLst>
+                                </p:cTn>
+                              </p:par>
+                            </p:childTnLst>
+                          </p:cTn>
+                        </p:par>
+                      </p:childTnLst>
+                    </p:cTn>
+                  </p:par>
+                </p:childTnLst>
+              </p:cTn>
+              <p:prevCondLst>
+                <p:cond evt="onPrev" delay="0">
+                  <p:tgtEl>
+                    <p:sldTgt/>
+                  </p:tgtEl>
+                </p:cond>
+              </p:prevCondLst>
+              <p:nextCondLst>
+                <p:cond evt="onNext" delay="0">
+                  <p:tgtEl>
+                    <p:sldTgt/>
+                  </p:tgtEl>
+                </p:cond>
+              </p:nextCondLst>
+            </p:seq>
+          </p:childTnLst>
+        </p:cTn>
+      </p:par>
+    </p:tnLst>
+  </p:timing>
+</p:sld>
+</file>
+
+<file path=ppt/slides/slide7.xml><?xml version="1.0" encoding="utf-8"?>
+<p:sld xmlns:a="http://schemas.openxmlformats.org/drawingml/2006/main" xmlns:r="http://schemas.openxmlformats.org/officeDocument/2006/relationships" xmlns:p="http://schemas.openxmlformats.org/presentationml/2006/main">
+  <p:cSld>
+    <p:spTree>
+      <p:nvGrpSpPr>
+        <p:cNvPr id="1" name="">
+          <a:extLst>
+            <a:ext uri="{FF2B5EF4-FFF2-40B4-BE49-F238E27FC236}">
+              <a16:creationId xmlns:a16="http://schemas.microsoft.com/office/drawing/2014/main" id="{148AE3BA-5316-BF9D-F70F-56560679EA64}"/>
+            </a:ext>
+          </a:extLst>
+        </p:cNvPr>
+        <p:cNvGrpSpPr/>
+        <p:nvPr/>
+      </p:nvGrpSpPr>
+      <p:grpSpPr>
+        <a:xfrm>
+          <a:off x="0" y="0"/>
+          <a:ext cx="0" cy="0"/>
+          <a:chOff x="0" y="0"/>
+          <a:chExt cx="0" cy="0"/>
+        </a:xfrm>
+      </p:grpSpPr>
+      <p:sp>
+        <p:nvSpPr>
+          <p:cNvPr id="2" name="Title 1">
+            <a:extLst>
+              <a:ext uri="{FF2B5EF4-FFF2-40B4-BE49-F238E27FC236}">
+                <a16:creationId xmlns:a16="http://schemas.microsoft.com/office/drawing/2014/main" id="{AFAF7236-BD85-4A18-23D9-EB2B61B0FDD8}"/>
+              </a:ext>
+            </a:extLst>
+          </p:cNvPr>
+          <p:cNvSpPr>
+            <a:spLocks noGrp="1"/>
+          </p:cNvSpPr>
+          <p:nvPr>
+            <p:ph type="ctrTitle"/>
+          </p:nvPr>
+        </p:nvSpPr>
+        <p:spPr>
+          <a:xfrm>
+            <a:off x="1524000" y="1122364"/>
+            <a:ext cx="9144000" cy="716376"/>
+          </a:xfrm>
+        </p:spPr>
+        <p:txBody>
+          <a:bodyPr>
+            <a:normAutofit fontScale="90000"/>
+          </a:bodyPr>
+          <a:lstStyle/>
+          <a:p>
+            <a:r>
+              <a:rPr lang="en-US" dirty="0"/>
+              <a:t>Main Course Components:</a:t>
+            </a:r>
+          </a:p>
+        </p:txBody>
+      </p:sp>
+      <p:sp>
+        <p:nvSpPr>
+          <p:cNvPr id="3" name="Subtitle 2">
+            <a:extLst>
+              <a:ext uri="{FF2B5EF4-FFF2-40B4-BE49-F238E27FC236}">
+                <a16:creationId xmlns:a16="http://schemas.microsoft.com/office/drawing/2014/main" id="{D2A3236A-EEC5-EDBF-E424-319C91C752D7}"/>
+              </a:ext>
+            </a:extLst>
+          </p:cNvPr>
+          <p:cNvSpPr>
+            <a:spLocks noGrp="1"/>
+          </p:cNvSpPr>
+          <p:nvPr>
+            <p:ph type="subTitle" idx="1"/>
+          </p:nvPr>
+        </p:nvSpPr>
+        <p:spPr>
+          <a:xfrm>
+            <a:off x="1307184" y="2074410"/>
+            <a:ext cx="9144000" cy="4134677"/>
+          </a:xfrm>
+        </p:spPr>
+        <p:txBody>
+          <a:bodyPr>
+            <a:normAutofit/>
+          </a:bodyPr>
+          <a:lstStyle/>
+          <a:p>
+            <a:pPr algn="l"/>
+            <a:r>
+              <a:rPr lang="en-US" sz="3600" dirty="0"/>
+              <a:t>1. </a:t>
+            </a:r>
+            <a:r>
+              <a:rPr lang="en-US" sz="3600" dirty="0">
+                <a:solidFill>
+                  <a:srgbClr val="00B0F0"/>
+                </a:solidFill>
+              </a:rPr>
+              <a:t>Introduction to MapReduce Paradigm (25%)</a:t>
+            </a:r>
+          </a:p>
+          <a:p>
+            <a:pPr algn="l"/>
+            <a:r>
+              <a:rPr lang="en-US" sz="3600" dirty="0"/>
+              <a:t>2. </a:t>
+            </a:r>
+            <a:r>
+              <a:rPr lang="en-US" sz="3600" dirty="0">
+                <a:solidFill>
+                  <a:srgbClr val="FF0000"/>
+                </a:solidFill>
+              </a:rPr>
+              <a:t>Spark and PySpark (60%)</a:t>
+            </a:r>
+          </a:p>
+          <a:p>
+            <a:pPr algn="l"/>
+            <a:r>
+              <a:rPr lang="en-US" sz="3600" dirty="0"/>
+              <a:t>3. </a:t>
+            </a:r>
+            <a:r>
+              <a:rPr lang="en-US" sz="3600" dirty="0">
+                <a:solidFill>
+                  <a:srgbClr val="00B050"/>
+                </a:solidFill>
+              </a:rPr>
+              <a:t>Serverless SQL Access to Big Data (15%)</a:t>
+            </a:r>
+            <a:endParaRPr lang="en-US" sz="1200" dirty="0">
+              <a:solidFill>
+                <a:srgbClr val="00B050"/>
+              </a:solidFill>
+            </a:endParaRPr>
+          </a:p>
+          <a:p>
+            <a:pPr marL="800100" lvl="1" indent="-342900" algn="l">
+              <a:buFont typeface="+mj-lt"/>
+              <a:buAutoNum type="arabicPeriod"/>
+            </a:pPr>
+            <a:endParaRPr lang="en-US" sz="1200" dirty="0"/>
+          </a:p>
+        </p:txBody>
+      </p:sp>
+    </p:spTree>
+    <p:extLst>
+      <p:ext uri="{BB962C8B-B14F-4D97-AF65-F5344CB8AC3E}">
+        <p14:creationId xmlns:p14="http://schemas.microsoft.com/office/powerpoint/2010/main" val="3610126460"/>
+      </p:ext>
+    </p:extLst>
+  </p:cSld>
+  <p:clrMapOvr>
+    <a:masterClrMapping/>
+  </p:clrMapOvr>
+  <p:timing>
+    <p:tnLst>
+      <p:par>
+        <p:cTn id="1" dur="indefinite" restart="never" nodeType="tmRoot">
+          <p:childTnLst>
+            <p:seq concurrent="1" nextAc="seek">
+              <p:cTn id="2" dur="indefinite" nodeType="mainSeq">
+                <p:childTnLst>
+                  <p:par>
+                    <p:cTn id="3" fill="hold">
+                      <p:stCondLst>
+                        <p:cond delay="indefinite"/>
+                      </p:stCondLst>
+                      <p:childTnLst>
+                        <p:par>
+                          <p:cTn id="4" fill="hold">
+                            <p:stCondLst>
+                              <p:cond delay="0"/>
+                            </p:stCondLst>
+                            <p:childTnLst>
+                              <p:par>
+                                <p:cTn id="5" presetID="1" presetClass="entr" presetSubtype="0" fill="hold" nodeType="clickEffect">
+                                  <p:stCondLst>
+                                    <p:cond delay="0"/>
+                                  </p:stCondLst>
+                                  <p:childTnLst>
+                                    <p:set>
+                                      <p:cBhvr>
+                                        <p:cTn id="6" dur="1" fill="hold">
+                                          <p:stCondLst>
+                                            <p:cond delay="0"/>
+                                          </p:stCondLst>
+                                        </p:cTn>
+                                        <p:tgtEl>
+                                          <p:spTgt spid="3">
+                                            <p:txEl>
+                                              <p:pRg st="0" end="0"/>
+                                            </p:txEl>
+                                          </p:spTgt>
+                                        </p:tgtEl>
+                                        <p:attrNameLst>
+                                          <p:attrName>style.visibility</p:attrName>
+                                        </p:attrNameLst>
+                                      </p:cBhvr>
+                                      <p:to>
+                                        <p:strVal val="visible"/>
+                                      </p:to>
+                                    </p:set>
+                                  </p:childTnLst>
+                                </p:cTn>
+                              </p:par>
+                            </p:childTnLst>
+                          </p:cTn>
+                        </p:par>
+                      </p:childTnLst>
+                    </p:cTn>
+                  </p:par>
+                  <p:par>
+                    <p:cTn id="7" fill="hold">
+                      <p:stCondLst>
+                        <p:cond delay="indefinite"/>
+                      </p:stCondLst>
+                      <p:childTnLst>
+                        <p:par>
+                          <p:cTn id="8" fill="hold">
+                            <p:stCondLst>
+                              <p:cond delay="0"/>
+                            </p:stCondLst>
+                            <p:childTnLst>
+                              <p:par>
+                                <p:cTn id="9" presetID="1" presetClass="entr" presetSubtype="0" fill="hold" nodeType="clickEffect">
+                                  <p:stCondLst>
+                                    <p:cond delay="0"/>
+                                  </p:stCondLst>
+                                  <p:childTnLst>
+                                    <p:set>
+                                      <p:cBhvr>
+                                        <p:cTn id="10" dur="1" fill="hold">
+                                          <p:stCondLst>
+                                            <p:cond delay="0"/>
+                                          </p:stCondLst>
+                                        </p:cTn>
+                                        <p:tgtEl>
+                                          <p:spTgt spid="3">
+                                            <p:txEl>
+                                              <p:pRg st="1" end="1"/>
+                                            </p:txEl>
+                                          </p:spTgt>
+                                        </p:tgtEl>
+                                        <p:attrNameLst>
+                                          <p:attrName>style.visibility</p:attrName>
+                                        </p:attrNameLst>
+                                      </p:cBhvr>
+                                      <p:to>
+                                        <p:strVal val="visible"/>
+                                      </p:to>
+                                    </p:set>
+                                  </p:childTnLst>
+                                </p:cTn>
+                              </p:par>
+                            </p:childTnLst>
+                          </p:cTn>
+                        </p:par>
+                      </p:childTnLst>
+                    </p:cTn>
+                  </p:par>
+                  <p:par>
+                    <p:cTn id="11" fill="hold">
+                      <p:stCondLst>
+                        <p:cond delay="indefinite"/>
+                      </p:stCondLst>
+                      <p:childTnLst>
+                        <p:par>
+                          <p:cTn id="12" fill="hold">
+                            <p:stCondLst>
+                              <p:cond delay="0"/>
+                            </p:stCondLst>
+                            <p:childTnLst>
+                              <p:par>
+                                <p:cTn id="13" presetID="1" presetClass="entr" presetSubtype="0" fill="hold" nodeType="clickEffect">
+                                  <p:stCondLst>
+                                    <p:cond delay="0"/>
+                                  </p:stCondLst>
+                                  <p:childTnLst>
+                                    <p:set>
+                                      <p:cBhvr>
+                                        <p:cTn id="14" dur="1" fill="hold">
+                                          <p:stCondLst>
+                                            <p:cond delay="0"/>
+                                          </p:stCondLst>
+                                        </p:cTn>
+                                        <p:tgtEl>
+                                          <p:spTgt spid="3">
+                                            <p:txEl>
+                                              <p:pRg st="2" end="2"/>
+                                            </p:txEl>
+                                          </p:spTgt>
+                                        </p:tgtEl>
+                                        <p:attrNameLst>
+                                          <p:attrName>style.visibility</p:attrName>
+                                        </p:attrNameLst>
+                                      </p:cBhvr>
+                                      <p:to>
+                                        <p:strVal val="visible"/>
+                                      </p:to>
+                                    </p:set>
+                                  </p:childTnLst>
+                                </p:cTn>
+                              </p:par>
+                            </p:childTnLst>
+                          </p:cTn>
+                        </p:par>
+                      </p:childTnLst>
+                    </p:cTn>
+                  </p:par>
+                </p:childTnLst>
+              </p:cTn>
+              <p:prevCondLst>
+                <p:cond evt="onPrev" delay="0">
+                  <p:tgtEl>
+                    <p:sldTgt/>
+                  </p:tgtEl>
+                </p:cond>
+              </p:prevCondLst>
+              <p:nextCondLst>
+                <p:cond evt="onNext" delay="0">
+                  <p:tgtEl>
+                    <p:sldTgt/>
+                  </p:tgtEl>
+                </p:cond>
+              </p:nextCondLst>
+            </p:seq>
+          </p:childTnLst>
+        </p:cTn>
+      </p:par>
+    </p:tnLst>
+  </p:timing>
+</p:sld>
+</file>
+
+<file path=ppt/slides/slide8.xml><?xml version="1.0" encoding="utf-8"?>
 <p:sld xmlns:a="http://schemas.openxmlformats.org/drawingml/2006/main" xmlns:r="http://schemas.openxmlformats.org/officeDocument/2006/relationships" xmlns:p="http://schemas.openxmlformats.org/presentationml/2006/main">
   <p:cSld>
     <p:spTree>
@@ -17447,7 +22279,7 @@
 </p:sld>
 </file>
 
-<file path=ppt/slides/slide4.xml><?xml version="1.0" encoding="utf-8"?>
+<file path=ppt/slides/slide9.xml><?xml version="1.0" encoding="utf-8"?>
 <p:sld xmlns:a="http://schemas.openxmlformats.org/drawingml/2006/main" xmlns:r="http://schemas.openxmlformats.org/officeDocument/2006/relationships" xmlns:p="http://schemas.openxmlformats.org/presentationml/2006/main">
   <p:cSld>
     <p:spTree>
@@ -17872,1641 +22704,6 @@
       </p:par>
     </p:tnLst>
   </p:timing>
-</p:sld>
-</file>
-
-<file path=ppt/slides/slide5.xml><?xml version="1.0" encoding="utf-8"?>
-<p:sld xmlns:a="http://schemas.openxmlformats.org/drawingml/2006/main" xmlns:r="http://schemas.openxmlformats.org/officeDocument/2006/relationships" xmlns:p="http://schemas.openxmlformats.org/presentationml/2006/main">
-  <p:cSld>
-    <p:spTree>
-      <p:nvGrpSpPr>
-        <p:cNvPr id="1" name=""/>
-        <p:cNvGrpSpPr/>
-        <p:nvPr/>
-      </p:nvGrpSpPr>
-      <p:grpSpPr>
-        <a:xfrm>
-          <a:off x="0" y="0"/>
-          <a:ext cx="0" cy="0"/>
-          <a:chOff x="0" y="0"/>
-          <a:chExt cx="0" cy="0"/>
-        </a:xfrm>
-      </p:grpSpPr>
-      <p:sp>
-        <p:nvSpPr>
-          <p:cNvPr id="2" name="Title 1">
-            <a:extLst>
-              <a:ext uri="{FF2B5EF4-FFF2-40B4-BE49-F238E27FC236}">
-                <a16:creationId xmlns:a16="http://schemas.microsoft.com/office/drawing/2014/main" id="{8207F09F-B406-FB4C-ABE0-890E4E4F95C8}"/>
-              </a:ext>
-            </a:extLst>
-          </p:cNvPr>
-          <p:cNvSpPr>
-            <a:spLocks noGrp="1"/>
-          </p:cNvSpPr>
-          <p:nvPr>
-            <p:ph type="ctrTitle"/>
-          </p:nvPr>
-        </p:nvSpPr>
-        <p:spPr>
-          <a:xfrm>
-            <a:off x="1524000" y="652805"/>
-            <a:ext cx="9144000" cy="915159"/>
-          </a:xfrm>
-        </p:spPr>
-        <p:txBody>
-          <a:bodyPr/>
-          <a:lstStyle/>
-          <a:p>
-            <a:r>
-              <a:rPr lang="en-US" dirty="0"/>
-              <a:t>1. MapReduce Programs</a:t>
-            </a:r>
-          </a:p>
-        </p:txBody>
-      </p:sp>
-      <p:sp>
-        <p:nvSpPr>
-          <p:cNvPr id="3" name="Subtitle 2">
-            <a:extLst>
-              <a:ext uri="{FF2B5EF4-FFF2-40B4-BE49-F238E27FC236}">
-                <a16:creationId xmlns:a16="http://schemas.microsoft.com/office/drawing/2014/main" id="{67BA4937-A89D-8343-B4A3-942B771C889A}"/>
-              </a:ext>
-            </a:extLst>
-          </p:cNvPr>
-          <p:cNvSpPr>
-            <a:spLocks noGrp="1"/>
-          </p:cNvSpPr>
-          <p:nvPr>
-            <p:ph type="subTitle" idx="1"/>
-          </p:nvPr>
-        </p:nvSpPr>
-        <p:spPr>
-          <a:xfrm>
-            <a:off x="1524000" y="1689652"/>
-            <a:ext cx="9144000" cy="4283765"/>
-          </a:xfrm>
-        </p:spPr>
-        <p:txBody>
-          <a:bodyPr>
-            <a:normAutofit lnSpcReduction="10000"/>
-          </a:bodyPr>
-          <a:lstStyle/>
-          <a:p>
-            <a:pPr marL="457200" indent="-457200" algn="l">
-              <a:buFont typeface="Arial" panose="020B0604020202020204" pitchFamily="34" charset="0"/>
-              <a:buChar char="•"/>
-            </a:pPr>
-            <a:r>
-              <a:rPr lang="en-US" sz="3000" b="1" dirty="0">
-                <a:solidFill>
-                  <a:srgbClr val="002060"/>
-                </a:solidFill>
-              </a:rPr>
-              <a:t>For MapReduce, we will use:</a:t>
-            </a:r>
-          </a:p>
-          <a:p>
-            <a:pPr marL="914389" lvl="1" indent="-457200" algn="l">
-              <a:buFont typeface="Arial" panose="020B0604020202020204" pitchFamily="34" charset="0"/>
-              <a:buChar char="•"/>
-            </a:pPr>
-            <a:r>
-              <a:rPr lang="en-US" sz="2600" b="1" dirty="0">
-                <a:solidFill>
-                  <a:srgbClr val="002060"/>
-                </a:solidFill>
-              </a:rPr>
-              <a:t>Pseudo code (not executable)</a:t>
-            </a:r>
-          </a:p>
-          <a:p>
-            <a:pPr marL="914389" lvl="1" indent="-457200" algn="l">
-              <a:buFont typeface="Arial" panose="020B0604020202020204" pitchFamily="34" charset="0"/>
-              <a:buChar char="•"/>
-            </a:pPr>
-            <a:r>
-              <a:rPr lang="en-US" sz="2600" b="1" dirty="0">
-                <a:solidFill>
-                  <a:srgbClr val="002060"/>
-                </a:solidFill>
-              </a:rPr>
-              <a:t>PySpark code (runs on Spark)</a:t>
-            </a:r>
-          </a:p>
-          <a:p>
-            <a:pPr marL="457200" indent="-457200" algn="l">
-              <a:buFont typeface="Arial" panose="020B0604020202020204" pitchFamily="34" charset="0"/>
-              <a:buChar char="•"/>
-            </a:pPr>
-            <a:r>
-              <a:rPr lang="en-US" sz="3000" dirty="0">
-                <a:solidFill>
-                  <a:srgbClr val="002060"/>
-                </a:solidFill>
-              </a:rPr>
-              <a:t> For MapReduce, we will focus on learning MapReduce </a:t>
-            </a:r>
-            <a:r>
-              <a:rPr lang="en-US" sz="3000" b="1" dirty="0">
-                <a:solidFill>
-                  <a:srgbClr val="002060"/>
-                </a:solidFill>
-              </a:rPr>
-              <a:t>paradigm/model</a:t>
-            </a:r>
-            <a:r>
-              <a:rPr lang="en-US" sz="3000" dirty="0">
-                <a:solidFill>
-                  <a:srgbClr val="002060"/>
-                </a:solidFill>
-              </a:rPr>
-              <a:t> that enables </a:t>
-            </a:r>
-            <a:r>
-              <a:rPr lang="en-US" sz="3000" b="1" dirty="0">
-                <a:solidFill>
-                  <a:srgbClr val="002060"/>
-                </a:solidFill>
-              </a:rPr>
-              <a:t>massive scalability </a:t>
-            </a:r>
-            <a:r>
-              <a:rPr lang="en-US" sz="3000" dirty="0">
-                <a:solidFill>
-                  <a:srgbClr val="002060"/>
-                </a:solidFill>
-              </a:rPr>
-              <a:t>across hundreds or thousands of servers in a cluster.</a:t>
-            </a:r>
-            <a:endParaRPr lang="en-US" sz="3600" dirty="0"/>
-          </a:p>
-          <a:p>
-            <a:pPr marL="457200" indent="-457200">
-              <a:buFont typeface="Arial" panose="020B0604020202020204" pitchFamily="34" charset="0"/>
-              <a:buChar char="•"/>
-            </a:pPr>
-            <a:r>
-              <a:rPr lang="en-US" sz="3600" dirty="0">
-                <a:solidFill>
-                  <a:srgbClr val="002060"/>
-                </a:solidFill>
-              </a:rPr>
-              <a:t>For MapReduce, </a:t>
-            </a:r>
-            <a:r>
-              <a:rPr lang="en-US" sz="3600" b="1" dirty="0">
-                <a:solidFill>
-                  <a:srgbClr val="002060"/>
-                </a:solidFill>
-              </a:rPr>
-              <a:t>pseudo-code </a:t>
-            </a:r>
-            <a:endParaRPr lang="en-US" sz="3600" dirty="0">
-              <a:solidFill>
-                <a:srgbClr val="002060"/>
-              </a:solidFill>
-            </a:endParaRPr>
-          </a:p>
-          <a:p>
-            <a:pPr marL="914389" lvl="1" indent="-457200" algn="l">
-              <a:buFont typeface="Arial" panose="020B0604020202020204" pitchFamily="34" charset="0"/>
-              <a:buChar char="•"/>
-            </a:pPr>
-            <a:r>
-              <a:rPr lang="en-US" sz="2400" dirty="0">
-                <a:solidFill>
-                  <a:srgbClr val="002060"/>
-                </a:solidFill>
-              </a:rPr>
-              <a:t>examples are given in </a:t>
-            </a:r>
-            <a:r>
-              <a:rPr lang="en-US" sz="2400" dirty="0"/>
-              <a:t>Lin, J., &amp; Dyer, C. (2010). </a:t>
-            </a:r>
-            <a:r>
-              <a:rPr lang="en-US" sz="2400" i="1" dirty="0"/>
-              <a:t>Data-intensive text processing with MapReduce</a:t>
-            </a:r>
-            <a:endParaRPr lang="en-US" sz="2400" dirty="0"/>
-          </a:p>
-        </p:txBody>
-      </p:sp>
-    </p:spTree>
-    <p:extLst>
-      <p:ext uri="{BB962C8B-B14F-4D97-AF65-F5344CB8AC3E}">
-        <p14:creationId xmlns:p14="http://schemas.microsoft.com/office/powerpoint/2010/main" val="1982055136"/>
-      </p:ext>
-    </p:extLst>
-  </p:cSld>
-  <p:clrMapOvr>
-    <a:masterClrMapping/>
-  </p:clrMapOvr>
-  <p:timing>
-    <p:tnLst>
-      <p:par>
-        <p:cTn id="1" dur="indefinite" restart="never" nodeType="tmRoot">
-          <p:childTnLst>
-            <p:seq concurrent="1" nextAc="seek">
-              <p:cTn id="2" dur="indefinite" nodeType="mainSeq">
-                <p:childTnLst>
-                  <p:par>
-                    <p:cTn id="3" fill="hold">
-                      <p:stCondLst>
-                        <p:cond delay="indefinite"/>
-                      </p:stCondLst>
-                      <p:childTnLst>
-                        <p:par>
-                          <p:cTn id="4" fill="hold">
-                            <p:stCondLst>
-                              <p:cond delay="0"/>
-                            </p:stCondLst>
-                            <p:childTnLst>
-                              <p:par>
-                                <p:cTn id="5" presetID="1" presetClass="entr" presetSubtype="0" fill="hold" nodeType="clickEffect">
-                                  <p:stCondLst>
-                                    <p:cond delay="0"/>
-                                  </p:stCondLst>
-                                  <p:childTnLst>
-                                    <p:set>
-                                      <p:cBhvr>
-                                        <p:cTn id="6" dur="1" fill="hold">
-                                          <p:stCondLst>
-                                            <p:cond delay="0"/>
-                                          </p:stCondLst>
-                                        </p:cTn>
-                                        <p:tgtEl>
-                                          <p:spTgt spid="3">
-                                            <p:txEl>
-                                              <p:pRg st="0" end="0"/>
-                                            </p:txEl>
-                                          </p:spTgt>
-                                        </p:tgtEl>
-                                        <p:attrNameLst>
-                                          <p:attrName>style.visibility</p:attrName>
-                                        </p:attrNameLst>
-                                      </p:cBhvr>
-                                      <p:to>
-                                        <p:strVal val="visible"/>
-                                      </p:to>
-                                    </p:set>
-                                  </p:childTnLst>
-                                </p:cTn>
-                              </p:par>
-                            </p:childTnLst>
-                          </p:cTn>
-                        </p:par>
-                      </p:childTnLst>
-                    </p:cTn>
-                  </p:par>
-                  <p:par>
-                    <p:cTn id="7" fill="hold">
-                      <p:stCondLst>
-                        <p:cond delay="indefinite"/>
-                      </p:stCondLst>
-                      <p:childTnLst>
-                        <p:par>
-                          <p:cTn id="8" fill="hold">
-                            <p:stCondLst>
-                              <p:cond delay="0"/>
-                            </p:stCondLst>
-                            <p:childTnLst>
-                              <p:par>
-                                <p:cTn id="9" presetID="1" presetClass="entr" presetSubtype="0" fill="hold" nodeType="clickEffect">
-                                  <p:stCondLst>
-                                    <p:cond delay="0"/>
-                                  </p:stCondLst>
-                                  <p:childTnLst>
-                                    <p:set>
-                                      <p:cBhvr>
-                                        <p:cTn id="10" dur="1" fill="hold">
-                                          <p:stCondLst>
-                                            <p:cond delay="0"/>
-                                          </p:stCondLst>
-                                        </p:cTn>
-                                        <p:tgtEl>
-                                          <p:spTgt spid="3">
-                                            <p:txEl>
-                                              <p:pRg st="1" end="1"/>
-                                            </p:txEl>
-                                          </p:spTgt>
-                                        </p:tgtEl>
-                                        <p:attrNameLst>
-                                          <p:attrName>style.visibility</p:attrName>
-                                        </p:attrNameLst>
-                                      </p:cBhvr>
-                                      <p:to>
-                                        <p:strVal val="visible"/>
-                                      </p:to>
-                                    </p:set>
-                                  </p:childTnLst>
-                                </p:cTn>
-                              </p:par>
-                            </p:childTnLst>
-                          </p:cTn>
-                        </p:par>
-                      </p:childTnLst>
-                    </p:cTn>
-                  </p:par>
-                  <p:par>
-                    <p:cTn id="11" fill="hold">
-                      <p:stCondLst>
-                        <p:cond delay="indefinite"/>
-                      </p:stCondLst>
-                      <p:childTnLst>
-                        <p:par>
-                          <p:cTn id="12" fill="hold">
-                            <p:stCondLst>
-                              <p:cond delay="0"/>
-                            </p:stCondLst>
-                            <p:childTnLst>
-                              <p:par>
-                                <p:cTn id="13" presetID="1" presetClass="entr" presetSubtype="0" fill="hold" nodeType="clickEffect">
-                                  <p:stCondLst>
-                                    <p:cond delay="0"/>
-                                  </p:stCondLst>
-                                  <p:childTnLst>
-                                    <p:set>
-                                      <p:cBhvr>
-                                        <p:cTn id="14" dur="1" fill="hold">
-                                          <p:stCondLst>
-                                            <p:cond delay="0"/>
-                                          </p:stCondLst>
-                                        </p:cTn>
-                                        <p:tgtEl>
-                                          <p:spTgt spid="3">
-                                            <p:txEl>
-                                              <p:pRg st="2" end="2"/>
-                                            </p:txEl>
-                                          </p:spTgt>
-                                        </p:tgtEl>
-                                        <p:attrNameLst>
-                                          <p:attrName>style.visibility</p:attrName>
-                                        </p:attrNameLst>
-                                      </p:cBhvr>
-                                      <p:to>
-                                        <p:strVal val="visible"/>
-                                      </p:to>
-                                    </p:set>
-                                  </p:childTnLst>
-                                </p:cTn>
-                              </p:par>
-                            </p:childTnLst>
-                          </p:cTn>
-                        </p:par>
-                      </p:childTnLst>
-                    </p:cTn>
-                  </p:par>
-                  <p:par>
-                    <p:cTn id="15" fill="hold">
-                      <p:stCondLst>
-                        <p:cond delay="indefinite"/>
-                      </p:stCondLst>
-                      <p:childTnLst>
-                        <p:par>
-                          <p:cTn id="16" fill="hold">
-                            <p:stCondLst>
-                              <p:cond delay="0"/>
-                            </p:stCondLst>
-                            <p:childTnLst>
-                              <p:par>
-                                <p:cTn id="17" presetID="1" presetClass="entr" presetSubtype="0" fill="hold" nodeType="clickEffect">
-                                  <p:stCondLst>
-                                    <p:cond delay="0"/>
-                                  </p:stCondLst>
-                                  <p:childTnLst>
-                                    <p:set>
-                                      <p:cBhvr>
-                                        <p:cTn id="18" dur="1" fill="hold">
-                                          <p:stCondLst>
-                                            <p:cond delay="0"/>
-                                          </p:stCondLst>
-                                        </p:cTn>
-                                        <p:tgtEl>
-                                          <p:spTgt spid="3">
-                                            <p:txEl>
-                                              <p:pRg st="3" end="3"/>
-                                            </p:txEl>
-                                          </p:spTgt>
-                                        </p:tgtEl>
-                                        <p:attrNameLst>
-                                          <p:attrName>style.visibility</p:attrName>
-                                        </p:attrNameLst>
-                                      </p:cBhvr>
-                                      <p:to>
-                                        <p:strVal val="visible"/>
-                                      </p:to>
-                                    </p:set>
-                                  </p:childTnLst>
-                                </p:cTn>
-                              </p:par>
-                            </p:childTnLst>
-                          </p:cTn>
-                        </p:par>
-                      </p:childTnLst>
-                    </p:cTn>
-                  </p:par>
-                </p:childTnLst>
-              </p:cTn>
-              <p:prevCondLst>
-                <p:cond evt="onPrev" delay="0">
-                  <p:tgtEl>
-                    <p:sldTgt/>
-                  </p:tgtEl>
-                </p:cond>
-              </p:prevCondLst>
-              <p:nextCondLst>
-                <p:cond evt="onNext" delay="0">
-                  <p:tgtEl>
-                    <p:sldTgt/>
-                  </p:tgtEl>
-                </p:cond>
-              </p:nextCondLst>
-            </p:seq>
-          </p:childTnLst>
-        </p:cTn>
-      </p:par>
-    </p:tnLst>
-  </p:timing>
-</p:sld>
-</file>
-
-<file path=ppt/slides/slide6.xml><?xml version="1.0" encoding="utf-8"?>
-<p:sld xmlns:a="http://schemas.openxmlformats.org/drawingml/2006/main" xmlns:r="http://schemas.openxmlformats.org/officeDocument/2006/relationships" xmlns:p="http://schemas.openxmlformats.org/presentationml/2006/main">
-  <p:cSld>
-    <p:spTree>
-      <p:nvGrpSpPr>
-        <p:cNvPr id="1" name=""/>
-        <p:cNvGrpSpPr/>
-        <p:nvPr/>
-      </p:nvGrpSpPr>
-      <p:grpSpPr>
-        <a:xfrm>
-          <a:off x="0" y="0"/>
-          <a:ext cx="0" cy="0"/>
-          <a:chOff x="0" y="0"/>
-          <a:chExt cx="0" cy="0"/>
-        </a:xfrm>
-      </p:grpSpPr>
-      <p:sp>
-        <p:nvSpPr>
-          <p:cNvPr id="2" name="Title 1">
-            <a:extLst>
-              <a:ext uri="{FF2B5EF4-FFF2-40B4-BE49-F238E27FC236}">
-                <a16:creationId xmlns:a16="http://schemas.microsoft.com/office/drawing/2014/main" id="{8207F09F-B406-FB4C-ABE0-890E4E4F95C8}"/>
-              </a:ext>
-            </a:extLst>
-          </p:cNvPr>
-          <p:cNvSpPr>
-            <a:spLocks noGrp="1"/>
-          </p:cNvSpPr>
-          <p:nvPr>
-            <p:ph type="ctrTitle"/>
-          </p:nvPr>
-        </p:nvSpPr>
-        <p:spPr>
-          <a:xfrm>
-            <a:off x="1524000" y="652805"/>
-            <a:ext cx="9144000" cy="915159"/>
-          </a:xfrm>
-        </p:spPr>
-        <p:txBody>
-          <a:bodyPr/>
-          <a:lstStyle/>
-          <a:p>
-            <a:r>
-              <a:rPr lang="en-US" dirty="0"/>
-              <a:t>1. MapReduce Components</a:t>
-            </a:r>
-          </a:p>
-        </p:txBody>
-      </p:sp>
-      <p:sp>
-        <p:nvSpPr>
-          <p:cNvPr id="3" name="Subtitle 2">
-            <a:extLst>
-              <a:ext uri="{FF2B5EF4-FFF2-40B4-BE49-F238E27FC236}">
-                <a16:creationId xmlns:a16="http://schemas.microsoft.com/office/drawing/2014/main" id="{67BA4937-A89D-8343-B4A3-942B771C889A}"/>
-              </a:ext>
-            </a:extLst>
-          </p:cNvPr>
-          <p:cNvSpPr>
-            <a:spLocks noGrp="1"/>
-          </p:cNvSpPr>
-          <p:nvPr>
-            <p:ph type="subTitle" idx="1"/>
-          </p:nvPr>
-        </p:nvSpPr>
-        <p:spPr>
-          <a:xfrm>
-            <a:off x="1524000" y="1689652"/>
-            <a:ext cx="9144000" cy="4283765"/>
-          </a:xfrm>
-        </p:spPr>
-        <p:txBody>
-          <a:bodyPr>
-            <a:normAutofit/>
-          </a:bodyPr>
-          <a:lstStyle/>
-          <a:p>
-            <a:pPr algn="l"/>
-            <a:r>
-              <a:rPr lang="en-US" sz="3600" dirty="0"/>
-              <a:t>MapReduce has 3 functions:</a:t>
-            </a:r>
-          </a:p>
-          <a:p>
-            <a:pPr marL="457200" lvl="1" algn="l"/>
-            <a:r>
-              <a:rPr lang="en-US" sz="3200" b="1" dirty="0">
-                <a:latin typeface="Consolas" panose="020B0609020204030204" pitchFamily="49" charset="0"/>
-                <a:cs typeface="Consolas" panose="020B0609020204030204" pitchFamily="49" charset="0"/>
-              </a:rPr>
-              <a:t>map()</a:t>
-            </a:r>
-          </a:p>
-          <a:p>
-            <a:pPr marL="1485888" lvl="2" indent="-571500" algn="l">
-              <a:buFont typeface="Arial" panose="020B0604020202020204" pitchFamily="34" charset="0"/>
-              <a:buChar char="•"/>
-            </a:pPr>
-            <a:r>
-              <a:rPr lang="en-US" sz="3000" dirty="0">
-                <a:latin typeface="Consolas" panose="020B0609020204030204" pitchFamily="49" charset="0"/>
-                <a:cs typeface="Consolas" panose="020B0609020204030204" pitchFamily="49" charset="0"/>
-              </a:rPr>
-              <a:t>Mapper function</a:t>
-            </a:r>
-          </a:p>
-          <a:p>
-            <a:pPr marL="457200" lvl="1" algn="l"/>
-            <a:r>
-              <a:rPr lang="en-US" sz="3200" b="1" dirty="0">
-                <a:latin typeface="Consolas" panose="020B0609020204030204" pitchFamily="49" charset="0"/>
-                <a:cs typeface="Consolas" panose="020B0609020204030204" pitchFamily="49" charset="0"/>
-              </a:rPr>
-              <a:t>reduce()</a:t>
-            </a:r>
-          </a:p>
-          <a:p>
-            <a:pPr marL="1485888" lvl="2" indent="-571500" algn="l">
-              <a:buFont typeface="Arial" panose="020B0604020202020204" pitchFamily="34" charset="0"/>
-              <a:buChar char="•"/>
-            </a:pPr>
-            <a:r>
-              <a:rPr lang="en-US" sz="3000" dirty="0">
-                <a:latin typeface="Consolas" panose="020B0609020204030204" pitchFamily="49" charset="0"/>
-                <a:cs typeface="Consolas" panose="020B0609020204030204" pitchFamily="49" charset="0"/>
-              </a:rPr>
-              <a:t>Reducer function</a:t>
-            </a:r>
-          </a:p>
-          <a:p>
-            <a:pPr marL="457200" lvl="1" algn="l"/>
-            <a:r>
-              <a:rPr lang="en-US" sz="3200" b="1" dirty="0">
-                <a:latin typeface="Consolas" panose="020B0609020204030204" pitchFamily="49" charset="0"/>
-                <a:cs typeface="Consolas" panose="020B0609020204030204" pitchFamily="49" charset="0"/>
-              </a:rPr>
-              <a:t>combine()</a:t>
-            </a:r>
-            <a:r>
-              <a:rPr lang="en-US" sz="800" b="1" dirty="0">
-                <a:latin typeface="Consolas" panose="020B0609020204030204" pitchFamily="49" charset="0"/>
-                <a:cs typeface="Consolas" panose="020B0609020204030204" pitchFamily="49" charset="0"/>
-              </a:rPr>
-              <a:t> </a:t>
-            </a:r>
-          </a:p>
-          <a:p>
-            <a:pPr marL="1485888" lvl="2" indent="-571500" algn="l">
-              <a:buFont typeface="Arial" panose="020B0604020202020204" pitchFamily="34" charset="0"/>
-              <a:buChar char="•"/>
-            </a:pPr>
-            <a:r>
-              <a:rPr lang="en-US" sz="2600" dirty="0">
-                <a:latin typeface="Consolas" panose="020B0609020204030204" pitchFamily="49" charset="0"/>
-                <a:cs typeface="Consolas" panose="020B0609020204030204" pitchFamily="49" charset="0"/>
-              </a:rPr>
-              <a:t>Optional combiner function</a:t>
-            </a:r>
-            <a:endParaRPr lang="en-US" sz="600" dirty="0">
-              <a:latin typeface="Consolas" panose="020B0609020204030204" pitchFamily="49" charset="0"/>
-              <a:cs typeface="Consolas" panose="020B0609020204030204" pitchFamily="49" charset="0"/>
-            </a:endParaRPr>
-          </a:p>
-          <a:p>
-            <a:pPr marL="1028700" lvl="1" indent="-571500" algn="l">
-              <a:buFont typeface="Arial" panose="020B0604020202020204" pitchFamily="34" charset="0"/>
-              <a:buChar char="•"/>
-            </a:pPr>
-            <a:endParaRPr lang="en-US" sz="400" dirty="0">
-              <a:latin typeface="Consolas" panose="020B0609020204030204" pitchFamily="49" charset="0"/>
-              <a:cs typeface="Consolas" panose="020B0609020204030204" pitchFamily="49" charset="0"/>
-            </a:endParaRPr>
-          </a:p>
-          <a:p>
-            <a:pPr marL="800100" lvl="1" indent="-342900" algn="l">
-              <a:buFont typeface="+mj-lt"/>
-              <a:buAutoNum type="arabicPeriod"/>
-            </a:pPr>
-            <a:endParaRPr lang="en-US" sz="1200" dirty="0"/>
-          </a:p>
-        </p:txBody>
-      </p:sp>
-    </p:spTree>
-    <p:extLst>
-      <p:ext uri="{BB962C8B-B14F-4D97-AF65-F5344CB8AC3E}">
-        <p14:creationId xmlns:p14="http://schemas.microsoft.com/office/powerpoint/2010/main" val="1696857354"/>
-      </p:ext>
-    </p:extLst>
-  </p:cSld>
-  <p:clrMapOvr>
-    <a:masterClrMapping/>
-  </p:clrMapOvr>
-  <p:timing>
-    <p:tnLst>
-      <p:par>
-        <p:cTn id="1" dur="indefinite" restart="never" nodeType="tmRoot">
-          <p:childTnLst>
-            <p:seq concurrent="1" nextAc="seek">
-              <p:cTn id="2" dur="indefinite" nodeType="mainSeq">
-                <p:childTnLst>
-                  <p:par>
-                    <p:cTn id="3" fill="hold">
-                      <p:stCondLst>
-                        <p:cond delay="indefinite"/>
-                      </p:stCondLst>
-                      <p:childTnLst>
-                        <p:par>
-                          <p:cTn id="4" fill="hold">
-                            <p:stCondLst>
-                              <p:cond delay="0"/>
-                            </p:stCondLst>
-                            <p:childTnLst>
-                              <p:par>
-                                <p:cTn id="5" presetID="1" presetClass="entr" presetSubtype="0" fill="hold" nodeType="clickEffect">
-                                  <p:stCondLst>
-                                    <p:cond delay="0"/>
-                                  </p:stCondLst>
-                                  <p:childTnLst>
-                                    <p:set>
-                                      <p:cBhvr>
-                                        <p:cTn id="6" dur="1" fill="hold">
-                                          <p:stCondLst>
-                                            <p:cond delay="0"/>
-                                          </p:stCondLst>
-                                        </p:cTn>
-                                        <p:tgtEl>
-                                          <p:spTgt spid="3">
-                                            <p:txEl>
-                                              <p:pRg st="0" end="0"/>
-                                            </p:txEl>
-                                          </p:spTgt>
-                                        </p:tgtEl>
-                                        <p:attrNameLst>
-                                          <p:attrName>style.visibility</p:attrName>
-                                        </p:attrNameLst>
-                                      </p:cBhvr>
-                                      <p:to>
-                                        <p:strVal val="visible"/>
-                                      </p:to>
-                                    </p:set>
-                                  </p:childTnLst>
-                                </p:cTn>
-                              </p:par>
-                              <p:par>
-                                <p:cTn id="7" presetID="1" presetClass="entr" presetSubtype="0" fill="hold" nodeType="withEffect">
-                                  <p:stCondLst>
-                                    <p:cond delay="0"/>
-                                  </p:stCondLst>
-                                  <p:childTnLst>
-                                    <p:set>
-                                      <p:cBhvr>
-                                        <p:cTn id="8" dur="1" fill="hold">
-                                          <p:stCondLst>
-                                            <p:cond delay="0"/>
-                                          </p:stCondLst>
-                                        </p:cTn>
-                                        <p:tgtEl>
-                                          <p:spTgt spid="3">
-                                            <p:txEl>
-                                              <p:pRg st="1" end="1"/>
-                                            </p:txEl>
-                                          </p:spTgt>
-                                        </p:tgtEl>
-                                        <p:attrNameLst>
-                                          <p:attrName>style.visibility</p:attrName>
-                                        </p:attrNameLst>
-                                      </p:cBhvr>
-                                      <p:to>
-                                        <p:strVal val="visible"/>
-                                      </p:to>
-                                    </p:set>
-                                  </p:childTnLst>
-                                </p:cTn>
-                              </p:par>
-                              <p:par>
-                                <p:cTn id="9" presetID="1" presetClass="entr" presetSubtype="0" fill="hold" nodeType="withEffect">
-                                  <p:stCondLst>
-                                    <p:cond delay="0"/>
-                                  </p:stCondLst>
-                                  <p:childTnLst>
-                                    <p:set>
-                                      <p:cBhvr>
-                                        <p:cTn id="10" dur="1" fill="hold">
-                                          <p:stCondLst>
-                                            <p:cond delay="0"/>
-                                          </p:stCondLst>
-                                        </p:cTn>
-                                        <p:tgtEl>
-                                          <p:spTgt spid="3">
-                                            <p:txEl>
-                                              <p:pRg st="2" end="2"/>
-                                            </p:txEl>
-                                          </p:spTgt>
-                                        </p:tgtEl>
-                                        <p:attrNameLst>
-                                          <p:attrName>style.visibility</p:attrName>
-                                        </p:attrNameLst>
-                                      </p:cBhvr>
-                                      <p:to>
-                                        <p:strVal val="visible"/>
-                                      </p:to>
-                                    </p:set>
-                                  </p:childTnLst>
-                                </p:cTn>
-                              </p:par>
-                              <p:par>
-                                <p:cTn id="11" presetID="1" presetClass="entr" presetSubtype="0" fill="hold" nodeType="withEffect">
-                                  <p:stCondLst>
-                                    <p:cond delay="0"/>
-                                  </p:stCondLst>
-                                  <p:childTnLst>
-                                    <p:set>
-                                      <p:cBhvr>
-                                        <p:cTn id="12" dur="1" fill="hold">
-                                          <p:stCondLst>
-                                            <p:cond delay="0"/>
-                                          </p:stCondLst>
-                                        </p:cTn>
-                                        <p:tgtEl>
-                                          <p:spTgt spid="3">
-                                            <p:txEl>
-                                              <p:pRg st="3" end="3"/>
-                                            </p:txEl>
-                                          </p:spTgt>
-                                        </p:tgtEl>
-                                        <p:attrNameLst>
-                                          <p:attrName>style.visibility</p:attrName>
-                                        </p:attrNameLst>
-                                      </p:cBhvr>
-                                      <p:to>
-                                        <p:strVal val="visible"/>
-                                      </p:to>
-                                    </p:set>
-                                  </p:childTnLst>
-                                </p:cTn>
-                              </p:par>
-                              <p:par>
-                                <p:cTn id="13" presetID="1" presetClass="entr" presetSubtype="0" fill="hold" nodeType="withEffect">
-                                  <p:stCondLst>
-                                    <p:cond delay="0"/>
-                                  </p:stCondLst>
-                                  <p:childTnLst>
-                                    <p:set>
-                                      <p:cBhvr>
-                                        <p:cTn id="14" dur="1" fill="hold">
-                                          <p:stCondLst>
-                                            <p:cond delay="0"/>
-                                          </p:stCondLst>
-                                        </p:cTn>
-                                        <p:tgtEl>
-                                          <p:spTgt spid="3">
-                                            <p:txEl>
-                                              <p:pRg st="4" end="4"/>
-                                            </p:txEl>
-                                          </p:spTgt>
-                                        </p:tgtEl>
-                                        <p:attrNameLst>
-                                          <p:attrName>style.visibility</p:attrName>
-                                        </p:attrNameLst>
-                                      </p:cBhvr>
-                                      <p:to>
-                                        <p:strVal val="visible"/>
-                                      </p:to>
-                                    </p:set>
-                                  </p:childTnLst>
-                                </p:cTn>
-                              </p:par>
-                              <p:par>
-                                <p:cTn id="15" presetID="1" presetClass="entr" presetSubtype="0" fill="hold" nodeType="withEffect">
-                                  <p:stCondLst>
-                                    <p:cond delay="0"/>
-                                  </p:stCondLst>
-                                  <p:childTnLst>
-                                    <p:set>
-                                      <p:cBhvr>
-                                        <p:cTn id="16" dur="1" fill="hold">
-                                          <p:stCondLst>
-                                            <p:cond delay="0"/>
-                                          </p:stCondLst>
-                                        </p:cTn>
-                                        <p:tgtEl>
-                                          <p:spTgt spid="3">
-                                            <p:txEl>
-                                              <p:pRg st="5" end="5"/>
-                                            </p:txEl>
-                                          </p:spTgt>
-                                        </p:tgtEl>
-                                        <p:attrNameLst>
-                                          <p:attrName>style.visibility</p:attrName>
-                                        </p:attrNameLst>
-                                      </p:cBhvr>
-                                      <p:to>
-                                        <p:strVal val="visible"/>
-                                      </p:to>
-                                    </p:set>
-                                  </p:childTnLst>
-                                </p:cTn>
-                              </p:par>
-                              <p:par>
-                                <p:cTn id="17" presetID="1" presetClass="entr" presetSubtype="0" fill="hold" nodeType="withEffect">
-                                  <p:stCondLst>
-                                    <p:cond delay="0"/>
-                                  </p:stCondLst>
-                                  <p:childTnLst>
-                                    <p:set>
-                                      <p:cBhvr>
-                                        <p:cTn id="18" dur="1" fill="hold">
-                                          <p:stCondLst>
-                                            <p:cond delay="0"/>
-                                          </p:stCondLst>
-                                        </p:cTn>
-                                        <p:tgtEl>
-                                          <p:spTgt spid="3">
-                                            <p:txEl>
-                                              <p:pRg st="6" end="6"/>
-                                            </p:txEl>
-                                          </p:spTgt>
-                                        </p:tgtEl>
-                                        <p:attrNameLst>
-                                          <p:attrName>style.visibility</p:attrName>
-                                        </p:attrNameLst>
-                                      </p:cBhvr>
-                                      <p:to>
-                                        <p:strVal val="visible"/>
-                                      </p:to>
-                                    </p:set>
-                                  </p:childTnLst>
-                                </p:cTn>
-                              </p:par>
-                            </p:childTnLst>
-                          </p:cTn>
-                        </p:par>
-                      </p:childTnLst>
-                    </p:cTn>
-                  </p:par>
-                </p:childTnLst>
-              </p:cTn>
-              <p:prevCondLst>
-                <p:cond evt="onPrev" delay="0">
-                  <p:tgtEl>
-                    <p:sldTgt/>
-                  </p:tgtEl>
-                </p:cond>
-              </p:prevCondLst>
-              <p:nextCondLst>
-                <p:cond evt="onNext" delay="0">
-                  <p:tgtEl>
-                    <p:sldTgt/>
-                  </p:tgtEl>
-                </p:cond>
-              </p:nextCondLst>
-            </p:seq>
-          </p:childTnLst>
-        </p:cTn>
-      </p:par>
-    </p:tnLst>
-  </p:timing>
-</p:sld>
-</file>
-
-<file path=ppt/slides/slide7.xml><?xml version="1.0" encoding="utf-8"?>
-<p:sld xmlns:a="http://schemas.openxmlformats.org/drawingml/2006/main" xmlns:r="http://schemas.openxmlformats.org/officeDocument/2006/relationships" xmlns:p="http://schemas.openxmlformats.org/presentationml/2006/main">
-  <p:cSld>
-    <p:spTree>
-      <p:nvGrpSpPr>
-        <p:cNvPr id="1" name=""/>
-        <p:cNvGrpSpPr/>
-        <p:nvPr/>
-      </p:nvGrpSpPr>
-      <p:grpSpPr>
-        <a:xfrm>
-          <a:off x="0" y="0"/>
-          <a:ext cx="0" cy="0"/>
-          <a:chOff x="0" y="0"/>
-          <a:chExt cx="0" cy="0"/>
-        </a:xfrm>
-      </p:grpSpPr>
-      <p:sp>
-        <p:nvSpPr>
-          <p:cNvPr id="2" name="Title 1">
-            <a:extLst>
-              <a:ext uri="{FF2B5EF4-FFF2-40B4-BE49-F238E27FC236}">
-                <a16:creationId xmlns:a16="http://schemas.microsoft.com/office/drawing/2014/main" id="{8207F09F-B406-FB4C-ABE0-890E4E4F95C8}"/>
-              </a:ext>
-            </a:extLst>
-          </p:cNvPr>
-          <p:cNvSpPr>
-            <a:spLocks noGrp="1"/>
-          </p:cNvSpPr>
-          <p:nvPr>
-            <p:ph type="ctrTitle"/>
-          </p:nvPr>
-        </p:nvSpPr>
-        <p:spPr>
-          <a:xfrm>
-            <a:off x="1524000" y="652806"/>
-            <a:ext cx="9144000" cy="830006"/>
-          </a:xfrm>
-        </p:spPr>
-        <p:txBody>
-          <a:bodyPr/>
-          <a:lstStyle/>
-          <a:p>
-            <a:r>
-              <a:rPr lang="en-US" dirty="0"/>
-              <a:t>MapReduce Paradigm</a:t>
-            </a:r>
-          </a:p>
-        </p:txBody>
-      </p:sp>
-      <p:sp>
-        <p:nvSpPr>
-          <p:cNvPr id="3" name="Subtitle 2">
-            <a:extLst>
-              <a:ext uri="{FF2B5EF4-FFF2-40B4-BE49-F238E27FC236}">
-                <a16:creationId xmlns:a16="http://schemas.microsoft.com/office/drawing/2014/main" id="{67BA4937-A89D-8343-B4A3-942B771C889A}"/>
-              </a:ext>
-            </a:extLst>
-          </p:cNvPr>
-          <p:cNvSpPr>
-            <a:spLocks noGrp="1"/>
-          </p:cNvSpPr>
-          <p:nvPr>
-            <p:ph type="subTitle" idx="1"/>
-          </p:nvPr>
-        </p:nvSpPr>
-        <p:spPr>
-          <a:xfrm>
-            <a:off x="1523999" y="1482812"/>
-            <a:ext cx="9362303" cy="4337220"/>
-          </a:xfrm>
-        </p:spPr>
-        <p:txBody>
-          <a:bodyPr>
-            <a:normAutofit lnSpcReduction="10000"/>
-          </a:bodyPr>
-          <a:lstStyle/>
-          <a:p>
-            <a:pPr marL="457211" indent="-457200">
-              <a:buFont typeface="Arial" panose="020B0604020202020204" pitchFamily="34" charset="0"/>
-              <a:buChar char="•"/>
-            </a:pPr>
-            <a:r>
-              <a:rPr lang="en-US" sz="3200" dirty="0">
-                <a:solidFill>
-                  <a:srgbClr val="0070C0"/>
-                </a:solidFill>
-              </a:rPr>
-              <a:t>MapReduce is a foundation model/paradigm for distributed computing using clusters</a:t>
-            </a:r>
-          </a:p>
-          <a:p>
-            <a:pPr marL="457211" indent="-457200">
-              <a:buFont typeface="Arial" panose="020B0604020202020204" pitchFamily="34" charset="0"/>
-              <a:buChar char="•"/>
-            </a:pPr>
-            <a:r>
-              <a:rPr lang="en-US" sz="3200" dirty="0">
-                <a:solidFill>
-                  <a:srgbClr val="00B050"/>
-                </a:solidFill>
-              </a:rPr>
-              <a:t>MapReduce concrete implementations:</a:t>
-            </a:r>
-          </a:p>
-          <a:p>
-            <a:pPr marL="914400" lvl="1" indent="-457200" algn="l">
-              <a:buFont typeface="Arial" panose="020B0604020202020204" pitchFamily="34" charset="0"/>
-              <a:buChar char="•"/>
-            </a:pPr>
-            <a:r>
-              <a:rPr lang="en-US" sz="3200" dirty="0">
-                <a:solidFill>
-                  <a:schemeClr val="tx1"/>
-                </a:solidFill>
-              </a:rPr>
-              <a:t>Apache Hadoop implements MapReduce</a:t>
-            </a:r>
-          </a:p>
-          <a:p>
-            <a:pPr marL="914400" lvl="1" indent="-457200" algn="l">
-              <a:buFont typeface="Arial" panose="020B0604020202020204" pitchFamily="34" charset="0"/>
-              <a:buChar char="•"/>
-            </a:pPr>
-            <a:r>
-              <a:rPr lang="en-US" sz="3200" dirty="0">
-                <a:solidFill>
-                  <a:schemeClr val="tx1"/>
-                </a:solidFill>
-              </a:rPr>
-              <a:t>Apache Spark implements superset of MapReduce</a:t>
-            </a:r>
-          </a:p>
-          <a:p>
-            <a:pPr marL="914400" lvl="1" indent="-457200" algn="l">
-              <a:buFont typeface="Arial" panose="020B0604020202020204" pitchFamily="34" charset="0"/>
-              <a:buChar char="•"/>
-            </a:pPr>
-            <a:r>
-              <a:rPr lang="en-US" sz="3200" dirty="0">
-                <a:solidFill>
-                  <a:schemeClr val="tx1"/>
-                </a:solidFill>
-              </a:rPr>
-              <a:t>Apache Tez implements MapReduce</a:t>
-            </a:r>
-          </a:p>
-          <a:p>
-            <a:pPr marL="914400" lvl="1" indent="-457200" algn="l">
-              <a:buFont typeface="Arial" panose="020B0604020202020204" pitchFamily="34" charset="0"/>
-              <a:buChar char="•"/>
-            </a:pPr>
-            <a:r>
-              <a:rPr lang="en-US" sz="3200" dirty="0">
-                <a:solidFill>
-                  <a:schemeClr val="tx1"/>
-                </a:solidFill>
-              </a:rPr>
-              <a:t>Amazon Athena implements MapReduce</a:t>
-            </a:r>
-          </a:p>
-          <a:p>
-            <a:pPr marL="914400" lvl="1" indent="-457200" algn="l">
-              <a:buFont typeface="Arial" panose="020B0604020202020204" pitchFamily="34" charset="0"/>
-              <a:buChar char="•"/>
-            </a:pPr>
-            <a:r>
-              <a:rPr lang="en-US" sz="3200" dirty="0">
-                <a:solidFill>
-                  <a:schemeClr val="tx1"/>
-                </a:solidFill>
-              </a:rPr>
-              <a:t>Google Big Query implements MapReduce</a:t>
-            </a:r>
-          </a:p>
-          <a:p>
-            <a:pPr marL="457211" indent="-457200">
-              <a:buFont typeface="Arial" panose="020B0604020202020204" pitchFamily="34" charset="0"/>
-              <a:buChar char="•"/>
-            </a:pPr>
-            <a:endParaRPr lang="en-US" sz="3200" dirty="0">
-              <a:solidFill>
-                <a:srgbClr val="002060"/>
-              </a:solidFill>
-            </a:endParaRPr>
-          </a:p>
-          <a:p>
-            <a:pPr marL="800100" lvl="1" indent="-342900" algn="l">
-              <a:buFont typeface="+mj-lt"/>
-              <a:buAutoNum type="arabicPeriod"/>
-            </a:pPr>
-            <a:endParaRPr lang="en-US" sz="1200" dirty="0"/>
-          </a:p>
-        </p:txBody>
-      </p:sp>
-    </p:spTree>
-    <p:extLst>
-      <p:ext uri="{BB962C8B-B14F-4D97-AF65-F5344CB8AC3E}">
-        <p14:creationId xmlns:p14="http://schemas.microsoft.com/office/powerpoint/2010/main" val="3149967708"/>
-      </p:ext>
-    </p:extLst>
-  </p:cSld>
-  <p:clrMapOvr>
-    <a:masterClrMapping/>
-  </p:clrMapOvr>
-  <p:timing>
-    <p:tnLst>
-      <p:par>
-        <p:cTn id="1" dur="indefinite" restart="never" nodeType="tmRoot">
-          <p:childTnLst>
-            <p:seq concurrent="1" nextAc="seek">
-              <p:cTn id="2" dur="indefinite" nodeType="mainSeq">
-                <p:childTnLst>
-                  <p:par>
-                    <p:cTn id="3" fill="hold">
-                      <p:stCondLst>
-                        <p:cond delay="indefinite"/>
-                      </p:stCondLst>
-                      <p:childTnLst>
-                        <p:par>
-                          <p:cTn id="4" fill="hold">
-                            <p:stCondLst>
-                              <p:cond delay="0"/>
-                            </p:stCondLst>
-                            <p:childTnLst>
-                              <p:par>
-                                <p:cTn id="5" presetID="1" presetClass="entr" presetSubtype="0" fill="hold" nodeType="clickEffect">
-                                  <p:stCondLst>
-                                    <p:cond delay="0"/>
-                                  </p:stCondLst>
-                                  <p:childTnLst>
-                                    <p:set>
-                                      <p:cBhvr>
-                                        <p:cTn id="6" dur="1" fill="hold">
-                                          <p:stCondLst>
-                                            <p:cond delay="0"/>
-                                          </p:stCondLst>
-                                        </p:cTn>
-                                        <p:tgtEl>
-                                          <p:spTgt spid="3">
-                                            <p:txEl>
-                                              <p:pRg st="0" end="0"/>
-                                            </p:txEl>
-                                          </p:spTgt>
-                                        </p:tgtEl>
-                                        <p:attrNameLst>
-                                          <p:attrName>style.visibility</p:attrName>
-                                        </p:attrNameLst>
-                                      </p:cBhvr>
-                                      <p:to>
-                                        <p:strVal val="visible"/>
-                                      </p:to>
-                                    </p:set>
-                                  </p:childTnLst>
-                                </p:cTn>
-                              </p:par>
-                            </p:childTnLst>
-                          </p:cTn>
-                        </p:par>
-                      </p:childTnLst>
-                    </p:cTn>
-                  </p:par>
-                  <p:par>
-                    <p:cTn id="7" fill="hold">
-                      <p:stCondLst>
-                        <p:cond delay="indefinite"/>
-                      </p:stCondLst>
-                      <p:childTnLst>
-                        <p:par>
-                          <p:cTn id="8" fill="hold">
-                            <p:stCondLst>
-                              <p:cond delay="0"/>
-                            </p:stCondLst>
-                            <p:childTnLst>
-                              <p:par>
-                                <p:cTn id="9" presetID="1" presetClass="entr" presetSubtype="0" fill="hold" nodeType="clickEffect">
-                                  <p:stCondLst>
-                                    <p:cond delay="0"/>
-                                  </p:stCondLst>
-                                  <p:childTnLst>
-                                    <p:set>
-                                      <p:cBhvr>
-                                        <p:cTn id="10" dur="1" fill="hold">
-                                          <p:stCondLst>
-                                            <p:cond delay="0"/>
-                                          </p:stCondLst>
-                                        </p:cTn>
-                                        <p:tgtEl>
-                                          <p:spTgt spid="3">
-                                            <p:txEl>
-                                              <p:pRg st="1" end="1"/>
-                                            </p:txEl>
-                                          </p:spTgt>
-                                        </p:tgtEl>
-                                        <p:attrNameLst>
-                                          <p:attrName>style.visibility</p:attrName>
-                                        </p:attrNameLst>
-                                      </p:cBhvr>
-                                      <p:to>
-                                        <p:strVal val="visible"/>
-                                      </p:to>
-                                    </p:set>
-                                  </p:childTnLst>
-                                </p:cTn>
-                              </p:par>
-                              <p:par>
-                                <p:cTn id="11" presetID="1" presetClass="entr" presetSubtype="0" fill="hold" nodeType="withEffect">
-                                  <p:stCondLst>
-                                    <p:cond delay="0"/>
-                                  </p:stCondLst>
-                                  <p:childTnLst>
-                                    <p:set>
-                                      <p:cBhvr>
-                                        <p:cTn id="12" dur="1" fill="hold">
-                                          <p:stCondLst>
-                                            <p:cond delay="0"/>
-                                          </p:stCondLst>
-                                        </p:cTn>
-                                        <p:tgtEl>
-                                          <p:spTgt spid="3">
-                                            <p:txEl>
-                                              <p:pRg st="2" end="2"/>
-                                            </p:txEl>
-                                          </p:spTgt>
-                                        </p:tgtEl>
-                                        <p:attrNameLst>
-                                          <p:attrName>style.visibility</p:attrName>
-                                        </p:attrNameLst>
-                                      </p:cBhvr>
-                                      <p:to>
-                                        <p:strVal val="visible"/>
-                                      </p:to>
-                                    </p:set>
-                                  </p:childTnLst>
-                                </p:cTn>
-                              </p:par>
-                              <p:par>
-                                <p:cTn id="13" presetID="1" presetClass="entr" presetSubtype="0" fill="hold" nodeType="withEffect">
-                                  <p:stCondLst>
-                                    <p:cond delay="0"/>
-                                  </p:stCondLst>
-                                  <p:childTnLst>
-                                    <p:set>
-                                      <p:cBhvr>
-                                        <p:cTn id="14" dur="1" fill="hold">
-                                          <p:stCondLst>
-                                            <p:cond delay="0"/>
-                                          </p:stCondLst>
-                                        </p:cTn>
-                                        <p:tgtEl>
-                                          <p:spTgt spid="3">
-                                            <p:txEl>
-                                              <p:pRg st="3" end="3"/>
-                                            </p:txEl>
-                                          </p:spTgt>
-                                        </p:tgtEl>
-                                        <p:attrNameLst>
-                                          <p:attrName>style.visibility</p:attrName>
-                                        </p:attrNameLst>
-                                      </p:cBhvr>
-                                      <p:to>
-                                        <p:strVal val="visible"/>
-                                      </p:to>
-                                    </p:set>
-                                  </p:childTnLst>
-                                </p:cTn>
-                              </p:par>
-                              <p:par>
-                                <p:cTn id="15" presetID="1" presetClass="entr" presetSubtype="0" fill="hold" nodeType="withEffect">
-                                  <p:stCondLst>
-                                    <p:cond delay="0"/>
-                                  </p:stCondLst>
-                                  <p:childTnLst>
-                                    <p:set>
-                                      <p:cBhvr>
-                                        <p:cTn id="16" dur="1" fill="hold">
-                                          <p:stCondLst>
-                                            <p:cond delay="0"/>
-                                          </p:stCondLst>
-                                        </p:cTn>
-                                        <p:tgtEl>
-                                          <p:spTgt spid="3">
-                                            <p:txEl>
-                                              <p:pRg st="4" end="4"/>
-                                            </p:txEl>
-                                          </p:spTgt>
-                                        </p:tgtEl>
-                                        <p:attrNameLst>
-                                          <p:attrName>style.visibility</p:attrName>
-                                        </p:attrNameLst>
-                                      </p:cBhvr>
-                                      <p:to>
-                                        <p:strVal val="visible"/>
-                                      </p:to>
-                                    </p:set>
-                                  </p:childTnLst>
-                                </p:cTn>
-                              </p:par>
-                              <p:par>
-                                <p:cTn id="17" presetID="1" presetClass="entr" presetSubtype="0" fill="hold" nodeType="withEffect">
-                                  <p:stCondLst>
-                                    <p:cond delay="0"/>
-                                  </p:stCondLst>
-                                  <p:childTnLst>
-                                    <p:set>
-                                      <p:cBhvr>
-                                        <p:cTn id="18" dur="1" fill="hold">
-                                          <p:stCondLst>
-                                            <p:cond delay="0"/>
-                                          </p:stCondLst>
-                                        </p:cTn>
-                                        <p:tgtEl>
-                                          <p:spTgt spid="3">
-                                            <p:txEl>
-                                              <p:pRg st="5" end="5"/>
-                                            </p:txEl>
-                                          </p:spTgt>
-                                        </p:tgtEl>
-                                        <p:attrNameLst>
-                                          <p:attrName>style.visibility</p:attrName>
-                                        </p:attrNameLst>
-                                      </p:cBhvr>
-                                      <p:to>
-                                        <p:strVal val="visible"/>
-                                      </p:to>
-                                    </p:set>
-                                  </p:childTnLst>
-                                </p:cTn>
-                              </p:par>
-                              <p:par>
-                                <p:cTn id="19" presetID="1" presetClass="entr" presetSubtype="0" fill="hold" nodeType="withEffect">
-                                  <p:stCondLst>
-                                    <p:cond delay="0"/>
-                                  </p:stCondLst>
-                                  <p:childTnLst>
-                                    <p:set>
-                                      <p:cBhvr>
-                                        <p:cTn id="20" dur="1" fill="hold">
-                                          <p:stCondLst>
-                                            <p:cond delay="0"/>
-                                          </p:stCondLst>
-                                        </p:cTn>
-                                        <p:tgtEl>
-                                          <p:spTgt spid="3">
-                                            <p:txEl>
-                                              <p:pRg st="6" end="6"/>
-                                            </p:txEl>
-                                          </p:spTgt>
-                                        </p:tgtEl>
-                                        <p:attrNameLst>
-                                          <p:attrName>style.visibility</p:attrName>
-                                        </p:attrNameLst>
-                                      </p:cBhvr>
-                                      <p:to>
-                                        <p:strVal val="visible"/>
-                                      </p:to>
-                                    </p:set>
-                                  </p:childTnLst>
-                                </p:cTn>
-                              </p:par>
-                            </p:childTnLst>
-                          </p:cTn>
-                        </p:par>
-                      </p:childTnLst>
-                    </p:cTn>
-                  </p:par>
-                </p:childTnLst>
-              </p:cTn>
-              <p:prevCondLst>
-                <p:cond evt="onPrev" delay="0">
-                  <p:tgtEl>
-                    <p:sldTgt/>
-                  </p:tgtEl>
-                </p:cond>
-              </p:prevCondLst>
-              <p:nextCondLst>
-                <p:cond evt="onNext" delay="0">
-                  <p:tgtEl>
-                    <p:sldTgt/>
-                  </p:tgtEl>
-                </p:cond>
-              </p:nextCondLst>
-            </p:seq>
-          </p:childTnLst>
-        </p:cTn>
-      </p:par>
-    </p:tnLst>
-  </p:timing>
-</p:sld>
-</file>
-
-<file path=ppt/slides/slide8.xml><?xml version="1.0" encoding="utf-8"?>
-<p:sld xmlns:a="http://schemas.openxmlformats.org/drawingml/2006/main" xmlns:r="http://schemas.openxmlformats.org/officeDocument/2006/relationships" xmlns:p="http://schemas.openxmlformats.org/presentationml/2006/main">
-  <p:cSld>
-    <p:spTree>
-      <p:nvGrpSpPr>
-        <p:cNvPr id="1" name=""/>
-        <p:cNvGrpSpPr/>
-        <p:nvPr/>
-      </p:nvGrpSpPr>
-      <p:grpSpPr>
-        <a:xfrm>
-          <a:off x="0" y="0"/>
-          <a:ext cx="0" cy="0"/>
-          <a:chOff x="0" y="0"/>
-          <a:chExt cx="0" cy="0"/>
-        </a:xfrm>
-      </p:grpSpPr>
-      <p:sp>
-        <p:nvSpPr>
-          <p:cNvPr id="2" name="Title 1">
-            <a:extLst>
-              <a:ext uri="{FF2B5EF4-FFF2-40B4-BE49-F238E27FC236}">
-                <a16:creationId xmlns:a16="http://schemas.microsoft.com/office/drawing/2014/main" id="{8207F09F-B406-FB4C-ABE0-890E4E4F95C8}"/>
-              </a:ext>
-            </a:extLst>
-          </p:cNvPr>
-          <p:cNvSpPr>
-            <a:spLocks noGrp="1"/>
-          </p:cNvSpPr>
-          <p:nvPr>
-            <p:ph type="ctrTitle"/>
-          </p:nvPr>
-        </p:nvSpPr>
-        <p:spPr>
-          <a:xfrm>
-            <a:off x="1524000" y="652805"/>
-            <a:ext cx="9144000" cy="629343"/>
-          </a:xfrm>
-        </p:spPr>
-        <p:txBody>
-          <a:bodyPr>
-            <a:normAutofit fontScale="90000"/>
-          </a:bodyPr>
-          <a:lstStyle/>
-          <a:p>
-            <a:r>
-              <a:rPr lang="en-US" dirty="0"/>
-              <a:t>MapReduce Paradigm: High-Level</a:t>
-            </a:r>
-          </a:p>
-        </p:txBody>
-      </p:sp>
-      <p:sp>
-        <p:nvSpPr>
-          <p:cNvPr id="3" name="Subtitle 2">
-            <a:extLst>
-              <a:ext uri="{FF2B5EF4-FFF2-40B4-BE49-F238E27FC236}">
-                <a16:creationId xmlns:a16="http://schemas.microsoft.com/office/drawing/2014/main" id="{67BA4937-A89D-8343-B4A3-942B771C889A}"/>
-              </a:ext>
-            </a:extLst>
-          </p:cNvPr>
-          <p:cNvSpPr>
-            <a:spLocks noGrp="1"/>
-          </p:cNvSpPr>
-          <p:nvPr>
-            <p:ph type="subTitle" idx="1"/>
-          </p:nvPr>
-        </p:nvSpPr>
-        <p:spPr>
-          <a:xfrm>
-            <a:off x="1524000" y="1371600"/>
-            <a:ext cx="9144000" cy="4333461"/>
-          </a:xfrm>
-        </p:spPr>
-        <p:txBody>
-          <a:bodyPr>
-            <a:normAutofit/>
-          </a:bodyPr>
-          <a:lstStyle/>
-          <a:p>
-            <a:pPr marL="800100" lvl="1" indent="-342900" algn="l">
-              <a:buFont typeface="+mj-lt"/>
-              <a:buAutoNum type="arabicPeriod"/>
-            </a:pPr>
-            <a:endParaRPr lang="en-US" sz="1200" dirty="0"/>
-          </a:p>
-        </p:txBody>
-      </p:sp>
-      <p:pic>
-        <p:nvPicPr>
-          <p:cNvPr id="5" name="Picture 4">
-            <a:extLst>
-              <a:ext uri="{FF2B5EF4-FFF2-40B4-BE49-F238E27FC236}">
-                <a16:creationId xmlns:a16="http://schemas.microsoft.com/office/drawing/2014/main" id="{491BFEAB-8BBF-7B20-3166-F2CEF8513A05}"/>
-              </a:ext>
-            </a:extLst>
-          </p:cNvPr>
-          <p:cNvPicPr>
-            <a:picLocks noChangeAspect="1"/>
-          </p:cNvPicPr>
-          <p:nvPr/>
-        </p:nvPicPr>
-        <p:blipFill>
-          <a:blip r:embed="rId2"/>
-          <a:stretch>
-            <a:fillRect/>
-          </a:stretch>
-        </p:blipFill>
-        <p:spPr>
-          <a:xfrm>
-            <a:off x="1651000" y="1828800"/>
-            <a:ext cx="8890000" cy="3657600"/>
-          </a:xfrm>
-          <a:prstGeom prst="rect">
-            <a:avLst/>
-          </a:prstGeom>
-        </p:spPr>
-      </p:pic>
-    </p:spTree>
-    <p:extLst>
-      <p:ext uri="{BB962C8B-B14F-4D97-AF65-F5344CB8AC3E}">
-        <p14:creationId xmlns:p14="http://schemas.microsoft.com/office/powerpoint/2010/main" val="230988414"/>
-      </p:ext>
-    </p:extLst>
-  </p:cSld>
-  <p:clrMapOvr>
-    <a:masterClrMapping/>
-  </p:clrMapOvr>
-</p:sld>
-</file>
-
-<file path=ppt/slides/slide9.xml><?xml version="1.0" encoding="utf-8"?>
-<p:sld xmlns:a="http://schemas.openxmlformats.org/drawingml/2006/main" xmlns:r="http://schemas.openxmlformats.org/officeDocument/2006/relationships" xmlns:p="http://schemas.openxmlformats.org/presentationml/2006/main">
-  <p:cSld>
-    <p:spTree>
-      <p:nvGrpSpPr>
-        <p:cNvPr id="1" name=""/>
-        <p:cNvGrpSpPr/>
-        <p:nvPr/>
-      </p:nvGrpSpPr>
-      <p:grpSpPr>
-        <a:xfrm>
-          <a:off x="0" y="0"/>
-          <a:ext cx="0" cy="0"/>
-          <a:chOff x="0" y="0"/>
-          <a:chExt cx="0" cy="0"/>
-        </a:xfrm>
-      </p:grpSpPr>
-      <p:sp>
-        <p:nvSpPr>
-          <p:cNvPr id="2" name="Title 1">
-            <a:extLst>
-              <a:ext uri="{FF2B5EF4-FFF2-40B4-BE49-F238E27FC236}">
-                <a16:creationId xmlns:a16="http://schemas.microsoft.com/office/drawing/2014/main" id="{8207F09F-B406-FB4C-ABE0-890E4E4F95C8}"/>
-              </a:ext>
-            </a:extLst>
-          </p:cNvPr>
-          <p:cNvSpPr>
-            <a:spLocks noGrp="1"/>
-          </p:cNvSpPr>
-          <p:nvPr>
-            <p:ph type="ctrTitle"/>
-          </p:nvPr>
-        </p:nvSpPr>
-        <p:spPr>
-          <a:xfrm>
-            <a:off x="1524000" y="652805"/>
-            <a:ext cx="9144000" cy="718795"/>
-          </a:xfrm>
-        </p:spPr>
-        <p:txBody>
-          <a:bodyPr>
-            <a:normAutofit fontScale="90000"/>
-          </a:bodyPr>
-          <a:lstStyle/>
-          <a:p>
-            <a:r>
-              <a:rPr lang="en-US" dirty="0"/>
-              <a:t>MapReduce Paradigm</a:t>
-            </a:r>
-          </a:p>
-        </p:txBody>
-      </p:sp>
-      <p:pic>
-        <p:nvPicPr>
-          <p:cNvPr id="6" name="Picture 5" descr="Diagram, schematic&#10;&#10;Description automatically generated">
-            <a:extLst>
-              <a:ext uri="{FF2B5EF4-FFF2-40B4-BE49-F238E27FC236}">
-                <a16:creationId xmlns:a16="http://schemas.microsoft.com/office/drawing/2014/main" id="{8F8E1082-1B75-2177-A0EF-659F97E96A95}"/>
-              </a:ext>
-            </a:extLst>
-          </p:cNvPr>
-          <p:cNvPicPr>
-            <a:picLocks noChangeAspect="1"/>
-          </p:cNvPicPr>
-          <p:nvPr/>
-        </p:nvPicPr>
-        <p:blipFill>
-          <a:blip r:embed="rId2"/>
-          <a:stretch>
-            <a:fillRect/>
-          </a:stretch>
-        </p:blipFill>
-        <p:spPr>
-          <a:xfrm>
-            <a:off x="1524000" y="1470453"/>
-            <a:ext cx="7780638" cy="3978877"/>
-          </a:xfrm>
-          <a:prstGeom prst="rect">
-            <a:avLst/>
-          </a:prstGeom>
-        </p:spPr>
-      </p:pic>
-    </p:spTree>
-    <p:extLst>
-      <p:ext uri="{BB962C8B-B14F-4D97-AF65-F5344CB8AC3E}">
-        <p14:creationId xmlns:p14="http://schemas.microsoft.com/office/powerpoint/2010/main" val="3660410151"/>
-      </p:ext>
-    </p:extLst>
-  </p:cSld>
-  <p:clrMapOvr>
-    <a:masterClrMapping/>
-  </p:clrMapOvr>
 </p:sld>
 </file>
 

--- a/course_outine_10_weeks/Course_Outline_Big_Data_Modeling.pptx
+++ b/course_outine_10_weeks/Course_Outline_Big_Data_Modeling.pptx
@@ -21485,8 +21485,8 @@
         </p:nvSpPr>
         <p:spPr>
           <a:xfrm>
-            <a:off x="1523999" y="397565"/>
-            <a:ext cx="9144000" cy="750402"/>
+            <a:off x="3433414" y="287567"/>
+            <a:ext cx="4192655" cy="750402"/>
           </a:xfrm>
         </p:spPr>
         <p:txBody>
@@ -21556,8 +21556,8 @@
         </p:nvSpPr>
         <p:spPr>
           <a:xfrm>
-            <a:off x="892814" y="2786028"/>
-            <a:ext cx="2609126" cy="2069889"/>
+            <a:off x="1080230" y="2797226"/>
+            <a:ext cx="2030770" cy="2069889"/>
           </a:xfrm>
           <a:prstGeom prst="foldedCorner">
             <a:avLst/>
@@ -21697,7 +21697,7 @@
         </p:nvSpPr>
         <p:spPr>
           <a:xfrm>
-            <a:off x="3866323" y="2842591"/>
+            <a:off x="4000121" y="2855485"/>
             <a:ext cx="4192654" cy="2067339"/>
           </a:xfrm>
           <a:prstGeom prst="rect">
@@ -21794,8 +21794,8 @@
         </p:nvSpPr>
         <p:spPr>
           <a:xfrm>
-            <a:off x="8882270" y="3177366"/>
-            <a:ext cx="1404730" cy="914400"/>
+            <a:off x="9004052" y="3175686"/>
+            <a:ext cx="1404730" cy="916080"/>
           </a:xfrm>
           <a:prstGeom prst="foldedCorner">
             <a:avLst/>
@@ -21857,13 +21857,13 @@
         </p:nvCxnSpPr>
         <p:spPr>
           <a:xfrm>
-            <a:off x="3501940" y="3820973"/>
-            <a:ext cx="364383" cy="55288"/>
+            <a:off x="3111000" y="3832171"/>
+            <a:ext cx="889121" cy="56984"/>
           </a:xfrm>
           <a:prstGeom prst="straightConnector1">
             <a:avLst/>
           </a:prstGeom>
-          <a:ln>
+          <a:ln w="22225">
             <a:solidFill>
               <a:schemeClr val="tx1"/>
             </a:solidFill>
@@ -21903,15 +21903,17 @@
         </p:nvCxnSpPr>
         <p:spPr>
           <a:xfrm flipV="1">
-            <a:off x="8058977" y="3634566"/>
-            <a:ext cx="823293" cy="241695"/>
+            <a:off x="8192775" y="3633726"/>
+            <a:ext cx="811277" cy="255429"/>
           </a:xfrm>
           <a:prstGeom prst="straightConnector1">
             <a:avLst/>
           </a:prstGeom>
-          <a:ln>
+          <a:ln w="31750">
             <a:solidFill>
-              <a:schemeClr val="tx1"/>
+              <a:schemeClr val="tx1">
+                <a:alpha val="94000"/>
+              </a:schemeClr>
             </a:solidFill>
             <a:tailEnd type="triangle" w="lg" len="lg"/>
           </a:ln>
@@ -21945,7 +21947,7 @@
         </p:nvSpPr>
         <p:spPr>
           <a:xfrm>
-            <a:off x="2730778" y="1254883"/>
+            <a:off x="2385445" y="1202700"/>
             <a:ext cx="1881808" cy="1033669"/>
           </a:xfrm>
           <a:prstGeom prst="roundRect">
@@ -21997,8 +21999,8 @@
         </p:nvSpPr>
         <p:spPr>
           <a:xfrm>
-            <a:off x="4826277" y="1292155"/>
-            <a:ext cx="1881808" cy="1033669"/>
+            <a:off x="4451420" y="1202701"/>
+            <a:ext cx="2461846" cy="1123124"/>
           </a:xfrm>
           <a:prstGeom prst="roundRect">
             <a:avLst/>
@@ -22037,64 +22039,23 @@
             <a:pPr algn="ctr"/>
             <a:r>
               <a:rPr lang="en-US" sz="2400" dirty="0"/>
-              <a:t>Spark</a:t>
+              <a:t>Spark/PySpark</a:t>
             </a:r>
           </a:p>
           <a:p>
             <a:pPr algn="ctr"/>
             <a:r>
               <a:rPr lang="en-US" sz="2400" dirty="0"/>
-              <a:t>PySpark</a:t>
-            </a:r>
+              <a:t>RDD/</a:t>
+            </a:r>
+            <a:r>
+              <a:rPr lang="en-US" sz="2400" dirty="0" err="1"/>
+              <a:t>DataFrame</a:t>
+            </a:r>
+            <a:endParaRPr lang="en-US" sz="2400" dirty="0"/>
           </a:p>
         </p:txBody>
       </p:sp>
-      <p:cxnSp>
-        <p:nvCxnSpPr>
-          <p:cNvPr id="11" name="Straight Connector 10">
-            <a:extLst>
-              <a:ext uri="{FF2B5EF4-FFF2-40B4-BE49-F238E27FC236}">
-                <a16:creationId xmlns:a16="http://schemas.microsoft.com/office/drawing/2014/main" id="{18258C1F-9AEA-F448-93BC-4C001F23E7A9}"/>
-              </a:ext>
-            </a:extLst>
-          </p:cNvPr>
-          <p:cNvCxnSpPr>
-            <a:cxnSpLocks/>
-            <a:stCxn id="7" idx="2"/>
-          </p:cNvCxnSpPr>
-          <p:nvPr/>
-        </p:nvCxnSpPr>
-        <p:spPr>
-          <a:xfrm>
-            <a:off x="3671682" y="2288552"/>
-            <a:ext cx="374374" cy="551489"/>
-          </a:xfrm>
-          <a:prstGeom prst="line">
-            <a:avLst/>
-          </a:prstGeom>
-          <a:ln w="15875">
-            <a:solidFill>
-              <a:schemeClr val="tx1">
-                <a:alpha val="32000"/>
-              </a:schemeClr>
-            </a:solidFill>
-          </a:ln>
-        </p:spPr>
-        <p:style>
-          <a:lnRef idx="1">
-            <a:schemeClr val="accent1"/>
-          </a:lnRef>
-          <a:fillRef idx="0">
-            <a:schemeClr val="accent1"/>
-          </a:fillRef>
-          <a:effectRef idx="0">
-            <a:schemeClr val="accent1"/>
-          </a:effectRef>
-          <a:fontRef idx="minor">
-            <a:schemeClr val="tx1"/>
-          </a:fontRef>
-        </p:style>
-      </p:cxnSp>
       <p:cxnSp>
         <p:nvCxnSpPr>
           <p:cNvPr id="16" name="Straight Connector 15">
@@ -22113,13 +22074,13 @@
         </p:nvCxnSpPr>
         <p:spPr>
           <a:xfrm>
-            <a:off x="5767181" y="2325824"/>
-            <a:ext cx="195469" cy="516767"/>
+            <a:off x="5682343" y="2325825"/>
+            <a:ext cx="414105" cy="529660"/>
           </a:xfrm>
           <a:prstGeom prst="line">
             <a:avLst/>
           </a:prstGeom>
-          <a:ln>
+          <a:ln w="31750">
             <a:solidFill>
               <a:schemeClr val="tx1"/>
             </a:solidFill>
@@ -22154,7 +22115,7 @@
         </p:nvSpPr>
         <p:spPr>
           <a:xfrm>
-            <a:off x="6921776" y="1306661"/>
+            <a:off x="7172985" y="1291451"/>
             <a:ext cx="2002735" cy="1033669"/>
           </a:xfrm>
           <a:prstGeom prst="roundRect">
@@ -22245,7 +22206,50 @@
           <a:prstGeom prst="line">
             <a:avLst/>
           </a:prstGeom>
-          <a:ln>
+          <a:ln w="25400">
+            <a:solidFill>
+              <a:schemeClr val="tx1"/>
+            </a:solidFill>
+          </a:ln>
+        </p:spPr>
+        <p:style>
+          <a:lnRef idx="1">
+            <a:schemeClr val="accent1"/>
+          </a:lnRef>
+          <a:fillRef idx="0">
+            <a:schemeClr val="accent1"/>
+          </a:fillRef>
+          <a:effectRef idx="0">
+            <a:schemeClr val="accent1"/>
+          </a:effectRef>
+          <a:fontRef idx="minor">
+            <a:schemeClr val="tx1"/>
+          </a:fontRef>
+        </p:style>
+      </p:cxnSp>
+      <p:cxnSp>
+        <p:nvCxnSpPr>
+          <p:cNvPr id="20" name="Straight Connector 19">
+            <a:extLst>
+              <a:ext uri="{FF2B5EF4-FFF2-40B4-BE49-F238E27FC236}">
+                <a16:creationId xmlns:a16="http://schemas.microsoft.com/office/drawing/2014/main" id="{47874E25-F3A4-8706-151D-7E2633C31F01}"/>
+              </a:ext>
+            </a:extLst>
+          </p:cNvPr>
+          <p:cNvCxnSpPr>
+            <a:cxnSpLocks/>
+          </p:cNvCxnSpPr>
+          <p:nvPr/>
+        </p:nvCxnSpPr>
+        <p:spPr>
+          <a:xfrm>
+            <a:off x="3418232" y="2264006"/>
+            <a:ext cx="970001" cy="533220"/>
+          </a:xfrm>
+          <a:prstGeom prst="line">
+            <a:avLst/>
+          </a:prstGeom>
+          <a:ln w="31750">
             <a:solidFill>
               <a:schemeClr val="tx1"/>
             </a:solidFill>

--- a/course_outine_10_weeks/Course_Outline_Big_Data_Modeling.pptx
+++ b/course_outine_10_weeks/Course_Outline_Big_Data_Modeling.pptx
@@ -5,43 +5,44 @@
     <p:sldMasterId id="2147483660" r:id="rId1"/>
   </p:sldMasterIdLst>
   <p:notesMasterIdLst>
-    <p:notesMasterId r:id="rId36"/>
+    <p:notesMasterId r:id="rId37"/>
   </p:notesMasterIdLst>
   <p:sldIdLst>
     <p:sldId id="256" r:id="rId2"/>
     <p:sldId id="288" r:id="rId3"/>
-    <p:sldId id="291" r:id="rId4"/>
-    <p:sldId id="257" r:id="rId5"/>
-    <p:sldId id="289" r:id="rId6"/>
-    <p:sldId id="290" r:id="rId7"/>
-    <p:sldId id="287" r:id="rId8"/>
-    <p:sldId id="258" r:id="rId9"/>
-    <p:sldId id="260" r:id="rId10"/>
-    <p:sldId id="277" r:id="rId11"/>
-    <p:sldId id="278" r:id="rId12"/>
-    <p:sldId id="263" r:id="rId13"/>
-    <p:sldId id="262" r:id="rId14"/>
-    <p:sldId id="271" r:id="rId15"/>
-    <p:sldId id="272" r:id="rId16"/>
-    <p:sldId id="275" r:id="rId17"/>
-    <p:sldId id="280" r:id="rId18"/>
-    <p:sldId id="261" r:id="rId19"/>
-    <p:sldId id="281" r:id="rId20"/>
-    <p:sldId id="279" r:id="rId21"/>
-    <p:sldId id="282" r:id="rId22"/>
-    <p:sldId id="273" r:id="rId23"/>
-    <p:sldId id="284" r:id="rId24"/>
-    <p:sldId id="283" r:id="rId25"/>
-    <p:sldId id="268" r:id="rId26"/>
-    <p:sldId id="264" r:id="rId27"/>
-    <p:sldId id="269" r:id="rId28"/>
-    <p:sldId id="270" r:id="rId29"/>
-    <p:sldId id="274" r:id="rId30"/>
-    <p:sldId id="285" r:id="rId31"/>
-    <p:sldId id="286" r:id="rId32"/>
-    <p:sldId id="276" r:id="rId33"/>
-    <p:sldId id="266" r:id="rId34"/>
-    <p:sldId id="267" r:id="rId35"/>
+    <p:sldId id="292" r:id="rId4"/>
+    <p:sldId id="291" r:id="rId5"/>
+    <p:sldId id="257" r:id="rId6"/>
+    <p:sldId id="289" r:id="rId7"/>
+    <p:sldId id="290" r:id="rId8"/>
+    <p:sldId id="287" r:id="rId9"/>
+    <p:sldId id="258" r:id="rId10"/>
+    <p:sldId id="260" r:id="rId11"/>
+    <p:sldId id="277" r:id="rId12"/>
+    <p:sldId id="278" r:id="rId13"/>
+    <p:sldId id="263" r:id="rId14"/>
+    <p:sldId id="262" r:id="rId15"/>
+    <p:sldId id="271" r:id="rId16"/>
+    <p:sldId id="272" r:id="rId17"/>
+    <p:sldId id="275" r:id="rId18"/>
+    <p:sldId id="280" r:id="rId19"/>
+    <p:sldId id="261" r:id="rId20"/>
+    <p:sldId id="281" r:id="rId21"/>
+    <p:sldId id="279" r:id="rId22"/>
+    <p:sldId id="282" r:id="rId23"/>
+    <p:sldId id="273" r:id="rId24"/>
+    <p:sldId id="284" r:id="rId25"/>
+    <p:sldId id="283" r:id="rId26"/>
+    <p:sldId id="268" r:id="rId27"/>
+    <p:sldId id="264" r:id="rId28"/>
+    <p:sldId id="269" r:id="rId29"/>
+    <p:sldId id="270" r:id="rId30"/>
+    <p:sldId id="274" r:id="rId31"/>
+    <p:sldId id="285" r:id="rId32"/>
+    <p:sldId id="286" r:id="rId33"/>
+    <p:sldId id="276" r:id="rId34"/>
+    <p:sldId id="266" r:id="rId35"/>
+    <p:sldId id="267" r:id="rId36"/>
   </p:sldIdLst>
   <p:sldSz cx="12192000" cy="6858000"/>
   <p:notesSz cx="6858000" cy="9144000"/>
@@ -7144,6 +7145,434 @@
           <a:p>
             <a:r>
               <a:rPr lang="en-US" dirty="0"/>
+              <a:t>1. MapReduce Paradigm</a:t>
+            </a:r>
+          </a:p>
+        </p:txBody>
+      </p:sp>
+      <p:sp>
+        <p:nvSpPr>
+          <p:cNvPr id="3" name="Subtitle 2">
+            <a:extLst>
+              <a:ext uri="{FF2B5EF4-FFF2-40B4-BE49-F238E27FC236}">
+                <a16:creationId xmlns:a16="http://schemas.microsoft.com/office/drawing/2014/main" id="{67BA4937-A89D-8343-B4A3-942B771C889A}"/>
+              </a:ext>
+            </a:extLst>
+          </p:cNvPr>
+          <p:cNvSpPr>
+            <a:spLocks noGrp="1"/>
+          </p:cNvSpPr>
+          <p:nvPr>
+            <p:ph type="subTitle" idx="1"/>
+          </p:nvPr>
+        </p:nvSpPr>
+        <p:spPr>
+          <a:xfrm>
+            <a:off x="1524000" y="1689652"/>
+            <a:ext cx="9144000" cy="4283765"/>
+          </a:xfrm>
+        </p:spPr>
+        <p:txBody>
+          <a:bodyPr>
+            <a:normAutofit/>
+          </a:bodyPr>
+          <a:lstStyle/>
+          <a:p>
+            <a:pPr marL="457200" indent="-457200" algn="l">
+              <a:buFont typeface="Arial" panose="020B0604020202020204" pitchFamily="34" charset="0"/>
+              <a:buChar char="•"/>
+            </a:pPr>
+            <a:r>
+              <a:rPr lang="en-US" sz="3000" b="1" dirty="0">
+                <a:solidFill>
+                  <a:srgbClr val="002060"/>
+                </a:solidFill>
+              </a:rPr>
+              <a:t>MapReduce</a:t>
+            </a:r>
+            <a:r>
+              <a:rPr lang="en-US" sz="3000" dirty="0">
+                <a:solidFill>
+                  <a:srgbClr val="002060"/>
+                </a:solidFill>
+              </a:rPr>
+              <a:t> is a programming </a:t>
+            </a:r>
+            <a:r>
+              <a:rPr lang="en-US" sz="3000" b="1" dirty="0">
+                <a:solidFill>
+                  <a:srgbClr val="002060"/>
+                </a:solidFill>
+              </a:rPr>
+              <a:t>paradigm/model</a:t>
+            </a:r>
+            <a:r>
+              <a:rPr lang="en-US" sz="3000" dirty="0">
+                <a:solidFill>
+                  <a:srgbClr val="002060"/>
+                </a:solidFill>
+              </a:rPr>
+              <a:t> that enables </a:t>
+            </a:r>
+            <a:r>
+              <a:rPr lang="en-US" sz="3000" b="1" dirty="0">
+                <a:solidFill>
+                  <a:srgbClr val="002060"/>
+                </a:solidFill>
+              </a:rPr>
+              <a:t>massive scalability </a:t>
+            </a:r>
+            <a:r>
+              <a:rPr lang="en-US" sz="3000" dirty="0">
+                <a:solidFill>
+                  <a:srgbClr val="002060"/>
+                </a:solidFill>
+              </a:rPr>
+              <a:t>across hundreds or thousands of servers in a cluster.</a:t>
+            </a:r>
+            <a:endParaRPr lang="en-US" sz="3600" dirty="0"/>
+          </a:p>
+          <a:p>
+            <a:pPr marL="571500" indent="-571500" algn="l">
+              <a:buFont typeface="Arial" panose="020B0604020202020204" pitchFamily="34" charset="0"/>
+              <a:buChar char="•"/>
+            </a:pPr>
+            <a:r>
+              <a:rPr lang="en-US" sz="3600" dirty="0"/>
+              <a:t>MapReduce has 3 functions:</a:t>
+            </a:r>
+          </a:p>
+          <a:p>
+            <a:pPr marL="1028700" lvl="1" indent="-571500" algn="l">
+              <a:buFont typeface="Arial" panose="020B0604020202020204" pitchFamily="34" charset="0"/>
+              <a:buChar char="•"/>
+            </a:pPr>
+            <a:r>
+              <a:rPr lang="en-US" sz="3200" dirty="0">
+                <a:latin typeface="Consolas" panose="020B0609020204030204" pitchFamily="49" charset="0"/>
+                <a:cs typeface="Consolas" panose="020B0609020204030204" pitchFamily="49" charset="0"/>
+              </a:rPr>
+              <a:t>map()</a:t>
+            </a:r>
+          </a:p>
+          <a:p>
+            <a:pPr marL="1028700" lvl="1" indent="-571500" algn="l">
+              <a:buFont typeface="Arial" panose="020B0604020202020204" pitchFamily="34" charset="0"/>
+              <a:buChar char="•"/>
+            </a:pPr>
+            <a:r>
+              <a:rPr lang="en-US" sz="3200" dirty="0">
+                <a:latin typeface="Consolas" panose="020B0609020204030204" pitchFamily="49" charset="0"/>
+                <a:cs typeface="Consolas" panose="020B0609020204030204" pitchFamily="49" charset="0"/>
+              </a:rPr>
+              <a:t>reduce()</a:t>
+            </a:r>
+          </a:p>
+          <a:p>
+            <a:pPr marL="1028700" lvl="1" indent="-571500" algn="l">
+              <a:buFont typeface="Arial" panose="020B0604020202020204" pitchFamily="34" charset="0"/>
+              <a:buChar char="•"/>
+            </a:pPr>
+            <a:r>
+              <a:rPr lang="en-US" sz="3200" dirty="0">
+                <a:latin typeface="Consolas" panose="020B0609020204030204" pitchFamily="49" charset="0"/>
+                <a:cs typeface="Consolas" panose="020B0609020204030204" pitchFamily="49" charset="0"/>
+              </a:rPr>
+              <a:t>combine()</a:t>
+            </a:r>
+            <a:endParaRPr lang="en-US" sz="800" dirty="0">
+              <a:latin typeface="Consolas" panose="020B0609020204030204" pitchFamily="49" charset="0"/>
+              <a:cs typeface="Consolas" panose="020B0609020204030204" pitchFamily="49" charset="0"/>
+            </a:endParaRPr>
+          </a:p>
+          <a:p>
+            <a:pPr marL="800100" lvl="1" indent="-342900" algn="l">
+              <a:buFont typeface="+mj-lt"/>
+              <a:buAutoNum type="arabicPeriod"/>
+            </a:pPr>
+            <a:endParaRPr lang="en-US" sz="1200" dirty="0"/>
+          </a:p>
+        </p:txBody>
+      </p:sp>
+    </p:spTree>
+    <p:extLst>
+      <p:ext uri="{BB962C8B-B14F-4D97-AF65-F5344CB8AC3E}">
+        <p14:creationId xmlns:p14="http://schemas.microsoft.com/office/powerpoint/2010/main" val="3838766083"/>
+      </p:ext>
+    </p:extLst>
+  </p:cSld>
+  <p:clrMapOvr>
+    <a:masterClrMapping/>
+  </p:clrMapOvr>
+  <p:timing>
+    <p:tnLst>
+      <p:par>
+        <p:cTn id="1" dur="indefinite" restart="never" nodeType="tmRoot">
+          <p:childTnLst>
+            <p:seq concurrent="1" nextAc="seek">
+              <p:cTn id="2" dur="indefinite" nodeType="mainSeq">
+                <p:childTnLst>
+                  <p:par>
+                    <p:cTn id="3" fill="hold">
+                      <p:stCondLst>
+                        <p:cond delay="indefinite"/>
+                      </p:stCondLst>
+                      <p:childTnLst>
+                        <p:par>
+                          <p:cTn id="4" fill="hold">
+                            <p:stCondLst>
+                              <p:cond delay="0"/>
+                            </p:stCondLst>
+                            <p:childTnLst>
+                              <p:par>
+                                <p:cTn id="5" presetID="1" presetClass="entr" presetSubtype="0" fill="hold" nodeType="clickEffect">
+                                  <p:stCondLst>
+                                    <p:cond delay="0"/>
+                                  </p:stCondLst>
+                                  <p:childTnLst>
+                                    <p:set>
+                                      <p:cBhvr>
+                                        <p:cTn id="6" dur="1" fill="hold">
+                                          <p:stCondLst>
+                                            <p:cond delay="0"/>
+                                          </p:stCondLst>
+                                        </p:cTn>
+                                        <p:tgtEl>
+                                          <p:spTgt spid="3">
+                                            <p:txEl>
+                                              <p:pRg st="0" end="0"/>
+                                            </p:txEl>
+                                          </p:spTgt>
+                                        </p:tgtEl>
+                                        <p:attrNameLst>
+                                          <p:attrName>style.visibility</p:attrName>
+                                        </p:attrNameLst>
+                                      </p:cBhvr>
+                                      <p:to>
+                                        <p:strVal val="visible"/>
+                                      </p:to>
+                                    </p:set>
+                                  </p:childTnLst>
+                                </p:cTn>
+                              </p:par>
+                            </p:childTnLst>
+                          </p:cTn>
+                        </p:par>
+                      </p:childTnLst>
+                    </p:cTn>
+                  </p:par>
+                  <p:par>
+                    <p:cTn id="7" fill="hold">
+                      <p:stCondLst>
+                        <p:cond delay="indefinite"/>
+                      </p:stCondLst>
+                      <p:childTnLst>
+                        <p:par>
+                          <p:cTn id="8" fill="hold">
+                            <p:stCondLst>
+                              <p:cond delay="0"/>
+                            </p:stCondLst>
+                            <p:childTnLst>
+                              <p:par>
+                                <p:cTn id="9" presetID="1" presetClass="entr" presetSubtype="0" fill="hold" nodeType="clickEffect">
+                                  <p:stCondLst>
+                                    <p:cond delay="0"/>
+                                  </p:stCondLst>
+                                  <p:childTnLst>
+                                    <p:set>
+                                      <p:cBhvr>
+                                        <p:cTn id="10" dur="1" fill="hold">
+                                          <p:stCondLst>
+                                            <p:cond delay="0"/>
+                                          </p:stCondLst>
+                                        </p:cTn>
+                                        <p:tgtEl>
+                                          <p:spTgt spid="3">
+                                            <p:txEl>
+                                              <p:pRg st="1" end="1"/>
+                                            </p:txEl>
+                                          </p:spTgt>
+                                        </p:tgtEl>
+                                        <p:attrNameLst>
+                                          <p:attrName>style.visibility</p:attrName>
+                                        </p:attrNameLst>
+                                      </p:cBhvr>
+                                      <p:to>
+                                        <p:strVal val="visible"/>
+                                      </p:to>
+                                    </p:set>
+                                  </p:childTnLst>
+                                </p:cTn>
+                              </p:par>
+                              <p:par>
+                                <p:cTn id="11" presetID="1" presetClass="entr" presetSubtype="0" fill="hold" nodeType="withEffect">
+                                  <p:stCondLst>
+                                    <p:cond delay="0"/>
+                                  </p:stCondLst>
+                                  <p:childTnLst>
+                                    <p:set>
+                                      <p:cBhvr>
+                                        <p:cTn id="12" dur="1" fill="hold">
+                                          <p:stCondLst>
+                                            <p:cond delay="0"/>
+                                          </p:stCondLst>
+                                        </p:cTn>
+                                        <p:tgtEl>
+                                          <p:spTgt spid="3">
+                                            <p:txEl>
+                                              <p:pRg st="2" end="2"/>
+                                            </p:txEl>
+                                          </p:spTgt>
+                                        </p:tgtEl>
+                                        <p:attrNameLst>
+                                          <p:attrName>style.visibility</p:attrName>
+                                        </p:attrNameLst>
+                                      </p:cBhvr>
+                                      <p:to>
+                                        <p:strVal val="visible"/>
+                                      </p:to>
+                                    </p:set>
+                                  </p:childTnLst>
+                                </p:cTn>
+                              </p:par>
+                              <p:par>
+                                <p:cTn id="13" presetID="1" presetClass="entr" presetSubtype="0" fill="hold" nodeType="withEffect">
+                                  <p:stCondLst>
+                                    <p:cond delay="0"/>
+                                  </p:stCondLst>
+                                  <p:childTnLst>
+                                    <p:set>
+                                      <p:cBhvr>
+                                        <p:cTn id="14" dur="1" fill="hold">
+                                          <p:stCondLst>
+                                            <p:cond delay="0"/>
+                                          </p:stCondLst>
+                                        </p:cTn>
+                                        <p:tgtEl>
+                                          <p:spTgt spid="3">
+                                            <p:txEl>
+                                              <p:pRg st="3" end="3"/>
+                                            </p:txEl>
+                                          </p:spTgt>
+                                        </p:tgtEl>
+                                        <p:attrNameLst>
+                                          <p:attrName>style.visibility</p:attrName>
+                                        </p:attrNameLst>
+                                      </p:cBhvr>
+                                      <p:to>
+                                        <p:strVal val="visible"/>
+                                      </p:to>
+                                    </p:set>
+                                  </p:childTnLst>
+                                </p:cTn>
+                              </p:par>
+                              <p:par>
+                                <p:cTn id="15" presetID="1" presetClass="entr" presetSubtype="0" fill="hold" nodeType="withEffect">
+                                  <p:stCondLst>
+                                    <p:cond delay="0"/>
+                                  </p:stCondLst>
+                                  <p:childTnLst>
+                                    <p:set>
+                                      <p:cBhvr>
+                                        <p:cTn id="16" dur="1" fill="hold">
+                                          <p:stCondLst>
+                                            <p:cond delay="0"/>
+                                          </p:stCondLst>
+                                        </p:cTn>
+                                        <p:tgtEl>
+                                          <p:spTgt spid="3">
+                                            <p:txEl>
+                                              <p:pRg st="4" end="4"/>
+                                            </p:txEl>
+                                          </p:spTgt>
+                                        </p:tgtEl>
+                                        <p:attrNameLst>
+                                          <p:attrName>style.visibility</p:attrName>
+                                        </p:attrNameLst>
+                                      </p:cBhvr>
+                                      <p:to>
+                                        <p:strVal val="visible"/>
+                                      </p:to>
+                                    </p:set>
+                                  </p:childTnLst>
+                                </p:cTn>
+                              </p:par>
+                            </p:childTnLst>
+                          </p:cTn>
+                        </p:par>
+                      </p:childTnLst>
+                    </p:cTn>
+                  </p:par>
+                </p:childTnLst>
+              </p:cTn>
+              <p:prevCondLst>
+                <p:cond evt="onPrev" delay="0">
+                  <p:tgtEl>
+                    <p:sldTgt/>
+                  </p:tgtEl>
+                </p:cond>
+              </p:prevCondLst>
+              <p:nextCondLst>
+                <p:cond evt="onNext" delay="0">
+                  <p:tgtEl>
+                    <p:sldTgt/>
+                  </p:tgtEl>
+                </p:cond>
+              </p:nextCondLst>
+            </p:seq>
+          </p:childTnLst>
+        </p:cTn>
+      </p:par>
+    </p:tnLst>
+  </p:timing>
+</p:sld>
+</file>
+
+<file path=ppt/slides/slide11.xml><?xml version="1.0" encoding="utf-8"?>
+<p:sld xmlns:a="http://schemas.openxmlformats.org/drawingml/2006/main" xmlns:r="http://schemas.openxmlformats.org/officeDocument/2006/relationships" xmlns:p="http://schemas.openxmlformats.org/presentationml/2006/main">
+  <p:cSld>
+    <p:spTree>
+      <p:nvGrpSpPr>
+        <p:cNvPr id="1" name=""/>
+        <p:cNvGrpSpPr/>
+        <p:nvPr/>
+      </p:nvGrpSpPr>
+      <p:grpSpPr>
+        <a:xfrm>
+          <a:off x="0" y="0"/>
+          <a:ext cx="0" cy="0"/>
+          <a:chOff x="0" y="0"/>
+          <a:chExt cx="0" cy="0"/>
+        </a:xfrm>
+      </p:grpSpPr>
+      <p:sp>
+        <p:nvSpPr>
+          <p:cNvPr id="2" name="Title 1">
+            <a:extLst>
+              <a:ext uri="{FF2B5EF4-FFF2-40B4-BE49-F238E27FC236}">
+                <a16:creationId xmlns:a16="http://schemas.microsoft.com/office/drawing/2014/main" id="{8207F09F-B406-FB4C-ABE0-890E4E4F95C8}"/>
+              </a:ext>
+            </a:extLst>
+          </p:cNvPr>
+          <p:cNvSpPr>
+            <a:spLocks noGrp="1"/>
+          </p:cNvSpPr>
+          <p:nvPr>
+            <p:ph type="ctrTitle"/>
+          </p:nvPr>
+        </p:nvSpPr>
+        <p:spPr>
+          <a:xfrm>
+            <a:off x="1524000" y="652805"/>
+            <a:ext cx="9144000" cy="915159"/>
+          </a:xfrm>
+        </p:spPr>
+        <p:txBody>
+          <a:bodyPr/>
+          <a:lstStyle/>
+          <a:p>
+            <a:r>
+              <a:rPr lang="en-US" dirty="0"/>
               <a:t>1. MapReduce Programs</a:t>
             </a:r>
           </a:p>
@@ -7556,7 +7985,7 @@
 </p:sld>
 </file>
 
-<file path=ppt/slides/slide11.xml><?xml version="1.0" encoding="utf-8"?>
+<file path=ppt/slides/slide12.xml><?xml version="1.0" encoding="utf-8"?>
 <p:sld xmlns:a="http://schemas.openxmlformats.org/drawingml/2006/main" xmlns:r="http://schemas.openxmlformats.org/officeDocument/2006/relationships" xmlns:p="http://schemas.openxmlformats.org/presentationml/2006/main">
   <p:cSld>
     <p:spTree>
@@ -8017,7 +8446,7 @@
 </p:sld>
 </file>
 
-<file path=ppt/slides/slide12.xml><?xml version="1.0" encoding="utf-8"?>
+<file path=ppt/slides/slide13.xml><?xml version="1.0" encoding="utf-8"?>
 <p:sld xmlns:a="http://schemas.openxmlformats.org/drawingml/2006/main" xmlns:r="http://schemas.openxmlformats.org/officeDocument/2006/relationships" xmlns:p="http://schemas.openxmlformats.org/presentationml/2006/main">
   <p:cSld>
     <p:spTree>
@@ -8085,13 +8514,13 @@
         </p:nvSpPr>
         <p:spPr>
           <a:xfrm>
-            <a:off x="1523999" y="1482812"/>
-            <a:ext cx="9362303" cy="4337220"/>
+            <a:off x="1523999" y="1482811"/>
+            <a:ext cx="9362303" cy="4556247"/>
           </a:xfrm>
         </p:spPr>
         <p:txBody>
           <a:bodyPr>
-            <a:normAutofit lnSpcReduction="10000"/>
+            <a:normAutofit fontScale="92500" lnSpcReduction="10000"/>
           </a:bodyPr>
           <a:lstStyle/>
           <a:p>
@@ -8119,7 +8548,7 @@
                   <a:srgbClr val="00B050"/>
                 </a:solidFill>
               </a:rPr>
-              <a:t>MapReduce concrete implementations:</a:t>
+              <a:t>MapReduce implementations:</a:t>
             </a:r>
           </a:p>
           <a:p>
@@ -8128,12 +8557,20 @@
               <a:buChar char="•"/>
             </a:pPr>
             <a:r>
+              <a:rPr lang="en-US" sz="3200" b="1" dirty="0">
+                <a:solidFill>
+                  <a:schemeClr val="tx1"/>
+                </a:solidFill>
+              </a:rPr>
+              <a:t>Apache Hadoop</a:t>
+            </a:r>
+            <a:r>
               <a:rPr lang="en-US" sz="3200" dirty="0">
                 <a:solidFill>
                   <a:schemeClr val="tx1"/>
                 </a:solidFill>
               </a:rPr>
-              <a:t>Apache Hadoop implements MapReduce</a:t>
+              <a:t> implements MapReduce</a:t>
             </a:r>
           </a:p>
           <a:p>
@@ -8142,12 +8579,20 @@
               <a:buChar char="•"/>
             </a:pPr>
             <a:r>
+              <a:rPr lang="en-US" sz="3200" b="1" dirty="0">
+                <a:solidFill>
+                  <a:schemeClr val="tx1"/>
+                </a:solidFill>
+              </a:rPr>
+              <a:t>Apache Spark</a:t>
+            </a:r>
+            <a:r>
               <a:rPr lang="en-US" sz="3200" dirty="0">
                 <a:solidFill>
                   <a:schemeClr val="tx1"/>
                 </a:solidFill>
               </a:rPr>
-              <a:t>Apache Spark implements superset of MapReduce</a:t>
+              <a:t> implements superset of MapReduce</a:t>
             </a:r>
           </a:p>
           <a:p>
@@ -8156,12 +8601,20 @@
               <a:buChar char="•"/>
             </a:pPr>
             <a:r>
+              <a:rPr lang="en-US" sz="3200" b="1" dirty="0">
+                <a:solidFill>
+                  <a:schemeClr val="tx1"/>
+                </a:solidFill>
+              </a:rPr>
+              <a:t>Apache Tez</a:t>
+            </a:r>
+            <a:r>
               <a:rPr lang="en-US" sz="3200" dirty="0">
                 <a:solidFill>
                   <a:schemeClr val="tx1"/>
                 </a:solidFill>
               </a:rPr>
-              <a:t>Apache Tez implements MapReduce</a:t>
+              <a:t> implements MapReduce</a:t>
             </a:r>
           </a:p>
           <a:p>
@@ -8170,13 +8623,30 @@
               <a:buChar char="•"/>
             </a:pPr>
             <a:r>
+              <a:rPr lang="en-US" sz="3200" b="1" dirty="0">
+                <a:solidFill>
+                  <a:schemeClr val="tx1"/>
+                </a:solidFill>
+              </a:rPr>
+              <a:t>Amazon Athena</a:t>
+            </a:r>
+            <a:r>
               <a:rPr lang="en-US" sz="3200" dirty="0">
                 <a:solidFill>
                   <a:schemeClr val="tx1"/>
                 </a:solidFill>
               </a:rPr>
-              <a:t>Amazon Athena implements MapReduce</a:t>
-            </a:r>
+              <a:t>: S</a:t>
+            </a:r>
+            <a:r>
+              <a:rPr lang="en-US" sz="3200" dirty="0"/>
+              <a:t>erverless SQL service</a:t>
+            </a:r>
+            <a:endParaRPr lang="en-US" sz="3200" dirty="0">
+              <a:solidFill>
+                <a:schemeClr val="tx1"/>
+              </a:solidFill>
+            </a:endParaRPr>
           </a:p>
           <a:p>
             <a:pPr marL="914400" lvl="1" indent="-457200" algn="l">
@@ -8184,13 +8654,30 @@
               <a:buChar char="•"/>
             </a:pPr>
             <a:r>
+              <a:rPr lang="en-US" sz="3200" b="1" dirty="0">
+                <a:solidFill>
+                  <a:schemeClr val="tx1"/>
+                </a:solidFill>
+              </a:rPr>
+              <a:t>Google BigQuery</a:t>
+            </a:r>
+            <a:r>
               <a:rPr lang="en-US" sz="3200" dirty="0">
                 <a:solidFill>
                   <a:schemeClr val="tx1"/>
                 </a:solidFill>
               </a:rPr>
-              <a:t>Google Big Query implements MapReduce</a:t>
-            </a:r>
+              <a:t>:  </a:t>
+            </a:r>
+            <a:r>
+              <a:rPr lang="en-US" sz="3000" dirty="0"/>
+              <a:t>distributed execution graph and shuffle architecture</a:t>
+            </a:r>
+            <a:endParaRPr lang="en-US" sz="3200" dirty="0">
+              <a:solidFill>
+                <a:schemeClr val="tx1"/>
+              </a:solidFill>
+            </a:endParaRPr>
           </a:p>
           <a:p>
             <a:pPr marL="457211" indent="-457200">
@@ -8508,7 +8995,7 @@
 </p:sld>
 </file>
 
-<file path=ppt/slides/slide13.xml><?xml version="1.0" encoding="utf-8"?>
+<file path=ppt/slides/slide14.xml><?xml version="1.0" encoding="utf-8"?>
 <p:sld xmlns:a="http://schemas.openxmlformats.org/drawingml/2006/main" xmlns:r="http://schemas.openxmlformats.org/officeDocument/2006/relationships" xmlns:p="http://schemas.openxmlformats.org/presentationml/2006/main">
   <p:cSld>
     <p:spTree>
@@ -8639,7 +9126,7 @@
 </p:sld>
 </file>
 
-<file path=ppt/slides/slide14.xml><?xml version="1.0" encoding="utf-8"?>
+<file path=ppt/slides/slide15.xml><?xml version="1.0" encoding="utf-8"?>
 <p:sld xmlns:a="http://schemas.openxmlformats.org/drawingml/2006/main" xmlns:r="http://schemas.openxmlformats.org/officeDocument/2006/relationships" xmlns:p="http://schemas.openxmlformats.org/presentationml/2006/main">
   <p:cSld>
     <p:spTree>
@@ -8734,7 +9221,7 @@
 </p:sld>
 </file>
 
-<file path=ppt/slides/slide15.xml><?xml version="1.0" encoding="utf-8"?>
+<file path=ppt/slides/slide16.xml><?xml version="1.0" encoding="utf-8"?>
 <p:sld xmlns:a="http://schemas.openxmlformats.org/drawingml/2006/main" xmlns:r="http://schemas.openxmlformats.org/officeDocument/2006/relationships" xmlns:p="http://schemas.openxmlformats.org/presentationml/2006/main">
   <p:cSld>
     <p:spTree>
@@ -8829,7 +9316,7 @@
 </p:sld>
 </file>
 
-<file path=ppt/slides/slide16.xml><?xml version="1.0" encoding="utf-8"?>
+<file path=ppt/slides/slide17.xml><?xml version="1.0" encoding="utf-8"?>
 <p:sld xmlns:a="http://schemas.openxmlformats.org/drawingml/2006/main" xmlns:r="http://schemas.openxmlformats.org/officeDocument/2006/relationships" xmlns:p="http://schemas.openxmlformats.org/presentationml/2006/main">
   <p:cSld>
     <p:spTree>
@@ -8924,7 +9411,7 @@
 </p:sld>
 </file>
 
-<file path=ppt/slides/slide17.xml><?xml version="1.0" encoding="utf-8"?>
+<file path=ppt/slides/slide18.xml><?xml version="1.0" encoding="utf-8"?>
 <p:sld xmlns:a="http://schemas.openxmlformats.org/drawingml/2006/main" xmlns:r="http://schemas.openxmlformats.org/officeDocument/2006/relationships" xmlns:p="http://schemas.openxmlformats.org/presentationml/2006/main">
   <p:cSld>
     <p:spTree>
@@ -9628,7 +10115,7 @@
 </p:sld>
 </file>
 
-<file path=ppt/slides/slide18.xml><?xml version="1.0" encoding="utf-8"?>
+<file path=ppt/slides/slide19.xml><?xml version="1.0" encoding="utf-8"?>
 <p:sld xmlns:a="http://schemas.openxmlformats.org/drawingml/2006/main" xmlns:r="http://schemas.openxmlformats.org/officeDocument/2006/relationships" xmlns:p="http://schemas.openxmlformats.org/presentationml/2006/main">
   <p:cSld>
     <p:spTree>
@@ -10415,7 +10902,668 @@
 </p:sld>
 </file>
 
-<file path=ppt/slides/slide19.xml><?xml version="1.0" encoding="utf-8"?>
+<file path=ppt/slides/slide2.xml><?xml version="1.0" encoding="utf-8"?>
+<p:sld xmlns:a="http://schemas.openxmlformats.org/drawingml/2006/main" xmlns:r="http://schemas.openxmlformats.org/officeDocument/2006/relationships" xmlns:p="http://schemas.openxmlformats.org/presentationml/2006/main">
+  <p:cSld>
+    <p:spTree>
+      <p:nvGrpSpPr>
+        <p:cNvPr id="1" name="">
+          <a:extLst>
+            <a:ext uri="{FF2B5EF4-FFF2-40B4-BE49-F238E27FC236}">
+              <a16:creationId xmlns:a16="http://schemas.microsoft.com/office/drawing/2014/main" id="{EB808638-B2D6-95E9-A973-3576A94C2A4F}"/>
+            </a:ext>
+          </a:extLst>
+        </p:cNvPr>
+        <p:cNvGrpSpPr/>
+        <p:nvPr/>
+      </p:nvGrpSpPr>
+      <p:grpSpPr>
+        <a:xfrm>
+          <a:off x="0" y="0"/>
+          <a:ext cx="0" cy="0"/>
+          <a:chOff x="0" y="0"/>
+          <a:chExt cx="0" cy="0"/>
+        </a:xfrm>
+      </p:grpSpPr>
+      <p:sp>
+        <p:nvSpPr>
+          <p:cNvPr id="2" name="Title 1">
+            <a:extLst>
+              <a:ext uri="{FF2B5EF4-FFF2-40B4-BE49-F238E27FC236}">
+                <a16:creationId xmlns:a16="http://schemas.microsoft.com/office/drawing/2014/main" id="{5825050C-745B-BB10-EB31-67B29EBCBB21}"/>
+              </a:ext>
+            </a:extLst>
+          </p:cNvPr>
+          <p:cNvSpPr>
+            <a:spLocks noGrp="1"/>
+          </p:cNvSpPr>
+          <p:nvPr>
+            <p:ph type="ctrTitle"/>
+          </p:nvPr>
+        </p:nvSpPr>
+        <p:spPr>
+          <a:xfrm>
+            <a:off x="1413468" y="290725"/>
+            <a:ext cx="9144000" cy="583482"/>
+          </a:xfrm>
+        </p:spPr>
+        <p:txBody>
+          <a:bodyPr>
+            <a:normAutofit fontScale="90000"/>
+          </a:bodyPr>
+          <a:lstStyle/>
+          <a:p>
+            <a:r>
+              <a:rPr lang="en-US" sz="3600" dirty="0">
+                <a:solidFill>
+                  <a:srgbClr val="0070C0"/>
+                </a:solidFill>
+              </a:rPr>
+              <a:t>Big Data Modeling &amp; Analytics?</a:t>
+            </a:r>
+          </a:p>
+        </p:txBody>
+      </p:sp>
+      <p:sp>
+        <p:nvSpPr>
+          <p:cNvPr id="3" name="Subtitle 2">
+            <a:extLst>
+              <a:ext uri="{FF2B5EF4-FFF2-40B4-BE49-F238E27FC236}">
+                <a16:creationId xmlns:a16="http://schemas.microsoft.com/office/drawing/2014/main" id="{432915E2-5634-69F9-B951-73B2F49D6C21}"/>
+              </a:ext>
+            </a:extLst>
+          </p:cNvPr>
+          <p:cNvSpPr>
+            <a:spLocks noGrp="1"/>
+          </p:cNvSpPr>
+          <p:nvPr>
+            <p:ph type="subTitle" idx="1"/>
+          </p:nvPr>
+        </p:nvSpPr>
+        <p:spPr>
+          <a:xfrm>
+            <a:off x="1307184" y="1225900"/>
+            <a:ext cx="9144000" cy="4983188"/>
+          </a:xfrm>
+        </p:spPr>
+        <p:txBody>
+          <a:bodyPr>
+            <a:normAutofit/>
+          </a:bodyPr>
+          <a:lstStyle/>
+          <a:p>
+            <a:pPr marL="514350" indent="-514350">
+              <a:buAutoNum type="arabicPeriod"/>
+            </a:pPr>
+            <a:r>
+              <a:rPr lang="en-US" sz="3200" dirty="0">
+                <a:solidFill>
+                  <a:schemeClr val="tx1"/>
+                </a:solidFill>
+              </a:rPr>
+              <a:t>What is Big Data?</a:t>
+            </a:r>
+          </a:p>
+          <a:p>
+            <a:pPr marL="514350" indent="-514350">
+              <a:buAutoNum type="arabicPeriod"/>
+            </a:pPr>
+            <a:r>
+              <a:rPr lang="en-US" sz="3200" dirty="0">
+                <a:solidFill>
+                  <a:schemeClr val="tx1"/>
+                </a:solidFill>
+              </a:rPr>
+              <a:t>What  is  Big data Modeling?</a:t>
+            </a:r>
+          </a:p>
+          <a:p>
+            <a:r>
+              <a:rPr lang="en-US" sz="3200" dirty="0">
+                <a:solidFill>
+                  <a:schemeClr val="tx1"/>
+                </a:solidFill>
+              </a:rPr>
+              <a:t>3.   What  is  Big Data Modeling &amp; Analytics?</a:t>
+            </a:r>
+          </a:p>
+          <a:p>
+            <a:r>
+              <a:rPr lang="en-US" sz="3200" dirty="0">
+                <a:solidFill>
+                  <a:schemeClr val="tx1"/>
+                </a:solidFill>
+              </a:rPr>
+              <a:t>4.  </a:t>
+            </a:r>
+            <a:r>
+              <a:rPr lang="en-US" sz="3200" dirty="0">
+                <a:solidFill>
+                  <a:srgbClr val="00B0F0"/>
+                </a:solidFill>
+              </a:rPr>
+              <a:t>Solutions</a:t>
+            </a:r>
+            <a:r>
+              <a:rPr lang="en-US" sz="3200" dirty="0">
+                <a:solidFill>
+                  <a:schemeClr val="tx1"/>
+                </a:solidFill>
+              </a:rPr>
+              <a:t> to Big Data Modeling &amp; Analytics</a:t>
+            </a:r>
+          </a:p>
+          <a:p>
+            <a:pPr marL="457200" indent="-457200">
+              <a:buFont typeface="Arial" panose="020B0604020202020204" pitchFamily="34" charset="0"/>
+              <a:buChar char="•"/>
+            </a:pPr>
+            <a:r>
+              <a:rPr lang="en-US" sz="3200" dirty="0">
+                <a:solidFill>
+                  <a:srgbClr val="00B0F0"/>
+                </a:solidFill>
+              </a:rPr>
+              <a:t>MapReduce paradigm</a:t>
+            </a:r>
+          </a:p>
+          <a:p>
+            <a:pPr marL="457200" indent="-457200">
+              <a:buFont typeface="Arial" panose="020B0604020202020204" pitchFamily="34" charset="0"/>
+              <a:buChar char="•"/>
+            </a:pPr>
+            <a:r>
+              <a:rPr lang="en-US" sz="3200" dirty="0">
+                <a:solidFill>
+                  <a:srgbClr val="00B0F0"/>
+                </a:solidFill>
+              </a:rPr>
+              <a:t>Spark/PySpark</a:t>
+            </a:r>
+          </a:p>
+          <a:p>
+            <a:pPr marL="457200" indent="-457200">
+              <a:buFont typeface="Arial" panose="020B0604020202020204" pitchFamily="34" charset="0"/>
+              <a:buChar char="•"/>
+            </a:pPr>
+            <a:r>
+              <a:rPr lang="en-US" sz="3200" dirty="0">
+                <a:solidFill>
+                  <a:srgbClr val="00B0F0"/>
+                </a:solidFill>
+              </a:rPr>
+              <a:t>Amazon Athena &amp; Google’s Big Query</a:t>
+            </a:r>
+          </a:p>
+          <a:p>
+            <a:pPr marL="457200" indent="-457200">
+              <a:buFont typeface="Arial" panose="020B0604020202020204" pitchFamily="34" charset="0"/>
+              <a:buChar char="•"/>
+            </a:pPr>
+            <a:r>
+              <a:rPr lang="en-US" sz="3200" dirty="0">
+                <a:solidFill>
+                  <a:srgbClr val="00B0F0"/>
+                </a:solidFill>
+              </a:rPr>
+              <a:t>…</a:t>
+            </a:r>
+          </a:p>
+          <a:p>
+            <a:endParaRPr lang="en-US" sz="3200" dirty="0">
+              <a:solidFill>
+                <a:srgbClr val="00B0F0"/>
+              </a:solidFill>
+            </a:endParaRPr>
+          </a:p>
+          <a:p>
+            <a:endParaRPr lang="en-US" sz="3600" dirty="0"/>
+          </a:p>
+          <a:p>
+            <a:pPr marL="800100" lvl="1" indent="-342900" algn="l">
+              <a:buFont typeface="+mj-lt"/>
+              <a:buAutoNum type="arabicPeriod"/>
+            </a:pPr>
+            <a:endParaRPr lang="en-US" sz="1200" dirty="0"/>
+          </a:p>
+        </p:txBody>
+      </p:sp>
+    </p:spTree>
+    <p:extLst>
+      <p:ext uri="{BB962C8B-B14F-4D97-AF65-F5344CB8AC3E}">
+        <p14:creationId xmlns:p14="http://schemas.microsoft.com/office/powerpoint/2010/main" val="2281650071"/>
+      </p:ext>
+    </p:extLst>
+  </p:cSld>
+  <p:clrMapOvr>
+    <a:masterClrMapping/>
+  </p:clrMapOvr>
+  <p:timing>
+    <p:tnLst>
+      <p:par>
+        <p:cTn id="1" dur="indefinite" restart="never" nodeType="tmRoot">
+          <p:childTnLst>
+            <p:seq concurrent="1" nextAc="seek">
+              <p:cTn id="2" dur="indefinite" nodeType="mainSeq">
+                <p:childTnLst>
+                  <p:par>
+                    <p:cTn id="3" fill="hold">
+                      <p:stCondLst>
+                        <p:cond delay="indefinite"/>
+                      </p:stCondLst>
+                      <p:childTnLst>
+                        <p:par>
+                          <p:cTn id="4" fill="hold">
+                            <p:stCondLst>
+                              <p:cond delay="0"/>
+                            </p:stCondLst>
+                            <p:childTnLst>
+                              <p:par>
+                                <p:cTn id="5" presetID="1" presetClass="entr" presetSubtype="0" fill="hold" nodeType="clickEffect">
+                                  <p:stCondLst>
+                                    <p:cond delay="0"/>
+                                  </p:stCondLst>
+                                  <p:childTnLst>
+                                    <p:set>
+                                      <p:cBhvr>
+                                        <p:cTn id="6" dur="1" fill="hold">
+                                          <p:stCondLst>
+                                            <p:cond delay="0"/>
+                                          </p:stCondLst>
+                                        </p:cTn>
+                                        <p:tgtEl>
+                                          <p:spTgt spid="3">
+                                            <p:txEl>
+                                              <p:pRg st="0" end="0"/>
+                                            </p:txEl>
+                                          </p:spTgt>
+                                        </p:tgtEl>
+                                        <p:attrNameLst>
+                                          <p:attrName>style.visibility</p:attrName>
+                                        </p:attrNameLst>
+                                      </p:cBhvr>
+                                      <p:to>
+                                        <p:strVal val="visible"/>
+                                      </p:to>
+                                    </p:set>
+                                  </p:childTnLst>
+                                </p:cTn>
+                              </p:par>
+                            </p:childTnLst>
+                          </p:cTn>
+                        </p:par>
+                      </p:childTnLst>
+                    </p:cTn>
+                  </p:par>
+                  <p:par>
+                    <p:cTn id="7" fill="hold">
+                      <p:stCondLst>
+                        <p:cond delay="indefinite"/>
+                      </p:stCondLst>
+                      <p:childTnLst>
+                        <p:par>
+                          <p:cTn id="8" fill="hold">
+                            <p:stCondLst>
+                              <p:cond delay="0"/>
+                            </p:stCondLst>
+                            <p:childTnLst>
+                              <p:par>
+                                <p:cTn id="9" presetID="1" presetClass="entr" presetSubtype="0" fill="hold" nodeType="clickEffect">
+                                  <p:stCondLst>
+                                    <p:cond delay="0"/>
+                                  </p:stCondLst>
+                                  <p:childTnLst>
+                                    <p:set>
+                                      <p:cBhvr>
+                                        <p:cTn id="10" dur="1" fill="hold">
+                                          <p:stCondLst>
+                                            <p:cond delay="0"/>
+                                          </p:stCondLst>
+                                        </p:cTn>
+                                        <p:tgtEl>
+                                          <p:spTgt spid="3">
+                                            <p:txEl>
+                                              <p:pRg st="1" end="1"/>
+                                            </p:txEl>
+                                          </p:spTgt>
+                                        </p:tgtEl>
+                                        <p:attrNameLst>
+                                          <p:attrName>style.visibility</p:attrName>
+                                        </p:attrNameLst>
+                                      </p:cBhvr>
+                                      <p:to>
+                                        <p:strVal val="visible"/>
+                                      </p:to>
+                                    </p:set>
+                                  </p:childTnLst>
+                                </p:cTn>
+                              </p:par>
+                            </p:childTnLst>
+                          </p:cTn>
+                        </p:par>
+                      </p:childTnLst>
+                    </p:cTn>
+                  </p:par>
+                  <p:par>
+                    <p:cTn id="11" fill="hold">
+                      <p:stCondLst>
+                        <p:cond delay="indefinite"/>
+                      </p:stCondLst>
+                      <p:childTnLst>
+                        <p:par>
+                          <p:cTn id="12" fill="hold">
+                            <p:stCondLst>
+                              <p:cond delay="0"/>
+                            </p:stCondLst>
+                            <p:childTnLst>
+                              <p:par>
+                                <p:cTn id="13" presetID="1" presetClass="entr" presetSubtype="0" fill="hold" nodeType="clickEffect">
+                                  <p:stCondLst>
+                                    <p:cond delay="0"/>
+                                  </p:stCondLst>
+                                  <p:childTnLst>
+                                    <p:set>
+                                      <p:cBhvr>
+                                        <p:cTn id="14" dur="1" fill="hold">
+                                          <p:stCondLst>
+                                            <p:cond delay="0"/>
+                                          </p:stCondLst>
+                                        </p:cTn>
+                                        <p:tgtEl>
+                                          <p:spTgt spid="3">
+                                            <p:txEl>
+                                              <p:pRg st="2" end="2"/>
+                                            </p:txEl>
+                                          </p:spTgt>
+                                        </p:tgtEl>
+                                        <p:attrNameLst>
+                                          <p:attrName>style.visibility</p:attrName>
+                                        </p:attrNameLst>
+                                      </p:cBhvr>
+                                      <p:to>
+                                        <p:strVal val="visible"/>
+                                      </p:to>
+                                    </p:set>
+                                  </p:childTnLst>
+                                </p:cTn>
+                              </p:par>
+                            </p:childTnLst>
+                          </p:cTn>
+                        </p:par>
+                      </p:childTnLst>
+                    </p:cTn>
+                  </p:par>
+                  <p:par>
+                    <p:cTn id="15" fill="hold">
+                      <p:stCondLst>
+                        <p:cond delay="indefinite"/>
+                      </p:stCondLst>
+                      <p:childTnLst>
+                        <p:par>
+                          <p:cTn id="16" fill="hold">
+                            <p:stCondLst>
+                              <p:cond delay="0"/>
+                            </p:stCondLst>
+                            <p:childTnLst>
+                              <p:par>
+                                <p:cTn id="17" presetID="1" presetClass="entr" presetSubtype="0" fill="hold" nodeType="clickEffect">
+                                  <p:stCondLst>
+                                    <p:cond delay="0"/>
+                                  </p:stCondLst>
+                                  <p:childTnLst>
+                                    <p:set>
+                                      <p:cBhvr>
+                                        <p:cTn id="18" dur="1" fill="hold">
+                                          <p:stCondLst>
+                                            <p:cond delay="0"/>
+                                          </p:stCondLst>
+                                        </p:cTn>
+                                        <p:tgtEl>
+                                          <p:spTgt spid="3">
+                                            <p:txEl>
+                                              <p:pRg st="3" end="3"/>
+                                            </p:txEl>
+                                          </p:spTgt>
+                                        </p:tgtEl>
+                                        <p:attrNameLst>
+                                          <p:attrName>style.visibility</p:attrName>
+                                        </p:attrNameLst>
+                                      </p:cBhvr>
+                                      <p:to>
+                                        <p:strVal val="visible"/>
+                                      </p:to>
+                                    </p:set>
+                                  </p:childTnLst>
+                                </p:cTn>
+                              </p:par>
+                            </p:childTnLst>
+                          </p:cTn>
+                        </p:par>
+                      </p:childTnLst>
+                    </p:cTn>
+                  </p:par>
+                  <p:par>
+                    <p:cTn id="19" fill="hold">
+                      <p:stCondLst>
+                        <p:cond delay="indefinite"/>
+                      </p:stCondLst>
+                      <p:childTnLst>
+                        <p:par>
+                          <p:cTn id="20" fill="hold">
+                            <p:stCondLst>
+                              <p:cond delay="0"/>
+                            </p:stCondLst>
+                            <p:childTnLst>
+                              <p:par>
+                                <p:cTn id="21" presetID="1" presetClass="entr" presetSubtype="0" fill="hold" nodeType="clickEffect">
+                                  <p:stCondLst>
+                                    <p:cond delay="0"/>
+                                  </p:stCondLst>
+                                  <p:childTnLst>
+                                    <p:set>
+                                      <p:cBhvr>
+                                        <p:cTn id="22" dur="1" fill="hold">
+                                          <p:stCondLst>
+                                            <p:cond delay="0"/>
+                                          </p:stCondLst>
+                                        </p:cTn>
+                                        <p:tgtEl>
+                                          <p:spTgt spid="3">
+                                            <p:txEl>
+                                              <p:pRg st="4" end="4"/>
+                                            </p:txEl>
+                                          </p:spTgt>
+                                        </p:tgtEl>
+                                        <p:attrNameLst>
+                                          <p:attrName>style.visibility</p:attrName>
+                                        </p:attrNameLst>
+                                      </p:cBhvr>
+                                      <p:to>
+                                        <p:strVal val="visible"/>
+                                      </p:to>
+                                    </p:set>
+                                  </p:childTnLst>
+                                </p:cTn>
+                              </p:par>
+                            </p:childTnLst>
+                          </p:cTn>
+                        </p:par>
+                      </p:childTnLst>
+                    </p:cTn>
+                  </p:par>
+                  <p:par>
+                    <p:cTn id="23" fill="hold">
+                      <p:stCondLst>
+                        <p:cond delay="indefinite"/>
+                      </p:stCondLst>
+                      <p:childTnLst>
+                        <p:par>
+                          <p:cTn id="24" fill="hold">
+                            <p:stCondLst>
+                              <p:cond delay="0"/>
+                            </p:stCondLst>
+                            <p:childTnLst>
+                              <p:par>
+                                <p:cTn id="25" presetID="1" presetClass="entr" presetSubtype="0" fill="hold" nodeType="clickEffect">
+                                  <p:stCondLst>
+                                    <p:cond delay="0"/>
+                                  </p:stCondLst>
+                                  <p:childTnLst>
+                                    <p:set>
+                                      <p:cBhvr>
+                                        <p:cTn id="26" dur="1" fill="hold">
+                                          <p:stCondLst>
+                                            <p:cond delay="0"/>
+                                          </p:stCondLst>
+                                        </p:cTn>
+                                        <p:tgtEl>
+                                          <p:spTgt spid="3">
+                                            <p:txEl>
+                                              <p:pRg st="5" end="5"/>
+                                            </p:txEl>
+                                          </p:spTgt>
+                                        </p:tgtEl>
+                                        <p:attrNameLst>
+                                          <p:attrName>style.visibility</p:attrName>
+                                        </p:attrNameLst>
+                                      </p:cBhvr>
+                                      <p:to>
+                                        <p:strVal val="visible"/>
+                                      </p:to>
+                                    </p:set>
+                                  </p:childTnLst>
+                                </p:cTn>
+                              </p:par>
+                            </p:childTnLst>
+                          </p:cTn>
+                        </p:par>
+                      </p:childTnLst>
+                    </p:cTn>
+                  </p:par>
+                  <p:par>
+                    <p:cTn id="27" fill="hold">
+                      <p:stCondLst>
+                        <p:cond delay="indefinite"/>
+                      </p:stCondLst>
+                      <p:childTnLst>
+                        <p:par>
+                          <p:cTn id="28" fill="hold">
+                            <p:stCondLst>
+                              <p:cond delay="0"/>
+                            </p:stCondLst>
+                            <p:childTnLst>
+                              <p:par>
+                                <p:cTn id="29" presetID="1" presetClass="entr" presetSubtype="0" fill="hold" nodeType="clickEffect">
+                                  <p:stCondLst>
+                                    <p:cond delay="0"/>
+                                  </p:stCondLst>
+                                  <p:childTnLst>
+                                    <p:set>
+                                      <p:cBhvr>
+                                        <p:cTn id="30" dur="1" fill="hold">
+                                          <p:stCondLst>
+                                            <p:cond delay="0"/>
+                                          </p:stCondLst>
+                                        </p:cTn>
+                                        <p:tgtEl>
+                                          <p:spTgt spid="3">
+                                            <p:txEl>
+                                              <p:pRg st="6" end="6"/>
+                                            </p:txEl>
+                                          </p:spTgt>
+                                        </p:tgtEl>
+                                        <p:attrNameLst>
+                                          <p:attrName>style.visibility</p:attrName>
+                                        </p:attrNameLst>
+                                      </p:cBhvr>
+                                      <p:to>
+                                        <p:strVal val="visible"/>
+                                      </p:to>
+                                    </p:set>
+                                  </p:childTnLst>
+                                </p:cTn>
+                              </p:par>
+                            </p:childTnLst>
+                          </p:cTn>
+                        </p:par>
+                      </p:childTnLst>
+                    </p:cTn>
+                  </p:par>
+                  <p:par>
+                    <p:cTn id="31" fill="hold">
+                      <p:stCondLst>
+                        <p:cond delay="indefinite"/>
+                      </p:stCondLst>
+                      <p:childTnLst>
+                        <p:par>
+                          <p:cTn id="32" fill="hold">
+                            <p:stCondLst>
+                              <p:cond delay="0"/>
+                            </p:stCondLst>
+                            <p:childTnLst>
+                              <p:par>
+                                <p:cTn id="33" presetID="1" presetClass="entr" presetSubtype="0" fill="hold" nodeType="clickEffect">
+                                  <p:stCondLst>
+                                    <p:cond delay="0"/>
+                                  </p:stCondLst>
+                                  <p:childTnLst>
+                                    <p:set>
+                                      <p:cBhvr>
+                                        <p:cTn id="34" dur="1" fill="hold">
+                                          <p:stCondLst>
+                                            <p:cond delay="0"/>
+                                          </p:stCondLst>
+                                        </p:cTn>
+                                        <p:tgtEl>
+                                          <p:spTgt spid="3">
+                                            <p:txEl>
+                                              <p:pRg st="7" end="7"/>
+                                            </p:txEl>
+                                          </p:spTgt>
+                                        </p:tgtEl>
+                                        <p:attrNameLst>
+                                          <p:attrName>style.visibility</p:attrName>
+                                        </p:attrNameLst>
+                                      </p:cBhvr>
+                                      <p:to>
+                                        <p:strVal val="visible"/>
+                                      </p:to>
+                                    </p:set>
+                                  </p:childTnLst>
+                                </p:cTn>
+                              </p:par>
+                            </p:childTnLst>
+                          </p:cTn>
+                        </p:par>
+                      </p:childTnLst>
+                    </p:cTn>
+                  </p:par>
+                </p:childTnLst>
+              </p:cTn>
+              <p:prevCondLst>
+                <p:cond evt="onPrev" delay="0">
+                  <p:tgtEl>
+                    <p:sldTgt/>
+                  </p:tgtEl>
+                </p:cond>
+              </p:prevCondLst>
+              <p:nextCondLst>
+                <p:cond evt="onNext" delay="0">
+                  <p:tgtEl>
+                    <p:sldTgt/>
+                  </p:tgtEl>
+                </p:cond>
+              </p:nextCondLst>
+            </p:seq>
+          </p:childTnLst>
+        </p:cTn>
+      </p:par>
+    </p:tnLst>
+  </p:timing>
+</p:sld>
+</file>
+
+<file path=ppt/slides/slide20.xml><?xml version="1.0" encoding="utf-8"?>
 <p:sld xmlns:a="http://schemas.openxmlformats.org/drawingml/2006/main" xmlns:r="http://schemas.openxmlformats.org/officeDocument/2006/relationships" xmlns:p="http://schemas.openxmlformats.org/presentationml/2006/main">
   <p:cSld>
     <p:spTree>
@@ -11280,540 +12428,7 @@
 </p:sld>
 </file>
 
-<file path=ppt/slides/slide2.xml><?xml version="1.0" encoding="utf-8"?>
-<p:sld xmlns:a="http://schemas.openxmlformats.org/drawingml/2006/main" xmlns:r="http://schemas.openxmlformats.org/officeDocument/2006/relationships" xmlns:p="http://schemas.openxmlformats.org/presentationml/2006/main">
-  <p:cSld>
-    <p:spTree>
-      <p:nvGrpSpPr>
-        <p:cNvPr id="1" name="">
-          <a:extLst>
-            <a:ext uri="{FF2B5EF4-FFF2-40B4-BE49-F238E27FC236}">
-              <a16:creationId xmlns:a16="http://schemas.microsoft.com/office/drawing/2014/main" id="{EB808638-B2D6-95E9-A973-3576A94C2A4F}"/>
-            </a:ext>
-          </a:extLst>
-        </p:cNvPr>
-        <p:cNvGrpSpPr/>
-        <p:nvPr/>
-      </p:nvGrpSpPr>
-      <p:grpSpPr>
-        <a:xfrm>
-          <a:off x="0" y="0"/>
-          <a:ext cx="0" cy="0"/>
-          <a:chOff x="0" y="0"/>
-          <a:chExt cx="0" cy="0"/>
-        </a:xfrm>
-      </p:grpSpPr>
-      <p:sp>
-        <p:nvSpPr>
-          <p:cNvPr id="2" name="Title 1">
-            <a:extLst>
-              <a:ext uri="{FF2B5EF4-FFF2-40B4-BE49-F238E27FC236}">
-                <a16:creationId xmlns:a16="http://schemas.microsoft.com/office/drawing/2014/main" id="{5825050C-745B-BB10-EB31-67B29EBCBB21}"/>
-              </a:ext>
-            </a:extLst>
-          </p:cNvPr>
-          <p:cNvSpPr>
-            <a:spLocks noGrp="1"/>
-          </p:cNvSpPr>
-          <p:nvPr>
-            <p:ph type="ctrTitle"/>
-          </p:nvPr>
-        </p:nvSpPr>
-        <p:spPr>
-          <a:xfrm>
-            <a:off x="1413468" y="290725"/>
-            <a:ext cx="9144000" cy="583482"/>
-          </a:xfrm>
-        </p:spPr>
-        <p:txBody>
-          <a:bodyPr>
-            <a:normAutofit fontScale="90000"/>
-          </a:bodyPr>
-          <a:lstStyle/>
-          <a:p>
-            <a:r>
-              <a:rPr lang="en-US" sz="3600" dirty="0">
-                <a:solidFill>
-                  <a:srgbClr val="0070C0"/>
-                </a:solidFill>
-              </a:rPr>
-              <a:t>Big Data Modeling &amp; Analytics?</a:t>
-            </a:r>
-          </a:p>
-        </p:txBody>
-      </p:sp>
-      <p:sp>
-        <p:nvSpPr>
-          <p:cNvPr id="3" name="Subtitle 2">
-            <a:extLst>
-              <a:ext uri="{FF2B5EF4-FFF2-40B4-BE49-F238E27FC236}">
-                <a16:creationId xmlns:a16="http://schemas.microsoft.com/office/drawing/2014/main" id="{432915E2-5634-69F9-B951-73B2F49D6C21}"/>
-              </a:ext>
-            </a:extLst>
-          </p:cNvPr>
-          <p:cNvSpPr>
-            <a:spLocks noGrp="1"/>
-          </p:cNvSpPr>
-          <p:nvPr>
-            <p:ph type="subTitle" idx="1"/>
-          </p:nvPr>
-        </p:nvSpPr>
-        <p:spPr>
-          <a:xfrm>
-            <a:off x="1307184" y="1225900"/>
-            <a:ext cx="9144000" cy="4983188"/>
-          </a:xfrm>
-        </p:spPr>
-        <p:txBody>
-          <a:bodyPr>
-            <a:normAutofit/>
-          </a:bodyPr>
-          <a:lstStyle/>
-          <a:p>
-            <a:r>
-              <a:rPr lang="en-US" sz="3200" dirty="0">
-                <a:solidFill>
-                  <a:schemeClr val="tx1"/>
-                </a:solidFill>
-              </a:rPr>
-              <a:t>1. What is a Big data Modeling?</a:t>
-            </a:r>
-          </a:p>
-          <a:p>
-            <a:r>
-              <a:rPr lang="en-US" sz="3200" dirty="0">
-                <a:solidFill>
-                  <a:schemeClr val="tx1"/>
-                </a:solidFill>
-              </a:rPr>
-              <a:t>2. What is a Big Data Modeling &amp; Analytics?</a:t>
-            </a:r>
-          </a:p>
-          <a:p>
-            <a:r>
-              <a:rPr lang="en-US" sz="3200" dirty="0">
-                <a:solidFill>
-                  <a:schemeClr val="tx1"/>
-                </a:solidFill>
-              </a:rPr>
-              <a:t>3. </a:t>
-            </a:r>
-            <a:r>
-              <a:rPr lang="en-US" sz="3200" dirty="0">
-                <a:solidFill>
-                  <a:srgbClr val="00B0F0"/>
-                </a:solidFill>
-              </a:rPr>
-              <a:t>Solutions</a:t>
-            </a:r>
-            <a:r>
-              <a:rPr lang="en-US" sz="3200" dirty="0">
-                <a:solidFill>
-                  <a:schemeClr val="tx1"/>
-                </a:solidFill>
-              </a:rPr>
-              <a:t> to Big Data Modeling &amp; Analytics</a:t>
-            </a:r>
-          </a:p>
-          <a:p>
-            <a:pPr marL="457200" indent="-457200">
-              <a:buFont typeface="Arial" panose="020B0604020202020204" pitchFamily="34" charset="0"/>
-              <a:buChar char="•"/>
-            </a:pPr>
-            <a:r>
-              <a:rPr lang="en-US" sz="3200" dirty="0">
-                <a:solidFill>
-                  <a:srgbClr val="00B0F0"/>
-                </a:solidFill>
-              </a:rPr>
-              <a:t>MapReduce paradigm</a:t>
-            </a:r>
-          </a:p>
-          <a:p>
-            <a:pPr marL="457200" indent="-457200">
-              <a:buFont typeface="Arial" panose="020B0604020202020204" pitchFamily="34" charset="0"/>
-              <a:buChar char="•"/>
-            </a:pPr>
-            <a:r>
-              <a:rPr lang="en-US" sz="3200" dirty="0">
-                <a:solidFill>
-                  <a:srgbClr val="00B0F0"/>
-                </a:solidFill>
-              </a:rPr>
-              <a:t>Spark/PySpark</a:t>
-            </a:r>
-          </a:p>
-          <a:p>
-            <a:pPr marL="457200" indent="-457200">
-              <a:buFont typeface="Arial" panose="020B0604020202020204" pitchFamily="34" charset="0"/>
-              <a:buChar char="•"/>
-            </a:pPr>
-            <a:r>
-              <a:rPr lang="en-US" sz="3200" dirty="0">
-                <a:solidFill>
-                  <a:srgbClr val="00B0F0"/>
-                </a:solidFill>
-              </a:rPr>
-              <a:t>Amazon Athena &amp; Google’s Big Query</a:t>
-            </a:r>
-          </a:p>
-          <a:p>
-            <a:endParaRPr lang="en-US" sz="3200" dirty="0">
-              <a:solidFill>
-                <a:srgbClr val="00B0F0"/>
-              </a:solidFill>
-            </a:endParaRPr>
-          </a:p>
-          <a:p>
-            <a:endParaRPr lang="en-US" sz="3600" dirty="0"/>
-          </a:p>
-          <a:p>
-            <a:pPr marL="800100" lvl="1" indent="-342900" algn="l">
-              <a:buFont typeface="+mj-lt"/>
-              <a:buAutoNum type="arabicPeriod"/>
-            </a:pPr>
-            <a:endParaRPr lang="en-US" sz="1200" dirty="0"/>
-          </a:p>
-        </p:txBody>
-      </p:sp>
-    </p:spTree>
-    <p:extLst>
-      <p:ext uri="{BB962C8B-B14F-4D97-AF65-F5344CB8AC3E}">
-        <p14:creationId xmlns:p14="http://schemas.microsoft.com/office/powerpoint/2010/main" val="2281650071"/>
-      </p:ext>
-    </p:extLst>
-  </p:cSld>
-  <p:clrMapOvr>
-    <a:masterClrMapping/>
-  </p:clrMapOvr>
-  <p:timing>
-    <p:tnLst>
-      <p:par>
-        <p:cTn id="1" dur="indefinite" restart="never" nodeType="tmRoot">
-          <p:childTnLst>
-            <p:seq concurrent="1" nextAc="seek">
-              <p:cTn id="2" dur="indefinite" nodeType="mainSeq">
-                <p:childTnLst>
-                  <p:par>
-                    <p:cTn id="3" fill="hold">
-                      <p:stCondLst>
-                        <p:cond delay="indefinite"/>
-                      </p:stCondLst>
-                      <p:childTnLst>
-                        <p:par>
-                          <p:cTn id="4" fill="hold">
-                            <p:stCondLst>
-                              <p:cond delay="0"/>
-                            </p:stCondLst>
-                            <p:childTnLst>
-                              <p:par>
-                                <p:cTn id="5" presetID="1" presetClass="entr" presetSubtype="0" fill="hold" nodeType="clickEffect">
-                                  <p:stCondLst>
-                                    <p:cond delay="0"/>
-                                  </p:stCondLst>
-                                  <p:childTnLst>
-                                    <p:set>
-                                      <p:cBhvr>
-                                        <p:cTn id="6" dur="1" fill="hold">
-                                          <p:stCondLst>
-                                            <p:cond delay="0"/>
-                                          </p:stCondLst>
-                                        </p:cTn>
-                                        <p:tgtEl>
-                                          <p:spTgt spid="3">
-                                            <p:txEl>
-                                              <p:pRg st="0" end="0"/>
-                                            </p:txEl>
-                                          </p:spTgt>
-                                        </p:tgtEl>
-                                        <p:attrNameLst>
-                                          <p:attrName>style.visibility</p:attrName>
-                                        </p:attrNameLst>
-                                      </p:cBhvr>
-                                      <p:to>
-                                        <p:strVal val="visible"/>
-                                      </p:to>
-                                    </p:set>
-                                  </p:childTnLst>
-                                </p:cTn>
-                              </p:par>
-                            </p:childTnLst>
-                          </p:cTn>
-                        </p:par>
-                      </p:childTnLst>
-                    </p:cTn>
-                  </p:par>
-                  <p:par>
-                    <p:cTn id="7" fill="hold">
-                      <p:stCondLst>
-                        <p:cond delay="indefinite"/>
-                      </p:stCondLst>
-                      <p:childTnLst>
-                        <p:par>
-                          <p:cTn id="8" fill="hold">
-                            <p:stCondLst>
-                              <p:cond delay="0"/>
-                            </p:stCondLst>
-                            <p:childTnLst>
-                              <p:par>
-                                <p:cTn id="9" presetID="1" presetClass="entr" presetSubtype="0" fill="hold" nodeType="clickEffect">
-                                  <p:stCondLst>
-                                    <p:cond delay="0"/>
-                                  </p:stCondLst>
-                                  <p:childTnLst>
-                                    <p:set>
-                                      <p:cBhvr>
-                                        <p:cTn id="10" dur="1" fill="hold">
-                                          <p:stCondLst>
-                                            <p:cond delay="0"/>
-                                          </p:stCondLst>
-                                        </p:cTn>
-                                        <p:tgtEl>
-                                          <p:spTgt spid="3">
-                                            <p:txEl>
-                                              <p:pRg st="1" end="1"/>
-                                            </p:txEl>
-                                          </p:spTgt>
-                                        </p:tgtEl>
-                                        <p:attrNameLst>
-                                          <p:attrName>style.visibility</p:attrName>
-                                        </p:attrNameLst>
-                                      </p:cBhvr>
-                                      <p:to>
-                                        <p:strVal val="visible"/>
-                                      </p:to>
-                                    </p:set>
-                                  </p:childTnLst>
-                                </p:cTn>
-                              </p:par>
-                            </p:childTnLst>
-                          </p:cTn>
-                        </p:par>
-                      </p:childTnLst>
-                    </p:cTn>
-                  </p:par>
-                  <p:par>
-                    <p:cTn id="11" fill="hold">
-                      <p:stCondLst>
-                        <p:cond delay="indefinite"/>
-                      </p:stCondLst>
-                      <p:childTnLst>
-                        <p:par>
-                          <p:cTn id="12" fill="hold">
-                            <p:stCondLst>
-                              <p:cond delay="0"/>
-                            </p:stCondLst>
-                            <p:childTnLst>
-                              <p:par>
-                                <p:cTn id="13" presetID="1" presetClass="entr" presetSubtype="0" fill="hold" nodeType="clickEffect">
-                                  <p:stCondLst>
-                                    <p:cond delay="0"/>
-                                  </p:stCondLst>
-                                  <p:childTnLst>
-                                    <p:set>
-                                      <p:cBhvr>
-                                        <p:cTn id="14" dur="1" fill="hold">
-                                          <p:stCondLst>
-                                            <p:cond delay="0"/>
-                                          </p:stCondLst>
-                                        </p:cTn>
-                                        <p:tgtEl>
-                                          <p:spTgt spid="3">
-                                            <p:txEl>
-                                              <p:pRg st="2" end="2"/>
-                                            </p:txEl>
-                                          </p:spTgt>
-                                        </p:tgtEl>
-                                        <p:attrNameLst>
-                                          <p:attrName>style.visibility</p:attrName>
-                                        </p:attrNameLst>
-                                      </p:cBhvr>
-                                      <p:to>
-                                        <p:strVal val="visible"/>
-                                      </p:to>
-                                    </p:set>
-                                  </p:childTnLst>
-                                </p:cTn>
-                              </p:par>
-                            </p:childTnLst>
-                          </p:cTn>
-                        </p:par>
-                      </p:childTnLst>
-                    </p:cTn>
-                  </p:par>
-                  <p:par>
-                    <p:cTn id="15" fill="hold">
-                      <p:stCondLst>
-                        <p:cond delay="indefinite"/>
-                      </p:stCondLst>
-                      <p:childTnLst>
-                        <p:par>
-                          <p:cTn id="16" fill="hold">
-                            <p:stCondLst>
-                              <p:cond delay="0"/>
-                            </p:stCondLst>
-                            <p:childTnLst>
-                              <p:par>
-                                <p:cTn id="17" presetID="1" presetClass="entr" presetSubtype="0" fill="hold" nodeType="clickEffect">
-                                  <p:stCondLst>
-                                    <p:cond delay="0"/>
-                                  </p:stCondLst>
-                                  <p:childTnLst>
-                                    <p:set>
-                                      <p:cBhvr>
-                                        <p:cTn id="18" dur="1" fill="hold">
-                                          <p:stCondLst>
-                                            <p:cond delay="0"/>
-                                          </p:stCondLst>
-                                        </p:cTn>
-                                        <p:tgtEl>
-                                          <p:spTgt spid="3">
-                                            <p:txEl>
-                                              <p:pRg st="3" end="3"/>
-                                            </p:txEl>
-                                          </p:spTgt>
-                                        </p:tgtEl>
-                                        <p:attrNameLst>
-                                          <p:attrName>style.visibility</p:attrName>
-                                        </p:attrNameLst>
-                                      </p:cBhvr>
-                                      <p:to>
-                                        <p:strVal val="visible"/>
-                                      </p:to>
-                                    </p:set>
-                                  </p:childTnLst>
-                                </p:cTn>
-                              </p:par>
-                            </p:childTnLst>
-                          </p:cTn>
-                        </p:par>
-                      </p:childTnLst>
-                    </p:cTn>
-                  </p:par>
-                  <p:par>
-                    <p:cTn id="19" fill="hold">
-                      <p:stCondLst>
-                        <p:cond delay="indefinite"/>
-                      </p:stCondLst>
-                      <p:childTnLst>
-                        <p:par>
-                          <p:cTn id="20" fill="hold">
-                            <p:stCondLst>
-                              <p:cond delay="0"/>
-                            </p:stCondLst>
-                            <p:childTnLst>
-                              <p:par>
-                                <p:cTn id="21" presetID="1" presetClass="entr" presetSubtype="0" fill="hold" nodeType="clickEffect">
-                                  <p:stCondLst>
-                                    <p:cond delay="0"/>
-                                  </p:stCondLst>
-                                  <p:childTnLst>
-                                    <p:set>
-                                      <p:cBhvr>
-                                        <p:cTn id="22" dur="1" fill="hold">
-                                          <p:stCondLst>
-                                            <p:cond delay="0"/>
-                                          </p:stCondLst>
-                                        </p:cTn>
-                                        <p:tgtEl>
-                                          <p:spTgt spid="3">
-                                            <p:txEl>
-                                              <p:pRg st="4" end="4"/>
-                                            </p:txEl>
-                                          </p:spTgt>
-                                        </p:tgtEl>
-                                        <p:attrNameLst>
-                                          <p:attrName>style.visibility</p:attrName>
-                                        </p:attrNameLst>
-                                      </p:cBhvr>
-                                      <p:to>
-                                        <p:strVal val="visible"/>
-                                      </p:to>
-                                    </p:set>
-                                  </p:childTnLst>
-                                </p:cTn>
-                              </p:par>
-                            </p:childTnLst>
-                          </p:cTn>
-                        </p:par>
-                      </p:childTnLst>
-                    </p:cTn>
-                  </p:par>
-                  <p:par>
-                    <p:cTn id="23" fill="hold">
-                      <p:stCondLst>
-                        <p:cond delay="indefinite"/>
-                      </p:stCondLst>
-                      <p:childTnLst>
-                        <p:par>
-                          <p:cTn id="24" fill="hold">
-                            <p:stCondLst>
-                              <p:cond delay="0"/>
-                            </p:stCondLst>
-                            <p:childTnLst>
-                              <p:par>
-                                <p:cTn id="25" presetID="1" presetClass="entr" presetSubtype="0" fill="hold" nodeType="clickEffect">
-                                  <p:stCondLst>
-                                    <p:cond delay="0"/>
-                                  </p:stCondLst>
-                                  <p:childTnLst>
-                                    <p:set>
-                                      <p:cBhvr>
-                                        <p:cTn id="26" dur="1" fill="hold">
-                                          <p:stCondLst>
-                                            <p:cond delay="0"/>
-                                          </p:stCondLst>
-                                        </p:cTn>
-                                        <p:tgtEl>
-                                          <p:spTgt spid="3">
-                                            <p:txEl>
-                                              <p:pRg st="5" end="5"/>
-                                            </p:txEl>
-                                          </p:spTgt>
-                                        </p:tgtEl>
-                                        <p:attrNameLst>
-                                          <p:attrName>style.visibility</p:attrName>
-                                        </p:attrNameLst>
-                                      </p:cBhvr>
-                                      <p:to>
-                                        <p:strVal val="visible"/>
-                                      </p:to>
-                                    </p:set>
-                                  </p:childTnLst>
-                                </p:cTn>
-                              </p:par>
-                            </p:childTnLst>
-                          </p:cTn>
-                        </p:par>
-                      </p:childTnLst>
-                    </p:cTn>
-                  </p:par>
-                </p:childTnLst>
-              </p:cTn>
-              <p:prevCondLst>
-                <p:cond evt="onPrev" delay="0">
-                  <p:tgtEl>
-                    <p:sldTgt/>
-                  </p:tgtEl>
-                </p:cond>
-              </p:prevCondLst>
-              <p:nextCondLst>
-                <p:cond evt="onNext" delay="0">
-                  <p:tgtEl>
-                    <p:sldTgt/>
-                  </p:tgtEl>
-                </p:cond>
-              </p:nextCondLst>
-            </p:seq>
-          </p:childTnLst>
-        </p:cTn>
-      </p:par>
-    </p:tnLst>
-  </p:timing>
-</p:sld>
-</file>
-
-<file path=ppt/slides/slide20.xml><?xml version="1.0" encoding="utf-8"?>
+<file path=ppt/slides/slide21.xml><?xml version="1.0" encoding="utf-8"?>
 <p:sld xmlns:a="http://schemas.openxmlformats.org/drawingml/2006/main" xmlns:r="http://schemas.openxmlformats.org/officeDocument/2006/relationships" xmlns:p="http://schemas.openxmlformats.org/presentationml/2006/main">
   <p:cSld>
     <p:spTree>
@@ -12254,7 +12869,7 @@
 </p:sld>
 </file>
 
-<file path=ppt/slides/slide21.xml><?xml version="1.0" encoding="utf-8"?>
+<file path=ppt/slides/slide22.xml><?xml version="1.0" encoding="utf-8"?>
 <p:sld xmlns:a="http://schemas.openxmlformats.org/drawingml/2006/main" xmlns:r="http://schemas.openxmlformats.org/officeDocument/2006/relationships" xmlns:p="http://schemas.openxmlformats.org/presentationml/2006/main">
   <p:cSld>
     <p:spTree>
@@ -13275,7 +13890,7 @@
 </p:sld>
 </file>
 
-<file path=ppt/slides/slide22.xml><?xml version="1.0" encoding="utf-8"?>
+<file path=ppt/slides/slide23.xml><?xml version="1.0" encoding="utf-8"?>
 <p:sld xmlns:a="http://schemas.openxmlformats.org/drawingml/2006/main" xmlns:r="http://schemas.openxmlformats.org/officeDocument/2006/relationships" xmlns:p="http://schemas.openxmlformats.org/presentationml/2006/main">
   <p:cSld>
     <p:bg>
@@ -13378,7 +13993,7 @@
 </p:sld>
 </file>
 
-<file path=ppt/slides/slide23.xml><?xml version="1.0" encoding="utf-8"?>
+<file path=ppt/slides/slide24.xml><?xml version="1.0" encoding="utf-8"?>
 <p:sld xmlns:a="http://schemas.openxmlformats.org/drawingml/2006/main" xmlns:r="http://schemas.openxmlformats.org/officeDocument/2006/relationships" xmlns:p="http://schemas.openxmlformats.org/presentationml/2006/main">
   <p:cSld>
     <p:spTree>
@@ -14047,7 +14662,7 @@
 </p:sld>
 </file>
 
-<file path=ppt/slides/slide24.xml><?xml version="1.0" encoding="utf-8"?>
+<file path=ppt/slides/slide25.xml><?xml version="1.0" encoding="utf-8"?>
 <p:sld xmlns:a="http://schemas.openxmlformats.org/drawingml/2006/main" xmlns:r="http://schemas.openxmlformats.org/officeDocument/2006/relationships" xmlns:p="http://schemas.openxmlformats.org/presentationml/2006/main">
   <p:cSld>
     <p:spTree>
@@ -14156,7 +14771,7 @@
 </p:sld>
 </file>
 
-<file path=ppt/slides/slide25.xml><?xml version="1.0" encoding="utf-8"?>
+<file path=ppt/slides/slide26.xml><?xml version="1.0" encoding="utf-8"?>
 <p:sld xmlns:a="http://schemas.openxmlformats.org/drawingml/2006/main" xmlns:r="http://schemas.openxmlformats.org/officeDocument/2006/relationships" xmlns:p="http://schemas.openxmlformats.org/presentationml/2006/main">
   <p:cSld>
     <p:spTree>
@@ -14251,7 +14866,7 @@
 </p:sld>
 </file>
 
-<file path=ppt/slides/slide26.xml><?xml version="1.0" encoding="utf-8"?>
+<file path=ppt/slides/slide27.xml><?xml version="1.0" encoding="utf-8"?>
 <p:sld xmlns:a="http://schemas.openxmlformats.org/drawingml/2006/main" xmlns:r="http://schemas.openxmlformats.org/officeDocument/2006/relationships" xmlns:p="http://schemas.openxmlformats.org/presentationml/2006/main">
   <p:cSld>
     <p:spTree>
@@ -14361,7 +14976,7 @@
 </p:sld>
 </file>
 
-<file path=ppt/slides/slide27.xml><?xml version="1.0" encoding="utf-8"?>
+<file path=ppt/slides/slide28.xml><?xml version="1.0" encoding="utf-8"?>
 <p:sld xmlns:a="http://schemas.openxmlformats.org/drawingml/2006/main" xmlns:r="http://schemas.openxmlformats.org/officeDocument/2006/relationships" xmlns:p="http://schemas.openxmlformats.org/presentationml/2006/main">
   <p:cSld>
     <p:spTree>
@@ -14968,7 +15583,7 @@
 </p:sld>
 </file>
 
-<file path=ppt/slides/slide28.xml><?xml version="1.0" encoding="utf-8"?>
+<file path=ppt/slides/slide29.xml><?xml version="1.0" encoding="utf-8"?>
 <p:sld xmlns:a="http://schemas.openxmlformats.org/drawingml/2006/main" xmlns:r="http://schemas.openxmlformats.org/officeDocument/2006/relationships" xmlns:p="http://schemas.openxmlformats.org/presentationml/2006/main">
   <p:cSld>
     <p:spTree>
@@ -15423,7 +16038,379 @@
 </p:sld>
 </file>
 
-<file path=ppt/slides/slide29.xml><?xml version="1.0" encoding="utf-8"?>
+<file path=ppt/slides/slide3.xml><?xml version="1.0" encoding="utf-8"?>
+<p:sld xmlns:a="http://schemas.openxmlformats.org/drawingml/2006/main" xmlns:r="http://schemas.openxmlformats.org/officeDocument/2006/relationships" xmlns:p="http://schemas.openxmlformats.org/presentationml/2006/main">
+  <p:cSld>
+    <p:spTree>
+      <p:nvGrpSpPr>
+        <p:cNvPr id="1" name="">
+          <a:extLst>
+            <a:ext uri="{FF2B5EF4-FFF2-40B4-BE49-F238E27FC236}">
+              <a16:creationId xmlns:a16="http://schemas.microsoft.com/office/drawing/2014/main" id="{F27D7243-15AD-425E-DFCF-2A2EE95FA6F7}"/>
+            </a:ext>
+          </a:extLst>
+        </p:cNvPr>
+        <p:cNvGrpSpPr/>
+        <p:nvPr/>
+      </p:nvGrpSpPr>
+      <p:grpSpPr>
+        <a:xfrm>
+          <a:off x="0" y="0"/>
+          <a:ext cx="0" cy="0"/>
+          <a:chOff x="0" y="0"/>
+          <a:chExt cx="0" cy="0"/>
+        </a:xfrm>
+      </p:grpSpPr>
+      <p:sp>
+        <p:nvSpPr>
+          <p:cNvPr id="2" name="Title 1">
+            <a:extLst>
+              <a:ext uri="{FF2B5EF4-FFF2-40B4-BE49-F238E27FC236}">
+                <a16:creationId xmlns:a16="http://schemas.microsoft.com/office/drawing/2014/main" id="{5CB8F834-4DE8-3048-DAA2-4FBC5C624122}"/>
+              </a:ext>
+            </a:extLst>
+          </p:cNvPr>
+          <p:cNvSpPr>
+            <a:spLocks noGrp="1"/>
+          </p:cNvSpPr>
+          <p:nvPr>
+            <p:ph type="ctrTitle"/>
+          </p:nvPr>
+        </p:nvSpPr>
+        <p:spPr>
+          <a:xfrm>
+            <a:off x="1413468" y="290725"/>
+            <a:ext cx="9144000" cy="764352"/>
+          </a:xfrm>
+        </p:spPr>
+        <p:txBody>
+          <a:bodyPr>
+            <a:normAutofit/>
+          </a:bodyPr>
+          <a:lstStyle/>
+          <a:p>
+            <a:r>
+              <a:rPr lang="en-US" sz="3600" dirty="0">
+                <a:solidFill>
+                  <a:srgbClr val="0070C0"/>
+                </a:solidFill>
+              </a:rPr>
+              <a:t>1. What is Big Data?</a:t>
+            </a:r>
+          </a:p>
+        </p:txBody>
+      </p:sp>
+      <p:sp>
+        <p:nvSpPr>
+          <p:cNvPr id="3" name="Subtitle 2">
+            <a:extLst>
+              <a:ext uri="{FF2B5EF4-FFF2-40B4-BE49-F238E27FC236}">
+                <a16:creationId xmlns:a16="http://schemas.microsoft.com/office/drawing/2014/main" id="{D619F36D-D67A-B1D0-6CD3-5B3D4D9B070A}"/>
+              </a:ext>
+            </a:extLst>
+          </p:cNvPr>
+          <p:cNvSpPr>
+            <a:spLocks noGrp="1"/>
+          </p:cNvSpPr>
+          <p:nvPr>
+            <p:ph type="subTitle" idx="1"/>
+          </p:nvPr>
+        </p:nvSpPr>
+        <p:spPr>
+          <a:xfrm>
+            <a:off x="1307184" y="1225899"/>
+            <a:ext cx="9144000" cy="5114611"/>
+          </a:xfrm>
+        </p:spPr>
+        <p:txBody>
+          <a:bodyPr>
+            <a:normAutofit fontScale="92500" lnSpcReduction="20000"/>
+          </a:bodyPr>
+          <a:lstStyle/>
+          <a:p>
+            <a:r>
+              <a:rPr lang="en-US" sz="3200" dirty="0">
+                <a:solidFill>
+                  <a:schemeClr val="tx1"/>
+                </a:solidFill>
+                <a:highlight>
+                  <a:srgbClr val="FFFF00"/>
+                </a:highlight>
+              </a:rPr>
+              <a:t>Big Data</a:t>
+            </a:r>
+            <a:r>
+              <a:rPr lang="en-US" sz="3200" dirty="0">
+                <a:solidFill>
+                  <a:schemeClr val="tx1"/>
+                </a:solidFill>
+              </a:rPr>
+              <a:t> refers to datasets that are </a:t>
+            </a:r>
+            <a:r>
+              <a:rPr lang="en-US" sz="3200" u="sng" dirty="0">
+                <a:solidFill>
+                  <a:schemeClr val="tx1"/>
+                </a:solidFill>
+                <a:highlight>
+                  <a:srgbClr val="00FF00"/>
+                </a:highlight>
+              </a:rPr>
+              <a:t>so massive</a:t>
+            </a:r>
+            <a:r>
+              <a:rPr lang="en-US" sz="3200" dirty="0">
+                <a:solidFill>
+                  <a:schemeClr val="tx1"/>
+                </a:solidFill>
+              </a:rPr>
+              <a:t>, </a:t>
+            </a:r>
+          </a:p>
+          <a:p>
+            <a:r>
+              <a:rPr lang="en-US" sz="3200" u="sng" dirty="0">
+                <a:solidFill>
+                  <a:srgbClr val="0070C0"/>
+                </a:solidFill>
+                <a:highlight>
+                  <a:srgbClr val="00FF00"/>
+                </a:highlight>
+              </a:rPr>
+              <a:t>fast-moving</a:t>
+            </a:r>
+            <a:r>
+              <a:rPr lang="en-US" sz="3200" dirty="0">
+                <a:solidFill>
+                  <a:schemeClr val="tx1"/>
+                </a:solidFill>
+              </a:rPr>
+              <a:t>,  and </a:t>
+            </a:r>
+            <a:r>
+              <a:rPr lang="en-US" sz="3200" u="sng" dirty="0">
+                <a:solidFill>
+                  <a:srgbClr val="7030A0"/>
+                </a:solidFill>
+                <a:highlight>
+                  <a:srgbClr val="00FF00"/>
+                </a:highlight>
+              </a:rPr>
+              <a:t>complex</a:t>
+            </a:r>
+            <a:r>
+              <a:rPr lang="en-US" sz="3200" dirty="0">
+                <a:solidFill>
+                  <a:schemeClr val="tx1"/>
+                </a:solidFill>
+              </a:rPr>
+              <a:t> that traditional data-processing </a:t>
+            </a:r>
+          </a:p>
+          <a:p>
+            <a:r>
+              <a:rPr lang="en-US" sz="3200" dirty="0">
+                <a:solidFill>
+                  <a:schemeClr val="tx1"/>
+                </a:solidFill>
+              </a:rPr>
+              <a:t>software cannot capture, store, or analyze them effectively</a:t>
+            </a:r>
+            <a:r>
+              <a:rPr lang="en-US" sz="3200" b="1" dirty="0">
+                <a:solidFill>
+                  <a:schemeClr val="tx1"/>
+                </a:solidFill>
+              </a:rPr>
+              <a:t>.</a:t>
+            </a:r>
+            <a:r>
+              <a:rPr lang="en-US" sz="3200" dirty="0">
+                <a:solidFill>
+                  <a:schemeClr val="tx1"/>
+                </a:solidFill>
+              </a:rPr>
+              <a:t> </a:t>
+            </a:r>
+          </a:p>
+          <a:p>
+            <a:endParaRPr lang="en-US" sz="3200" dirty="0">
+              <a:solidFill>
+                <a:schemeClr val="tx1"/>
+              </a:solidFill>
+            </a:endParaRPr>
+          </a:p>
+          <a:p>
+            <a:r>
+              <a:rPr lang="en-US" sz="3200" dirty="0">
+                <a:solidFill>
+                  <a:schemeClr val="tx1"/>
+                </a:solidFill>
+              </a:rPr>
+              <a:t>Instead of relying on a  </a:t>
+            </a:r>
+            <a:r>
+              <a:rPr lang="en-US" sz="3200" dirty="0">
+                <a:solidFill>
+                  <a:schemeClr val="accent1"/>
+                </a:solidFill>
+                <a:highlight>
+                  <a:srgbClr val="0000FF"/>
+                </a:highlight>
+              </a:rPr>
+              <a:t>single computer </a:t>
+            </a:r>
+            <a:r>
+              <a:rPr lang="en-US" sz="3200" dirty="0">
+                <a:solidFill>
+                  <a:schemeClr val="tx1"/>
+                </a:solidFill>
+              </a:rPr>
+              <a:t>, </a:t>
+            </a:r>
+          </a:p>
+          <a:p>
+            <a:r>
+              <a:rPr lang="en-US" sz="3200" dirty="0">
+                <a:solidFill>
+                  <a:schemeClr val="tx1"/>
+                </a:solidFill>
+              </a:rPr>
+              <a:t>big data requires </a:t>
+            </a:r>
+            <a:r>
+              <a:rPr lang="en-US" sz="3200" u="sng" dirty="0">
+                <a:solidFill>
+                  <a:schemeClr val="tx1"/>
+                </a:solidFill>
+              </a:rPr>
+              <a:t>specialized frameworks </a:t>
+            </a:r>
+            <a:r>
+              <a:rPr lang="en-US" sz="3200" dirty="0">
+                <a:solidFill>
+                  <a:schemeClr val="tx1"/>
+                </a:solidFill>
+              </a:rPr>
+              <a:t>like </a:t>
+            </a:r>
+          </a:p>
+          <a:p>
+            <a:pPr marL="457200" indent="-457200">
+              <a:buFont typeface="Arial" panose="020B0604020202020204" pitchFamily="34" charset="0"/>
+              <a:buChar char="•"/>
+            </a:pPr>
+            <a:r>
+              <a:rPr lang="en-US" sz="3200" dirty="0">
+                <a:solidFill>
+                  <a:schemeClr val="tx1"/>
+                </a:solidFill>
+                <a:highlight>
+                  <a:srgbClr val="C0C0C0"/>
+                </a:highlight>
+                <a:hlinkClick r:id="rId2">
+                  <a:extLst>
+                    <a:ext uri="{A12FA001-AC4F-418D-AE19-62706E023703}">
+                      <ahyp:hlinkClr xmlns:ahyp="http://schemas.microsoft.com/office/drawing/2018/hyperlinkcolor" val="tx"/>
+                    </a:ext>
+                  </a:extLst>
+                </a:hlinkClick>
+              </a:rPr>
+              <a:t>Apache Spark</a:t>
+            </a:r>
+            <a:endParaRPr lang="en-US" sz="3200" dirty="0">
+              <a:solidFill>
+                <a:schemeClr val="tx1"/>
+              </a:solidFill>
+              <a:highlight>
+                <a:srgbClr val="C0C0C0"/>
+              </a:highlight>
+            </a:endParaRPr>
+          </a:p>
+          <a:p>
+            <a:pPr marL="457200" indent="-457200">
+              <a:buFont typeface="Arial" panose="020B0604020202020204" pitchFamily="34" charset="0"/>
+              <a:buChar char="•"/>
+            </a:pPr>
+            <a:r>
+              <a:rPr lang="en-US" sz="3200" dirty="0">
+                <a:solidFill>
+                  <a:schemeClr val="tx1"/>
+                </a:solidFill>
+                <a:highlight>
+                  <a:srgbClr val="C0C0C0"/>
+                </a:highlight>
+              </a:rPr>
+              <a:t>Cluster Computing</a:t>
+            </a:r>
+          </a:p>
+          <a:p>
+            <a:pPr marL="457200" indent="-457200">
+              <a:buFont typeface="Arial" panose="020B0604020202020204" pitchFamily="34" charset="0"/>
+              <a:buChar char="•"/>
+            </a:pPr>
+            <a:r>
+              <a:rPr lang="en-US" sz="3200" dirty="0">
+                <a:solidFill>
+                  <a:schemeClr val="tx1"/>
+                </a:solidFill>
+                <a:highlight>
+                  <a:srgbClr val="C0C0C0"/>
+                </a:highlight>
+              </a:rPr>
+              <a:t>Snowflake</a:t>
+            </a:r>
+          </a:p>
+          <a:p>
+            <a:pPr marL="457200" indent="-457200">
+              <a:buFont typeface="Arial" panose="020B0604020202020204" pitchFamily="34" charset="0"/>
+              <a:buChar char="•"/>
+            </a:pPr>
+            <a:r>
+              <a:rPr lang="en-US" sz="3200" dirty="0">
+                <a:solidFill>
+                  <a:schemeClr val="tx1"/>
+                </a:solidFill>
+                <a:highlight>
+                  <a:srgbClr val="C0C0C0"/>
+                </a:highlight>
+              </a:rPr>
+              <a:t>Amazon Athena / Google’s BigQuery</a:t>
+            </a:r>
+          </a:p>
+          <a:p>
+            <a:endParaRPr lang="en-US" sz="3200" dirty="0">
+              <a:solidFill>
+                <a:schemeClr val="tx1"/>
+              </a:solidFill>
+            </a:endParaRPr>
+          </a:p>
+          <a:p>
+            <a:endParaRPr lang="en-US" sz="3200" dirty="0"/>
+          </a:p>
+          <a:p>
+            <a:pPr marL="800100" lvl="1" indent="-342900" algn="l">
+              <a:buFont typeface="+mj-lt"/>
+              <a:buAutoNum type="arabicPeriod"/>
+            </a:pPr>
+            <a:endParaRPr lang="en-US" sz="1200" dirty="0"/>
+          </a:p>
+        </p:txBody>
+      </p:sp>
+    </p:spTree>
+    <p:extLst>
+      <p:ext uri="{BB962C8B-B14F-4D97-AF65-F5344CB8AC3E}">
+        <p14:creationId xmlns:p14="http://schemas.microsoft.com/office/powerpoint/2010/main" val="2377715886"/>
+      </p:ext>
+    </p:extLst>
+  </p:cSld>
+  <p:clrMapOvr>
+    <a:masterClrMapping/>
+  </p:clrMapOvr>
+</p:sld>
+</file>
+
+<file path=ppt/slides/slide30.xml><?xml version="1.0" encoding="utf-8"?>
 <p:sld xmlns:a="http://schemas.openxmlformats.org/drawingml/2006/main" xmlns:r="http://schemas.openxmlformats.org/officeDocument/2006/relationships" xmlns:p="http://schemas.openxmlformats.org/presentationml/2006/main">
   <p:cSld>
     <p:spTree>
@@ -15521,818 +16508,7 @@
 </p:sld>
 </file>
 
-<file path=ppt/slides/slide3.xml><?xml version="1.0" encoding="utf-8"?>
-<p:sld xmlns:a="http://schemas.openxmlformats.org/drawingml/2006/main" xmlns:r="http://schemas.openxmlformats.org/officeDocument/2006/relationships" xmlns:p="http://schemas.openxmlformats.org/presentationml/2006/main">
-  <p:cSld>
-    <p:spTree>
-      <p:nvGrpSpPr>
-        <p:cNvPr id="1" name="">
-          <a:extLst>
-            <a:ext uri="{FF2B5EF4-FFF2-40B4-BE49-F238E27FC236}">
-              <a16:creationId xmlns:a16="http://schemas.microsoft.com/office/drawing/2014/main" id="{E15F8F14-B0A6-8471-A8BF-4EB9794682F5}"/>
-            </a:ext>
-          </a:extLst>
-        </p:cNvPr>
-        <p:cNvGrpSpPr/>
-        <p:nvPr/>
-      </p:nvGrpSpPr>
-      <p:grpSpPr>
-        <a:xfrm>
-          <a:off x="0" y="0"/>
-          <a:ext cx="0" cy="0"/>
-          <a:chOff x="0" y="0"/>
-          <a:chExt cx="0" cy="0"/>
-        </a:xfrm>
-      </p:grpSpPr>
-      <p:sp>
-        <p:nvSpPr>
-          <p:cNvPr id="2" name="Title 1">
-            <a:extLst>
-              <a:ext uri="{FF2B5EF4-FFF2-40B4-BE49-F238E27FC236}">
-                <a16:creationId xmlns:a16="http://schemas.microsoft.com/office/drawing/2014/main" id="{4FEEC0D2-3D42-409E-6E8A-3022A7934564}"/>
-              </a:ext>
-            </a:extLst>
-          </p:cNvPr>
-          <p:cNvSpPr>
-            <a:spLocks noGrp="1"/>
-          </p:cNvSpPr>
-          <p:nvPr>
-            <p:ph type="ctrTitle"/>
-          </p:nvPr>
-        </p:nvSpPr>
-        <p:spPr>
-          <a:xfrm>
-            <a:off x="1413468" y="290725"/>
-            <a:ext cx="9144000" cy="583482"/>
-          </a:xfrm>
-        </p:spPr>
-        <p:txBody>
-          <a:bodyPr>
-            <a:normAutofit fontScale="90000"/>
-          </a:bodyPr>
-          <a:lstStyle/>
-          <a:p>
-            <a:r>
-              <a:rPr lang="en-US" sz="3600" dirty="0"/>
-              <a:t>What is a Big Data Modeling?</a:t>
-            </a:r>
-          </a:p>
-        </p:txBody>
-      </p:sp>
-      <p:sp>
-        <p:nvSpPr>
-          <p:cNvPr id="3" name="Subtitle 2">
-            <a:extLst>
-              <a:ext uri="{FF2B5EF4-FFF2-40B4-BE49-F238E27FC236}">
-                <a16:creationId xmlns:a16="http://schemas.microsoft.com/office/drawing/2014/main" id="{EC353BF7-8743-7C25-95E3-4E6ADA5D6666}"/>
-              </a:ext>
-            </a:extLst>
-          </p:cNvPr>
-          <p:cNvSpPr>
-            <a:spLocks noGrp="1"/>
-          </p:cNvSpPr>
-          <p:nvPr>
-            <p:ph type="subTitle" idx="1"/>
-          </p:nvPr>
-        </p:nvSpPr>
-        <p:spPr>
-          <a:xfrm>
-            <a:off x="1307184" y="1225900"/>
-            <a:ext cx="9144000" cy="4983188"/>
-          </a:xfrm>
-        </p:spPr>
-        <p:txBody>
-          <a:bodyPr>
-            <a:normAutofit fontScale="70000" lnSpcReduction="20000"/>
-          </a:bodyPr>
-          <a:lstStyle/>
-          <a:p>
-            <a:r>
-              <a:rPr lang="en-US" sz="3600" dirty="0">
-                <a:solidFill>
-                  <a:schemeClr val="tx1"/>
-                </a:solidFill>
-              </a:rPr>
-              <a:t>Big data modeling is the process of </a:t>
-            </a:r>
-            <a:r>
-              <a:rPr lang="en-US" sz="3600" dirty="0">
-                <a:solidFill>
-                  <a:srgbClr val="00B0F0"/>
-                </a:solidFill>
-              </a:rPr>
-              <a:t>organizing large</a:t>
-            </a:r>
-            <a:r>
-              <a:rPr lang="en-US" sz="3600" dirty="0">
-                <a:solidFill>
-                  <a:schemeClr val="tx1"/>
-                </a:solidFill>
-              </a:rPr>
-              <a:t>, </a:t>
-            </a:r>
-          </a:p>
-          <a:p>
-            <a:r>
-              <a:rPr lang="en-US" sz="3600" dirty="0">
-                <a:solidFill>
-                  <a:srgbClr val="00B0F0"/>
-                </a:solidFill>
-              </a:rPr>
-              <a:t>fast-moving</a:t>
-            </a:r>
-            <a:r>
-              <a:rPr lang="en-US" sz="3600" dirty="0">
-                <a:solidFill>
-                  <a:schemeClr val="tx1"/>
-                </a:solidFill>
-              </a:rPr>
-              <a:t>, and </a:t>
-            </a:r>
-            <a:r>
-              <a:rPr lang="en-US" sz="3600" dirty="0">
-                <a:solidFill>
-                  <a:srgbClr val="00B0F0"/>
-                </a:solidFill>
-              </a:rPr>
-              <a:t>diverse datasets </a:t>
-            </a:r>
-            <a:r>
-              <a:rPr lang="en-US" sz="3600" dirty="0">
-                <a:solidFill>
-                  <a:schemeClr val="tx1"/>
-                </a:solidFill>
-              </a:rPr>
-              <a:t>so they can be </a:t>
-            </a:r>
-            <a:r>
-              <a:rPr lang="en-US" sz="3600" dirty="0">
-                <a:solidFill>
-                  <a:srgbClr val="00B050"/>
-                </a:solidFill>
-              </a:rPr>
-              <a:t>stored</a:t>
-            </a:r>
-            <a:r>
-              <a:rPr lang="en-US" sz="3600" dirty="0">
-                <a:solidFill>
-                  <a:schemeClr val="tx1"/>
-                </a:solidFill>
-              </a:rPr>
-              <a:t>, </a:t>
-            </a:r>
-          </a:p>
-          <a:p>
-            <a:r>
-              <a:rPr lang="en-US" sz="3600" dirty="0">
-                <a:solidFill>
-                  <a:srgbClr val="00B050"/>
-                </a:solidFill>
-              </a:rPr>
-              <a:t>processed</a:t>
-            </a:r>
-            <a:r>
-              <a:rPr lang="en-US" sz="3600" dirty="0">
-                <a:solidFill>
-                  <a:schemeClr val="tx1"/>
-                </a:solidFill>
-              </a:rPr>
-              <a:t>, </a:t>
-            </a:r>
-            <a:r>
-              <a:rPr lang="en-US" sz="3600" dirty="0">
-                <a:solidFill>
-                  <a:srgbClr val="00B050"/>
-                </a:solidFill>
-              </a:rPr>
-              <a:t>analyzed</a:t>
-            </a:r>
-            <a:r>
-              <a:rPr lang="en-US" sz="3600" dirty="0">
-                <a:solidFill>
-                  <a:schemeClr val="tx1"/>
-                </a:solidFill>
-              </a:rPr>
-              <a:t>, and </a:t>
-            </a:r>
-            <a:r>
-              <a:rPr lang="en-US" sz="3600" dirty="0">
-                <a:solidFill>
-                  <a:srgbClr val="00B050"/>
-                </a:solidFill>
-              </a:rPr>
-              <a:t>understood</a:t>
-            </a:r>
-            <a:r>
-              <a:rPr lang="en-US" sz="3600" dirty="0">
-                <a:solidFill>
-                  <a:schemeClr val="tx1"/>
-                </a:solidFill>
-              </a:rPr>
-              <a:t> efficiently.</a:t>
-            </a:r>
-          </a:p>
-          <a:p>
-            <a:endParaRPr lang="en-US" sz="3600" dirty="0"/>
-          </a:p>
-          <a:p>
-            <a:r>
-              <a:rPr lang="en-US" sz="3600" b="1" u="sng" dirty="0"/>
-              <a:t>Key Characteristics</a:t>
-            </a:r>
-            <a:endParaRPr lang="en-US" sz="3600" b="1" u="sng" dirty="0">
-              <a:solidFill>
-                <a:schemeClr val="tx1"/>
-              </a:solidFill>
-            </a:endParaRPr>
-          </a:p>
-          <a:p>
-            <a:r>
-              <a:rPr lang="en-US" sz="3600" dirty="0">
-                <a:solidFill>
-                  <a:srgbClr val="00B0F0"/>
-                </a:solidFill>
-              </a:rPr>
-              <a:t>1. Volume</a:t>
-            </a:r>
-            <a:r>
-              <a:rPr lang="en-US" sz="3600" dirty="0">
-                <a:solidFill>
-                  <a:schemeClr val="tx1"/>
-                </a:solidFill>
-              </a:rPr>
-              <a:t>: Handles massive amounts of data</a:t>
-            </a:r>
-          </a:p>
-          <a:p>
-            <a:r>
-              <a:rPr lang="en-US" sz="3600" dirty="0">
-                <a:solidFill>
-                  <a:srgbClr val="00B0F0"/>
-                </a:solidFill>
-              </a:rPr>
-              <a:t>2. Velocity</a:t>
-            </a:r>
-            <a:r>
-              <a:rPr lang="en-US" sz="3600" dirty="0">
-                <a:solidFill>
-                  <a:schemeClr val="tx1"/>
-                </a:solidFill>
-              </a:rPr>
-              <a:t>: Supports rapidly generated and processed data</a:t>
-            </a:r>
-          </a:p>
-          <a:p>
-            <a:r>
-              <a:rPr lang="en-US" sz="3600" dirty="0">
-                <a:solidFill>
-                  <a:srgbClr val="00B0F0"/>
-                </a:solidFill>
-              </a:rPr>
-              <a:t>3. Variety</a:t>
-            </a:r>
-            <a:r>
-              <a:rPr lang="en-US" sz="3600" dirty="0">
-                <a:solidFill>
-                  <a:schemeClr val="tx1"/>
-                </a:solidFill>
-              </a:rPr>
-              <a:t>: Combines structured, semi-structured, and unstructured data</a:t>
-            </a:r>
-          </a:p>
-          <a:p>
-            <a:r>
-              <a:rPr lang="en-US" sz="3600" dirty="0">
-                <a:solidFill>
-                  <a:srgbClr val="00B0F0"/>
-                </a:solidFill>
-              </a:rPr>
-              <a:t>4. Veracity</a:t>
-            </a:r>
-            <a:r>
-              <a:rPr lang="en-US" sz="3600" dirty="0">
-                <a:solidFill>
-                  <a:schemeClr val="tx1"/>
-                </a:solidFill>
-              </a:rPr>
-              <a:t>: The quality, reliability, and trust of the data</a:t>
-            </a:r>
-          </a:p>
-          <a:p>
-            <a:r>
-              <a:rPr lang="en-US" sz="3600" dirty="0">
-                <a:solidFill>
-                  <a:srgbClr val="00B0F0"/>
-                </a:solidFill>
-              </a:rPr>
-              <a:t>5. Scalability</a:t>
-            </a:r>
-            <a:r>
-              <a:rPr lang="en-US" sz="3600" dirty="0">
-                <a:solidFill>
-                  <a:schemeClr val="tx1"/>
-                </a:solidFill>
-              </a:rPr>
-              <a:t>: Adapts as data and user demand grow</a:t>
-            </a:r>
-          </a:p>
-          <a:p>
-            <a:endParaRPr lang="en-US" sz="3600" dirty="0"/>
-          </a:p>
-          <a:p>
-            <a:pPr marL="800100" lvl="1" indent="-342900" algn="l">
-              <a:buFont typeface="+mj-lt"/>
-              <a:buAutoNum type="arabicPeriod"/>
-            </a:pPr>
-            <a:endParaRPr lang="en-US" sz="1200" dirty="0"/>
-          </a:p>
-        </p:txBody>
-      </p:sp>
-    </p:spTree>
-    <p:extLst>
-      <p:ext uri="{BB962C8B-B14F-4D97-AF65-F5344CB8AC3E}">
-        <p14:creationId xmlns:p14="http://schemas.microsoft.com/office/powerpoint/2010/main" val="614690070"/>
-      </p:ext>
-    </p:extLst>
-  </p:cSld>
-  <p:clrMapOvr>
-    <a:masterClrMapping/>
-  </p:clrMapOvr>
-  <p:timing>
-    <p:tnLst>
-      <p:par>
-        <p:cTn id="1" dur="indefinite" restart="never" nodeType="tmRoot">
-          <p:childTnLst>
-            <p:seq concurrent="1" nextAc="seek">
-              <p:cTn id="2" dur="indefinite" nodeType="mainSeq">
-                <p:childTnLst>
-                  <p:par>
-                    <p:cTn id="3" fill="hold">
-                      <p:stCondLst>
-                        <p:cond delay="indefinite"/>
-                      </p:stCondLst>
-                      <p:childTnLst>
-                        <p:par>
-                          <p:cTn id="4" fill="hold">
-                            <p:stCondLst>
-                              <p:cond delay="0"/>
-                            </p:stCondLst>
-                            <p:childTnLst>
-                              <p:par>
-                                <p:cTn id="5" presetID="1" presetClass="entr" presetSubtype="0" fill="hold" nodeType="clickEffect">
-                                  <p:stCondLst>
-                                    <p:cond delay="0"/>
-                                  </p:stCondLst>
-                                  <p:childTnLst>
-                                    <p:set>
-                                      <p:cBhvr>
-                                        <p:cTn id="6" dur="1" fill="hold">
-                                          <p:stCondLst>
-                                            <p:cond delay="0"/>
-                                          </p:stCondLst>
-                                        </p:cTn>
-                                        <p:tgtEl>
-                                          <p:spTgt spid="3">
-                                            <p:txEl>
-                                              <p:pRg st="0" end="0"/>
-                                            </p:txEl>
-                                          </p:spTgt>
-                                        </p:tgtEl>
-                                        <p:attrNameLst>
-                                          <p:attrName>style.visibility</p:attrName>
-                                        </p:attrNameLst>
-                                      </p:cBhvr>
-                                      <p:to>
-                                        <p:strVal val="visible"/>
-                                      </p:to>
-                                    </p:set>
-                                  </p:childTnLst>
-                                </p:cTn>
-                              </p:par>
-                            </p:childTnLst>
-                          </p:cTn>
-                        </p:par>
-                      </p:childTnLst>
-                    </p:cTn>
-                  </p:par>
-                  <p:par>
-                    <p:cTn id="7" fill="hold">
-                      <p:stCondLst>
-                        <p:cond delay="indefinite"/>
-                      </p:stCondLst>
-                      <p:childTnLst>
-                        <p:par>
-                          <p:cTn id="8" fill="hold">
-                            <p:stCondLst>
-                              <p:cond delay="0"/>
-                            </p:stCondLst>
-                            <p:childTnLst>
-                              <p:par>
-                                <p:cTn id="9" presetID="1" presetClass="entr" presetSubtype="0" fill="hold" nodeType="clickEffect">
-                                  <p:stCondLst>
-                                    <p:cond delay="0"/>
-                                  </p:stCondLst>
-                                  <p:childTnLst>
-                                    <p:set>
-                                      <p:cBhvr>
-                                        <p:cTn id="10" dur="1" fill="hold">
-                                          <p:stCondLst>
-                                            <p:cond delay="0"/>
-                                          </p:stCondLst>
-                                        </p:cTn>
-                                        <p:tgtEl>
-                                          <p:spTgt spid="3">
-                                            <p:txEl>
-                                              <p:pRg st="1" end="1"/>
-                                            </p:txEl>
-                                          </p:spTgt>
-                                        </p:tgtEl>
-                                        <p:attrNameLst>
-                                          <p:attrName>style.visibility</p:attrName>
-                                        </p:attrNameLst>
-                                      </p:cBhvr>
-                                      <p:to>
-                                        <p:strVal val="visible"/>
-                                      </p:to>
-                                    </p:set>
-                                  </p:childTnLst>
-                                </p:cTn>
-                              </p:par>
-                            </p:childTnLst>
-                          </p:cTn>
-                        </p:par>
-                      </p:childTnLst>
-                    </p:cTn>
-                  </p:par>
-                  <p:par>
-                    <p:cTn id="11" fill="hold">
-                      <p:stCondLst>
-                        <p:cond delay="indefinite"/>
-                      </p:stCondLst>
-                      <p:childTnLst>
-                        <p:par>
-                          <p:cTn id="12" fill="hold">
-                            <p:stCondLst>
-                              <p:cond delay="0"/>
-                            </p:stCondLst>
-                            <p:childTnLst>
-                              <p:par>
-                                <p:cTn id="13" presetID="1" presetClass="entr" presetSubtype="0" fill="hold" nodeType="clickEffect">
-                                  <p:stCondLst>
-                                    <p:cond delay="0"/>
-                                  </p:stCondLst>
-                                  <p:childTnLst>
-                                    <p:set>
-                                      <p:cBhvr>
-                                        <p:cTn id="14" dur="1" fill="hold">
-                                          <p:stCondLst>
-                                            <p:cond delay="0"/>
-                                          </p:stCondLst>
-                                        </p:cTn>
-                                        <p:tgtEl>
-                                          <p:spTgt spid="3">
-                                            <p:txEl>
-                                              <p:pRg st="2" end="2"/>
-                                            </p:txEl>
-                                          </p:spTgt>
-                                        </p:tgtEl>
-                                        <p:attrNameLst>
-                                          <p:attrName>style.visibility</p:attrName>
-                                        </p:attrNameLst>
-                                      </p:cBhvr>
-                                      <p:to>
-                                        <p:strVal val="visible"/>
-                                      </p:to>
-                                    </p:set>
-                                  </p:childTnLst>
-                                </p:cTn>
-                              </p:par>
-                            </p:childTnLst>
-                          </p:cTn>
-                        </p:par>
-                      </p:childTnLst>
-                    </p:cTn>
-                  </p:par>
-                  <p:par>
-                    <p:cTn id="15" fill="hold">
-                      <p:stCondLst>
-                        <p:cond delay="indefinite"/>
-                      </p:stCondLst>
-                      <p:childTnLst>
-                        <p:par>
-                          <p:cTn id="16" fill="hold">
-                            <p:stCondLst>
-                              <p:cond delay="0"/>
-                            </p:stCondLst>
-                            <p:childTnLst>
-                              <p:par>
-                                <p:cTn id="17" presetID="1" presetClass="entr" presetSubtype="0" fill="hold" nodeType="clickEffect">
-                                  <p:stCondLst>
-                                    <p:cond delay="0"/>
-                                  </p:stCondLst>
-                                  <p:childTnLst>
-                                    <p:set>
-                                      <p:cBhvr>
-                                        <p:cTn id="18" dur="1" fill="hold">
-                                          <p:stCondLst>
-                                            <p:cond delay="0"/>
-                                          </p:stCondLst>
-                                        </p:cTn>
-                                        <p:tgtEl>
-                                          <p:spTgt spid="3">
-                                            <p:txEl>
-                                              <p:pRg st="4" end="4"/>
-                                            </p:txEl>
-                                          </p:spTgt>
-                                        </p:tgtEl>
-                                        <p:attrNameLst>
-                                          <p:attrName>style.visibility</p:attrName>
-                                        </p:attrNameLst>
-                                      </p:cBhvr>
-                                      <p:to>
-                                        <p:strVal val="visible"/>
-                                      </p:to>
-                                    </p:set>
-                                  </p:childTnLst>
-                                </p:cTn>
-                              </p:par>
-                            </p:childTnLst>
-                          </p:cTn>
-                        </p:par>
-                      </p:childTnLst>
-                    </p:cTn>
-                  </p:par>
-                  <p:par>
-                    <p:cTn id="19" fill="hold">
-                      <p:stCondLst>
-                        <p:cond delay="indefinite"/>
-                      </p:stCondLst>
-                      <p:childTnLst>
-                        <p:par>
-                          <p:cTn id="20" fill="hold">
-                            <p:stCondLst>
-                              <p:cond delay="0"/>
-                            </p:stCondLst>
-                            <p:childTnLst>
-                              <p:par>
-                                <p:cTn id="21" presetID="1" presetClass="entr" presetSubtype="0" fill="hold" nodeType="clickEffect">
-                                  <p:stCondLst>
-                                    <p:cond delay="0"/>
-                                  </p:stCondLst>
-                                  <p:childTnLst>
-                                    <p:set>
-                                      <p:cBhvr>
-                                        <p:cTn id="22" dur="1" fill="hold">
-                                          <p:stCondLst>
-                                            <p:cond delay="0"/>
-                                          </p:stCondLst>
-                                        </p:cTn>
-                                        <p:tgtEl>
-                                          <p:spTgt spid="3">
-                                            <p:txEl>
-                                              <p:pRg st="5" end="5"/>
-                                            </p:txEl>
-                                          </p:spTgt>
-                                        </p:tgtEl>
-                                        <p:attrNameLst>
-                                          <p:attrName>style.visibility</p:attrName>
-                                        </p:attrNameLst>
-                                      </p:cBhvr>
-                                      <p:to>
-                                        <p:strVal val="visible"/>
-                                      </p:to>
-                                    </p:set>
-                                  </p:childTnLst>
-                                </p:cTn>
-                              </p:par>
-                            </p:childTnLst>
-                          </p:cTn>
-                        </p:par>
-                      </p:childTnLst>
-                    </p:cTn>
-                  </p:par>
-                  <p:par>
-                    <p:cTn id="23" fill="hold">
-                      <p:stCondLst>
-                        <p:cond delay="indefinite"/>
-                      </p:stCondLst>
-                      <p:childTnLst>
-                        <p:par>
-                          <p:cTn id="24" fill="hold">
-                            <p:stCondLst>
-                              <p:cond delay="0"/>
-                            </p:stCondLst>
-                            <p:childTnLst>
-                              <p:par>
-                                <p:cTn id="25" presetID="1" presetClass="entr" presetSubtype="0" fill="hold" nodeType="clickEffect">
-                                  <p:stCondLst>
-                                    <p:cond delay="0"/>
-                                  </p:stCondLst>
-                                  <p:childTnLst>
-                                    <p:set>
-                                      <p:cBhvr>
-                                        <p:cTn id="26" dur="1" fill="hold">
-                                          <p:stCondLst>
-                                            <p:cond delay="0"/>
-                                          </p:stCondLst>
-                                        </p:cTn>
-                                        <p:tgtEl>
-                                          <p:spTgt spid="3">
-                                            <p:txEl>
-                                              <p:pRg st="6" end="6"/>
-                                            </p:txEl>
-                                          </p:spTgt>
-                                        </p:tgtEl>
-                                        <p:attrNameLst>
-                                          <p:attrName>style.visibility</p:attrName>
-                                        </p:attrNameLst>
-                                      </p:cBhvr>
-                                      <p:to>
-                                        <p:strVal val="visible"/>
-                                      </p:to>
-                                    </p:set>
-                                  </p:childTnLst>
-                                </p:cTn>
-                              </p:par>
-                            </p:childTnLst>
-                          </p:cTn>
-                        </p:par>
-                      </p:childTnLst>
-                    </p:cTn>
-                  </p:par>
-                  <p:par>
-                    <p:cTn id="27" fill="hold">
-                      <p:stCondLst>
-                        <p:cond delay="indefinite"/>
-                      </p:stCondLst>
-                      <p:childTnLst>
-                        <p:par>
-                          <p:cTn id="28" fill="hold">
-                            <p:stCondLst>
-                              <p:cond delay="0"/>
-                            </p:stCondLst>
-                            <p:childTnLst>
-                              <p:par>
-                                <p:cTn id="29" presetID="1" presetClass="entr" presetSubtype="0" fill="hold" nodeType="clickEffect">
-                                  <p:stCondLst>
-                                    <p:cond delay="0"/>
-                                  </p:stCondLst>
-                                  <p:childTnLst>
-                                    <p:set>
-                                      <p:cBhvr>
-                                        <p:cTn id="30" dur="1" fill="hold">
-                                          <p:stCondLst>
-                                            <p:cond delay="0"/>
-                                          </p:stCondLst>
-                                        </p:cTn>
-                                        <p:tgtEl>
-                                          <p:spTgt spid="3">
-                                            <p:txEl>
-                                              <p:pRg st="7" end="7"/>
-                                            </p:txEl>
-                                          </p:spTgt>
-                                        </p:tgtEl>
-                                        <p:attrNameLst>
-                                          <p:attrName>style.visibility</p:attrName>
-                                        </p:attrNameLst>
-                                      </p:cBhvr>
-                                      <p:to>
-                                        <p:strVal val="visible"/>
-                                      </p:to>
-                                    </p:set>
-                                  </p:childTnLst>
-                                </p:cTn>
-                              </p:par>
-                            </p:childTnLst>
-                          </p:cTn>
-                        </p:par>
-                      </p:childTnLst>
-                    </p:cTn>
-                  </p:par>
-                  <p:par>
-                    <p:cTn id="31" fill="hold">
-                      <p:stCondLst>
-                        <p:cond delay="indefinite"/>
-                      </p:stCondLst>
-                      <p:childTnLst>
-                        <p:par>
-                          <p:cTn id="32" fill="hold">
-                            <p:stCondLst>
-                              <p:cond delay="0"/>
-                            </p:stCondLst>
-                            <p:childTnLst>
-                              <p:par>
-                                <p:cTn id="33" presetID="1" presetClass="entr" presetSubtype="0" fill="hold" nodeType="clickEffect">
-                                  <p:stCondLst>
-                                    <p:cond delay="0"/>
-                                  </p:stCondLst>
-                                  <p:childTnLst>
-                                    <p:set>
-                                      <p:cBhvr>
-                                        <p:cTn id="34" dur="1" fill="hold">
-                                          <p:stCondLst>
-                                            <p:cond delay="0"/>
-                                          </p:stCondLst>
-                                        </p:cTn>
-                                        <p:tgtEl>
-                                          <p:spTgt spid="3">
-                                            <p:txEl>
-                                              <p:pRg st="8" end="8"/>
-                                            </p:txEl>
-                                          </p:spTgt>
-                                        </p:tgtEl>
-                                        <p:attrNameLst>
-                                          <p:attrName>style.visibility</p:attrName>
-                                        </p:attrNameLst>
-                                      </p:cBhvr>
-                                      <p:to>
-                                        <p:strVal val="visible"/>
-                                      </p:to>
-                                    </p:set>
-                                  </p:childTnLst>
-                                </p:cTn>
-                              </p:par>
-                            </p:childTnLst>
-                          </p:cTn>
-                        </p:par>
-                      </p:childTnLst>
-                    </p:cTn>
-                  </p:par>
-                  <p:par>
-                    <p:cTn id="35" fill="hold">
-                      <p:stCondLst>
-                        <p:cond delay="indefinite"/>
-                      </p:stCondLst>
-                      <p:childTnLst>
-                        <p:par>
-                          <p:cTn id="36" fill="hold">
-                            <p:stCondLst>
-                              <p:cond delay="0"/>
-                            </p:stCondLst>
-                            <p:childTnLst>
-                              <p:par>
-                                <p:cTn id="37" presetID="1" presetClass="entr" presetSubtype="0" fill="hold" nodeType="clickEffect">
-                                  <p:stCondLst>
-                                    <p:cond delay="0"/>
-                                  </p:stCondLst>
-                                  <p:childTnLst>
-                                    <p:set>
-                                      <p:cBhvr>
-                                        <p:cTn id="38" dur="1" fill="hold">
-                                          <p:stCondLst>
-                                            <p:cond delay="0"/>
-                                          </p:stCondLst>
-                                        </p:cTn>
-                                        <p:tgtEl>
-                                          <p:spTgt spid="3">
-                                            <p:txEl>
-                                              <p:pRg st="9" end="9"/>
-                                            </p:txEl>
-                                          </p:spTgt>
-                                        </p:tgtEl>
-                                        <p:attrNameLst>
-                                          <p:attrName>style.visibility</p:attrName>
-                                        </p:attrNameLst>
-                                      </p:cBhvr>
-                                      <p:to>
-                                        <p:strVal val="visible"/>
-                                      </p:to>
-                                    </p:set>
-                                  </p:childTnLst>
-                                </p:cTn>
-                              </p:par>
-                            </p:childTnLst>
-                          </p:cTn>
-                        </p:par>
-                      </p:childTnLst>
-                    </p:cTn>
-                  </p:par>
-                </p:childTnLst>
-              </p:cTn>
-              <p:prevCondLst>
-                <p:cond evt="onPrev" delay="0">
-                  <p:tgtEl>
-                    <p:sldTgt/>
-                  </p:tgtEl>
-                </p:cond>
-              </p:prevCondLst>
-              <p:nextCondLst>
-                <p:cond evt="onNext" delay="0">
-                  <p:tgtEl>
-                    <p:sldTgt/>
-                  </p:tgtEl>
-                </p:cond>
-              </p:nextCondLst>
-            </p:seq>
-          </p:childTnLst>
-        </p:cTn>
-      </p:par>
-    </p:tnLst>
-  </p:timing>
-</p:sld>
-</file>
-
-<file path=ppt/slides/slide30.xml><?xml version="1.0" encoding="utf-8"?>
+<file path=ppt/slides/slide31.xml><?xml version="1.0" encoding="utf-8"?>
 <p:sld xmlns:a="http://schemas.openxmlformats.org/drawingml/2006/main" xmlns:r="http://schemas.openxmlformats.org/officeDocument/2006/relationships" xmlns:p="http://schemas.openxmlformats.org/presentationml/2006/main">
   <p:cSld>
     <p:spTree>
@@ -16373,26 +16549,30 @@
         </p:nvSpPr>
         <p:spPr>
           <a:xfrm>
-            <a:off x="1524000" y="603316"/>
-            <a:ext cx="9144000" cy="650450"/>
+            <a:off x="1524000" y="382580"/>
+            <a:ext cx="9144000" cy="502003"/>
           </a:xfrm>
         </p:spPr>
         <p:txBody>
           <a:bodyPr>
-            <a:normAutofit fontScale="90000"/>
+            <a:noAutofit/>
           </a:bodyPr>
           <a:lstStyle/>
           <a:p>
             <a:r>
-              <a:rPr lang="en-US"/>
-              <a:t>PySpark </a:t>
-            </a:r>
-            <a:r>
-              <a:rPr lang="en-US" err="1"/>
+              <a:rPr lang="en-US" sz="3200" dirty="0" err="1"/>
+              <a:t>PySpark</a:t>
+            </a:r>
+            <a:r>
+              <a:rPr lang="en-US" sz="3200" dirty="0"/>
+              <a:t> </a:t>
+            </a:r>
+            <a:r>
+              <a:rPr lang="en-US" sz="3200" dirty="0" err="1"/>
               <a:t>DataFrame</a:t>
             </a:r>
             <a:r>
-              <a:rPr lang="en-US"/>
+              <a:rPr lang="en-US" sz="3200" dirty="0"/>
               <a:t> Example</a:t>
             </a:r>
           </a:p>
@@ -16416,8 +16596,8 @@
         </p:nvSpPr>
         <p:spPr>
           <a:xfrm>
-            <a:off x="1524000" y="1357460"/>
-            <a:ext cx="9144000" cy="4615957"/>
+            <a:off x="1524000" y="884584"/>
+            <a:ext cx="9144000" cy="5088834"/>
           </a:xfrm>
         </p:spPr>
         <p:txBody>
@@ -16427,7 +16607,7 @@
           <a:lstStyle/>
           <a:p>
             <a:r>
-              <a:rPr lang="en-US" sz="1600">
+              <a:rPr lang="en-US" sz="1800" dirty="0">
                 <a:solidFill>
                   <a:schemeClr val="tx1"/>
                 </a:solidFill>
@@ -16437,7 +16617,7 @@
               <a:t>from </a:t>
             </a:r>
             <a:r>
-              <a:rPr lang="en-US" sz="1600" err="1">
+              <a:rPr lang="en-US" sz="1800" dirty="0" err="1">
                 <a:solidFill>
                   <a:schemeClr val="tx1"/>
                 </a:solidFill>
@@ -16447,7 +16627,7 @@
               <a:t>pyspark.sql</a:t>
             </a:r>
             <a:r>
-              <a:rPr lang="en-US" sz="1600">
+              <a:rPr lang="en-US" sz="1800" dirty="0">
                 <a:solidFill>
                   <a:schemeClr val="tx1"/>
                 </a:solidFill>
@@ -16457,7 +16637,7 @@
               <a:t> import </a:t>
             </a:r>
             <a:r>
-              <a:rPr lang="en-US" sz="1600" err="1">
+              <a:rPr lang="en-US" sz="1800" dirty="0" err="1">
                 <a:solidFill>
                   <a:schemeClr val="tx1"/>
                 </a:solidFill>
@@ -16466,7 +16646,7 @@
               </a:rPr>
               <a:t>SparkSession</a:t>
             </a:r>
-            <a:endParaRPr lang="en-US" sz="1600">
+            <a:endParaRPr lang="en-US" sz="1800" dirty="0">
               <a:solidFill>
                 <a:schemeClr val="tx1"/>
               </a:solidFill>
@@ -16476,9 +16656,9 @@
           </a:p>
           <a:p>
             <a:r>
-              <a:rPr lang="en-US" sz="1600">
-                <a:solidFill>
-                  <a:srgbClr val="00B050"/>
+              <a:rPr lang="en-US" sz="1800" dirty="0">
+                <a:solidFill>
+                  <a:schemeClr val="tx1"/>
                 </a:solidFill>
                 <a:highlight>
                   <a:srgbClr val="FFFF00"/>
@@ -16489,9 +16669,9 @@
               <a:t># 1. Initialize a </a:t>
             </a:r>
             <a:r>
-              <a:rPr lang="en-US" sz="1600" err="1">
-                <a:solidFill>
-                  <a:srgbClr val="00B050"/>
+              <a:rPr lang="en-US" sz="1800" dirty="0" err="1">
+                <a:solidFill>
+                  <a:schemeClr val="tx1"/>
                 </a:solidFill>
                 <a:highlight>
                   <a:srgbClr val="FFFF00"/>
@@ -16501,9 +16681,9 @@
               </a:rPr>
               <a:t>SparkSession</a:t>
             </a:r>
-            <a:endParaRPr lang="en-US" sz="1600">
+            <a:endParaRPr lang="en-US" sz="1800" dirty="0">
               <a:solidFill>
-                <a:srgbClr val="00B050"/>
+                <a:schemeClr val="tx1"/>
               </a:solidFill>
               <a:highlight>
                 <a:srgbClr val="FFFF00"/>
@@ -16514,7 +16694,7 @@
           </a:p>
           <a:p>
             <a:r>
-              <a:rPr lang="en-US" sz="1600">
+              <a:rPr lang="en-US" sz="1800" dirty="0">
                 <a:solidFill>
                   <a:schemeClr val="tx1"/>
                 </a:solidFill>
@@ -16524,7 +16704,7 @@
               <a:t>spark = </a:t>
             </a:r>
             <a:r>
-              <a:rPr lang="en-US" sz="1600" err="1">
+              <a:rPr lang="en-US" sz="1800" dirty="0" err="1">
                 <a:solidFill>
                   <a:schemeClr val="tx1"/>
                 </a:solidFill>
@@ -16534,17 +16714,17 @@
               <a:t>SparkSession.builder.appName</a:t>
             </a:r>
             <a:r>
-              <a:rPr lang="en-US" sz="1600">
+              <a:rPr lang="en-US" sz="1800" dirty="0">
                 <a:solidFill>
                   <a:schemeClr val="tx1"/>
                 </a:solidFill>
                 <a:latin typeface="Consolas" panose="020B0609020204030204" pitchFamily="49" charset="0"/>
                 <a:cs typeface="Consolas" panose="020B0609020204030204" pitchFamily="49" charset="0"/>
               </a:rPr>
-              <a:t>(”demo").</a:t>
-            </a:r>
-            <a:r>
-              <a:rPr lang="en-US" sz="1600" err="1">
+              <a:t>("demo").</a:t>
+            </a:r>
+            <a:r>
+              <a:rPr lang="en-US" sz="1800" dirty="0" err="1">
                 <a:solidFill>
                   <a:schemeClr val="tx1"/>
                 </a:solidFill>
@@ -16554,7 +16734,7 @@
               <a:t>getOrCreate</a:t>
             </a:r>
             <a:r>
-              <a:rPr lang="en-US" sz="1600">
+              <a:rPr lang="en-US" sz="1800" dirty="0">
                 <a:solidFill>
                   <a:schemeClr val="tx1"/>
                 </a:solidFill>
@@ -16565,7 +16745,7 @@
             </a:r>
           </a:p>
           <a:p>
-            <a:endParaRPr lang="en-US" sz="1600">
+            <a:endParaRPr lang="en-US" sz="1800" dirty="0">
               <a:solidFill>
                 <a:schemeClr val="tx1"/>
               </a:solidFill>
@@ -16575,9 +16755,9 @@
           </a:p>
           <a:p>
             <a:r>
-              <a:rPr lang="en-US" sz="1600">
-                <a:solidFill>
-                  <a:srgbClr val="00B050"/>
+              <a:rPr lang="en-US" sz="1800" dirty="0">
+                <a:solidFill>
+                  <a:schemeClr val="tx1"/>
                 </a:solidFill>
                 <a:highlight>
                   <a:srgbClr val="FFFF00"/>
@@ -16588,9 +16768,9 @@
               <a:t># 2. Create a sample </a:t>
             </a:r>
             <a:r>
-              <a:rPr lang="en-US" sz="1600" err="1">
-                <a:solidFill>
-                  <a:srgbClr val="00B050"/>
+              <a:rPr lang="en-US" sz="1800" dirty="0" err="1">
+                <a:solidFill>
+                  <a:schemeClr val="tx1"/>
                 </a:solidFill>
                 <a:highlight>
                   <a:srgbClr val="FFFF00"/>
@@ -16600,9 +16780,35 @@
               </a:rPr>
               <a:t>DataFrame</a:t>
             </a:r>
-            <a:endParaRPr lang="en-US" sz="1600">
+            <a:r>
+              <a:rPr lang="en-US" sz="1800" dirty="0">
+                <a:solidFill>
+                  <a:schemeClr val="tx1"/>
+                </a:solidFill>
+                <a:highlight>
+                  <a:srgbClr val="FFFF00"/>
+                </a:highlight>
+                <a:latin typeface="Consolas" panose="020B0609020204030204" pitchFamily="49" charset="0"/>
+                <a:cs typeface="Consolas" panose="020B0609020204030204" pitchFamily="49" charset="0"/>
+              </a:rPr>
+              <a:t> as </a:t>
+            </a:r>
+            <a:r>
+              <a:rPr lang="en-US" sz="1800" dirty="0" err="1">
+                <a:solidFill>
+                  <a:schemeClr val="tx1"/>
+                </a:solidFill>
+                <a:highlight>
+                  <a:srgbClr val="FFFF00"/>
+                </a:highlight>
+                <a:latin typeface="Consolas" panose="020B0609020204030204" pitchFamily="49" charset="0"/>
+                <a:cs typeface="Consolas" panose="020B0609020204030204" pitchFamily="49" charset="0"/>
+              </a:rPr>
+              <a:t>df</a:t>
+            </a:r>
+            <a:endParaRPr lang="en-US" sz="1800" dirty="0">
               <a:solidFill>
-                <a:srgbClr val="00B050"/>
+                <a:schemeClr val="tx1"/>
               </a:solidFill>
               <a:highlight>
                 <a:srgbClr val="FFFF00"/>
@@ -16613,7 +16819,7 @@
           </a:p>
           <a:p>
             <a:r>
-              <a:rPr lang="en-US" sz="1600">
+              <a:rPr lang="en-US" sz="1800" dirty="0">
                 <a:solidFill>
                   <a:schemeClr val="tx1"/>
                 </a:solidFill>
@@ -16625,7 +16831,7 @@
           </a:p>
           <a:p>
             <a:r>
-              <a:rPr lang="en-US" sz="1600">
+              <a:rPr lang="en-US" sz="1800" dirty="0">
                 <a:solidFill>
                   <a:schemeClr val="tx1"/>
                 </a:solidFill>
@@ -16637,7 +16843,7 @@
           </a:p>
           <a:p>
             <a:r>
-              <a:rPr lang="en-US" sz="1600">
+              <a:rPr lang="en-US" sz="1800" dirty="0">
                 <a:solidFill>
                   <a:schemeClr val="tx1"/>
                 </a:solidFill>
@@ -16649,7 +16855,7 @@
           </a:p>
           <a:p>
             <a:r>
-              <a:rPr lang="en-US" sz="1600" err="1">
+              <a:rPr lang="en-US" sz="1800" dirty="0" err="1">
                 <a:solidFill>
                   <a:schemeClr val="tx1"/>
                 </a:solidFill>
@@ -16659,7 +16865,7 @@
               <a:t>df</a:t>
             </a:r>
             <a:r>
-              <a:rPr lang="en-US" sz="1600">
+              <a:rPr lang="en-US" sz="1800" dirty="0">
                 <a:solidFill>
                   <a:schemeClr val="tx1"/>
                 </a:solidFill>
@@ -16669,7 +16875,7 @@
               <a:t> = </a:t>
             </a:r>
             <a:r>
-              <a:rPr lang="en-US" sz="1600" err="1">
+              <a:rPr lang="en-US" sz="1800" dirty="0" err="1">
                 <a:solidFill>
                   <a:schemeClr val="tx1"/>
                 </a:solidFill>
@@ -16679,7 +16885,7 @@
               <a:t>spark.createDataFrame</a:t>
             </a:r>
             <a:r>
-              <a:rPr lang="en-US" sz="1600">
+              <a:rPr lang="en-US" sz="1800" dirty="0">
                 <a:solidFill>
                   <a:schemeClr val="tx1"/>
                 </a:solidFill>
@@ -16690,7 +16896,7 @@
             </a:r>
           </a:p>
           <a:p>
-            <a:endParaRPr lang="en-US" sz="1600">
+            <a:endParaRPr lang="en-US" sz="1800" dirty="0">
               <a:solidFill>
                 <a:schemeClr val="tx1"/>
               </a:solidFill>
@@ -16700,9 +16906,9 @@
           </a:p>
           <a:p>
             <a:r>
-              <a:rPr lang="en-US" sz="1600">
-                <a:solidFill>
-                  <a:srgbClr val="00B050"/>
+              <a:rPr lang="en-US" sz="1800" dirty="0">
+                <a:solidFill>
+                  <a:schemeClr val="tx1"/>
                 </a:solidFill>
                 <a:highlight>
                   <a:srgbClr val="FFFF00"/>
@@ -16713,9 +16919,9 @@
               <a:t># 3. Register the </a:t>
             </a:r>
             <a:r>
-              <a:rPr lang="en-US" sz="1600" err="1">
-                <a:solidFill>
-                  <a:srgbClr val="00B050"/>
+              <a:rPr lang="en-US" sz="1800" dirty="0" err="1">
+                <a:solidFill>
+                  <a:schemeClr val="tx1"/>
                 </a:solidFill>
                 <a:highlight>
                   <a:srgbClr val="FFFF00"/>
@@ -16726,9 +16932,9 @@
               <a:t>DataFrame</a:t>
             </a:r>
             <a:r>
-              <a:rPr lang="en-US" sz="1600">
-                <a:solidFill>
-                  <a:srgbClr val="00B050"/>
+              <a:rPr lang="en-US" sz="1800" dirty="0">
+                <a:solidFill>
+                  <a:schemeClr val="tx1"/>
                 </a:solidFill>
                 <a:highlight>
                   <a:srgbClr val="FFFF00"/>
@@ -16741,7 +16947,7 @@
           </a:p>
           <a:p>
             <a:r>
-              <a:rPr lang="en-US" sz="1600" err="1">
+              <a:rPr lang="en-US" sz="1800" dirty="0" err="1">
                 <a:solidFill>
                   <a:schemeClr val="tx1"/>
                 </a:solidFill>
@@ -16751,7 +16957,7 @@
               <a:t>df.createOrReplaceTempView</a:t>
             </a:r>
             <a:r>
-              <a:rPr lang="en-US" sz="1600">
+              <a:rPr lang="en-US" sz="1800" dirty="0">
                 <a:solidFill>
                   <a:schemeClr val="tx1"/>
                 </a:solidFill>
@@ -16760,6 +16966,13 @@
               </a:rPr>
               <a:t>("employees")</a:t>
             </a:r>
+            <a:endParaRPr lang="en-US" sz="1600" dirty="0">
+              <a:solidFill>
+                <a:schemeClr val="tx1"/>
+              </a:solidFill>
+              <a:latin typeface="Consolas" panose="020B0609020204030204" pitchFamily="49" charset="0"/>
+              <a:cs typeface="Consolas" panose="020B0609020204030204" pitchFamily="49" charset="0"/>
+            </a:endParaRPr>
           </a:p>
         </p:txBody>
       </p:sp>
@@ -17296,7 +17509,7 @@
 </p:sld>
 </file>
 
-<file path=ppt/slides/slide31.xml><?xml version="1.0" encoding="utf-8"?>
+<file path=ppt/slides/slide32.xml><?xml version="1.0" encoding="utf-8"?>
 <p:sld xmlns:a="http://schemas.openxmlformats.org/drawingml/2006/main" xmlns:r="http://schemas.openxmlformats.org/officeDocument/2006/relationships" xmlns:p="http://schemas.openxmlformats.org/presentationml/2006/main">
   <p:cSld>
     <p:spTree>
@@ -17338,32 +17551,36 @@
         <p:spPr>
           <a:xfrm>
             <a:off x="1524000" y="603316"/>
-            <a:ext cx="9144000" cy="650450"/>
+            <a:ext cx="9144000" cy="461809"/>
           </a:xfrm>
         </p:spPr>
         <p:txBody>
           <a:bodyPr>
-            <a:normAutofit fontScale="90000"/>
+            <a:noAutofit/>
           </a:bodyPr>
           <a:lstStyle/>
           <a:p>
             <a:r>
-              <a:rPr lang="en-US"/>
-              <a:t>PySpark </a:t>
-            </a:r>
-            <a:r>
-              <a:rPr lang="en-US" err="1"/>
+              <a:rPr lang="en-US" sz="3200" dirty="0" err="1"/>
+              <a:t>PySpark</a:t>
+            </a:r>
+            <a:r>
+              <a:rPr lang="en-US" sz="3200" dirty="0"/>
+              <a:t> </a:t>
+            </a:r>
+            <a:r>
+              <a:rPr lang="en-US" sz="3200" dirty="0" err="1"/>
               <a:t>DataFrame</a:t>
             </a:r>
             <a:r>
-              <a:rPr lang="en-US"/>
+              <a:rPr lang="en-US" sz="3200" dirty="0"/>
               <a:t> Example </a:t>
             </a:r>
             <a:r>
-              <a:rPr lang="en-US" sz="2700"/>
+              <a:rPr lang="en-US" sz="1600" dirty="0"/>
               <a:t>continued…</a:t>
             </a:r>
-            <a:endParaRPr lang="en-US"/>
+            <a:endParaRPr lang="en-US" sz="3200" dirty="0"/>
           </a:p>
         </p:txBody>
       </p:sp>
@@ -17385,20 +17602,20 @@
         </p:nvSpPr>
         <p:spPr>
           <a:xfrm>
-            <a:off x="1524000" y="1357460"/>
-            <a:ext cx="9144000" cy="4615957"/>
+            <a:off x="1524000" y="1135464"/>
+            <a:ext cx="9144000" cy="4837953"/>
           </a:xfrm>
         </p:spPr>
         <p:txBody>
           <a:bodyPr>
-            <a:normAutofit fontScale="55000" lnSpcReduction="20000"/>
+            <a:normAutofit fontScale="62500" lnSpcReduction="20000"/>
           </a:bodyPr>
           <a:lstStyle/>
           <a:p>
             <a:r>
-              <a:rPr lang="en-US" sz="2800">
-                <a:solidFill>
-                  <a:srgbClr val="00B050"/>
+              <a:rPr lang="en-US" sz="2800" dirty="0">
+                <a:solidFill>
+                  <a:schemeClr val="tx1"/>
                 </a:solidFill>
                 <a:highlight>
                   <a:srgbClr val="FFFF00"/>
@@ -17409,9 +17626,9 @@
               <a:t># 4. Run an SQL query using </a:t>
             </a:r>
             <a:r>
-              <a:rPr lang="en-US" sz="2800" err="1">
-                <a:solidFill>
-                  <a:srgbClr val="00B050"/>
+              <a:rPr lang="en-US" sz="2800" dirty="0" err="1">
+                <a:solidFill>
+                  <a:schemeClr val="tx1"/>
                 </a:solidFill>
                 <a:highlight>
                   <a:srgbClr val="FFFF00"/>
@@ -17422,9 +17639,9 @@
               <a:t>spark.sql</a:t>
             </a:r>
             <a:r>
-              <a:rPr lang="en-US" sz="2800">
-                <a:solidFill>
-                  <a:srgbClr val="00B050"/>
+              <a:rPr lang="en-US" sz="2800" dirty="0">
+                <a:solidFill>
+                  <a:schemeClr val="tx1"/>
                 </a:solidFill>
                 <a:highlight>
                   <a:srgbClr val="FFFF00"/>
@@ -17437,7 +17654,7 @@
           </a:p>
           <a:p>
             <a:r>
-              <a:rPr lang="en-US" sz="2800" err="1">
+              <a:rPr lang="en-US" sz="2800" dirty="0" err="1">
                 <a:solidFill>
                   <a:schemeClr val="tx1"/>
                 </a:solidFill>
@@ -17447,7 +17664,7 @@
               <a:t>query_result</a:t>
             </a:r>
             <a:r>
-              <a:rPr lang="en-US" sz="2800">
+              <a:rPr lang="en-US" sz="2800" dirty="0">
                 <a:solidFill>
                   <a:schemeClr val="tx1"/>
                 </a:solidFill>
@@ -17457,7 +17674,7 @@
               <a:t> = </a:t>
             </a:r>
             <a:r>
-              <a:rPr lang="en-US" sz="2800" err="1">
+              <a:rPr lang="en-US" sz="2800" dirty="0" err="1">
                 <a:solidFill>
                   <a:schemeClr val="tx1"/>
                 </a:solidFill>
@@ -17467,7 +17684,7 @@
               <a:t>spark.sql</a:t>
             </a:r>
             <a:r>
-              <a:rPr lang="en-US" sz="2800">
+              <a:rPr lang="en-US" sz="2800" dirty="0">
                 <a:solidFill>
                   <a:schemeClr val="tx1"/>
                 </a:solidFill>
@@ -17479,7 +17696,7 @@
           </a:p>
           <a:p>
             <a:r>
-              <a:rPr lang="en-US" sz="2800">
+              <a:rPr lang="en-US" sz="2800" dirty="0">
                 <a:solidFill>
                   <a:schemeClr val="tx1"/>
                 </a:solidFill>
@@ -17491,7 +17708,7 @@
           </a:p>
           <a:p>
             <a:r>
-              <a:rPr lang="en-US" sz="2800">
+              <a:rPr lang="en-US" sz="2800" dirty="0">
                 <a:solidFill>
                   <a:schemeClr val="tx1"/>
                 </a:solidFill>
@@ -17503,7 +17720,7 @@
           </a:p>
           <a:p>
             <a:r>
-              <a:rPr lang="en-US" sz="2800">
+              <a:rPr lang="en-US" sz="2800" dirty="0">
                 <a:solidFill>
                   <a:schemeClr val="tx1"/>
                 </a:solidFill>
@@ -17513,7 +17730,7 @@
               <a:t>        COUNT(*) as </a:t>
             </a:r>
             <a:r>
-              <a:rPr lang="en-US" sz="2800" err="1">
+              <a:rPr lang="en-US" sz="2800" dirty="0" err="1">
                 <a:solidFill>
                   <a:schemeClr val="tx1"/>
                 </a:solidFill>
@@ -17523,7 +17740,7 @@
               <a:t>total_employees</a:t>
             </a:r>
             <a:r>
-              <a:rPr lang="en-US" sz="2800">
+              <a:rPr lang="en-US" sz="2800" dirty="0">
                 <a:solidFill>
                   <a:schemeClr val="tx1"/>
                 </a:solidFill>
@@ -17535,7 +17752,7 @@
           </a:p>
           <a:p>
             <a:r>
-              <a:rPr lang="en-US" sz="2800">
+              <a:rPr lang="en-US" sz="2800" dirty="0">
                 <a:solidFill>
                   <a:schemeClr val="tx1"/>
                 </a:solidFill>
@@ -17545,7 +17762,7 @@
               <a:t>        AVG(salary) as </a:t>
             </a:r>
             <a:r>
-              <a:rPr lang="en-US" sz="2800" err="1">
+              <a:rPr lang="en-US" sz="2800" dirty="0" err="1">
                 <a:solidFill>
                   <a:schemeClr val="tx1"/>
                 </a:solidFill>
@@ -17554,37 +17771,7 @@
               </a:rPr>
               <a:t>average_salary</a:t>
             </a:r>
-            <a:fld id="{EC398BCF-DA3B-3A48-A2AA-FD6C6A6B30E6}" type="slidenum">
-              <a:rPr lang="en-US" sz="2800" smtClean="0">
-                <a:solidFill>
-                  <a:schemeClr val="tx1"/>
-                </a:solidFill>
-                <a:latin typeface="Consolas" panose="020B0609020204030204" pitchFamily="49" charset="0"/>
-                <a:cs typeface="Consolas" panose="020B0609020204030204" pitchFamily="49" charset="0"/>
-              </a:rPr>
-              <a:t>31</a:t>
-            </a:fld>
-            <a:fld id="{CC2D33A0-B2E6-D349-A097-E72DB892D938}" type="slidenum">
-              <a:rPr lang="en-US" sz="2800" smtClean="0">
-                <a:solidFill>
-                  <a:schemeClr val="tx1"/>
-                </a:solidFill>
-                <a:latin typeface="Consolas" panose="020B0609020204030204" pitchFamily="49" charset="0"/>
-                <a:cs typeface="Consolas" panose="020B0609020204030204" pitchFamily="49" charset="0"/>
-              </a:rPr>
-              <a:t>31</a:t>
-            </a:fld>
-            <a:fld id="{DF44FC3A-F21A-1F4C-8B5B-6DE26541D48A}" type="slidenum">
-              <a:rPr lang="en-US" sz="2800" smtClean="0">
-                <a:solidFill>
-                  <a:schemeClr val="tx1"/>
-                </a:solidFill>
-                <a:latin typeface="Consolas" panose="020B0609020204030204" pitchFamily="49" charset="0"/>
-                <a:cs typeface="Consolas" panose="020B0609020204030204" pitchFamily="49" charset="0"/>
-              </a:rPr>
-              <a:t>31</a:t>
-            </a:fld>
-            <a:endParaRPr lang="en-US" sz="2800">
+            <a:endParaRPr lang="en-US" sz="2800" dirty="0">
               <a:solidFill>
                 <a:schemeClr val="tx1"/>
               </a:solidFill>
@@ -17594,7 +17781,7 @@
           </a:p>
           <a:p>
             <a:r>
-              <a:rPr lang="en-US" sz="2800">
+              <a:rPr lang="en-US" sz="2800" dirty="0">
                 <a:solidFill>
                   <a:schemeClr val="tx1"/>
                 </a:solidFill>
@@ -17606,7 +17793,7 @@
           </a:p>
           <a:p>
             <a:r>
-              <a:rPr lang="en-US" sz="2800">
+              <a:rPr lang="en-US" sz="2800" dirty="0">
                 <a:solidFill>
                   <a:schemeClr val="tx1"/>
                 </a:solidFill>
@@ -17618,7 +17805,7 @@
           </a:p>
           <a:p>
             <a:r>
-              <a:rPr lang="en-US" sz="2800">
+              <a:rPr lang="en-US" sz="2800" dirty="0">
                 <a:solidFill>
                   <a:schemeClr val="tx1"/>
                 </a:solidFill>
@@ -17628,7 +17815,7 @@
               <a:t>    HAVING </a:t>
             </a:r>
             <a:r>
-              <a:rPr lang="en-US" sz="2800" err="1">
+              <a:rPr lang="en-US" sz="2800" dirty="0" err="1">
                 <a:solidFill>
                   <a:schemeClr val="tx1"/>
                 </a:solidFill>
@@ -17638,7 +17825,7 @@
               <a:t>average_salary</a:t>
             </a:r>
             <a:r>
-              <a:rPr lang="en-US" sz="2800">
+              <a:rPr lang="en-US" sz="2800" dirty="0">
                 <a:solidFill>
                   <a:schemeClr val="tx1"/>
                 </a:solidFill>
@@ -17650,7 +17837,7 @@
           </a:p>
           <a:p>
             <a:r>
-              <a:rPr lang="en-US" sz="2800">
+              <a:rPr lang="en-US" sz="2800" dirty="0">
                 <a:solidFill>
                   <a:schemeClr val="tx1"/>
                 </a:solidFill>
@@ -17660,7 +17847,7 @@
               <a:t>    ORDER BY </a:t>
             </a:r>
             <a:r>
-              <a:rPr lang="en-US" sz="2800" err="1">
+              <a:rPr lang="en-US" sz="2800" dirty="0" err="1">
                 <a:solidFill>
                   <a:schemeClr val="tx1"/>
                 </a:solidFill>
@@ -17670,7 +17857,7 @@
               <a:t>average_salary</a:t>
             </a:r>
             <a:r>
-              <a:rPr lang="en-US" sz="2800">
+              <a:rPr lang="en-US" sz="2800" dirty="0">
                 <a:solidFill>
                   <a:schemeClr val="tx1"/>
                 </a:solidFill>
@@ -17682,7 +17869,7 @@
           </a:p>
           <a:p>
             <a:r>
-              <a:rPr lang="en-US" sz="2800">
+              <a:rPr lang="en-US" sz="2800" dirty="0">
                 <a:solidFill>
                   <a:schemeClr val="tx1"/>
                 </a:solidFill>
@@ -17693,7 +17880,7 @@
             </a:r>
           </a:p>
           <a:p>
-            <a:endParaRPr lang="en-US" sz="2800">
+            <a:endParaRPr lang="en-US" sz="2800" dirty="0">
               <a:solidFill>
                 <a:schemeClr val="tx1"/>
               </a:solidFill>
@@ -17703,9 +17890,9 @@
           </a:p>
           <a:p>
             <a:r>
-              <a:rPr lang="en-US" sz="2800">
-                <a:solidFill>
-                  <a:srgbClr val="00B050"/>
+              <a:rPr lang="en-US" sz="2800" dirty="0">
+                <a:solidFill>
+                  <a:schemeClr val="tx1"/>
                 </a:solidFill>
                 <a:highlight>
                   <a:srgbClr val="FFFF00"/>
@@ -17718,7 +17905,7 @@
           </a:p>
           <a:p>
             <a:r>
-              <a:rPr lang="en-US" sz="2800" err="1">
+              <a:rPr lang="en-US" sz="2800" dirty="0" err="1">
                 <a:solidFill>
                   <a:schemeClr val="tx1"/>
                 </a:solidFill>
@@ -17728,7 +17915,7 @@
               <a:t>query_result.show</a:t>
             </a:r>
             <a:r>
-              <a:rPr lang="en-US" sz="2800">
+              <a:rPr lang="en-US" sz="2800" dirty="0">
                 <a:solidFill>
                   <a:schemeClr val="tx1"/>
                 </a:solidFill>
@@ -18420,7 +18607,7 @@
 </p:sld>
 </file>
 
-<file path=ppt/slides/slide32.xml><?xml version="1.0" encoding="utf-8"?>
+<file path=ppt/slides/slide33.xml><?xml version="1.0" encoding="utf-8"?>
 <p:sld xmlns:a="http://schemas.openxmlformats.org/drawingml/2006/main" xmlns:r="http://schemas.openxmlformats.org/officeDocument/2006/relationships" xmlns:p="http://schemas.openxmlformats.org/presentationml/2006/main">
   <p:cSld>
     <p:spTree>
@@ -18513,7 +18700,7 @@
               <a:buChar char="•"/>
             </a:pPr>
             <a:r>
-              <a:rPr lang="en-US" sz="3600"/>
+              <a:rPr lang="en-US" sz="3600" dirty="0"/>
               <a:t>Amazon Athena</a:t>
             </a:r>
           </a:p>
@@ -18523,7 +18710,7 @@
               <a:buChar char="•"/>
             </a:pPr>
             <a:r>
-              <a:rPr lang="en-US" sz="4000"/>
+              <a:rPr lang="en-US" sz="4000" dirty="0"/>
               <a:t>Google BigQuery</a:t>
             </a:r>
           </a:p>
@@ -18533,20 +18720,20 @@
               <a:buChar char="•"/>
             </a:pPr>
             <a:r>
-              <a:rPr lang="en-US" sz="4000"/>
+              <a:rPr lang="en-US" sz="4000" dirty="0"/>
               <a:t>Snowflake</a:t>
             </a:r>
           </a:p>
           <a:p>
             <a:pPr lvl="1" algn="l"/>
-            <a:endParaRPr lang="en-US" sz="1200"/>
+            <a:endParaRPr lang="en-US" sz="1200" dirty="0"/>
           </a:p>
           <a:p>
             <a:pPr marL="800100" lvl="1" indent="-342900" algn="l">
               <a:buFont typeface="+mj-lt"/>
               <a:buAutoNum type="arabicPeriod"/>
             </a:pPr>
-            <a:endParaRPr lang="en-US" sz="1200"/>
+            <a:endParaRPr lang="en-US" sz="1200" dirty="0"/>
           </a:p>
         </p:txBody>
       </p:sp>
@@ -18707,7 +18894,7 @@
 </p:sld>
 </file>
 
-<file path=ppt/slides/slide33.xml><?xml version="1.0" encoding="utf-8"?>
+<file path=ppt/slides/slide34.xml><?xml version="1.0" encoding="utf-8"?>
 <p:sld xmlns:a="http://schemas.openxmlformats.org/drawingml/2006/main" xmlns:r="http://schemas.openxmlformats.org/officeDocument/2006/relationships" xmlns:p="http://schemas.openxmlformats.org/presentationml/2006/main">
   <p:cSld>
     <p:spTree>
@@ -19185,7 +19372,7 @@
 </p:sld>
 </file>
 
-<file path=ppt/slides/slide34.xml><?xml version="1.0" encoding="utf-8"?>
+<file path=ppt/slides/slide35.xml><?xml version="1.0" encoding="utf-8"?>
 <p:sld xmlns:a="http://schemas.openxmlformats.org/drawingml/2006/main" xmlns:r="http://schemas.openxmlformats.org/officeDocument/2006/relationships" xmlns:p="http://schemas.openxmlformats.org/presentationml/2006/main">
   <p:cSld>
     <p:spTree>
@@ -19279,6 +19466,817 @@
 </file>
 
 <file path=ppt/slides/slide4.xml><?xml version="1.0" encoding="utf-8"?>
+<p:sld xmlns:a="http://schemas.openxmlformats.org/drawingml/2006/main" xmlns:r="http://schemas.openxmlformats.org/officeDocument/2006/relationships" xmlns:p="http://schemas.openxmlformats.org/presentationml/2006/main">
+  <p:cSld>
+    <p:spTree>
+      <p:nvGrpSpPr>
+        <p:cNvPr id="1" name="">
+          <a:extLst>
+            <a:ext uri="{FF2B5EF4-FFF2-40B4-BE49-F238E27FC236}">
+              <a16:creationId xmlns:a16="http://schemas.microsoft.com/office/drawing/2014/main" id="{E15F8F14-B0A6-8471-A8BF-4EB9794682F5}"/>
+            </a:ext>
+          </a:extLst>
+        </p:cNvPr>
+        <p:cNvGrpSpPr/>
+        <p:nvPr/>
+      </p:nvGrpSpPr>
+      <p:grpSpPr>
+        <a:xfrm>
+          <a:off x="0" y="0"/>
+          <a:ext cx="0" cy="0"/>
+          <a:chOff x="0" y="0"/>
+          <a:chExt cx="0" cy="0"/>
+        </a:xfrm>
+      </p:grpSpPr>
+      <p:sp>
+        <p:nvSpPr>
+          <p:cNvPr id="2" name="Title 1">
+            <a:extLst>
+              <a:ext uri="{FF2B5EF4-FFF2-40B4-BE49-F238E27FC236}">
+                <a16:creationId xmlns:a16="http://schemas.microsoft.com/office/drawing/2014/main" id="{4FEEC0D2-3D42-409E-6E8A-3022A7934564}"/>
+              </a:ext>
+            </a:extLst>
+          </p:cNvPr>
+          <p:cNvSpPr>
+            <a:spLocks noGrp="1"/>
+          </p:cNvSpPr>
+          <p:nvPr>
+            <p:ph type="ctrTitle"/>
+          </p:nvPr>
+        </p:nvSpPr>
+        <p:spPr>
+          <a:xfrm>
+            <a:off x="1413468" y="290725"/>
+            <a:ext cx="9144000" cy="583482"/>
+          </a:xfrm>
+        </p:spPr>
+        <p:txBody>
+          <a:bodyPr>
+            <a:normAutofit fontScale="90000"/>
+          </a:bodyPr>
+          <a:lstStyle/>
+          <a:p>
+            <a:r>
+              <a:rPr lang="en-US" sz="3600" dirty="0"/>
+              <a:t>What is a Big Data Modeling?</a:t>
+            </a:r>
+          </a:p>
+        </p:txBody>
+      </p:sp>
+      <p:sp>
+        <p:nvSpPr>
+          <p:cNvPr id="3" name="Subtitle 2">
+            <a:extLst>
+              <a:ext uri="{FF2B5EF4-FFF2-40B4-BE49-F238E27FC236}">
+                <a16:creationId xmlns:a16="http://schemas.microsoft.com/office/drawing/2014/main" id="{EC353BF7-8743-7C25-95E3-4E6ADA5D6666}"/>
+              </a:ext>
+            </a:extLst>
+          </p:cNvPr>
+          <p:cNvSpPr>
+            <a:spLocks noGrp="1"/>
+          </p:cNvSpPr>
+          <p:nvPr>
+            <p:ph type="subTitle" idx="1"/>
+          </p:nvPr>
+        </p:nvSpPr>
+        <p:spPr>
+          <a:xfrm>
+            <a:off x="1307184" y="1225900"/>
+            <a:ext cx="9144000" cy="4983188"/>
+          </a:xfrm>
+        </p:spPr>
+        <p:txBody>
+          <a:bodyPr>
+            <a:normAutofit fontScale="70000" lnSpcReduction="20000"/>
+          </a:bodyPr>
+          <a:lstStyle/>
+          <a:p>
+            <a:r>
+              <a:rPr lang="en-US" sz="3600" dirty="0">
+                <a:solidFill>
+                  <a:schemeClr val="tx1"/>
+                </a:solidFill>
+              </a:rPr>
+              <a:t>Big data modeling is the process of </a:t>
+            </a:r>
+            <a:r>
+              <a:rPr lang="en-US" sz="3600" dirty="0">
+                <a:solidFill>
+                  <a:srgbClr val="00B0F0"/>
+                </a:solidFill>
+              </a:rPr>
+              <a:t>organizing large</a:t>
+            </a:r>
+            <a:r>
+              <a:rPr lang="en-US" sz="3600" dirty="0">
+                <a:solidFill>
+                  <a:schemeClr val="tx1"/>
+                </a:solidFill>
+              </a:rPr>
+              <a:t>, </a:t>
+            </a:r>
+          </a:p>
+          <a:p>
+            <a:r>
+              <a:rPr lang="en-US" sz="3600" dirty="0">
+                <a:solidFill>
+                  <a:srgbClr val="00B0F0"/>
+                </a:solidFill>
+              </a:rPr>
+              <a:t>fast-moving</a:t>
+            </a:r>
+            <a:r>
+              <a:rPr lang="en-US" sz="3600" dirty="0">
+                <a:solidFill>
+                  <a:schemeClr val="tx1"/>
+                </a:solidFill>
+              </a:rPr>
+              <a:t>, and </a:t>
+            </a:r>
+            <a:r>
+              <a:rPr lang="en-US" sz="3600" dirty="0">
+                <a:solidFill>
+                  <a:srgbClr val="00B0F0"/>
+                </a:solidFill>
+              </a:rPr>
+              <a:t>diverse datasets </a:t>
+            </a:r>
+            <a:r>
+              <a:rPr lang="en-US" sz="3600" dirty="0">
+                <a:solidFill>
+                  <a:schemeClr val="tx1"/>
+                </a:solidFill>
+              </a:rPr>
+              <a:t>so they can be </a:t>
+            </a:r>
+            <a:r>
+              <a:rPr lang="en-US" sz="3600" dirty="0">
+                <a:solidFill>
+                  <a:srgbClr val="00B050"/>
+                </a:solidFill>
+              </a:rPr>
+              <a:t>stored</a:t>
+            </a:r>
+            <a:r>
+              <a:rPr lang="en-US" sz="3600" dirty="0">
+                <a:solidFill>
+                  <a:schemeClr val="tx1"/>
+                </a:solidFill>
+              </a:rPr>
+              <a:t>, </a:t>
+            </a:r>
+          </a:p>
+          <a:p>
+            <a:r>
+              <a:rPr lang="en-US" sz="3600" dirty="0">
+                <a:solidFill>
+                  <a:srgbClr val="00B050"/>
+                </a:solidFill>
+              </a:rPr>
+              <a:t>processed</a:t>
+            </a:r>
+            <a:r>
+              <a:rPr lang="en-US" sz="3600" dirty="0">
+                <a:solidFill>
+                  <a:schemeClr val="tx1"/>
+                </a:solidFill>
+              </a:rPr>
+              <a:t>, </a:t>
+            </a:r>
+            <a:r>
+              <a:rPr lang="en-US" sz="3600" dirty="0">
+                <a:solidFill>
+                  <a:srgbClr val="00B050"/>
+                </a:solidFill>
+              </a:rPr>
+              <a:t>analyzed</a:t>
+            </a:r>
+            <a:r>
+              <a:rPr lang="en-US" sz="3600" dirty="0">
+                <a:solidFill>
+                  <a:schemeClr val="tx1"/>
+                </a:solidFill>
+              </a:rPr>
+              <a:t>, and </a:t>
+            </a:r>
+            <a:r>
+              <a:rPr lang="en-US" sz="3600" dirty="0">
+                <a:solidFill>
+                  <a:srgbClr val="00B050"/>
+                </a:solidFill>
+              </a:rPr>
+              <a:t>understood</a:t>
+            </a:r>
+            <a:r>
+              <a:rPr lang="en-US" sz="3600" dirty="0">
+                <a:solidFill>
+                  <a:schemeClr val="tx1"/>
+                </a:solidFill>
+              </a:rPr>
+              <a:t> efficiently.</a:t>
+            </a:r>
+          </a:p>
+          <a:p>
+            <a:endParaRPr lang="en-US" sz="3600" dirty="0"/>
+          </a:p>
+          <a:p>
+            <a:r>
+              <a:rPr lang="en-US" sz="3600" b="1" u="sng" dirty="0"/>
+              <a:t>Key Characteristics</a:t>
+            </a:r>
+            <a:endParaRPr lang="en-US" sz="3600" b="1" u="sng" dirty="0">
+              <a:solidFill>
+                <a:schemeClr val="tx1"/>
+              </a:solidFill>
+            </a:endParaRPr>
+          </a:p>
+          <a:p>
+            <a:r>
+              <a:rPr lang="en-US" sz="3600" dirty="0">
+                <a:solidFill>
+                  <a:srgbClr val="00B0F0"/>
+                </a:solidFill>
+              </a:rPr>
+              <a:t>1. Volume</a:t>
+            </a:r>
+            <a:r>
+              <a:rPr lang="en-US" sz="3600" dirty="0">
+                <a:solidFill>
+                  <a:schemeClr val="tx1"/>
+                </a:solidFill>
+              </a:rPr>
+              <a:t>: Handles massive amounts of data</a:t>
+            </a:r>
+          </a:p>
+          <a:p>
+            <a:r>
+              <a:rPr lang="en-US" sz="3600" dirty="0">
+                <a:solidFill>
+                  <a:srgbClr val="00B0F0"/>
+                </a:solidFill>
+              </a:rPr>
+              <a:t>2. Velocity</a:t>
+            </a:r>
+            <a:r>
+              <a:rPr lang="en-US" sz="3600" dirty="0">
+                <a:solidFill>
+                  <a:schemeClr val="tx1"/>
+                </a:solidFill>
+              </a:rPr>
+              <a:t>: Supports rapidly generated and processed data</a:t>
+            </a:r>
+          </a:p>
+          <a:p>
+            <a:r>
+              <a:rPr lang="en-US" sz="3600" dirty="0">
+                <a:solidFill>
+                  <a:srgbClr val="00B0F0"/>
+                </a:solidFill>
+              </a:rPr>
+              <a:t>3. Variety</a:t>
+            </a:r>
+            <a:r>
+              <a:rPr lang="en-US" sz="3600" dirty="0">
+                <a:solidFill>
+                  <a:schemeClr val="tx1"/>
+                </a:solidFill>
+              </a:rPr>
+              <a:t>: Combines structured, semi-structured, and unstructured data</a:t>
+            </a:r>
+          </a:p>
+          <a:p>
+            <a:r>
+              <a:rPr lang="en-US" sz="3600" dirty="0">
+                <a:solidFill>
+                  <a:srgbClr val="00B0F0"/>
+                </a:solidFill>
+              </a:rPr>
+              <a:t>4. Veracity</a:t>
+            </a:r>
+            <a:r>
+              <a:rPr lang="en-US" sz="3600" dirty="0">
+                <a:solidFill>
+                  <a:schemeClr val="tx1"/>
+                </a:solidFill>
+              </a:rPr>
+              <a:t>: The quality, reliability, and trust of the data</a:t>
+            </a:r>
+          </a:p>
+          <a:p>
+            <a:r>
+              <a:rPr lang="en-US" sz="3600" dirty="0">
+                <a:solidFill>
+                  <a:srgbClr val="00B0F0"/>
+                </a:solidFill>
+              </a:rPr>
+              <a:t>5. Scalability</a:t>
+            </a:r>
+            <a:r>
+              <a:rPr lang="en-US" sz="3600" dirty="0">
+                <a:solidFill>
+                  <a:schemeClr val="tx1"/>
+                </a:solidFill>
+              </a:rPr>
+              <a:t>: Adapts as data and user demand grow</a:t>
+            </a:r>
+          </a:p>
+          <a:p>
+            <a:endParaRPr lang="en-US" sz="3600" dirty="0"/>
+          </a:p>
+          <a:p>
+            <a:pPr marL="800100" lvl="1" indent="-342900" algn="l">
+              <a:buFont typeface="+mj-lt"/>
+              <a:buAutoNum type="arabicPeriod"/>
+            </a:pPr>
+            <a:endParaRPr lang="en-US" sz="1200" dirty="0"/>
+          </a:p>
+        </p:txBody>
+      </p:sp>
+    </p:spTree>
+    <p:extLst>
+      <p:ext uri="{BB962C8B-B14F-4D97-AF65-F5344CB8AC3E}">
+        <p14:creationId xmlns:p14="http://schemas.microsoft.com/office/powerpoint/2010/main" val="614690070"/>
+      </p:ext>
+    </p:extLst>
+  </p:cSld>
+  <p:clrMapOvr>
+    <a:masterClrMapping/>
+  </p:clrMapOvr>
+  <p:timing>
+    <p:tnLst>
+      <p:par>
+        <p:cTn id="1" dur="indefinite" restart="never" nodeType="tmRoot">
+          <p:childTnLst>
+            <p:seq concurrent="1" nextAc="seek">
+              <p:cTn id="2" dur="indefinite" nodeType="mainSeq">
+                <p:childTnLst>
+                  <p:par>
+                    <p:cTn id="3" fill="hold">
+                      <p:stCondLst>
+                        <p:cond delay="indefinite"/>
+                      </p:stCondLst>
+                      <p:childTnLst>
+                        <p:par>
+                          <p:cTn id="4" fill="hold">
+                            <p:stCondLst>
+                              <p:cond delay="0"/>
+                            </p:stCondLst>
+                            <p:childTnLst>
+                              <p:par>
+                                <p:cTn id="5" presetID="1" presetClass="entr" presetSubtype="0" fill="hold" nodeType="clickEffect">
+                                  <p:stCondLst>
+                                    <p:cond delay="0"/>
+                                  </p:stCondLst>
+                                  <p:childTnLst>
+                                    <p:set>
+                                      <p:cBhvr>
+                                        <p:cTn id="6" dur="1" fill="hold">
+                                          <p:stCondLst>
+                                            <p:cond delay="0"/>
+                                          </p:stCondLst>
+                                        </p:cTn>
+                                        <p:tgtEl>
+                                          <p:spTgt spid="3">
+                                            <p:txEl>
+                                              <p:pRg st="0" end="0"/>
+                                            </p:txEl>
+                                          </p:spTgt>
+                                        </p:tgtEl>
+                                        <p:attrNameLst>
+                                          <p:attrName>style.visibility</p:attrName>
+                                        </p:attrNameLst>
+                                      </p:cBhvr>
+                                      <p:to>
+                                        <p:strVal val="visible"/>
+                                      </p:to>
+                                    </p:set>
+                                  </p:childTnLst>
+                                </p:cTn>
+                              </p:par>
+                            </p:childTnLst>
+                          </p:cTn>
+                        </p:par>
+                      </p:childTnLst>
+                    </p:cTn>
+                  </p:par>
+                  <p:par>
+                    <p:cTn id="7" fill="hold">
+                      <p:stCondLst>
+                        <p:cond delay="indefinite"/>
+                      </p:stCondLst>
+                      <p:childTnLst>
+                        <p:par>
+                          <p:cTn id="8" fill="hold">
+                            <p:stCondLst>
+                              <p:cond delay="0"/>
+                            </p:stCondLst>
+                            <p:childTnLst>
+                              <p:par>
+                                <p:cTn id="9" presetID="1" presetClass="entr" presetSubtype="0" fill="hold" nodeType="clickEffect">
+                                  <p:stCondLst>
+                                    <p:cond delay="0"/>
+                                  </p:stCondLst>
+                                  <p:childTnLst>
+                                    <p:set>
+                                      <p:cBhvr>
+                                        <p:cTn id="10" dur="1" fill="hold">
+                                          <p:stCondLst>
+                                            <p:cond delay="0"/>
+                                          </p:stCondLst>
+                                        </p:cTn>
+                                        <p:tgtEl>
+                                          <p:spTgt spid="3">
+                                            <p:txEl>
+                                              <p:pRg st="1" end="1"/>
+                                            </p:txEl>
+                                          </p:spTgt>
+                                        </p:tgtEl>
+                                        <p:attrNameLst>
+                                          <p:attrName>style.visibility</p:attrName>
+                                        </p:attrNameLst>
+                                      </p:cBhvr>
+                                      <p:to>
+                                        <p:strVal val="visible"/>
+                                      </p:to>
+                                    </p:set>
+                                  </p:childTnLst>
+                                </p:cTn>
+                              </p:par>
+                            </p:childTnLst>
+                          </p:cTn>
+                        </p:par>
+                      </p:childTnLst>
+                    </p:cTn>
+                  </p:par>
+                  <p:par>
+                    <p:cTn id="11" fill="hold">
+                      <p:stCondLst>
+                        <p:cond delay="indefinite"/>
+                      </p:stCondLst>
+                      <p:childTnLst>
+                        <p:par>
+                          <p:cTn id="12" fill="hold">
+                            <p:stCondLst>
+                              <p:cond delay="0"/>
+                            </p:stCondLst>
+                            <p:childTnLst>
+                              <p:par>
+                                <p:cTn id="13" presetID="1" presetClass="entr" presetSubtype="0" fill="hold" nodeType="clickEffect">
+                                  <p:stCondLst>
+                                    <p:cond delay="0"/>
+                                  </p:stCondLst>
+                                  <p:childTnLst>
+                                    <p:set>
+                                      <p:cBhvr>
+                                        <p:cTn id="14" dur="1" fill="hold">
+                                          <p:stCondLst>
+                                            <p:cond delay="0"/>
+                                          </p:stCondLst>
+                                        </p:cTn>
+                                        <p:tgtEl>
+                                          <p:spTgt spid="3">
+                                            <p:txEl>
+                                              <p:pRg st="2" end="2"/>
+                                            </p:txEl>
+                                          </p:spTgt>
+                                        </p:tgtEl>
+                                        <p:attrNameLst>
+                                          <p:attrName>style.visibility</p:attrName>
+                                        </p:attrNameLst>
+                                      </p:cBhvr>
+                                      <p:to>
+                                        <p:strVal val="visible"/>
+                                      </p:to>
+                                    </p:set>
+                                  </p:childTnLst>
+                                </p:cTn>
+                              </p:par>
+                            </p:childTnLst>
+                          </p:cTn>
+                        </p:par>
+                      </p:childTnLst>
+                    </p:cTn>
+                  </p:par>
+                  <p:par>
+                    <p:cTn id="15" fill="hold">
+                      <p:stCondLst>
+                        <p:cond delay="indefinite"/>
+                      </p:stCondLst>
+                      <p:childTnLst>
+                        <p:par>
+                          <p:cTn id="16" fill="hold">
+                            <p:stCondLst>
+                              <p:cond delay="0"/>
+                            </p:stCondLst>
+                            <p:childTnLst>
+                              <p:par>
+                                <p:cTn id="17" presetID="1" presetClass="entr" presetSubtype="0" fill="hold" nodeType="clickEffect">
+                                  <p:stCondLst>
+                                    <p:cond delay="0"/>
+                                  </p:stCondLst>
+                                  <p:childTnLst>
+                                    <p:set>
+                                      <p:cBhvr>
+                                        <p:cTn id="18" dur="1" fill="hold">
+                                          <p:stCondLst>
+                                            <p:cond delay="0"/>
+                                          </p:stCondLst>
+                                        </p:cTn>
+                                        <p:tgtEl>
+                                          <p:spTgt spid="3">
+                                            <p:txEl>
+                                              <p:pRg st="4" end="4"/>
+                                            </p:txEl>
+                                          </p:spTgt>
+                                        </p:tgtEl>
+                                        <p:attrNameLst>
+                                          <p:attrName>style.visibility</p:attrName>
+                                        </p:attrNameLst>
+                                      </p:cBhvr>
+                                      <p:to>
+                                        <p:strVal val="visible"/>
+                                      </p:to>
+                                    </p:set>
+                                  </p:childTnLst>
+                                </p:cTn>
+                              </p:par>
+                            </p:childTnLst>
+                          </p:cTn>
+                        </p:par>
+                      </p:childTnLst>
+                    </p:cTn>
+                  </p:par>
+                  <p:par>
+                    <p:cTn id="19" fill="hold">
+                      <p:stCondLst>
+                        <p:cond delay="indefinite"/>
+                      </p:stCondLst>
+                      <p:childTnLst>
+                        <p:par>
+                          <p:cTn id="20" fill="hold">
+                            <p:stCondLst>
+                              <p:cond delay="0"/>
+                            </p:stCondLst>
+                            <p:childTnLst>
+                              <p:par>
+                                <p:cTn id="21" presetID="1" presetClass="entr" presetSubtype="0" fill="hold" nodeType="clickEffect">
+                                  <p:stCondLst>
+                                    <p:cond delay="0"/>
+                                  </p:stCondLst>
+                                  <p:childTnLst>
+                                    <p:set>
+                                      <p:cBhvr>
+                                        <p:cTn id="22" dur="1" fill="hold">
+                                          <p:stCondLst>
+                                            <p:cond delay="0"/>
+                                          </p:stCondLst>
+                                        </p:cTn>
+                                        <p:tgtEl>
+                                          <p:spTgt spid="3">
+                                            <p:txEl>
+                                              <p:pRg st="5" end="5"/>
+                                            </p:txEl>
+                                          </p:spTgt>
+                                        </p:tgtEl>
+                                        <p:attrNameLst>
+                                          <p:attrName>style.visibility</p:attrName>
+                                        </p:attrNameLst>
+                                      </p:cBhvr>
+                                      <p:to>
+                                        <p:strVal val="visible"/>
+                                      </p:to>
+                                    </p:set>
+                                  </p:childTnLst>
+                                </p:cTn>
+                              </p:par>
+                            </p:childTnLst>
+                          </p:cTn>
+                        </p:par>
+                      </p:childTnLst>
+                    </p:cTn>
+                  </p:par>
+                  <p:par>
+                    <p:cTn id="23" fill="hold">
+                      <p:stCondLst>
+                        <p:cond delay="indefinite"/>
+                      </p:stCondLst>
+                      <p:childTnLst>
+                        <p:par>
+                          <p:cTn id="24" fill="hold">
+                            <p:stCondLst>
+                              <p:cond delay="0"/>
+                            </p:stCondLst>
+                            <p:childTnLst>
+                              <p:par>
+                                <p:cTn id="25" presetID="1" presetClass="entr" presetSubtype="0" fill="hold" nodeType="clickEffect">
+                                  <p:stCondLst>
+                                    <p:cond delay="0"/>
+                                  </p:stCondLst>
+                                  <p:childTnLst>
+                                    <p:set>
+                                      <p:cBhvr>
+                                        <p:cTn id="26" dur="1" fill="hold">
+                                          <p:stCondLst>
+                                            <p:cond delay="0"/>
+                                          </p:stCondLst>
+                                        </p:cTn>
+                                        <p:tgtEl>
+                                          <p:spTgt spid="3">
+                                            <p:txEl>
+                                              <p:pRg st="6" end="6"/>
+                                            </p:txEl>
+                                          </p:spTgt>
+                                        </p:tgtEl>
+                                        <p:attrNameLst>
+                                          <p:attrName>style.visibility</p:attrName>
+                                        </p:attrNameLst>
+                                      </p:cBhvr>
+                                      <p:to>
+                                        <p:strVal val="visible"/>
+                                      </p:to>
+                                    </p:set>
+                                  </p:childTnLst>
+                                </p:cTn>
+                              </p:par>
+                            </p:childTnLst>
+                          </p:cTn>
+                        </p:par>
+                      </p:childTnLst>
+                    </p:cTn>
+                  </p:par>
+                  <p:par>
+                    <p:cTn id="27" fill="hold">
+                      <p:stCondLst>
+                        <p:cond delay="indefinite"/>
+                      </p:stCondLst>
+                      <p:childTnLst>
+                        <p:par>
+                          <p:cTn id="28" fill="hold">
+                            <p:stCondLst>
+                              <p:cond delay="0"/>
+                            </p:stCondLst>
+                            <p:childTnLst>
+                              <p:par>
+                                <p:cTn id="29" presetID="1" presetClass="entr" presetSubtype="0" fill="hold" nodeType="clickEffect">
+                                  <p:stCondLst>
+                                    <p:cond delay="0"/>
+                                  </p:stCondLst>
+                                  <p:childTnLst>
+                                    <p:set>
+                                      <p:cBhvr>
+                                        <p:cTn id="30" dur="1" fill="hold">
+                                          <p:stCondLst>
+                                            <p:cond delay="0"/>
+                                          </p:stCondLst>
+                                        </p:cTn>
+                                        <p:tgtEl>
+                                          <p:spTgt spid="3">
+                                            <p:txEl>
+                                              <p:pRg st="7" end="7"/>
+                                            </p:txEl>
+                                          </p:spTgt>
+                                        </p:tgtEl>
+                                        <p:attrNameLst>
+                                          <p:attrName>style.visibility</p:attrName>
+                                        </p:attrNameLst>
+                                      </p:cBhvr>
+                                      <p:to>
+                                        <p:strVal val="visible"/>
+                                      </p:to>
+                                    </p:set>
+                                  </p:childTnLst>
+                                </p:cTn>
+                              </p:par>
+                            </p:childTnLst>
+                          </p:cTn>
+                        </p:par>
+                      </p:childTnLst>
+                    </p:cTn>
+                  </p:par>
+                  <p:par>
+                    <p:cTn id="31" fill="hold">
+                      <p:stCondLst>
+                        <p:cond delay="indefinite"/>
+                      </p:stCondLst>
+                      <p:childTnLst>
+                        <p:par>
+                          <p:cTn id="32" fill="hold">
+                            <p:stCondLst>
+                              <p:cond delay="0"/>
+                            </p:stCondLst>
+                            <p:childTnLst>
+                              <p:par>
+                                <p:cTn id="33" presetID="1" presetClass="entr" presetSubtype="0" fill="hold" nodeType="clickEffect">
+                                  <p:stCondLst>
+                                    <p:cond delay="0"/>
+                                  </p:stCondLst>
+                                  <p:childTnLst>
+                                    <p:set>
+                                      <p:cBhvr>
+                                        <p:cTn id="34" dur="1" fill="hold">
+                                          <p:stCondLst>
+                                            <p:cond delay="0"/>
+                                          </p:stCondLst>
+                                        </p:cTn>
+                                        <p:tgtEl>
+                                          <p:spTgt spid="3">
+                                            <p:txEl>
+                                              <p:pRg st="8" end="8"/>
+                                            </p:txEl>
+                                          </p:spTgt>
+                                        </p:tgtEl>
+                                        <p:attrNameLst>
+                                          <p:attrName>style.visibility</p:attrName>
+                                        </p:attrNameLst>
+                                      </p:cBhvr>
+                                      <p:to>
+                                        <p:strVal val="visible"/>
+                                      </p:to>
+                                    </p:set>
+                                  </p:childTnLst>
+                                </p:cTn>
+                              </p:par>
+                            </p:childTnLst>
+                          </p:cTn>
+                        </p:par>
+                      </p:childTnLst>
+                    </p:cTn>
+                  </p:par>
+                  <p:par>
+                    <p:cTn id="35" fill="hold">
+                      <p:stCondLst>
+                        <p:cond delay="indefinite"/>
+                      </p:stCondLst>
+                      <p:childTnLst>
+                        <p:par>
+                          <p:cTn id="36" fill="hold">
+                            <p:stCondLst>
+                              <p:cond delay="0"/>
+                            </p:stCondLst>
+                            <p:childTnLst>
+                              <p:par>
+                                <p:cTn id="37" presetID="1" presetClass="entr" presetSubtype="0" fill="hold" nodeType="clickEffect">
+                                  <p:stCondLst>
+                                    <p:cond delay="0"/>
+                                  </p:stCondLst>
+                                  <p:childTnLst>
+                                    <p:set>
+                                      <p:cBhvr>
+                                        <p:cTn id="38" dur="1" fill="hold">
+                                          <p:stCondLst>
+                                            <p:cond delay="0"/>
+                                          </p:stCondLst>
+                                        </p:cTn>
+                                        <p:tgtEl>
+                                          <p:spTgt spid="3">
+                                            <p:txEl>
+                                              <p:pRg st="9" end="9"/>
+                                            </p:txEl>
+                                          </p:spTgt>
+                                        </p:tgtEl>
+                                        <p:attrNameLst>
+                                          <p:attrName>style.visibility</p:attrName>
+                                        </p:attrNameLst>
+                                      </p:cBhvr>
+                                      <p:to>
+                                        <p:strVal val="visible"/>
+                                      </p:to>
+                                    </p:set>
+                                  </p:childTnLst>
+                                </p:cTn>
+                              </p:par>
+                            </p:childTnLst>
+                          </p:cTn>
+                        </p:par>
+                      </p:childTnLst>
+                    </p:cTn>
+                  </p:par>
+                </p:childTnLst>
+              </p:cTn>
+              <p:prevCondLst>
+                <p:cond evt="onPrev" delay="0">
+                  <p:tgtEl>
+                    <p:sldTgt/>
+                  </p:tgtEl>
+                </p:cond>
+              </p:prevCondLst>
+              <p:nextCondLst>
+                <p:cond evt="onNext" delay="0">
+                  <p:tgtEl>
+                    <p:sldTgt/>
+                  </p:tgtEl>
+                </p:cond>
+              </p:nextCondLst>
+            </p:seq>
+          </p:childTnLst>
+        </p:cTn>
+      </p:par>
+    </p:tnLst>
+  </p:timing>
+</p:sld>
+</file>
+
+<file path=ppt/slides/slide5.xml><?xml version="1.0" encoding="utf-8"?>
 <p:sld xmlns:a="http://schemas.openxmlformats.org/drawingml/2006/main" xmlns:r="http://schemas.openxmlformats.org/officeDocument/2006/relationships" xmlns:p="http://schemas.openxmlformats.org/presentationml/2006/main">
   <p:cSld>
     <p:spTree>
@@ -19766,7 +20764,7 @@
 </p:sld>
 </file>
 
-<file path=ppt/slides/slide5.xml><?xml version="1.0" encoding="utf-8"?>
+<file path=ppt/slides/slide6.xml><?xml version="1.0" encoding="utf-8"?>
 <p:sld xmlns:a="http://schemas.openxmlformats.org/drawingml/2006/main" xmlns:r="http://schemas.openxmlformats.org/officeDocument/2006/relationships" xmlns:p="http://schemas.openxmlformats.org/presentationml/2006/main">
   <p:cSld>
     <p:spTree>
@@ -20451,7 +21449,7 @@
 </p:sld>
 </file>
 
-<file path=ppt/slides/slide6.xml><?xml version="1.0" encoding="utf-8"?>
+<file path=ppt/slides/slide7.xml><?xml version="1.0" encoding="utf-8"?>
 <p:sld xmlns:a="http://schemas.openxmlformats.org/drawingml/2006/main" xmlns:r="http://schemas.openxmlformats.org/officeDocument/2006/relationships" xmlns:p="http://schemas.openxmlformats.org/presentationml/2006/main">
   <p:cSld>
     <p:spTree>
@@ -21116,7 +22114,7 @@
 </p:sld>
 </file>
 
-<file path=ppt/slides/slide7.xml><?xml version="1.0" encoding="utf-8"?>
+<file path=ppt/slides/slide8.xml><?xml version="1.0" encoding="utf-8"?>
 <p:sld xmlns:a="http://schemas.openxmlformats.org/drawingml/2006/main" xmlns:r="http://schemas.openxmlformats.org/officeDocument/2006/relationships" xmlns:p="http://schemas.openxmlformats.org/presentationml/2006/main">
   <p:cSld>
     <p:spTree>
@@ -21450,7 +22448,7 @@
 </p:sld>
 </file>
 
-<file path=ppt/slides/slide8.xml><?xml version="1.0" encoding="utf-8"?>
+<file path=ppt/slides/slide9.xml><?xml version="1.0" encoding="utf-8"?>
 <p:sld xmlns:a="http://schemas.openxmlformats.org/drawingml/2006/main" xmlns:r="http://schemas.openxmlformats.org/officeDocument/2006/relationships" xmlns:p="http://schemas.openxmlformats.org/presentationml/2006/main">
   <p:cSld>
     <p:spTree>
@@ -22280,434 +23278,6 @@
   <p:clrMapOvr>
     <a:masterClrMapping/>
   </p:clrMapOvr>
-</p:sld>
-</file>
-
-<file path=ppt/slides/slide9.xml><?xml version="1.0" encoding="utf-8"?>
-<p:sld xmlns:a="http://schemas.openxmlformats.org/drawingml/2006/main" xmlns:r="http://schemas.openxmlformats.org/officeDocument/2006/relationships" xmlns:p="http://schemas.openxmlformats.org/presentationml/2006/main">
-  <p:cSld>
-    <p:spTree>
-      <p:nvGrpSpPr>
-        <p:cNvPr id="1" name=""/>
-        <p:cNvGrpSpPr/>
-        <p:nvPr/>
-      </p:nvGrpSpPr>
-      <p:grpSpPr>
-        <a:xfrm>
-          <a:off x="0" y="0"/>
-          <a:ext cx="0" cy="0"/>
-          <a:chOff x="0" y="0"/>
-          <a:chExt cx="0" cy="0"/>
-        </a:xfrm>
-      </p:grpSpPr>
-      <p:sp>
-        <p:nvSpPr>
-          <p:cNvPr id="2" name="Title 1">
-            <a:extLst>
-              <a:ext uri="{FF2B5EF4-FFF2-40B4-BE49-F238E27FC236}">
-                <a16:creationId xmlns:a16="http://schemas.microsoft.com/office/drawing/2014/main" id="{8207F09F-B406-FB4C-ABE0-890E4E4F95C8}"/>
-              </a:ext>
-            </a:extLst>
-          </p:cNvPr>
-          <p:cNvSpPr>
-            <a:spLocks noGrp="1"/>
-          </p:cNvSpPr>
-          <p:nvPr>
-            <p:ph type="ctrTitle"/>
-          </p:nvPr>
-        </p:nvSpPr>
-        <p:spPr>
-          <a:xfrm>
-            <a:off x="1524000" y="652805"/>
-            <a:ext cx="9144000" cy="915159"/>
-          </a:xfrm>
-        </p:spPr>
-        <p:txBody>
-          <a:bodyPr/>
-          <a:lstStyle/>
-          <a:p>
-            <a:r>
-              <a:rPr lang="en-US" dirty="0"/>
-              <a:t>1. MapReduce Paradigm</a:t>
-            </a:r>
-          </a:p>
-        </p:txBody>
-      </p:sp>
-      <p:sp>
-        <p:nvSpPr>
-          <p:cNvPr id="3" name="Subtitle 2">
-            <a:extLst>
-              <a:ext uri="{FF2B5EF4-FFF2-40B4-BE49-F238E27FC236}">
-                <a16:creationId xmlns:a16="http://schemas.microsoft.com/office/drawing/2014/main" id="{67BA4937-A89D-8343-B4A3-942B771C889A}"/>
-              </a:ext>
-            </a:extLst>
-          </p:cNvPr>
-          <p:cNvSpPr>
-            <a:spLocks noGrp="1"/>
-          </p:cNvSpPr>
-          <p:nvPr>
-            <p:ph type="subTitle" idx="1"/>
-          </p:nvPr>
-        </p:nvSpPr>
-        <p:spPr>
-          <a:xfrm>
-            <a:off x="1524000" y="1689652"/>
-            <a:ext cx="9144000" cy="4283765"/>
-          </a:xfrm>
-        </p:spPr>
-        <p:txBody>
-          <a:bodyPr>
-            <a:normAutofit/>
-          </a:bodyPr>
-          <a:lstStyle/>
-          <a:p>
-            <a:pPr marL="457200" indent="-457200" algn="l">
-              <a:buFont typeface="Arial" panose="020B0604020202020204" pitchFamily="34" charset="0"/>
-              <a:buChar char="•"/>
-            </a:pPr>
-            <a:r>
-              <a:rPr lang="en-US" sz="3000" b="1" dirty="0">
-                <a:solidFill>
-                  <a:srgbClr val="002060"/>
-                </a:solidFill>
-              </a:rPr>
-              <a:t>MapReduce</a:t>
-            </a:r>
-            <a:r>
-              <a:rPr lang="en-US" sz="3000" dirty="0">
-                <a:solidFill>
-                  <a:srgbClr val="002060"/>
-                </a:solidFill>
-              </a:rPr>
-              <a:t> is a programming </a:t>
-            </a:r>
-            <a:r>
-              <a:rPr lang="en-US" sz="3000" b="1" dirty="0">
-                <a:solidFill>
-                  <a:srgbClr val="002060"/>
-                </a:solidFill>
-              </a:rPr>
-              <a:t>paradigm/model</a:t>
-            </a:r>
-            <a:r>
-              <a:rPr lang="en-US" sz="3000" dirty="0">
-                <a:solidFill>
-                  <a:srgbClr val="002060"/>
-                </a:solidFill>
-              </a:rPr>
-              <a:t> that enables </a:t>
-            </a:r>
-            <a:r>
-              <a:rPr lang="en-US" sz="3000" b="1" dirty="0">
-                <a:solidFill>
-                  <a:srgbClr val="002060"/>
-                </a:solidFill>
-              </a:rPr>
-              <a:t>massive scalability </a:t>
-            </a:r>
-            <a:r>
-              <a:rPr lang="en-US" sz="3000" dirty="0">
-                <a:solidFill>
-                  <a:srgbClr val="002060"/>
-                </a:solidFill>
-              </a:rPr>
-              <a:t>across hundreds or thousands of servers in a cluster.</a:t>
-            </a:r>
-            <a:endParaRPr lang="en-US" sz="3600" dirty="0"/>
-          </a:p>
-          <a:p>
-            <a:pPr marL="571500" indent="-571500" algn="l">
-              <a:buFont typeface="Arial" panose="020B0604020202020204" pitchFamily="34" charset="0"/>
-              <a:buChar char="•"/>
-            </a:pPr>
-            <a:r>
-              <a:rPr lang="en-US" sz="3600" dirty="0"/>
-              <a:t>MapReduce has 3 functions:</a:t>
-            </a:r>
-          </a:p>
-          <a:p>
-            <a:pPr marL="1028700" lvl="1" indent="-571500" algn="l">
-              <a:buFont typeface="Arial" panose="020B0604020202020204" pitchFamily="34" charset="0"/>
-              <a:buChar char="•"/>
-            </a:pPr>
-            <a:r>
-              <a:rPr lang="en-US" sz="3200" dirty="0">
-                <a:latin typeface="Consolas" panose="020B0609020204030204" pitchFamily="49" charset="0"/>
-                <a:cs typeface="Consolas" panose="020B0609020204030204" pitchFamily="49" charset="0"/>
-              </a:rPr>
-              <a:t>map()</a:t>
-            </a:r>
-          </a:p>
-          <a:p>
-            <a:pPr marL="1028700" lvl="1" indent="-571500" algn="l">
-              <a:buFont typeface="Arial" panose="020B0604020202020204" pitchFamily="34" charset="0"/>
-              <a:buChar char="•"/>
-            </a:pPr>
-            <a:r>
-              <a:rPr lang="en-US" sz="3200" dirty="0">
-                <a:latin typeface="Consolas" panose="020B0609020204030204" pitchFamily="49" charset="0"/>
-                <a:cs typeface="Consolas" panose="020B0609020204030204" pitchFamily="49" charset="0"/>
-              </a:rPr>
-              <a:t>reduce()</a:t>
-            </a:r>
-          </a:p>
-          <a:p>
-            <a:pPr marL="1028700" lvl="1" indent="-571500" algn="l">
-              <a:buFont typeface="Arial" panose="020B0604020202020204" pitchFamily="34" charset="0"/>
-              <a:buChar char="•"/>
-            </a:pPr>
-            <a:r>
-              <a:rPr lang="en-US" sz="3200" dirty="0">
-                <a:latin typeface="Consolas" panose="020B0609020204030204" pitchFamily="49" charset="0"/>
-                <a:cs typeface="Consolas" panose="020B0609020204030204" pitchFamily="49" charset="0"/>
-              </a:rPr>
-              <a:t>combine()</a:t>
-            </a:r>
-            <a:endParaRPr lang="en-US" sz="800" dirty="0">
-              <a:latin typeface="Consolas" panose="020B0609020204030204" pitchFamily="49" charset="0"/>
-              <a:cs typeface="Consolas" panose="020B0609020204030204" pitchFamily="49" charset="0"/>
-            </a:endParaRPr>
-          </a:p>
-          <a:p>
-            <a:pPr marL="800100" lvl="1" indent="-342900" algn="l">
-              <a:buFont typeface="+mj-lt"/>
-              <a:buAutoNum type="arabicPeriod"/>
-            </a:pPr>
-            <a:endParaRPr lang="en-US" sz="1200" dirty="0"/>
-          </a:p>
-        </p:txBody>
-      </p:sp>
-    </p:spTree>
-    <p:extLst>
-      <p:ext uri="{BB962C8B-B14F-4D97-AF65-F5344CB8AC3E}">
-        <p14:creationId xmlns:p14="http://schemas.microsoft.com/office/powerpoint/2010/main" val="3838766083"/>
-      </p:ext>
-    </p:extLst>
-  </p:cSld>
-  <p:clrMapOvr>
-    <a:masterClrMapping/>
-  </p:clrMapOvr>
-  <p:timing>
-    <p:tnLst>
-      <p:par>
-        <p:cTn id="1" dur="indefinite" restart="never" nodeType="tmRoot">
-          <p:childTnLst>
-            <p:seq concurrent="1" nextAc="seek">
-              <p:cTn id="2" dur="indefinite" nodeType="mainSeq">
-                <p:childTnLst>
-                  <p:par>
-                    <p:cTn id="3" fill="hold">
-                      <p:stCondLst>
-                        <p:cond delay="indefinite"/>
-                      </p:stCondLst>
-                      <p:childTnLst>
-                        <p:par>
-                          <p:cTn id="4" fill="hold">
-                            <p:stCondLst>
-                              <p:cond delay="0"/>
-                            </p:stCondLst>
-                            <p:childTnLst>
-                              <p:par>
-                                <p:cTn id="5" presetID="1" presetClass="entr" presetSubtype="0" fill="hold" nodeType="clickEffect">
-                                  <p:stCondLst>
-                                    <p:cond delay="0"/>
-                                  </p:stCondLst>
-                                  <p:childTnLst>
-                                    <p:set>
-                                      <p:cBhvr>
-                                        <p:cTn id="6" dur="1" fill="hold">
-                                          <p:stCondLst>
-                                            <p:cond delay="0"/>
-                                          </p:stCondLst>
-                                        </p:cTn>
-                                        <p:tgtEl>
-                                          <p:spTgt spid="3">
-                                            <p:txEl>
-                                              <p:pRg st="0" end="0"/>
-                                            </p:txEl>
-                                          </p:spTgt>
-                                        </p:tgtEl>
-                                        <p:attrNameLst>
-                                          <p:attrName>style.visibility</p:attrName>
-                                        </p:attrNameLst>
-                                      </p:cBhvr>
-                                      <p:to>
-                                        <p:strVal val="visible"/>
-                                      </p:to>
-                                    </p:set>
-                                  </p:childTnLst>
-                                </p:cTn>
-                              </p:par>
-                            </p:childTnLst>
-                          </p:cTn>
-                        </p:par>
-                      </p:childTnLst>
-                    </p:cTn>
-                  </p:par>
-                  <p:par>
-                    <p:cTn id="7" fill="hold">
-                      <p:stCondLst>
-                        <p:cond delay="indefinite"/>
-                      </p:stCondLst>
-                      <p:childTnLst>
-                        <p:par>
-                          <p:cTn id="8" fill="hold">
-                            <p:stCondLst>
-                              <p:cond delay="0"/>
-                            </p:stCondLst>
-                            <p:childTnLst>
-                              <p:par>
-                                <p:cTn id="9" presetID="1" presetClass="entr" presetSubtype="0" fill="hold" nodeType="clickEffect">
-                                  <p:stCondLst>
-                                    <p:cond delay="0"/>
-                                  </p:stCondLst>
-                                  <p:childTnLst>
-                                    <p:set>
-                                      <p:cBhvr>
-                                        <p:cTn id="10" dur="1" fill="hold">
-                                          <p:stCondLst>
-                                            <p:cond delay="0"/>
-                                          </p:stCondLst>
-                                        </p:cTn>
-                                        <p:tgtEl>
-                                          <p:spTgt spid="3">
-                                            <p:txEl>
-                                              <p:pRg st="1" end="1"/>
-                                            </p:txEl>
-                                          </p:spTgt>
-                                        </p:tgtEl>
-                                        <p:attrNameLst>
-                                          <p:attrName>style.visibility</p:attrName>
-                                        </p:attrNameLst>
-                                      </p:cBhvr>
-                                      <p:to>
-                                        <p:strVal val="visible"/>
-                                      </p:to>
-                                    </p:set>
-                                  </p:childTnLst>
-                                </p:cTn>
-                              </p:par>
-                              <p:par>
-                                <p:cTn id="11" presetID="1" presetClass="entr" presetSubtype="0" fill="hold" nodeType="withEffect">
-                                  <p:stCondLst>
-                                    <p:cond delay="0"/>
-                                  </p:stCondLst>
-                                  <p:childTnLst>
-                                    <p:set>
-                                      <p:cBhvr>
-                                        <p:cTn id="12" dur="1" fill="hold">
-                                          <p:stCondLst>
-                                            <p:cond delay="0"/>
-                                          </p:stCondLst>
-                                        </p:cTn>
-                                        <p:tgtEl>
-                                          <p:spTgt spid="3">
-                                            <p:txEl>
-                                              <p:pRg st="2" end="2"/>
-                                            </p:txEl>
-                                          </p:spTgt>
-                                        </p:tgtEl>
-                                        <p:attrNameLst>
-                                          <p:attrName>style.visibility</p:attrName>
-                                        </p:attrNameLst>
-                                      </p:cBhvr>
-                                      <p:to>
-                                        <p:strVal val="visible"/>
-                                      </p:to>
-                                    </p:set>
-                                  </p:childTnLst>
-                                </p:cTn>
-                              </p:par>
-                              <p:par>
-                                <p:cTn id="13" presetID="1" presetClass="entr" presetSubtype="0" fill="hold" nodeType="withEffect">
-                                  <p:stCondLst>
-                                    <p:cond delay="0"/>
-                                  </p:stCondLst>
-                                  <p:childTnLst>
-                                    <p:set>
-                                      <p:cBhvr>
-                                        <p:cTn id="14" dur="1" fill="hold">
-                                          <p:stCondLst>
-                                            <p:cond delay="0"/>
-                                          </p:stCondLst>
-                                        </p:cTn>
-                                        <p:tgtEl>
-                                          <p:spTgt spid="3">
-                                            <p:txEl>
-                                              <p:pRg st="3" end="3"/>
-                                            </p:txEl>
-                                          </p:spTgt>
-                                        </p:tgtEl>
-                                        <p:attrNameLst>
-                                          <p:attrName>style.visibility</p:attrName>
-                                        </p:attrNameLst>
-                                      </p:cBhvr>
-                                      <p:to>
-                                        <p:strVal val="visible"/>
-                                      </p:to>
-                                    </p:set>
-                                  </p:childTnLst>
-                                </p:cTn>
-                              </p:par>
-                              <p:par>
-                                <p:cTn id="15" presetID="1" presetClass="entr" presetSubtype="0" fill="hold" nodeType="withEffect">
-                                  <p:stCondLst>
-                                    <p:cond delay="0"/>
-                                  </p:stCondLst>
-                                  <p:childTnLst>
-                                    <p:set>
-                                      <p:cBhvr>
-                                        <p:cTn id="16" dur="1" fill="hold">
-                                          <p:stCondLst>
-                                            <p:cond delay="0"/>
-                                          </p:stCondLst>
-                                        </p:cTn>
-                                        <p:tgtEl>
-                                          <p:spTgt spid="3">
-                                            <p:txEl>
-                                              <p:pRg st="4" end="4"/>
-                                            </p:txEl>
-                                          </p:spTgt>
-                                        </p:tgtEl>
-                                        <p:attrNameLst>
-                                          <p:attrName>style.visibility</p:attrName>
-                                        </p:attrNameLst>
-                                      </p:cBhvr>
-                                      <p:to>
-                                        <p:strVal val="visible"/>
-                                      </p:to>
-                                    </p:set>
-                                  </p:childTnLst>
-                                </p:cTn>
-                              </p:par>
-                            </p:childTnLst>
-                          </p:cTn>
-                        </p:par>
-                      </p:childTnLst>
-                    </p:cTn>
-                  </p:par>
-                </p:childTnLst>
-              </p:cTn>
-              <p:prevCondLst>
-                <p:cond evt="onPrev" delay="0">
-                  <p:tgtEl>
-                    <p:sldTgt/>
-                  </p:tgtEl>
-                </p:cond>
-              </p:prevCondLst>
-              <p:nextCondLst>
-                <p:cond evt="onNext" delay="0">
-                  <p:tgtEl>
-                    <p:sldTgt/>
-                  </p:tgtEl>
-                </p:cond>
-              </p:nextCondLst>
-            </p:seq>
-          </p:childTnLst>
-        </p:cTn>
-      </p:par>
-    </p:tnLst>
-  </p:timing>
 </p:sld>
 </file>
 
